--- a/MedFAQ_Slides.pptx
+++ b/MedFAQ_Slides.pptx
@@ -5,18 +5,18 @@
     <p:sldMasterId id="2147483648" r:id="rId1"/>
   </p:sldMasterIdLst>
   <p:sldIdLst>
-    <p:sldId id="256" r:id="rId7"/>
-    <p:sldId id="257" r:id="rId8"/>
-    <p:sldId id="258" r:id="rId9"/>
-    <p:sldId id="259" r:id="rId10"/>
-    <p:sldId id="260" r:id="rId11"/>
-    <p:sldId id="261" r:id="rId12"/>
-    <p:sldId id="262" r:id="rId13"/>
-    <p:sldId id="263" r:id="rId14"/>
-    <p:sldId id="264" r:id="rId15"/>
-    <p:sldId id="265" r:id="rId16"/>
+    <p:sldId id="256" r:id="rId2"/>
+    <p:sldId id="257" r:id="rId3"/>
+    <p:sldId id="258" r:id="rId4"/>
+    <p:sldId id="259" r:id="rId5"/>
+    <p:sldId id="260" r:id="rId6"/>
+    <p:sldId id="261" r:id="rId7"/>
+    <p:sldId id="262" r:id="rId8"/>
+    <p:sldId id="263" r:id="rId9"/>
+    <p:sldId id="264" r:id="rId10"/>
+    <p:sldId id="265" r:id="rId11"/>
   </p:sldIdLst>
-  <p:sldSz cx="12188952" cy="6858000" type="screen4x3"/>
+  <p:sldSz cx="12188825" cy="6858000"/>
   <p:notesSz cx="6858000" cy="9144000"/>
   <p:defaultTextStyle>
     <a:defPPr>
@@ -113,6 +113,22 @@
       </a:defRPr>
     </a:lvl9pPr>
   </p:defaultTextStyle>
+  <p:extLst>
+    <p:ext uri="{EFAFB233-063F-42B5-8137-9DF3F51BA10A}">
+      <p15:sldGuideLst xmlns:p15="http://schemas.microsoft.com/office/powerpoint/2012/main">
+        <p15:guide id="1" orient="horz" pos="2160">
+          <p15:clr>
+            <a:srgbClr val="A4A3A4"/>
+          </p15:clr>
+        </p15:guide>
+        <p15:guide id="2" pos="2880">
+          <p15:clr>
+            <a:srgbClr val="A4A3A4"/>
+          </p15:clr>
+        </p15:guide>
+      </p15:sldGuideLst>
+    </p:ext>
+  </p:extLst>
 </p:presentation>
 </file>
 
@@ -154,10 +170,9 @@
           <a:lstStyle/>
           <a:p>
             <a:r>
-              <a:rPr lang="en-US" smtClean="0"/>
+              <a:rPr lang="en-US"/>
               <a:t>Click to edit Master title style</a:t>
             </a:r>
-            <a:endParaRPr lang="en-US"/>
           </a:p>
         </p:txBody>
       </p:sp>
@@ -273,10 +288,9 @@
           </a:lstStyle>
           <a:p>
             <a:r>
-              <a:rPr lang="en-US" smtClean="0"/>
+              <a:rPr lang="en-US"/>
               <a:t>Click to edit Master subtitle style</a:t>
             </a:r>
-            <a:endParaRPr lang="en-US"/>
           </a:p>
         </p:txBody>
       </p:sp>
@@ -297,7 +311,7 @@
           <a:p>
             <a:fld id="{5BCAD085-E8A6-8845-BD4E-CB4CCA059FC4}" type="datetimeFigureOut">
               <a:rPr lang="en-US" smtClean="0"/>
-              <a:t>1/27/13</a:t>
+              <a:t>5/23/2026</a:t>
             </a:fld>
             <a:endParaRPr lang="en-US"/>
           </a:p>
@@ -391,10 +405,9 @@
           <a:lstStyle/>
           <a:p>
             <a:r>
-              <a:rPr lang="en-US" smtClean="0"/>
+              <a:rPr lang="en-US"/>
               <a:t>Click to edit Master title style</a:t>
             </a:r>
-            <a:endParaRPr lang="en-US"/>
           </a:p>
         </p:txBody>
       </p:sp>
@@ -415,38 +428,37 @@
           <a:p>
             <a:pPr lvl="0"/>
             <a:r>
-              <a:rPr lang="en-US" smtClean="0"/>
+              <a:rPr lang="en-US"/>
               <a:t>Click to edit Master text styles</a:t>
             </a:r>
           </a:p>
           <a:p>
             <a:pPr lvl="1"/>
             <a:r>
-              <a:rPr lang="en-US" smtClean="0"/>
+              <a:rPr lang="en-US"/>
               <a:t>Second level</a:t>
             </a:r>
           </a:p>
           <a:p>
             <a:pPr lvl="2"/>
             <a:r>
-              <a:rPr lang="en-US" smtClean="0"/>
+              <a:rPr lang="en-US"/>
               <a:t>Third level</a:t>
             </a:r>
           </a:p>
           <a:p>
             <a:pPr lvl="3"/>
             <a:r>
-              <a:rPr lang="en-US" smtClean="0"/>
+              <a:rPr lang="en-US"/>
               <a:t>Fourth level</a:t>
             </a:r>
           </a:p>
           <a:p>
             <a:pPr lvl="4"/>
             <a:r>
-              <a:rPr lang="en-US" smtClean="0"/>
+              <a:rPr lang="en-US"/>
               <a:t>Fifth level</a:t>
             </a:r>
-            <a:endParaRPr lang="en-US"/>
           </a:p>
         </p:txBody>
       </p:sp>
@@ -467,7 +479,7 @@
           <a:p>
             <a:fld id="{5BCAD085-E8A6-8845-BD4E-CB4CCA059FC4}" type="datetimeFigureOut">
               <a:rPr lang="en-US" smtClean="0"/>
-              <a:t>1/27/13</a:t>
+              <a:t>5/23/2026</a:t>
             </a:fld>
             <a:endParaRPr lang="en-US"/>
           </a:p>
@@ -566,10 +578,9 @@
           <a:lstStyle/>
           <a:p>
             <a:r>
-              <a:rPr lang="en-US" smtClean="0"/>
+              <a:rPr lang="en-US"/>
               <a:t>Click to edit Master title style</a:t>
             </a:r>
-            <a:endParaRPr lang="en-US"/>
           </a:p>
         </p:txBody>
       </p:sp>
@@ -595,38 +606,37 @@
           <a:p>
             <a:pPr lvl="0"/>
             <a:r>
-              <a:rPr lang="en-US" smtClean="0"/>
+              <a:rPr lang="en-US"/>
               <a:t>Click to edit Master text styles</a:t>
             </a:r>
           </a:p>
           <a:p>
             <a:pPr lvl="1"/>
             <a:r>
-              <a:rPr lang="en-US" smtClean="0"/>
+              <a:rPr lang="en-US"/>
               <a:t>Second level</a:t>
             </a:r>
           </a:p>
           <a:p>
             <a:pPr lvl="2"/>
             <a:r>
-              <a:rPr lang="en-US" smtClean="0"/>
+              <a:rPr lang="en-US"/>
               <a:t>Third level</a:t>
             </a:r>
           </a:p>
           <a:p>
             <a:pPr lvl="3"/>
             <a:r>
-              <a:rPr lang="en-US" smtClean="0"/>
+              <a:rPr lang="en-US"/>
               <a:t>Fourth level</a:t>
             </a:r>
           </a:p>
           <a:p>
             <a:pPr lvl="4"/>
             <a:r>
-              <a:rPr lang="en-US" smtClean="0"/>
+              <a:rPr lang="en-US"/>
               <a:t>Fifth level</a:t>
             </a:r>
-            <a:endParaRPr lang="en-US"/>
           </a:p>
         </p:txBody>
       </p:sp>
@@ -647,7 +657,7 @@
           <a:p>
             <a:fld id="{5BCAD085-E8A6-8845-BD4E-CB4CCA059FC4}" type="datetimeFigureOut">
               <a:rPr lang="en-US" smtClean="0"/>
-              <a:t>1/27/13</a:t>
+              <a:t>5/23/2026</a:t>
             </a:fld>
             <a:endParaRPr lang="en-US"/>
           </a:p>
@@ -741,10 +751,9 @@
           <a:lstStyle/>
           <a:p>
             <a:r>
-              <a:rPr lang="en-US" smtClean="0"/>
+              <a:rPr lang="en-US"/>
               <a:t>Click to edit Master title style</a:t>
             </a:r>
-            <a:endParaRPr lang="en-US"/>
           </a:p>
         </p:txBody>
       </p:sp>
@@ -765,38 +774,37 @@
           <a:p>
             <a:pPr lvl="0"/>
             <a:r>
-              <a:rPr lang="en-US" smtClean="0"/>
+              <a:rPr lang="en-US"/>
               <a:t>Click to edit Master text styles</a:t>
             </a:r>
           </a:p>
           <a:p>
             <a:pPr lvl="1"/>
             <a:r>
-              <a:rPr lang="en-US" smtClean="0"/>
+              <a:rPr lang="en-US"/>
               <a:t>Second level</a:t>
             </a:r>
           </a:p>
           <a:p>
             <a:pPr lvl="2"/>
             <a:r>
-              <a:rPr lang="en-US" smtClean="0"/>
+              <a:rPr lang="en-US"/>
               <a:t>Third level</a:t>
             </a:r>
           </a:p>
           <a:p>
             <a:pPr lvl="3"/>
             <a:r>
-              <a:rPr lang="en-US" smtClean="0"/>
+              <a:rPr lang="en-US"/>
               <a:t>Fourth level</a:t>
             </a:r>
           </a:p>
           <a:p>
             <a:pPr lvl="4"/>
             <a:r>
-              <a:rPr lang="en-US" smtClean="0"/>
+              <a:rPr lang="en-US"/>
               <a:t>Fifth level</a:t>
             </a:r>
-            <a:endParaRPr lang="en-US"/>
           </a:p>
         </p:txBody>
       </p:sp>
@@ -817,7 +825,7 @@
           <a:p>
             <a:fld id="{5BCAD085-E8A6-8845-BD4E-CB4CCA059FC4}" type="datetimeFigureOut">
               <a:rPr lang="en-US" smtClean="0"/>
-              <a:t>1/27/13</a:t>
+              <a:t>5/23/2026</a:t>
             </a:fld>
             <a:endParaRPr lang="en-US"/>
           </a:p>
@@ -920,10 +928,9 @@
           </a:lstStyle>
           <a:p>
             <a:r>
-              <a:rPr lang="en-US" smtClean="0"/>
+              <a:rPr lang="en-US"/>
               <a:t>Click to edit Master title style</a:t>
             </a:r>
-            <a:endParaRPr lang="en-US"/>
           </a:p>
         </p:txBody>
       </p:sp>
@@ -1040,7 +1047,7 @@
           <a:p>
             <a:pPr lvl="0"/>
             <a:r>
-              <a:rPr lang="en-US" smtClean="0"/>
+              <a:rPr lang="en-US"/>
               <a:t>Click to edit Master text styles</a:t>
             </a:r>
           </a:p>
@@ -1063,7 +1070,7 @@
           <a:p>
             <a:fld id="{5BCAD085-E8A6-8845-BD4E-CB4CCA059FC4}" type="datetimeFigureOut">
               <a:rPr lang="en-US" smtClean="0"/>
-              <a:t>1/27/13</a:t>
+              <a:t>5/23/2026</a:t>
             </a:fld>
             <a:endParaRPr lang="en-US"/>
           </a:p>
@@ -1157,10 +1164,9 @@
           <a:lstStyle/>
           <a:p>
             <a:r>
-              <a:rPr lang="en-US" smtClean="0"/>
+              <a:rPr lang="en-US"/>
               <a:t>Click to edit Master title style</a:t>
             </a:r>
-            <a:endParaRPr lang="en-US"/>
           </a:p>
         </p:txBody>
       </p:sp>
@@ -1214,38 +1220,37 @@
           <a:p>
             <a:pPr lvl="0"/>
             <a:r>
-              <a:rPr lang="en-US" smtClean="0"/>
+              <a:rPr lang="en-US"/>
               <a:t>Click to edit Master text styles</a:t>
             </a:r>
           </a:p>
           <a:p>
             <a:pPr lvl="1"/>
             <a:r>
-              <a:rPr lang="en-US" smtClean="0"/>
+              <a:rPr lang="en-US"/>
               <a:t>Second level</a:t>
             </a:r>
           </a:p>
           <a:p>
             <a:pPr lvl="2"/>
             <a:r>
-              <a:rPr lang="en-US" smtClean="0"/>
+              <a:rPr lang="en-US"/>
               <a:t>Third level</a:t>
             </a:r>
           </a:p>
           <a:p>
             <a:pPr lvl="3"/>
             <a:r>
-              <a:rPr lang="en-US" smtClean="0"/>
+              <a:rPr lang="en-US"/>
               <a:t>Fourth level</a:t>
             </a:r>
           </a:p>
           <a:p>
             <a:pPr lvl="4"/>
             <a:r>
-              <a:rPr lang="en-US" smtClean="0"/>
+              <a:rPr lang="en-US"/>
               <a:t>Fifth level</a:t>
             </a:r>
-            <a:endParaRPr lang="en-US"/>
           </a:p>
         </p:txBody>
       </p:sp>
@@ -1299,38 +1304,37 @@
           <a:p>
             <a:pPr lvl="0"/>
             <a:r>
-              <a:rPr lang="en-US" smtClean="0"/>
+              <a:rPr lang="en-US"/>
               <a:t>Click to edit Master text styles</a:t>
             </a:r>
           </a:p>
           <a:p>
             <a:pPr lvl="1"/>
             <a:r>
-              <a:rPr lang="en-US" smtClean="0"/>
+              <a:rPr lang="en-US"/>
               <a:t>Second level</a:t>
             </a:r>
           </a:p>
           <a:p>
             <a:pPr lvl="2"/>
             <a:r>
-              <a:rPr lang="en-US" smtClean="0"/>
+              <a:rPr lang="en-US"/>
               <a:t>Third level</a:t>
             </a:r>
           </a:p>
           <a:p>
             <a:pPr lvl="3"/>
             <a:r>
-              <a:rPr lang="en-US" smtClean="0"/>
+              <a:rPr lang="en-US"/>
               <a:t>Fourth level</a:t>
             </a:r>
           </a:p>
           <a:p>
             <a:pPr lvl="4"/>
             <a:r>
-              <a:rPr lang="en-US" smtClean="0"/>
+              <a:rPr lang="en-US"/>
               <a:t>Fifth level</a:t>
             </a:r>
-            <a:endParaRPr lang="en-US"/>
           </a:p>
         </p:txBody>
       </p:sp>
@@ -1351,7 +1355,7 @@
           <a:p>
             <a:fld id="{5BCAD085-E8A6-8845-BD4E-CB4CCA059FC4}" type="datetimeFigureOut">
               <a:rPr lang="en-US" smtClean="0"/>
-              <a:t>1/27/13</a:t>
+              <a:t>5/23/2026</a:t>
             </a:fld>
             <a:endParaRPr lang="en-US"/>
           </a:p>
@@ -1449,10 +1453,9 @@
           </a:lstStyle>
           <a:p>
             <a:r>
-              <a:rPr lang="en-US" smtClean="0"/>
+              <a:rPr lang="en-US"/>
               <a:t>Click to edit Master title style</a:t>
             </a:r>
-            <a:endParaRPr lang="en-US"/>
           </a:p>
         </p:txBody>
       </p:sp>
@@ -1515,7 +1518,7 @@
           <a:p>
             <a:pPr lvl="0"/>
             <a:r>
-              <a:rPr lang="en-US" smtClean="0"/>
+              <a:rPr lang="en-US"/>
               <a:t>Click to edit Master text styles</a:t>
             </a:r>
           </a:p>
@@ -1571,38 +1574,37 @@
           <a:p>
             <a:pPr lvl="0"/>
             <a:r>
-              <a:rPr lang="en-US" smtClean="0"/>
+              <a:rPr lang="en-US"/>
               <a:t>Click to edit Master text styles</a:t>
             </a:r>
           </a:p>
           <a:p>
             <a:pPr lvl="1"/>
             <a:r>
-              <a:rPr lang="en-US" smtClean="0"/>
+              <a:rPr lang="en-US"/>
               <a:t>Second level</a:t>
             </a:r>
           </a:p>
           <a:p>
             <a:pPr lvl="2"/>
             <a:r>
-              <a:rPr lang="en-US" smtClean="0"/>
+              <a:rPr lang="en-US"/>
               <a:t>Third level</a:t>
             </a:r>
           </a:p>
           <a:p>
             <a:pPr lvl="3"/>
             <a:r>
-              <a:rPr lang="en-US" smtClean="0"/>
+              <a:rPr lang="en-US"/>
               <a:t>Fourth level</a:t>
             </a:r>
           </a:p>
           <a:p>
             <a:pPr lvl="4"/>
             <a:r>
-              <a:rPr lang="en-US" smtClean="0"/>
+              <a:rPr lang="en-US"/>
               <a:t>Fifth level</a:t>
             </a:r>
-            <a:endParaRPr lang="en-US"/>
           </a:p>
         </p:txBody>
       </p:sp>
@@ -1665,7 +1667,7 @@
           <a:p>
             <a:pPr lvl="0"/>
             <a:r>
-              <a:rPr lang="en-US" smtClean="0"/>
+              <a:rPr lang="en-US"/>
               <a:t>Click to edit Master text styles</a:t>
             </a:r>
           </a:p>
@@ -1721,38 +1723,37 @@
           <a:p>
             <a:pPr lvl="0"/>
             <a:r>
-              <a:rPr lang="en-US" smtClean="0"/>
+              <a:rPr lang="en-US"/>
               <a:t>Click to edit Master text styles</a:t>
             </a:r>
           </a:p>
           <a:p>
             <a:pPr lvl="1"/>
             <a:r>
-              <a:rPr lang="en-US" smtClean="0"/>
+              <a:rPr lang="en-US"/>
               <a:t>Second level</a:t>
             </a:r>
           </a:p>
           <a:p>
             <a:pPr lvl="2"/>
             <a:r>
-              <a:rPr lang="en-US" smtClean="0"/>
+              <a:rPr lang="en-US"/>
               <a:t>Third level</a:t>
             </a:r>
           </a:p>
           <a:p>
             <a:pPr lvl="3"/>
             <a:r>
-              <a:rPr lang="en-US" smtClean="0"/>
+              <a:rPr lang="en-US"/>
               <a:t>Fourth level</a:t>
             </a:r>
           </a:p>
           <a:p>
             <a:pPr lvl="4"/>
             <a:r>
-              <a:rPr lang="en-US" smtClean="0"/>
+              <a:rPr lang="en-US"/>
               <a:t>Fifth level</a:t>
             </a:r>
-            <a:endParaRPr lang="en-US"/>
           </a:p>
         </p:txBody>
       </p:sp>
@@ -1773,7 +1774,7 @@
           <a:p>
             <a:fld id="{5BCAD085-E8A6-8845-BD4E-CB4CCA059FC4}" type="datetimeFigureOut">
               <a:rPr lang="en-US" smtClean="0"/>
-              <a:t>1/27/13</a:t>
+              <a:t>5/23/2026</a:t>
             </a:fld>
             <a:endParaRPr lang="en-US"/>
           </a:p>
@@ -1867,10 +1868,9 @@
           <a:lstStyle/>
           <a:p>
             <a:r>
-              <a:rPr lang="en-US" smtClean="0"/>
+              <a:rPr lang="en-US"/>
               <a:t>Click to edit Master title style</a:t>
             </a:r>
-            <a:endParaRPr lang="en-US"/>
           </a:p>
         </p:txBody>
       </p:sp>
@@ -1891,7 +1891,7 @@
           <a:p>
             <a:fld id="{5BCAD085-E8A6-8845-BD4E-CB4CCA059FC4}" type="datetimeFigureOut">
               <a:rPr lang="en-US" smtClean="0"/>
-              <a:t>1/27/13</a:t>
+              <a:t>5/23/2026</a:t>
             </a:fld>
             <a:endParaRPr lang="en-US"/>
           </a:p>
@@ -1986,7 +1986,7 @@
           <a:p>
             <a:fld id="{5BCAD085-E8A6-8845-BD4E-CB4CCA059FC4}" type="datetimeFigureOut">
               <a:rPr lang="en-US" smtClean="0"/>
-              <a:t>1/27/13</a:t>
+              <a:t>5/23/2026</a:t>
             </a:fld>
             <a:endParaRPr lang="en-US"/>
           </a:p>
@@ -2089,10 +2089,9 @@
           </a:lstStyle>
           <a:p>
             <a:r>
-              <a:rPr lang="en-US" smtClean="0"/>
+              <a:rPr lang="en-US"/>
               <a:t>Click to edit Master title style</a:t>
             </a:r>
-            <a:endParaRPr lang="en-US"/>
           </a:p>
         </p:txBody>
       </p:sp>
@@ -2146,38 +2145,37 @@
           <a:p>
             <a:pPr lvl="0"/>
             <a:r>
-              <a:rPr lang="en-US" smtClean="0"/>
+              <a:rPr lang="en-US"/>
               <a:t>Click to edit Master text styles</a:t>
             </a:r>
           </a:p>
           <a:p>
             <a:pPr lvl="1"/>
             <a:r>
-              <a:rPr lang="en-US" smtClean="0"/>
+              <a:rPr lang="en-US"/>
               <a:t>Second level</a:t>
             </a:r>
           </a:p>
           <a:p>
             <a:pPr lvl="2"/>
             <a:r>
-              <a:rPr lang="en-US" smtClean="0"/>
+              <a:rPr lang="en-US"/>
               <a:t>Third level</a:t>
             </a:r>
           </a:p>
           <a:p>
             <a:pPr lvl="3"/>
             <a:r>
-              <a:rPr lang="en-US" smtClean="0"/>
+              <a:rPr lang="en-US"/>
               <a:t>Fourth level</a:t>
             </a:r>
           </a:p>
           <a:p>
             <a:pPr lvl="4"/>
             <a:r>
-              <a:rPr lang="en-US" smtClean="0"/>
+              <a:rPr lang="en-US"/>
               <a:t>Fifth level</a:t>
             </a:r>
-            <a:endParaRPr lang="en-US"/>
           </a:p>
         </p:txBody>
       </p:sp>
@@ -2240,7 +2238,7 @@
           <a:p>
             <a:pPr lvl="0"/>
             <a:r>
-              <a:rPr lang="en-US" smtClean="0"/>
+              <a:rPr lang="en-US"/>
               <a:t>Click to edit Master text styles</a:t>
             </a:r>
           </a:p>
@@ -2263,7 +2261,7 @@
           <a:p>
             <a:fld id="{5BCAD085-E8A6-8845-BD4E-CB4CCA059FC4}" type="datetimeFigureOut">
               <a:rPr lang="en-US" smtClean="0"/>
-              <a:t>1/27/13</a:t>
+              <a:t>5/23/2026</a:t>
             </a:fld>
             <a:endParaRPr lang="en-US"/>
           </a:p>
@@ -2366,10 +2364,9 @@
           </a:lstStyle>
           <a:p>
             <a:r>
-              <a:rPr lang="en-US" smtClean="0"/>
+              <a:rPr lang="en-US"/>
               <a:t>Click to edit Master title style</a:t>
             </a:r>
-            <a:endParaRPr lang="en-US"/>
           </a:p>
         </p:txBody>
       </p:sp>
@@ -2493,7 +2490,7 @@
           <a:p>
             <a:pPr lvl="0"/>
             <a:r>
-              <a:rPr lang="en-US" smtClean="0"/>
+              <a:rPr lang="en-US"/>
               <a:t>Click to edit Master text styles</a:t>
             </a:r>
           </a:p>
@@ -2516,7 +2513,7 @@
           <a:p>
             <a:fld id="{5BCAD085-E8A6-8845-BD4E-CB4CCA059FC4}" type="datetimeFigureOut">
               <a:rPr lang="en-US" smtClean="0"/>
-              <a:t>1/27/13</a:t>
+              <a:t>5/23/2026</a:t>
             </a:fld>
             <a:endParaRPr lang="en-US"/>
           </a:p>
@@ -2625,10 +2622,9 @@
           <a:lstStyle/>
           <a:p>
             <a:r>
-              <a:rPr lang="en-US" smtClean="0"/>
+              <a:rPr lang="en-US"/>
               <a:t>Click to edit Master title style</a:t>
             </a:r>
-            <a:endParaRPr lang="en-US"/>
           </a:p>
         </p:txBody>
       </p:sp>
@@ -2659,38 +2655,37 @@
           <a:p>
             <a:pPr lvl="0"/>
             <a:r>
-              <a:rPr lang="en-US" smtClean="0"/>
+              <a:rPr lang="en-US"/>
               <a:t>Click to edit Master text styles</a:t>
             </a:r>
           </a:p>
           <a:p>
             <a:pPr lvl="1"/>
             <a:r>
-              <a:rPr lang="en-US" smtClean="0"/>
+              <a:rPr lang="en-US"/>
               <a:t>Second level</a:t>
             </a:r>
           </a:p>
           <a:p>
             <a:pPr lvl="2"/>
             <a:r>
-              <a:rPr lang="en-US" smtClean="0"/>
+              <a:rPr lang="en-US"/>
               <a:t>Third level</a:t>
             </a:r>
           </a:p>
           <a:p>
             <a:pPr lvl="3"/>
             <a:r>
-              <a:rPr lang="en-US" smtClean="0"/>
+              <a:rPr lang="en-US"/>
               <a:t>Fourth level</a:t>
             </a:r>
           </a:p>
           <a:p>
             <a:pPr lvl="4"/>
             <a:r>
-              <a:rPr lang="en-US" smtClean="0"/>
+              <a:rPr lang="en-US"/>
               <a:t>Fifth level</a:t>
             </a:r>
-            <a:endParaRPr lang="en-US"/>
           </a:p>
         </p:txBody>
       </p:sp>
@@ -2729,7 +2724,7 @@
           <a:p>
             <a:fld id="{5BCAD085-E8A6-8845-BD4E-CB4CCA059FC4}" type="datetimeFigureOut">
               <a:rPr lang="en-US" smtClean="0"/>
-              <a:t>1/27/13</a:t>
+              <a:t>5/23/2026</a:t>
             </a:fld>
             <a:endParaRPr lang="en-US"/>
           </a:p>
@@ -3088,7 +3083,7 @@
 </file>
 
 <file path=ppt/slides/slide1.xml><?xml version="1.0" encoding="utf-8"?>
-<p:sld xmlns:a="http://schemas.openxmlformats.org/drawingml/2006/main" xmlns:p="http://schemas.openxmlformats.org/presentationml/2006/main" xmlns:r="http://schemas.openxmlformats.org/officeDocument/2006/relationships">
+<p:sld xmlns:a="http://schemas.openxmlformats.org/drawingml/2006/main" xmlns:r="http://schemas.openxmlformats.org/officeDocument/2006/relationships" xmlns:p="http://schemas.openxmlformats.org/presentationml/2006/main">
   <p:cSld>
     <p:spTree>
       <p:nvGrpSpPr>
@@ -3096,7 +3091,14 @@
         <p:cNvGrpSpPr/>
         <p:nvPr/>
       </p:nvGrpSpPr>
-      <p:grpSpPr/>
+      <p:grpSpPr>
+        <a:xfrm>
+          <a:off x="0" y="0"/>
+          <a:ext cx="0" cy="0"/>
+          <a:chOff x="0" y="0"/>
+          <a:chExt cx="0" cy="0"/>
+        </a:xfrm>
+      </p:grpSpPr>
       <p:sp>
         <p:nvSpPr>
           <p:cNvPr id="2" name="Rectangle 1"/>
@@ -3137,6 +3139,7 @@
           <a:lstStyle/>
           <a:p>
             <a:pPr algn="ctr"/>
+            <a:endParaRPr/>
           </a:p>
         </p:txBody>
       </p:sp>
@@ -3157,7 +3160,7 @@
           <a:noFill/>
         </p:spPr>
         <p:txBody>
-          <a:bodyPr wrap="square" lIns="0" rIns="0" tIns="0" bIns="0">
+          <a:bodyPr wrap="square" lIns="0" tIns="0" rIns="0" bIns="0">
             <a:spAutoFit/>
           </a:bodyPr>
           <a:lstStyle/>
@@ -3191,7 +3194,7 @@
           <a:noFill/>
         </p:spPr>
         <p:txBody>
-          <a:bodyPr wrap="square" lIns="0" rIns="0" tIns="0" bIns="0">
+          <a:bodyPr wrap="square" lIns="0" tIns="0" rIns="0" bIns="0">
             <a:spAutoFit/>
           </a:bodyPr>
           <a:lstStyle/>
@@ -3225,7 +3228,7 @@
           <a:noFill/>
         </p:spPr>
         <p:txBody>
-          <a:bodyPr wrap="square" lIns="0" rIns="0" tIns="0" bIns="0">
+          <a:bodyPr wrap="square" lIns="0" tIns="0" rIns="0" bIns="0">
             <a:spAutoFit/>
           </a:bodyPr>
           <a:lstStyle/>
@@ -3251,7 +3254,7 @@
         <p:spPr>
           <a:xfrm>
             <a:off x="640080" y="4937760"/>
-            <a:ext cx="10972800" cy="411480"/>
+            <a:ext cx="10972800" cy="215444"/>
           </a:xfrm>
           <a:prstGeom prst="rect">
             <a:avLst/>
@@ -3259,20 +3262,33 @@
           <a:noFill/>
         </p:spPr>
         <p:txBody>
-          <a:bodyPr wrap="square" lIns="0" rIns="0" tIns="0" bIns="0">
+          <a:bodyPr wrap="square" lIns="0" tIns="0" rIns="0" bIns="0">
             <a:spAutoFit/>
           </a:bodyPr>
           <a:lstStyle/>
           <a:p>
             <a:pPr algn="l"/>
             <a:r>
-              <a:rPr sz="1400" b="0">
-                <a:solidFill>
-                  <a:srgbClr val="1C1717"/>
-                </a:solidFill>
-              </a:rPr>
-              <a:t>Abdul Ghani · Anas Bhatti · Muhammad Salman · 2 teammates</a:t>
-            </a:r>
+              <a:rPr sz="1400" b="0" dirty="0">
+                <a:solidFill>
+                  <a:srgbClr val="1C1717"/>
+                </a:solidFill>
+              </a:rPr>
+              <a:t>Abdul Ghani · Anas Bhatti · Muhammad Salman · </a:t>
+            </a:r>
+            <a:r>
+              <a:rPr lang="en-US" sz="1400" dirty="0">
+                <a:solidFill>
+                  <a:srgbClr val="1C1717"/>
+                </a:solidFill>
+              </a:rPr>
+              <a:t>Raja Mahad</a:t>
+            </a:r>
+            <a:endParaRPr sz="1400" b="0" dirty="0">
+              <a:solidFill>
+                <a:srgbClr val="1C1717"/>
+              </a:solidFill>
+            </a:endParaRPr>
           </a:p>
         </p:txBody>
       </p:sp>
@@ -3293,7 +3309,7 @@
           <a:noFill/>
         </p:spPr>
         <p:txBody>
-          <a:bodyPr wrap="square" lIns="0" rIns="0" tIns="0" bIns="0">
+          <a:bodyPr wrap="square" lIns="0" tIns="0" rIns="0" bIns="0">
             <a:spAutoFit/>
           </a:bodyPr>
           <a:lstStyle/>
@@ -3319,7 +3335,7 @@
 </file>
 
 <file path=ppt/slides/slide10.xml><?xml version="1.0" encoding="utf-8"?>
-<p:sld xmlns:a="http://schemas.openxmlformats.org/drawingml/2006/main" xmlns:p="http://schemas.openxmlformats.org/presentationml/2006/main" xmlns:r="http://schemas.openxmlformats.org/officeDocument/2006/relationships">
+<p:sld xmlns:a="http://schemas.openxmlformats.org/drawingml/2006/main" xmlns:r="http://schemas.openxmlformats.org/officeDocument/2006/relationships" xmlns:p="http://schemas.openxmlformats.org/presentationml/2006/main">
   <p:cSld>
     <p:spTree>
       <p:nvGrpSpPr>
@@ -3327,7 +3343,14 @@
         <p:cNvGrpSpPr/>
         <p:nvPr/>
       </p:nvGrpSpPr>
-      <p:grpSpPr/>
+      <p:grpSpPr>
+        <a:xfrm>
+          <a:off x="0" y="0"/>
+          <a:ext cx="0" cy="0"/>
+          <a:chOff x="0" y="0"/>
+          <a:chExt cx="0" cy="0"/>
+        </a:xfrm>
+      </p:grpSpPr>
       <p:sp>
         <p:nvSpPr>
           <p:cNvPr id="2" name="Rectangle 1"/>
@@ -3368,6 +3391,7 @@
           <a:lstStyle/>
           <a:p>
             <a:pPr algn="ctr"/>
+            <a:endParaRPr/>
           </a:p>
         </p:txBody>
       </p:sp>
@@ -3388,7 +3412,7 @@
           <a:noFill/>
         </p:spPr>
         <p:txBody>
-          <a:bodyPr wrap="square" lIns="0" rIns="0" tIns="0" bIns="0">
+          <a:bodyPr wrap="square" lIns="0" tIns="0" rIns="0" bIns="0">
             <a:spAutoFit/>
           </a:bodyPr>
           <a:lstStyle/>
@@ -3422,7 +3446,7 @@
           <a:noFill/>
         </p:spPr>
         <p:txBody>
-          <a:bodyPr wrap="square" lIns="0" rIns="0" tIns="0" bIns="0">
+          <a:bodyPr wrap="square" lIns="0" tIns="0" rIns="0" bIns="0">
             <a:spAutoFit/>
           </a:bodyPr>
           <a:lstStyle/>
@@ -3456,7 +3480,7 @@
           <a:noFill/>
         </p:spPr>
         <p:txBody>
-          <a:bodyPr wrap="square" lIns="0" rIns="0" tIns="0" bIns="0">
+          <a:bodyPr wrap="square" lIns="0" tIns="0" rIns="0" bIns="0">
             <a:spAutoFit/>
           </a:bodyPr>
           <a:lstStyle/>
@@ -3482,7 +3506,7 @@
         <p:spPr>
           <a:xfrm>
             <a:off x="548640" y="2468880"/>
-            <a:ext cx="11338560" cy="4114800"/>
+            <a:ext cx="11338560" cy="2246769"/>
           </a:xfrm>
           <a:prstGeom prst="rect">
             <a:avLst/>
@@ -3497,7 +3521,7 @@
           <a:p>
             <a:pPr algn="l"/>
             <a:r>
-              <a:rPr sz="1400" b="1">
+              <a:rPr sz="2000" b="1" dirty="0">
                 <a:solidFill>
                   <a:srgbClr val="1C1717"/>
                 </a:solidFill>
@@ -3505,18 +3529,34 @@
               <a:t>•  http://localhost:3000/</a:t>
             </a:r>
             <a:r>
-              <a:rPr sz="1300">
-                <a:solidFill>
-                  <a:srgbClr val="78716C"/>
-                </a:solidFill>
-              </a:rPr>
-              <a:t>  — landing page · pick a specialty</a:t>
-            </a:r>
-          </a:p>
-          <a:p>
-            <a:pPr algn="l"/>
-            <a:r>
-              <a:rPr sz="1400" b="1">
+              <a:rPr sz="2000" dirty="0">
+                <a:solidFill>
+                  <a:srgbClr val="78716C"/>
+                </a:solidFill>
+              </a:rPr>
+              <a:t>  </a:t>
+            </a:r>
+            <a:r>
+              <a:rPr lang="en-US" sz="2000" dirty="0">
+                <a:solidFill>
+                  <a:srgbClr val="78716C"/>
+                </a:solidFill>
+              </a:rPr>
+              <a:t>=</a:t>
+            </a:r>
+            <a:r>
+              <a:rPr sz="2000" dirty="0">
+                <a:solidFill>
+                  <a:srgbClr val="78716C"/>
+                </a:solidFill>
+              </a:rPr>
+              <a:t> landing page · pick a specialty</a:t>
+            </a:r>
+          </a:p>
+          <a:p>
+            <a:pPr algn="l"/>
+            <a:r>
+              <a:rPr sz="2000" b="1" dirty="0">
                 <a:solidFill>
                   <a:srgbClr val="1C1717"/>
                 </a:solidFill>
@@ -3524,18 +3564,34 @@
               <a:t>•  /chat/radiology</a:t>
             </a:r>
             <a:r>
-              <a:rPr sz="1300">
-                <a:solidFill>
-                  <a:srgbClr val="78716C"/>
-                </a:solidFill>
-              </a:rPr>
-              <a:t>  — full chatbot · NLP debug panel · voice input · reset / topic chip</a:t>
-            </a:r>
-          </a:p>
-          <a:p>
-            <a:pPr algn="l"/>
-            <a:r>
-              <a:rPr sz="1400" b="1">
+              <a:rPr sz="2000" dirty="0">
+                <a:solidFill>
+                  <a:srgbClr val="78716C"/>
+                </a:solidFill>
+              </a:rPr>
+              <a:t>  </a:t>
+            </a:r>
+            <a:r>
+              <a:rPr lang="en-US" sz="2000" dirty="0">
+                <a:solidFill>
+                  <a:srgbClr val="78716C"/>
+                </a:solidFill>
+              </a:rPr>
+              <a:t>=</a:t>
+            </a:r>
+            <a:r>
+              <a:rPr sz="2000" dirty="0">
+                <a:solidFill>
+                  <a:srgbClr val="78716C"/>
+                </a:solidFill>
+              </a:rPr>
+              <a:t> full chatbot · NLP debug panel · voice input · reset / topic chip</a:t>
+            </a:r>
+          </a:p>
+          <a:p>
+            <a:pPr algn="l"/>
+            <a:r>
+              <a:rPr sz="2000" b="1" dirty="0">
                 <a:solidFill>
                   <a:srgbClr val="1C1717"/>
                 </a:solidFill>
@@ -3543,18 +3599,34 @@
               <a:t>•  /playground</a:t>
             </a:r>
             <a:r>
-              <a:rPr sz="1300">
-                <a:solidFill>
-                  <a:srgbClr val="78716C"/>
-                </a:solidFill>
-              </a:rPr>
-              <a:t>  — type any sentence, see every NLP layer live</a:t>
-            </a:r>
-          </a:p>
-          <a:p>
-            <a:pPr algn="l"/>
-            <a:r>
-              <a:rPr sz="1400" b="1">
+              <a:rPr sz="2000" dirty="0">
+                <a:solidFill>
+                  <a:srgbClr val="78716C"/>
+                </a:solidFill>
+              </a:rPr>
+              <a:t>  </a:t>
+            </a:r>
+            <a:r>
+              <a:rPr lang="en-US" sz="2000" dirty="0">
+                <a:solidFill>
+                  <a:srgbClr val="78716C"/>
+                </a:solidFill>
+              </a:rPr>
+              <a:t>=</a:t>
+            </a:r>
+            <a:r>
+              <a:rPr sz="2000" dirty="0">
+                <a:solidFill>
+                  <a:srgbClr val="78716C"/>
+                </a:solidFill>
+              </a:rPr>
+              <a:t> type any sentence, see every NLP layer live</a:t>
+            </a:r>
+          </a:p>
+          <a:p>
+            <a:pPr algn="l"/>
+            <a:r>
+              <a:rPr sz="2000" b="1" dirty="0">
                 <a:solidFill>
                   <a:srgbClr val="1C1717"/>
                 </a:solidFill>
@@ -3562,18 +3634,34 @@
               <a:t>•  /architecture</a:t>
             </a:r>
             <a:r>
-              <a:rPr sz="1300">
-                <a:solidFill>
-                  <a:srgbClr val="78716C"/>
-                </a:solidFill>
-              </a:rPr>
-              <a:t>  — system architecture diagram + technique table + metrics</a:t>
-            </a:r>
-          </a:p>
-          <a:p>
-            <a:pPr algn="l"/>
-            <a:r>
-              <a:rPr sz="1400" b="1">
+              <a:rPr sz="2000" dirty="0">
+                <a:solidFill>
+                  <a:srgbClr val="78716C"/>
+                </a:solidFill>
+              </a:rPr>
+              <a:t>  </a:t>
+            </a:r>
+            <a:r>
+              <a:rPr lang="en-US" sz="2000" dirty="0">
+                <a:solidFill>
+                  <a:srgbClr val="78716C"/>
+                </a:solidFill>
+              </a:rPr>
+              <a:t>=</a:t>
+            </a:r>
+            <a:r>
+              <a:rPr sz="2000" dirty="0">
+                <a:solidFill>
+                  <a:srgbClr val="78716C"/>
+                </a:solidFill>
+              </a:rPr>
+              <a:t> system architecture diagram + technique table + metrics</a:t>
+            </a:r>
+          </a:p>
+          <a:p>
+            <a:pPr algn="l"/>
+            <a:r>
+              <a:rPr sz="2000" b="1" dirty="0">
                 <a:solidFill>
                   <a:srgbClr val="1C1717"/>
                 </a:solidFill>
@@ -3581,18 +3669,34 @@
               <a:t>•  /admin</a:t>
             </a:r>
             <a:r>
-              <a:rPr sz="1300">
-                <a:solidFill>
-                  <a:srgbClr val="78716C"/>
-                </a:solidFill>
-              </a:rPr>
-              <a:t>  — live FAQ counts + chart-rich admin dashboard</a:t>
-            </a:r>
-          </a:p>
-          <a:p>
-            <a:pPr algn="l"/>
-            <a:r>
-              <a:rPr sz="1400" b="1">
+              <a:rPr sz="2000" dirty="0">
+                <a:solidFill>
+                  <a:srgbClr val="78716C"/>
+                </a:solidFill>
+              </a:rPr>
+              <a:t>  </a:t>
+            </a:r>
+            <a:r>
+              <a:rPr lang="en-US" sz="2000" dirty="0">
+                <a:solidFill>
+                  <a:srgbClr val="78716C"/>
+                </a:solidFill>
+              </a:rPr>
+              <a:t>=</a:t>
+            </a:r>
+            <a:r>
+              <a:rPr sz="2000" dirty="0">
+                <a:solidFill>
+                  <a:srgbClr val="78716C"/>
+                </a:solidFill>
+              </a:rPr>
+              <a:t> live FAQ counts + chart-rich admin dashboard</a:t>
+            </a:r>
+          </a:p>
+          <a:p>
+            <a:pPr algn="l"/>
+            <a:r>
+              <a:rPr sz="2000" b="1" dirty="0">
                 <a:solidFill>
                   <a:srgbClr val="1C1717"/>
                 </a:solidFill>
@@ -3600,18 +3704,47 @@
               <a:t>•  python api/train_transformer.py --verbose</a:t>
             </a:r>
             <a:r>
-              <a:rPr sz="1300">
-                <a:solidFill>
-                  <a:srgbClr val="78716C"/>
-                </a:solidFill>
-              </a:rPr>
-              <a:t>  — train the from-scratch transformer (GPU auto-detected)</a:t>
-            </a:r>
-          </a:p>
-          <a:p>
-            <a:pPr algn="l"/>
-            <a:r>
-              <a:rPr sz="1400" b="1">
+              <a:rPr sz="2000" dirty="0">
+                <a:solidFill>
+                  <a:srgbClr val="78716C"/>
+                </a:solidFill>
+              </a:rPr>
+              <a:t>  </a:t>
+            </a:r>
+            <a:r>
+              <a:rPr lang="en-US" sz="2000" dirty="0">
+                <a:solidFill>
+                  <a:srgbClr val="78716C"/>
+                </a:solidFill>
+              </a:rPr>
+              <a:t>=</a:t>
+            </a:r>
+            <a:r>
+              <a:rPr sz="2000" dirty="0">
+                <a:solidFill>
+                  <a:srgbClr val="78716C"/>
+                </a:solidFill>
+              </a:rPr>
+              <a:t> train </a:t>
+            </a:r>
+            <a:r>
+              <a:rPr sz="2000">
+                <a:solidFill>
+                  <a:srgbClr val="78716C"/>
+                </a:solidFill>
+              </a:rPr>
+              <a:t>the transformer</a:t>
+            </a:r>
+            <a:endParaRPr sz="2000" dirty="0">
+              <a:solidFill>
+                <a:srgbClr val="78716C"/>
+              </a:solidFill>
+            </a:endParaRPr>
+          </a:p>
+          <a:p>
+            <a:pPr algn="l"/>
+            <a:r>
+              <a:rPr sz="2000" b="1" dirty="0">
                 <a:solidFill>
                   <a:srgbClr val="1C1717"/>
                 </a:solidFill>
@@ -3619,31 +3752,28 @@
               <a:t>•  python api/eval.py</a:t>
             </a:r>
             <a:r>
-              <a:rPr sz="1300">
-                <a:solidFill>
-                  <a:srgbClr val="78716C"/>
-                </a:solidFill>
-              </a:rPr>
-              <a:t>  — regenerate EVALUATION_REPORT.md from 116 held-out queries</a:t>
-            </a:r>
-          </a:p>
-          <a:p>
-            <a:pPr algn="l"/>
-            <a:r>
-              <a:rPr sz="1400" b="1">
-                <a:solidFill>
-                  <a:srgbClr val="1C1717"/>
-                </a:solidFill>
-              </a:rPr>
-              <a:t>•  python api/final_test.py</a:t>
-            </a:r>
-            <a:r>
-              <a:rPr sz="1300">
-                <a:solidFill>
-                  <a:srgbClr val="78716C"/>
-                </a:solidFill>
-              </a:rPr>
-              <a:t>  — 62 / 62 integration suite</a:t>
+              <a:rPr sz="2000" dirty="0">
+                <a:solidFill>
+                  <a:srgbClr val="78716C"/>
+                </a:solidFill>
+              </a:rPr>
+              <a:t>  </a:t>
+            </a:r>
+            <a:r>
+              <a:rPr lang="en-US" sz="2000" dirty="0">
+                <a:solidFill>
+                  <a:srgbClr val="78716C"/>
+                </a:solidFill>
+              </a:rPr>
+              <a:t>=</a:t>
+            </a:r>
+            <a:r>
+              <a:rPr sz="2000" dirty="0">
+                <a:solidFill>
+                  <a:srgbClr val="78716C"/>
+                </a:solidFill>
+              </a:rPr>
+              <a:t> regenerate EVALUATION_REPORT.md from 116 held-out queries</a:t>
             </a:r>
           </a:p>
         </p:txBody>
@@ -3657,7 +3787,7 @@
 </file>
 
 <file path=ppt/slides/slide2.xml><?xml version="1.0" encoding="utf-8"?>
-<p:sld xmlns:a="http://schemas.openxmlformats.org/drawingml/2006/main" xmlns:p="http://schemas.openxmlformats.org/presentationml/2006/main" xmlns:r="http://schemas.openxmlformats.org/officeDocument/2006/relationships">
+<p:sld xmlns:a="http://schemas.openxmlformats.org/drawingml/2006/main" xmlns:r="http://schemas.openxmlformats.org/officeDocument/2006/relationships" xmlns:p="http://schemas.openxmlformats.org/presentationml/2006/main">
   <p:cSld>
     <p:spTree>
       <p:nvGrpSpPr>
@@ -3665,7 +3795,14 @@
         <p:cNvGrpSpPr/>
         <p:nvPr/>
       </p:nvGrpSpPr>
-      <p:grpSpPr/>
+      <p:grpSpPr>
+        <a:xfrm>
+          <a:off x="0" y="0"/>
+          <a:ext cx="0" cy="0"/>
+          <a:chOff x="0" y="0"/>
+          <a:chExt cx="0" cy="0"/>
+        </a:xfrm>
+      </p:grpSpPr>
       <p:sp>
         <p:nvSpPr>
           <p:cNvPr id="2" name="Rectangle 1"/>
@@ -3706,6 +3843,7 @@
           <a:lstStyle/>
           <a:p>
             <a:pPr algn="ctr"/>
+            <a:endParaRPr/>
           </a:p>
         </p:txBody>
       </p:sp>
@@ -3726,7 +3864,7 @@
           <a:noFill/>
         </p:spPr>
         <p:txBody>
-          <a:bodyPr wrap="square" lIns="0" rIns="0" tIns="0" bIns="0">
+          <a:bodyPr wrap="square" lIns="0" tIns="0" rIns="0" bIns="0">
             <a:spAutoFit/>
           </a:bodyPr>
           <a:lstStyle/>
@@ -3760,7 +3898,7 @@
           <a:noFill/>
         </p:spPr>
         <p:txBody>
-          <a:bodyPr wrap="square" lIns="0" rIns="0" tIns="0" bIns="0">
+          <a:bodyPr wrap="square" lIns="0" tIns="0" rIns="0" bIns="0">
             <a:spAutoFit/>
           </a:bodyPr>
           <a:lstStyle/>
@@ -3786,7 +3924,7 @@
         <p:spPr>
           <a:xfrm>
             <a:off x="640080" y="1783080"/>
-            <a:ext cx="10972800" cy="4572000"/>
+            <a:ext cx="10972800" cy="2246769"/>
           </a:xfrm>
           <a:prstGeom prst="rect">
             <a:avLst/>
@@ -3801,7 +3939,7 @@
           <a:p>
             <a:pPr algn="l"/>
             <a:r>
-              <a:rPr sz="1500" b="1">
+              <a:rPr sz="2000" b="1" dirty="0">
                 <a:solidFill>
                   <a:srgbClr val="1C1717"/>
                 </a:solidFill>
@@ -3809,18 +3947,18 @@
               <a:t>•  Goal</a:t>
             </a:r>
             <a:r>
-              <a:rPr sz="1400">
-                <a:solidFill>
-                  <a:srgbClr val="78716C"/>
-                </a:solidFill>
-              </a:rPr>
-              <a:t>  — Retrieval chatbot that answers from an approved, clinician-reviewed FAQ index across three specialties.</a:t>
-            </a:r>
-          </a:p>
-          <a:p>
-            <a:pPr algn="l"/>
-            <a:r>
-              <a:rPr sz="1500" b="1">
+              <a:rPr sz="2000" dirty="0">
+                <a:solidFill>
+                  <a:srgbClr val="78716C"/>
+                </a:solidFill>
+              </a:rPr>
+              <a:t> Retrieval chatbot that answers from an approved, clinician-reviewed FAQ index across three specialties.</a:t>
+            </a:r>
+          </a:p>
+          <a:p>
+            <a:pPr algn="l"/>
+            <a:r>
+              <a:rPr sz="2000" b="1" dirty="0">
                 <a:solidFill>
                   <a:srgbClr val="1C1717"/>
                 </a:solidFill>
@@ -3828,18 +3966,18 @@
               <a:t>•  Specialties</a:t>
             </a:r>
             <a:r>
-              <a:rPr sz="1400">
-                <a:solidFill>
-                  <a:srgbClr val="78716C"/>
-                </a:solidFill>
-              </a:rPr>
-              <a:t>  — Radiology · Physiotherapy · Cardiovascular.</a:t>
-            </a:r>
-          </a:p>
-          <a:p>
-            <a:pPr algn="l"/>
-            <a:r>
-              <a:rPr sz="1500" b="1">
+              <a:rPr sz="2000" dirty="0">
+                <a:solidFill>
+                  <a:srgbClr val="78716C"/>
+                </a:solidFill>
+              </a:rPr>
+              <a:t> Radiology · Physiotherapy · Cardiovascular.</a:t>
+            </a:r>
+          </a:p>
+          <a:p>
+            <a:pPr algn="l"/>
+            <a:r>
+              <a:rPr sz="2000" b="1" dirty="0">
                 <a:solidFill>
                   <a:srgbClr val="1C1717"/>
                 </a:solidFill>
@@ -3847,18 +3985,18 @@
               <a:t>•  Honesty</a:t>
             </a:r>
             <a:r>
-              <a:rPr sz="1400">
-                <a:solidFill>
-                  <a:srgbClr val="78716C"/>
-                </a:solidFill>
-              </a:rPr>
-              <a:t>  — Every reply is a real, human-written FAQ entry. No hallucination.</a:t>
-            </a:r>
-          </a:p>
-          <a:p>
-            <a:pPr algn="l"/>
-            <a:r>
-              <a:rPr sz="1500" b="1">
+              <a:rPr sz="2000" dirty="0">
+                <a:solidFill>
+                  <a:srgbClr val="78716C"/>
+                </a:solidFill>
+              </a:rPr>
+              <a:t> Every reply is a real, human-written FAQ entry. No hallucination.</a:t>
+            </a:r>
+          </a:p>
+          <a:p>
+            <a:pPr algn="l"/>
+            <a:r>
+              <a:rPr sz="2000" b="1" dirty="0">
                 <a:solidFill>
                   <a:srgbClr val="1C1717"/>
                 </a:solidFill>
@@ -3866,37 +4004,23 @@
               <a:t>•  Hard constraint</a:t>
             </a:r>
             <a:r>
-              <a:rPr sz="1400">
-                <a:solidFill>
-                  <a:srgbClr val="78716C"/>
-                </a:solidFill>
-              </a:rPr>
-              <a:t>  — No LLM. No pretrained transformer. No sentence-transformers downloaded.</a:t>
-            </a:r>
-          </a:p>
-          <a:p>
-            <a:pPr algn="l"/>
-            <a:r>
-              <a:rPr sz="1500" b="1">
-                <a:solidFill>
-                  <a:srgbClr val="1C1717"/>
-                </a:solidFill>
-              </a:rPr>
-              <a:t>•  Hard constraint</a:t>
-            </a:r>
-            <a:r>
-              <a:rPr sz="1400">
-                <a:solidFill>
-                  <a:srgbClr val="78716C"/>
-                </a:solidFill>
-              </a:rPr>
-              <a:t>  — Every ML algorithm written by us (numpy or PyTorch tensors). ~3000 LoC.</a:t>
-            </a:r>
-          </a:p>
-          <a:p>
-            <a:pPr algn="l"/>
-            <a:r>
-              <a:rPr sz="1500" b="1">
+              <a:rPr sz="2000" dirty="0">
+                <a:solidFill>
+                  <a:srgbClr val="78716C"/>
+                </a:solidFill>
+              </a:rPr>
+              <a:t> No LLM. No pretrained transformer. No sentence-transformers downloaded.</a:t>
+            </a:r>
+            <a:endParaRPr lang="en-US" sz="2000" dirty="0">
+              <a:solidFill>
+                <a:srgbClr val="78716C"/>
+              </a:solidFill>
+            </a:endParaRPr>
+          </a:p>
+          <a:p>
+            <a:pPr algn="l"/>
+            <a:r>
+              <a:rPr sz="2000" b="1" dirty="0">
                 <a:solidFill>
                   <a:srgbClr val="1C1717"/>
                 </a:solidFill>
@@ -3904,18 +4028,34 @@
               <a:t>•  Deploy</a:t>
             </a:r>
             <a:r>
-              <a:rPr sz="1400">
-                <a:solidFill>
-                  <a:srgbClr val="78716C"/>
-                </a:solidFill>
-              </a:rPr>
-              <a:t>  — Single `docker compose up` brings web + api + mongo live.</a:t>
-            </a:r>
-          </a:p>
-          <a:p>
-            <a:pPr algn="l"/>
-            <a:r>
-              <a:rPr sz="1500" b="1">
+              <a:rPr sz="2000" dirty="0">
+                <a:solidFill>
+                  <a:srgbClr val="78716C"/>
+                </a:solidFill>
+              </a:rPr>
+              <a:t> Single `docker compose up` brings web + </a:t>
+            </a:r>
+            <a:r>
+              <a:rPr sz="2000" dirty="0" err="1">
+                <a:solidFill>
+                  <a:srgbClr val="78716C"/>
+                </a:solidFill>
+              </a:rPr>
+              <a:t>api</a:t>
+            </a:r>
+            <a:r>
+              <a:rPr sz="2000" dirty="0">
+                <a:solidFill>
+                  <a:srgbClr val="78716C"/>
+                </a:solidFill>
+              </a:rPr>
+              <a:t> + mongo live.</a:t>
+            </a:r>
+          </a:p>
+          <a:p>
+            <a:pPr algn="l"/>
+            <a:r>
+              <a:rPr sz="2000" b="1" dirty="0">
                 <a:solidFill>
                   <a:srgbClr val="1C1717"/>
                 </a:solidFill>
@@ -3923,12 +4063,12 @@
               <a:t>•  Pakistan context</a:t>
             </a:r>
             <a:r>
-              <a:rPr sz="1400">
-                <a:solidFill>
-                  <a:srgbClr val="78716C"/>
-                </a:solidFill>
-              </a:rPr>
-              <a:t>  — Roman-Urdu phonetic input · 1122 emergency banner · PHI scrub.</a:t>
+              <a:rPr sz="2000" dirty="0">
+                <a:solidFill>
+                  <a:srgbClr val="78716C"/>
+                </a:solidFill>
+              </a:rPr>
+              <a:t> Roman-Urdu phonetic input · 1122 emergency banner · PHI scrub.</a:t>
             </a:r>
           </a:p>
         </p:txBody>
@@ -3942,7 +4082,7 @@
 </file>
 
 <file path=ppt/slides/slide3.xml><?xml version="1.0" encoding="utf-8"?>
-<p:sld xmlns:a="http://schemas.openxmlformats.org/drawingml/2006/main" xmlns:p="http://schemas.openxmlformats.org/presentationml/2006/main" xmlns:r="http://schemas.openxmlformats.org/officeDocument/2006/relationships">
+<p:sld xmlns:a="http://schemas.openxmlformats.org/drawingml/2006/main" xmlns:r="http://schemas.openxmlformats.org/officeDocument/2006/relationships" xmlns:p="http://schemas.openxmlformats.org/presentationml/2006/main">
   <p:cSld>
     <p:spTree>
       <p:nvGrpSpPr>
@@ -3950,7 +4090,14 @@
         <p:cNvGrpSpPr/>
         <p:nvPr/>
       </p:nvGrpSpPr>
-      <p:grpSpPr/>
+      <p:grpSpPr>
+        <a:xfrm>
+          <a:off x="0" y="0"/>
+          <a:ext cx="0" cy="0"/>
+          <a:chOff x="0" y="0"/>
+          <a:chExt cx="0" cy="0"/>
+        </a:xfrm>
+      </p:grpSpPr>
       <p:sp>
         <p:nvSpPr>
           <p:cNvPr id="2" name="Rectangle 1"/>
@@ -3991,6 +4138,7 @@
           <a:lstStyle/>
           <a:p>
             <a:pPr algn="ctr"/>
+            <a:endParaRPr/>
           </a:p>
         </p:txBody>
       </p:sp>
@@ -4011,7 +4159,7 @@
           <a:noFill/>
         </p:spPr>
         <p:txBody>
-          <a:bodyPr wrap="square" lIns="0" rIns="0" tIns="0" bIns="0">
+          <a:bodyPr wrap="square" lIns="0" tIns="0" rIns="0" bIns="0">
             <a:spAutoFit/>
           </a:bodyPr>
           <a:lstStyle/>
@@ -4045,7 +4193,7 @@
           <a:noFill/>
         </p:spPr>
         <p:txBody>
-          <a:bodyPr wrap="square" lIns="0" rIns="0" tIns="0" bIns="0">
+          <a:bodyPr wrap="square" lIns="0" tIns="0" rIns="0" bIns="0">
             <a:spAutoFit/>
           </a:bodyPr>
           <a:lstStyle/>
@@ -4071,7 +4219,7 @@
         <p:spPr>
           <a:xfrm>
             <a:off x="640080" y="1783080"/>
-            <a:ext cx="10972800" cy="4572000"/>
+            <a:ext cx="10972800" cy="2862322"/>
           </a:xfrm>
           <a:prstGeom prst="rect">
             <a:avLst/>
@@ -4086,7 +4234,7 @@
           <a:p>
             <a:pPr algn="l"/>
             <a:r>
-              <a:rPr sz="1400" b="1">
+              <a:rPr sz="2000" b="1" dirty="0">
                 <a:solidFill>
                   <a:srgbClr val="1C1717"/>
                 </a:solidFill>
@@ -4094,18 +4242,18 @@
               <a:t>•  Preprocess</a:t>
             </a:r>
             <a:r>
-              <a:rPr sz="1300">
-                <a:solidFill>
-                  <a:srgbClr val="78716C"/>
-                </a:solidFill>
-              </a:rPr>
-              <a:t>  — PHI scrub → Roman-Urdu expand → coreference → context augment → spell-correct.</a:t>
-            </a:r>
-          </a:p>
-          <a:p>
-            <a:pPr algn="l"/>
-            <a:r>
-              <a:rPr sz="1400" b="1">
+              <a:rPr sz="2000" dirty="0">
+                <a:solidFill>
+                  <a:srgbClr val="78716C"/>
+                </a:solidFill>
+              </a:rPr>
+              <a:t>  PHI scrub → Roman-Urdu expand → coreference → context augment → spell-correct.</a:t>
+            </a:r>
+          </a:p>
+          <a:p>
+            <a:pPr algn="l"/>
+            <a:r>
+              <a:rPr sz="2000" b="1" dirty="0">
                 <a:solidFill>
                   <a:srgbClr val="1C1717"/>
                 </a:solidFill>
@@ -4113,18 +4261,50 @@
               <a:t>•  Understanding</a:t>
             </a:r>
             <a:r>
-              <a:rPr sz="1300">
-                <a:solidFill>
-                  <a:srgbClr val="78716C"/>
-                </a:solidFill>
-              </a:rPr>
-              <a:t>  — Tokeniser · POS (lexicon + HMM) · NER (dict + perceptron + CRF) · negation · sentiment · triage · intent (NB / MLP / Transformer).</a:t>
-            </a:r>
-          </a:p>
-          <a:p>
-            <a:pPr algn="l"/>
-            <a:r>
-              <a:rPr sz="1400" b="1">
+              <a:rPr sz="2000" dirty="0">
+                <a:solidFill>
+                  <a:srgbClr val="78716C"/>
+                </a:solidFill>
+              </a:rPr>
+              <a:t> </a:t>
+            </a:r>
+            <a:r>
+              <a:rPr sz="2000" dirty="0" err="1">
+                <a:solidFill>
+                  <a:srgbClr val="78716C"/>
+                </a:solidFill>
+              </a:rPr>
+              <a:t>Tokeniser</a:t>
+            </a:r>
+            <a:r>
+              <a:rPr sz="2000" dirty="0">
+                <a:solidFill>
+                  <a:srgbClr val="78716C"/>
+                </a:solidFill>
+              </a:rPr>
+              <a:t> · POS (lexicon + HMM) · NER (</a:t>
+            </a:r>
+            <a:r>
+              <a:rPr sz="2000" dirty="0" err="1">
+                <a:solidFill>
+                  <a:srgbClr val="78716C"/>
+                </a:solidFill>
+              </a:rPr>
+              <a:t>dict</a:t>
+            </a:r>
+            <a:r>
+              <a:rPr sz="2000" dirty="0">
+                <a:solidFill>
+                  <a:srgbClr val="78716C"/>
+                </a:solidFill>
+              </a:rPr>
+              <a:t> + perceptron + CRF) · negation · sentiment · triage · intent (NB / MLP / Transformer).</a:t>
+            </a:r>
+          </a:p>
+          <a:p>
+            <a:pPr algn="l"/>
+            <a:r>
+              <a:rPr sz="2000" b="1" dirty="0">
                 <a:solidFill>
                   <a:srgbClr val="1C1717"/>
                 </a:solidFill>
@@ -4132,37 +4312,61 @@
               <a:t>•  Retrieve (5 channels)</a:t>
             </a:r>
             <a:r>
-              <a:rPr sz="1300">
-                <a:solidFill>
-                  <a:srgbClr val="78716C"/>
-                </a:solidFill>
-              </a:rPr>
-              <a:t>  — TF-IDF word 0.20 · TF-IDF char 0.45 · BM25 0.25 · LSA 0.05 · PPMI 0.05.</a:t>
-            </a:r>
-          </a:p>
-          <a:p>
-            <a:pPr algn="l"/>
-            <a:r>
-              <a:rPr sz="1400" b="1">
-                <a:solidFill>
-                  <a:srgbClr val="1C1717"/>
-                </a:solidFill>
-              </a:rPr>
-              <a:t>•  Rerank</a:t>
-            </a:r>
-            <a:r>
-              <a:rPr sz="1300">
-                <a:solidFill>
-                  <a:srgbClr val="78716C"/>
-                </a:solidFill>
-              </a:rPr>
-              <a:t>  — PRF (Rocchio) → LTR (LogReg, 14 features) → MMR diversify.</a:t>
-            </a:r>
-          </a:p>
-          <a:p>
-            <a:pPr algn="l"/>
-            <a:r>
-              <a:rPr sz="1400" b="1">
+              <a:rPr sz="2000" dirty="0">
+                <a:solidFill>
+                  <a:srgbClr val="78716C"/>
+                </a:solidFill>
+              </a:rPr>
+              <a:t> TF-IDF word 0.20 · TF-IDF char 0.45 · BM25 0.25 · LSA 0.05 · PPMI 0.05.</a:t>
+            </a:r>
+          </a:p>
+          <a:p>
+            <a:pPr algn="l"/>
+            <a:r>
+              <a:rPr sz="2000" b="1" dirty="0">
+                <a:solidFill>
+                  <a:srgbClr val="1C1717"/>
+                </a:solidFill>
+              </a:rPr>
+              <a:t>•  </a:t>
+            </a:r>
+            <a:r>
+              <a:rPr sz="2000" b="1" dirty="0" err="1">
+                <a:solidFill>
+                  <a:srgbClr val="1C1717"/>
+                </a:solidFill>
+              </a:rPr>
+              <a:t>Rerank</a:t>
+            </a:r>
+            <a:r>
+              <a:rPr sz="2000" dirty="0">
+                <a:solidFill>
+                  <a:srgbClr val="78716C"/>
+                </a:solidFill>
+              </a:rPr>
+              <a:t> PRF (Rocchio) → LTR (</a:t>
+            </a:r>
+            <a:r>
+              <a:rPr sz="2000" dirty="0" err="1">
+                <a:solidFill>
+                  <a:srgbClr val="78716C"/>
+                </a:solidFill>
+              </a:rPr>
+              <a:t>LogReg</a:t>
+            </a:r>
+            <a:r>
+              <a:rPr sz="2000" dirty="0">
+                <a:solidFill>
+                  <a:srgbClr val="78716C"/>
+                </a:solidFill>
+              </a:rPr>
+              <a:t>, 14 features) → MMR diversify.</a:t>
+            </a:r>
+          </a:p>
+          <a:p>
+            <a:pPr algn="l"/>
+            <a:r>
+              <a:rPr sz="2000" b="1" dirty="0">
                 <a:solidFill>
                   <a:srgbClr val="1C1717"/>
                 </a:solidFill>
@@ -4170,18 +4374,18 @@
               <a:t>•  Dialog</a:t>
             </a:r>
             <a:r>
-              <a:rPr sz="1300">
-                <a:solidFill>
-                  <a:srgbClr val="78716C"/>
-                </a:solidFill>
-              </a:rPr>
-              <a:t>  — Empathic opener · triage banner · clarification · disambiguation card · stem-overlap highlight.</a:t>
-            </a:r>
-          </a:p>
-          <a:p>
-            <a:pPr algn="l"/>
-            <a:r>
-              <a:rPr sz="1400" b="1">
+              <a:rPr sz="2000" dirty="0">
+                <a:solidFill>
+                  <a:srgbClr val="78716C"/>
+                </a:solidFill>
+              </a:rPr>
+              <a:t> Empathic opener · triage banner · clarification · disambiguation card · stem-overlap highlight.</a:t>
+            </a:r>
+          </a:p>
+          <a:p>
+            <a:pPr algn="l"/>
+            <a:r>
+              <a:rPr sz="2000" b="1" dirty="0">
                 <a:solidFill>
                   <a:srgbClr val="1C1717"/>
                 </a:solidFill>
@@ -4189,18 +4393,18 @@
               <a:t>•  Reply</a:t>
             </a:r>
             <a:r>
-              <a:rPr sz="1300">
-                <a:solidFill>
-                  <a:srgbClr val="78716C"/>
-                </a:solidFill>
-              </a:rPr>
-              <a:t>  — answer + matched FAQ + score breakdown + NLP analysis + dialog meta.</a:t>
-            </a:r>
-          </a:p>
-          <a:p>
-            <a:pPr algn="l"/>
-            <a:r>
-              <a:rPr sz="1400" b="1">
+              <a:rPr sz="2000" dirty="0">
+                <a:solidFill>
+                  <a:srgbClr val="78716C"/>
+                </a:solidFill>
+              </a:rPr>
+              <a:t> answer + matched FAQ + score breakdown + NLP analysis + dialog meta.</a:t>
+            </a:r>
+          </a:p>
+          <a:p>
+            <a:pPr algn="l"/>
+            <a:r>
+              <a:rPr sz="2000" b="1" dirty="0">
                 <a:solidFill>
                   <a:srgbClr val="1C1717"/>
                 </a:solidFill>
@@ -4208,12 +4412,28 @@
               <a:t>•  Offline pipeline</a:t>
             </a:r>
             <a:r>
-              <a:rPr sz="1300">
-                <a:solidFill>
-                  <a:srgbClr val="78716C"/>
-                </a:solidFill>
-              </a:rPr>
-              <a:t>  — Chat-log → segment → normalise → embed (TF-IDF) → cluster (K-Means) → select → polish → publish.</a:t>
+              <a:rPr sz="2000" dirty="0">
+                <a:solidFill>
+                  <a:srgbClr val="78716C"/>
+                </a:solidFill>
+              </a:rPr>
+              <a:t> Chat-log → segment → </a:t>
+            </a:r>
+            <a:r>
+              <a:rPr sz="2000" dirty="0" err="1">
+                <a:solidFill>
+                  <a:srgbClr val="78716C"/>
+                </a:solidFill>
+              </a:rPr>
+              <a:t>normalise</a:t>
+            </a:r>
+            <a:r>
+              <a:rPr sz="2000" dirty="0">
+                <a:solidFill>
+                  <a:srgbClr val="78716C"/>
+                </a:solidFill>
+              </a:rPr>
+              <a:t> → embed (TF-IDF) → cluster (K-Means) → select → polish → publish.</a:t>
             </a:r>
           </a:p>
         </p:txBody>
@@ -4227,7 +4447,7 @@
 </file>
 
 <file path=ppt/slides/slide4.xml><?xml version="1.0" encoding="utf-8"?>
-<p:sld xmlns:a="http://schemas.openxmlformats.org/drawingml/2006/main" xmlns:p="http://schemas.openxmlformats.org/presentationml/2006/main" xmlns:r="http://schemas.openxmlformats.org/officeDocument/2006/relationships">
+<p:sld xmlns:a="http://schemas.openxmlformats.org/drawingml/2006/main" xmlns:r="http://schemas.openxmlformats.org/officeDocument/2006/relationships" xmlns:p="http://schemas.openxmlformats.org/presentationml/2006/main">
   <p:cSld>
     <p:spTree>
       <p:nvGrpSpPr>
@@ -4235,7 +4455,14 @@
         <p:cNvGrpSpPr/>
         <p:nvPr/>
       </p:nvGrpSpPr>
-      <p:grpSpPr/>
+      <p:grpSpPr>
+        <a:xfrm>
+          <a:off x="0" y="0"/>
+          <a:ext cx="0" cy="0"/>
+          <a:chOff x="0" y="0"/>
+          <a:chExt cx="0" cy="0"/>
+        </a:xfrm>
+      </p:grpSpPr>
       <p:sp>
         <p:nvSpPr>
           <p:cNvPr id="2" name="Rectangle 1"/>
@@ -4276,6 +4503,7 @@
           <a:lstStyle/>
           <a:p>
             <a:pPr algn="ctr"/>
+            <a:endParaRPr/>
           </a:p>
         </p:txBody>
       </p:sp>
@@ -4296,7 +4524,7 @@
           <a:noFill/>
         </p:spPr>
         <p:txBody>
-          <a:bodyPr wrap="square" lIns="0" rIns="0" tIns="0" bIns="0">
+          <a:bodyPr wrap="square" lIns="0" tIns="0" rIns="0" bIns="0">
             <a:spAutoFit/>
           </a:bodyPr>
           <a:lstStyle/>
@@ -4330,7 +4558,7 @@
           <a:noFill/>
         </p:spPr>
         <p:txBody>
-          <a:bodyPr wrap="square" lIns="0" rIns="0" tIns="0" bIns="0">
+          <a:bodyPr wrap="square" lIns="0" tIns="0" rIns="0" bIns="0">
             <a:spAutoFit/>
           </a:bodyPr>
           <a:lstStyle/>
@@ -4353,10 +4581,16 @@
           <p:cNvGraphicFramePr>
             <a:graphicFrameLocks noGrp="1"/>
           </p:cNvGraphicFramePr>
-          <p:nvPr/>
+          <p:nvPr>
+            <p:extLst>
+              <p:ext uri="{D42A27DB-BD31-4B8C-83A1-F6EECF244321}">
+                <p14:modId xmlns:p14="http://schemas.microsoft.com/office/powerpoint/2010/main" val="1664175578"/>
+              </p:ext>
+            </p:extLst>
+          </p:nvPr>
         </p:nvGraphicFramePr>
         <p:xfrm>
-          <a:off x="457200" y="1691640"/>
+          <a:off x="457200" y="1735328"/>
           <a:ext cx="11247120" cy="4297680"/>
         </p:xfrm>
         <a:graphic>
@@ -4366,9 +4600,27 @@
                 <a:tableStyleId>{5C22544A-7EE6-4342-B048-85BDC9FD1C3A}</a:tableStyleId>
               </a:tblPr>
               <a:tblGrid>
-                <a:gridCol w="3749040"/>
-                <a:gridCol w="3749040"/>
-                <a:gridCol w="3749040"/>
+                <a:gridCol w="3749040">
+                  <a:extLst>
+                    <a:ext uri="{9D8B030D-6E8A-4147-A177-3AD203B41FA5}">
+                      <a16:colId xmlns:a16="http://schemas.microsoft.com/office/drawing/2014/main" val="20000"/>
+                    </a:ext>
+                  </a:extLst>
+                </a:gridCol>
+                <a:gridCol w="3749040">
+                  <a:extLst>
+                    <a:ext uri="{9D8B030D-6E8A-4147-A177-3AD203B41FA5}">
+                      <a16:colId xmlns:a16="http://schemas.microsoft.com/office/drawing/2014/main" val="20001"/>
+                    </a:ext>
+                  </a:extLst>
+                </a:gridCol>
+                <a:gridCol w="3749040">
+                  <a:extLst>
+                    <a:ext uri="{9D8B030D-6E8A-4147-A177-3AD203B41FA5}">
+                      <a16:colId xmlns:a16="http://schemas.microsoft.com/office/drawing/2014/main" val="20002"/>
+                    </a:ext>
+                  </a:extLst>
+                </a:gridCol>
               </a:tblGrid>
               <a:tr h="477520">
                 <a:tc>
@@ -4377,7 +4629,7 @@
                     <a:lstStyle/>
                     <a:p>
                       <a:r>
-                        <a:rPr sz="1200" b="1">
+                        <a:rPr sz="1400" b="1" dirty="0">
                           <a:solidFill>
                             <a:srgbClr val="1C1717"/>
                           </a:solidFill>
@@ -4394,7 +4646,7 @@
                     <a:lstStyle/>
                     <a:p>
                       <a:r>
-                        <a:rPr sz="1200" b="1">
+                        <a:rPr sz="1400" b="1">
                           <a:solidFill>
                             <a:srgbClr val="1C1717"/>
                           </a:solidFill>
@@ -4411,7 +4663,7 @@
                     <a:lstStyle/>
                     <a:p>
                       <a:r>
-                        <a:rPr sz="1200" b="1">
+                        <a:rPr sz="1400" b="1">
                           <a:solidFill>
                             <a:srgbClr val="1C1717"/>
                           </a:solidFill>
@@ -4422,6 +4674,11 @@
                   </a:txBody>
                   <a:tcPr/>
                 </a:tc>
+                <a:extLst>
+                  <a:ext uri="{0D108BD9-81ED-4DB2-BD59-A6C34878D82A}">
+                    <a16:rowId xmlns:a16="http://schemas.microsoft.com/office/drawing/2014/main" val="10000"/>
+                  </a:ext>
+                </a:extLst>
               </a:tr>
               <a:tr h="477520">
                 <a:tc>
@@ -4430,13 +4687,18 @@
                     <a:lstStyle/>
                     <a:p>
                       <a:r>
-                        <a:rPr sz="1200">
+                        <a:rPr sz="1400" dirty="0" err="1">
                           <a:solidFill>
                             <a:srgbClr val="1C1717"/>
                           </a:solidFill>
                         </a:rPr>
                         <a:t>faqs.jsonl</a:t>
                       </a:r>
+                      <a:endParaRPr sz="1400" dirty="0">
+                        <a:solidFill>
+                          <a:srgbClr val="1C1717"/>
+                        </a:solidFill>
+                      </a:endParaRPr>
                     </a:p>
                   </a:txBody>
                   <a:tcPr/>
@@ -4447,7 +4709,7 @@
                     <a:lstStyle/>
                     <a:p>
                       <a:r>
-                        <a:rPr sz="1200">
+                        <a:rPr sz="1400">
                           <a:solidFill>
                             <a:srgbClr val="1C1717"/>
                           </a:solidFill>
@@ -4464,7 +4726,7 @@
                     <a:lstStyle/>
                     <a:p>
                       <a:r>
-                        <a:rPr sz="1200">
+                        <a:rPr sz="1400">
                           <a:solidFill>
                             <a:srgbClr val="1C1717"/>
                           </a:solidFill>
@@ -4475,6 +4737,11 @@
                   </a:txBody>
                   <a:tcPr/>
                 </a:tc>
+                <a:extLst>
+                  <a:ext uri="{0D108BD9-81ED-4DB2-BD59-A6C34878D82A}">
+                    <a16:rowId xmlns:a16="http://schemas.microsoft.com/office/drawing/2014/main" val="10001"/>
+                  </a:ext>
+                </a:extLst>
               </a:tr>
               <a:tr h="477520">
                 <a:tc>
@@ -4483,7 +4750,7 @@
                     <a:lstStyle/>
                     <a:p>
                       <a:r>
-                        <a:rPr sz="1200">
+                        <a:rPr sz="1400">
                           <a:solidFill>
                             <a:srgbClr val="1C1717"/>
                           </a:solidFill>
@@ -4500,7 +4767,7 @@
                     <a:lstStyle/>
                     <a:p>
                       <a:r>
-                        <a:rPr sz="1200">
+                        <a:rPr sz="1400">
                           <a:solidFill>
                             <a:srgbClr val="1C1717"/>
                           </a:solidFill>
@@ -4517,7 +4784,7 @@
                     <a:lstStyle/>
                     <a:p>
                       <a:r>
-                        <a:rPr sz="1200">
+                        <a:rPr sz="1400">
                           <a:solidFill>
                             <a:srgbClr val="1C1717"/>
                           </a:solidFill>
@@ -4528,6 +4795,11 @@
                   </a:txBody>
                   <a:tcPr/>
                 </a:tc>
+                <a:extLst>
+                  <a:ext uri="{0D108BD9-81ED-4DB2-BD59-A6C34878D82A}">
+                    <a16:rowId xmlns:a16="http://schemas.microsoft.com/office/drawing/2014/main" val="10002"/>
+                  </a:ext>
+                </a:extLst>
               </a:tr>
               <a:tr h="477520">
                 <a:tc>
@@ -4536,7 +4808,7 @@
                     <a:lstStyle/>
                     <a:p>
                       <a:r>
-                        <a:rPr sz="1200">
+                        <a:rPr sz="1400">
                           <a:solidFill>
                             <a:srgbClr val="1C1717"/>
                           </a:solidFill>
@@ -4553,7 +4825,7 @@
                     <a:lstStyle/>
                     <a:p>
                       <a:r>
-                        <a:rPr sz="1200">
+                        <a:rPr sz="1400">
                           <a:solidFill>
                             <a:srgbClr val="1C1717"/>
                           </a:solidFill>
@@ -4570,7 +4842,7 @@
                     <a:lstStyle/>
                     <a:p>
                       <a:r>
-                        <a:rPr sz="1200">
+                        <a:rPr sz="1400">
                           <a:solidFill>
                             <a:srgbClr val="1C1717"/>
                           </a:solidFill>
@@ -4581,6 +4853,11 @@
                   </a:txBody>
                   <a:tcPr/>
                 </a:tc>
+                <a:extLst>
+                  <a:ext uri="{0D108BD9-81ED-4DB2-BD59-A6C34878D82A}">
+                    <a16:rowId xmlns:a16="http://schemas.microsoft.com/office/drawing/2014/main" val="10003"/>
+                  </a:ext>
+                </a:extLst>
               </a:tr>
               <a:tr h="477520">
                 <a:tc>
@@ -4589,7 +4866,7 @@
                     <a:lstStyle/>
                     <a:p>
                       <a:r>
-                        <a:rPr sz="1200">
+                        <a:rPr sz="1400">
                           <a:solidFill>
                             <a:srgbClr val="1C1717"/>
                           </a:solidFill>
@@ -4606,7 +4883,7 @@
                     <a:lstStyle/>
                     <a:p>
                       <a:r>
-                        <a:rPr sz="1200">
+                        <a:rPr sz="1400">
                           <a:solidFill>
                             <a:srgbClr val="1C1717"/>
                           </a:solidFill>
@@ -4623,7 +4900,7 @@
                     <a:lstStyle/>
                     <a:p>
                       <a:r>
-                        <a:rPr sz="1200">
+                        <a:rPr sz="1400">
                           <a:solidFill>
                             <a:srgbClr val="1C1717"/>
                           </a:solidFill>
@@ -4634,6 +4911,11 @@
                   </a:txBody>
                   <a:tcPr/>
                 </a:tc>
+                <a:extLst>
+                  <a:ext uri="{0D108BD9-81ED-4DB2-BD59-A6C34878D82A}">
+                    <a16:rowId xmlns:a16="http://schemas.microsoft.com/office/drawing/2014/main" val="10004"/>
+                  </a:ext>
+                </a:extLst>
               </a:tr>
               <a:tr h="477520">
                 <a:tc>
@@ -4642,7 +4924,7 @@
                     <a:lstStyle/>
                     <a:p>
                       <a:r>
-                        <a:rPr sz="1200">
+                        <a:rPr sz="1400">
                           <a:solidFill>
                             <a:srgbClr val="1C1717"/>
                           </a:solidFill>
@@ -4659,7 +4941,7 @@
                     <a:lstStyle/>
                     <a:p>
                       <a:r>
-                        <a:rPr sz="1200">
+                        <a:rPr sz="1400">
                           <a:solidFill>
                             <a:srgbClr val="1C1717"/>
                           </a:solidFill>
@@ -4676,7 +4958,7 @@
                     <a:lstStyle/>
                     <a:p>
                       <a:r>
-                        <a:rPr sz="1200">
+                        <a:rPr sz="1400">
                           <a:solidFill>
                             <a:srgbClr val="1C1717"/>
                           </a:solidFill>
@@ -4687,6 +4969,11 @@
                   </a:txBody>
                   <a:tcPr/>
                 </a:tc>
+                <a:extLst>
+                  <a:ext uri="{0D108BD9-81ED-4DB2-BD59-A6C34878D82A}">
+                    <a16:rowId xmlns:a16="http://schemas.microsoft.com/office/drawing/2014/main" val="10005"/>
+                  </a:ext>
+                </a:extLst>
               </a:tr>
               <a:tr h="477520">
                 <a:tc>
@@ -4695,7 +4982,7 @@
                     <a:lstStyle/>
                     <a:p>
                       <a:r>
-                        <a:rPr sz="1200">
+                        <a:rPr sz="1400">
                           <a:solidFill>
                             <a:srgbClr val="1C1717"/>
                           </a:solidFill>
@@ -4712,7 +4999,7 @@
                     <a:lstStyle/>
                     <a:p>
                       <a:r>
-                        <a:rPr sz="1200">
+                        <a:rPr sz="1400">
                           <a:solidFill>
                             <a:srgbClr val="1C1717"/>
                           </a:solidFill>
@@ -4729,7 +5016,7 @@
                     <a:lstStyle/>
                     <a:p>
                       <a:r>
-                        <a:rPr sz="1200">
+                        <a:rPr sz="1400">
                           <a:solidFill>
                             <a:srgbClr val="1C1717"/>
                           </a:solidFill>
@@ -4740,6 +5027,11 @@
                   </a:txBody>
                   <a:tcPr/>
                 </a:tc>
+                <a:extLst>
+                  <a:ext uri="{0D108BD9-81ED-4DB2-BD59-A6C34878D82A}">
+                    <a16:rowId xmlns:a16="http://schemas.microsoft.com/office/drawing/2014/main" val="10006"/>
+                  </a:ext>
+                </a:extLst>
               </a:tr>
               <a:tr h="477520">
                 <a:tc>
@@ -4748,7 +5040,7 @@
                     <a:lstStyle/>
                     <a:p>
                       <a:r>
-                        <a:rPr sz="1200">
+                        <a:rPr sz="1400">
                           <a:solidFill>
                             <a:srgbClr val="1C1717"/>
                           </a:solidFill>
@@ -4765,7 +5057,7 @@
                     <a:lstStyle/>
                     <a:p>
                       <a:r>
-                        <a:rPr sz="1200">
+                        <a:rPr sz="1400">
                           <a:solidFill>
                             <a:srgbClr val="1C1717"/>
                           </a:solidFill>
@@ -4782,7 +5074,7 @@
                     <a:lstStyle/>
                     <a:p>
                       <a:r>
-                        <a:rPr sz="1200">
+                        <a:rPr sz="1400">
                           <a:solidFill>
                             <a:srgbClr val="1C1717"/>
                           </a:solidFill>
@@ -4793,6 +5085,11 @@
                   </a:txBody>
                   <a:tcPr/>
                 </a:tc>
+                <a:extLst>
+                  <a:ext uri="{0D108BD9-81ED-4DB2-BD59-A6C34878D82A}">
+                    <a16:rowId xmlns:a16="http://schemas.microsoft.com/office/drawing/2014/main" val="10007"/>
+                  </a:ext>
+                </a:extLst>
               </a:tr>
               <a:tr h="477520">
                 <a:tc>
@@ -4801,7 +5098,7 @@
                     <a:lstStyle/>
                     <a:p>
                       <a:r>
-                        <a:rPr sz="1200">
+                        <a:rPr sz="1400">
                           <a:solidFill>
                             <a:srgbClr val="1C1717"/>
                           </a:solidFill>
@@ -4818,7 +5115,7 @@
                     <a:lstStyle/>
                     <a:p>
                       <a:r>
-                        <a:rPr sz="1200">
+                        <a:rPr sz="1400">
                           <a:solidFill>
                             <a:srgbClr val="1C1717"/>
                           </a:solidFill>
@@ -4835,7 +5132,7 @@
                     <a:lstStyle/>
                     <a:p>
                       <a:r>
-                        <a:rPr sz="1200">
+                        <a:rPr sz="1400" dirty="0">
                           <a:solidFill>
                             <a:srgbClr val="1C1717"/>
                           </a:solidFill>
@@ -4846,6 +5143,11 @@
                   </a:txBody>
                   <a:tcPr/>
                 </a:tc>
+                <a:extLst>
+                  <a:ext uri="{0D108BD9-81ED-4DB2-BD59-A6C34878D82A}">
+                    <a16:rowId xmlns:a16="http://schemas.microsoft.com/office/drawing/2014/main" val="10008"/>
+                  </a:ext>
+                </a:extLst>
               </a:tr>
             </a:tbl>
           </a:graphicData>
@@ -4868,7 +5170,7 @@
           <a:noFill/>
         </p:spPr>
         <p:txBody>
-          <a:bodyPr wrap="square" lIns="0" rIns="0" tIns="0" bIns="0">
+          <a:bodyPr wrap="square" lIns="0" tIns="0" rIns="0" bIns="0">
             <a:spAutoFit/>
           </a:bodyPr>
           <a:lstStyle/>
@@ -4894,7 +5196,7 @@
 </file>
 
 <file path=ppt/slides/slide5.xml><?xml version="1.0" encoding="utf-8"?>
-<p:sld xmlns:a="http://schemas.openxmlformats.org/drawingml/2006/main" xmlns:p="http://schemas.openxmlformats.org/presentationml/2006/main" xmlns:r="http://schemas.openxmlformats.org/officeDocument/2006/relationships">
+<p:sld xmlns:a="http://schemas.openxmlformats.org/drawingml/2006/main" xmlns:r="http://schemas.openxmlformats.org/officeDocument/2006/relationships" xmlns:p="http://schemas.openxmlformats.org/presentationml/2006/main">
   <p:cSld>
     <p:spTree>
       <p:nvGrpSpPr>
@@ -4902,7 +5204,14 @@
         <p:cNvGrpSpPr/>
         <p:nvPr/>
       </p:nvGrpSpPr>
-      <p:grpSpPr/>
+      <p:grpSpPr>
+        <a:xfrm>
+          <a:off x="0" y="0"/>
+          <a:ext cx="0" cy="0"/>
+          <a:chOff x="0" y="0"/>
+          <a:chExt cx="0" cy="0"/>
+        </a:xfrm>
+      </p:grpSpPr>
       <p:sp>
         <p:nvSpPr>
           <p:cNvPr id="2" name="Rectangle 1"/>
@@ -4943,6 +5252,7 @@
           <a:lstStyle/>
           <a:p>
             <a:pPr algn="ctr"/>
+            <a:endParaRPr/>
           </a:p>
         </p:txBody>
       </p:sp>
@@ -4963,7 +5273,7 @@
           <a:noFill/>
         </p:spPr>
         <p:txBody>
-          <a:bodyPr wrap="square" lIns="0" rIns="0" tIns="0" bIns="0">
+          <a:bodyPr wrap="square" lIns="0" tIns="0" rIns="0" bIns="0">
             <a:spAutoFit/>
           </a:bodyPr>
           <a:lstStyle/>
@@ -4997,7 +5307,7 @@
           <a:noFill/>
         </p:spPr>
         <p:txBody>
-          <a:bodyPr wrap="square" lIns="0" rIns="0" tIns="0" bIns="0">
+          <a:bodyPr wrap="square" lIns="0" tIns="0" rIns="0" bIns="0">
             <a:spAutoFit/>
           </a:bodyPr>
           <a:lstStyle/>
@@ -5023,7 +5333,7 @@
         <p:spPr>
           <a:xfrm>
             <a:off x="502920" y="1463040"/>
-            <a:ext cx="5486400" cy="4572000"/>
+            <a:ext cx="5486400" cy="4093428"/>
           </a:xfrm>
           <a:prstGeom prst="rect">
             <a:avLst/>
@@ -5038,7 +5348,7 @@
           <a:p>
             <a:pPr algn="l"/>
             <a:r>
-              <a:rPr sz="1100" b="1">
+              <a:rPr sz="2000" b="1">
                 <a:solidFill>
                   <a:srgbClr val="1C1717"/>
                 </a:solidFill>
@@ -5046,7 +5356,7 @@
               <a:t>•  TF-IDF</a:t>
             </a:r>
             <a:r>
-              <a:rPr sz="1000">
+              <a:rPr sz="2000">
                 <a:solidFill>
                   <a:srgbClr val="78716C"/>
                 </a:solidFill>
@@ -5057,7 +5367,7 @@
           <a:p>
             <a:pPr algn="l"/>
             <a:r>
-              <a:rPr sz="1100" b="1">
+              <a:rPr sz="2000" b="1">
                 <a:solidFill>
                   <a:srgbClr val="1C1717"/>
                 </a:solidFill>
@@ -5065,7 +5375,7 @@
               <a:t>•  BM25 Okapi</a:t>
             </a:r>
             <a:r>
-              <a:rPr sz="1000">
+              <a:rPr sz="2000">
                 <a:solidFill>
                   <a:srgbClr val="78716C"/>
                 </a:solidFill>
@@ -5076,7 +5386,7 @@
           <a:p>
             <a:pPr algn="l"/>
             <a:r>
-              <a:rPr sz="1100" b="1">
+              <a:rPr sz="2000" b="1">
                 <a:solidFill>
                   <a:srgbClr val="1C1717"/>
                 </a:solidFill>
@@ -5084,7 +5394,7 @@
               <a:t>•  Naive Bayes</a:t>
             </a:r>
             <a:r>
-              <a:rPr sz="1000">
+              <a:rPr sz="2000">
                 <a:solidFill>
                   <a:srgbClr val="78716C"/>
                 </a:solidFill>
@@ -5095,7 +5405,7 @@
           <a:p>
             <a:pPr algn="l"/>
             <a:r>
-              <a:rPr sz="1100" b="1">
+              <a:rPr sz="2000" b="1">
                 <a:solidFill>
                   <a:srgbClr val="1C1717"/>
                 </a:solidFill>
@@ -5103,7 +5413,7 @@
               <a:t>•  Logistic Reg.</a:t>
             </a:r>
             <a:r>
-              <a:rPr sz="1000">
+              <a:rPr sz="2000">
                 <a:solidFill>
                   <a:srgbClr val="78716C"/>
                 </a:solidFill>
@@ -5114,7 +5424,7 @@
           <a:p>
             <a:pPr algn="l"/>
             <a:r>
-              <a:rPr sz="1100" b="1">
+              <a:rPr sz="2000" b="1">
                 <a:solidFill>
                   <a:srgbClr val="1C1717"/>
                 </a:solidFill>
@@ -5122,7 +5432,7 @@
               <a:t>•  Randomised SVD</a:t>
             </a:r>
             <a:r>
-              <a:rPr sz="1000">
+              <a:rPr sz="2000">
                 <a:solidFill>
                   <a:srgbClr val="78716C"/>
                 </a:solidFill>
@@ -5133,7 +5443,7 @@
           <a:p>
             <a:pPr algn="l"/>
             <a:r>
-              <a:rPr sz="1100" b="1">
+              <a:rPr sz="2000" b="1">
                 <a:solidFill>
                   <a:srgbClr val="1C1717"/>
                 </a:solidFill>
@@ -5141,7 +5451,7 @@
               <a:t>•  K-Means</a:t>
             </a:r>
             <a:r>
-              <a:rPr sz="1000">
+              <a:rPr sz="2000">
                 <a:solidFill>
                   <a:srgbClr val="78716C"/>
                 </a:solidFill>
@@ -5152,7 +5462,7 @@
           <a:p>
             <a:pPr algn="l"/>
             <a:r>
-              <a:rPr sz="1100" b="1">
+              <a:rPr sz="2000" b="1">
                 <a:solidFill>
                   <a:srgbClr val="1C1717"/>
                 </a:solidFill>
@@ -5160,7 +5470,7 @@
               <a:t>•  MLP + backprop</a:t>
             </a:r>
             <a:r>
-              <a:rPr sz="1000">
+              <a:rPr sz="2000">
                 <a:solidFill>
                   <a:srgbClr val="78716C"/>
                 </a:solidFill>
@@ -5171,7 +5481,7 @@
           <a:p>
             <a:pPr algn="l"/>
             <a:r>
-              <a:rPr sz="1100" b="1">
+              <a:rPr sz="2000" b="1">
                 <a:solidFill>
                   <a:srgbClr val="1C1717"/>
                 </a:solidFill>
@@ -5179,7 +5489,7 @@
               <a:t>•  CRF</a:t>
             </a:r>
             <a:r>
-              <a:rPr sz="1000">
+              <a:rPr sz="2000">
                 <a:solidFill>
                   <a:srgbClr val="78716C"/>
                 </a:solidFill>
@@ -5190,7 +5500,7 @@
           <a:p>
             <a:pPr algn="l"/>
             <a:r>
-              <a:rPr sz="1100" b="1">
+              <a:rPr sz="2000" b="1">
                 <a:solidFill>
                   <a:srgbClr val="1C1717"/>
                 </a:solidFill>
@@ -5198,7 +5508,7 @@
               <a:t>•  Word2Vec</a:t>
             </a:r>
             <a:r>
-              <a:rPr sz="1000">
+              <a:rPr sz="2000">
                 <a:solidFill>
                   <a:srgbClr val="78716C"/>
                 </a:solidFill>
@@ -5209,7 +5519,7 @@
           <a:p>
             <a:pPr algn="l"/>
             <a:r>
-              <a:rPr sz="1100" b="1">
+              <a:rPr sz="2000" b="1">
                 <a:solidFill>
                   <a:srgbClr val="1C1717"/>
                 </a:solidFill>
@@ -5217,7 +5527,7 @@
               <a:t>•  Dual encoder</a:t>
             </a:r>
             <a:r>
-              <a:rPr sz="1000">
+              <a:rPr sz="2000">
                 <a:solidFill>
                   <a:srgbClr val="78716C"/>
                 </a:solidFill>
@@ -5228,7 +5538,7 @@
           <a:p>
             <a:pPr algn="l"/>
             <a:r>
-              <a:rPr sz="1100" b="1">
+              <a:rPr sz="2000" b="1">
                 <a:solidFill>
                   <a:srgbClr val="1C1717"/>
                 </a:solidFill>
@@ -5236,7 +5546,7 @@
               <a:t>•  BPE tokenizer</a:t>
             </a:r>
             <a:r>
-              <a:rPr sz="1000">
+              <a:rPr sz="2000">
                 <a:solidFill>
                   <a:srgbClr val="78716C"/>
                 </a:solidFill>
@@ -5263,7 +5573,7 @@
           <a:noFill/>
         </p:spPr>
         <p:txBody>
-          <a:bodyPr wrap="square" lIns="0" rIns="0" tIns="0" bIns="0">
+          <a:bodyPr wrap="square" lIns="0" tIns="0" rIns="0" bIns="0">
             <a:spAutoFit/>
           </a:bodyPr>
           <a:lstStyle/>
@@ -5289,7 +5599,7 @@
         <p:spPr>
           <a:xfrm>
             <a:off x="6263640" y="1463040"/>
-            <a:ext cx="5486400" cy="4572000"/>
+            <a:ext cx="5486400" cy="5324535"/>
           </a:xfrm>
           <a:prstGeom prst="rect">
             <a:avLst/>
@@ -5304,7 +5614,7 @@
           <a:p>
             <a:pPr algn="l"/>
             <a:r>
-              <a:rPr sz="1100" b="1">
+              <a:rPr sz="2000" b="1">
                 <a:solidFill>
                   <a:srgbClr val="1C1717"/>
                 </a:solidFill>
@@ -5312,7 +5622,7 @@
               <a:t>•  Backend</a:t>
             </a:r>
             <a:r>
-              <a:rPr sz="1000">
+              <a:rPr sz="2000">
                 <a:solidFill>
                   <a:srgbClr val="78716C"/>
                 </a:solidFill>
@@ -5323,7 +5633,7 @@
           <a:p>
             <a:pPr algn="l"/>
             <a:r>
-              <a:rPr sz="1100" b="1">
+              <a:rPr sz="2000" b="1">
                 <a:solidFill>
                   <a:srgbClr val="1C1717"/>
                 </a:solidFill>
@@ -5331,7 +5641,7 @@
               <a:t>•  No pretrained weights</a:t>
             </a:r>
             <a:r>
-              <a:rPr sz="1000">
+              <a:rPr sz="2000">
                 <a:solidFill>
                   <a:srgbClr val="78716C"/>
                 </a:solidFill>
@@ -5342,7 +5652,7 @@
           <a:p>
             <a:pPr algn="l"/>
             <a:r>
-              <a:rPr sz="1100" b="1">
+              <a:rPr sz="2000" b="1">
                 <a:solidFill>
                   <a:srgbClr val="1C1717"/>
                 </a:solidFill>
@@ -5350,7 +5660,7 @@
               <a:t>•  Arch.</a:t>
             </a:r>
             <a:r>
-              <a:rPr sz="1000">
+              <a:rPr sz="2000">
                 <a:solidFill>
                   <a:srgbClr val="78716C"/>
                 </a:solidFill>
@@ -5361,7 +5671,7 @@
           <a:p>
             <a:pPr algn="l"/>
             <a:r>
-              <a:rPr sz="1100" b="1">
+              <a:rPr sz="2000" b="1">
                 <a:solidFill>
                   <a:srgbClr val="1C1717"/>
                 </a:solidFill>
@@ -5369,7 +5679,7 @@
               <a:t>•  Embedding</a:t>
             </a:r>
             <a:r>
-              <a:rPr sz="1000">
+              <a:rPr sz="2000">
                 <a:solidFill>
                   <a:srgbClr val="78716C"/>
                 </a:solidFill>
@@ -5380,7 +5690,7 @@
           <a:p>
             <a:pPr algn="l"/>
             <a:r>
-              <a:rPr sz="1100" b="1">
+              <a:rPr sz="2000" b="1">
                 <a:solidFill>
                   <a:srgbClr val="1C1717"/>
                 </a:solidFill>
@@ -5388,7 +5698,7 @@
               <a:t>•  Attention</a:t>
             </a:r>
             <a:r>
-              <a:rPr sz="1000">
+              <a:rPr sz="2000">
                 <a:solidFill>
                   <a:srgbClr val="78716C"/>
                 </a:solidFill>
@@ -5399,7 +5709,7 @@
           <a:p>
             <a:pPr algn="l"/>
             <a:r>
-              <a:rPr sz="1100" b="1">
+              <a:rPr sz="2000" b="1">
                 <a:solidFill>
                   <a:srgbClr val="1C1717"/>
                 </a:solidFill>
@@ -5407,7 +5717,7 @@
               <a:t>•  Pool / head</a:t>
             </a:r>
             <a:r>
-              <a:rPr sz="1000">
+              <a:rPr sz="2000">
                 <a:solidFill>
                   <a:srgbClr val="78716C"/>
                 </a:solidFill>
@@ -5418,7 +5728,7 @@
           <a:p>
             <a:pPr algn="l"/>
             <a:r>
-              <a:rPr sz="1100" b="1">
+              <a:rPr sz="2000" b="1">
                 <a:solidFill>
                   <a:srgbClr val="1C1717"/>
                 </a:solidFill>
@@ -5426,7 +5736,7 @@
               <a:t>•  Training data</a:t>
             </a:r>
             <a:r>
-              <a:rPr sz="1000">
+              <a:rPr sz="2000">
                 <a:solidFill>
                   <a:srgbClr val="78716C"/>
                 </a:solidFill>
@@ -5437,7 +5747,7 @@
           <a:p>
             <a:pPr algn="l"/>
             <a:r>
-              <a:rPr sz="1100" b="1">
+              <a:rPr sz="2000" b="1">
                 <a:solidFill>
                   <a:srgbClr val="1C1717"/>
                 </a:solidFill>
@@ -5445,7 +5755,7 @@
               <a:t>•  Optimiser</a:t>
             </a:r>
             <a:r>
-              <a:rPr sz="1000">
+              <a:rPr sz="2000">
                 <a:solidFill>
                   <a:srgbClr val="78716C"/>
                 </a:solidFill>
@@ -5456,7 +5766,7 @@
           <a:p>
             <a:pPr algn="l"/>
             <a:r>
-              <a:rPr sz="1100" b="1">
+              <a:rPr sz="2000" b="1">
                 <a:solidFill>
                   <a:srgbClr val="1C1717"/>
                 </a:solidFill>
@@ -5464,7 +5774,7 @@
               <a:t>•  Hardware</a:t>
             </a:r>
             <a:r>
-              <a:rPr sz="1000">
+              <a:rPr sz="2000">
                 <a:solidFill>
                   <a:srgbClr val="78716C"/>
                 </a:solidFill>
@@ -5475,7 +5785,7 @@
           <a:p>
             <a:pPr algn="l"/>
             <a:r>
-              <a:rPr sz="1100" b="1">
+              <a:rPr sz="2000" b="1">
                 <a:solidFill>
                   <a:srgbClr val="1C1717"/>
                 </a:solidFill>
@@ -5483,7 +5793,7 @@
               <a:t>•  Result</a:t>
             </a:r>
             <a:r>
-              <a:rPr sz="1000">
+              <a:rPr sz="2000">
                 <a:solidFill>
                   <a:srgbClr val="78716C"/>
                 </a:solidFill>
@@ -5494,7 +5804,7 @@
           <a:p>
             <a:pPr algn="l"/>
             <a:r>
-              <a:rPr sz="1100" b="1">
+              <a:rPr sz="2000" b="1">
                 <a:solidFill>
                   <a:srgbClr val="1C1717"/>
                 </a:solidFill>
@@ -5502,7 +5812,7 @@
               <a:t>•  Endpoint</a:t>
             </a:r>
             <a:r>
-              <a:rPr sz="1000">
+              <a:rPr sz="2000">
                 <a:solidFill>
                   <a:srgbClr val="78716C"/>
                 </a:solidFill>
@@ -5521,7 +5831,7 @@
 </file>
 
 <file path=ppt/slides/slide6.xml><?xml version="1.0" encoding="utf-8"?>
-<p:sld xmlns:a="http://schemas.openxmlformats.org/drawingml/2006/main" xmlns:p="http://schemas.openxmlformats.org/presentationml/2006/main" xmlns:r="http://schemas.openxmlformats.org/officeDocument/2006/relationships">
+<p:sld xmlns:a="http://schemas.openxmlformats.org/drawingml/2006/main" xmlns:r="http://schemas.openxmlformats.org/officeDocument/2006/relationships" xmlns:p="http://schemas.openxmlformats.org/presentationml/2006/main">
   <p:cSld>
     <p:spTree>
       <p:nvGrpSpPr>
@@ -5529,7 +5839,14 @@
         <p:cNvGrpSpPr/>
         <p:nvPr/>
       </p:nvGrpSpPr>
-      <p:grpSpPr/>
+      <p:grpSpPr>
+        <a:xfrm>
+          <a:off x="0" y="0"/>
+          <a:ext cx="0" cy="0"/>
+          <a:chOff x="0" y="0"/>
+          <a:chExt cx="0" cy="0"/>
+        </a:xfrm>
+      </p:grpSpPr>
       <p:sp>
         <p:nvSpPr>
           <p:cNvPr id="2" name="Rectangle 1"/>
@@ -5570,6 +5887,7 @@
           <a:lstStyle/>
           <a:p>
             <a:pPr algn="ctr"/>
+            <a:endParaRPr/>
           </a:p>
         </p:txBody>
       </p:sp>
@@ -5590,7 +5908,7 @@
           <a:noFill/>
         </p:spPr>
         <p:txBody>
-          <a:bodyPr wrap="square" lIns="0" rIns="0" tIns="0" bIns="0">
+          <a:bodyPr wrap="square" lIns="0" tIns="0" rIns="0" bIns="0">
             <a:spAutoFit/>
           </a:bodyPr>
           <a:lstStyle/>
@@ -5624,7 +5942,7 @@
           <a:noFill/>
         </p:spPr>
         <p:txBody>
-          <a:bodyPr wrap="square" lIns="0" rIns="0" tIns="0" bIns="0">
+          <a:bodyPr wrap="square" lIns="0" tIns="0" rIns="0" bIns="0">
             <a:spAutoFit/>
           </a:bodyPr>
           <a:lstStyle/>
@@ -5647,11 +5965,17 @@
           <p:cNvGraphicFramePr>
             <a:graphicFrameLocks noGrp="1"/>
           </p:cNvGraphicFramePr>
-          <p:nvPr/>
+          <p:nvPr>
+            <p:extLst>
+              <p:ext uri="{D42A27DB-BD31-4B8C-83A1-F6EECF244321}">
+                <p14:modId xmlns:p14="http://schemas.microsoft.com/office/powerpoint/2010/main" val="1001498319"/>
+              </p:ext>
+            </p:extLst>
+          </p:nvPr>
         </p:nvGraphicFramePr>
         <p:xfrm>
           <a:off x="457200" y="1783080"/>
-          <a:ext cx="3657600" cy="2103120"/>
+          <a:ext cx="3657600" cy="2194560"/>
         </p:xfrm>
         <a:graphic>
           <a:graphicData uri="http://schemas.openxmlformats.org/drawingml/2006/table">
@@ -5660,8 +5984,20 @@
                 <a:tableStyleId>{5C22544A-7EE6-4342-B048-85BDC9FD1C3A}</a:tableStyleId>
               </a:tblPr>
               <a:tblGrid>
-                <a:gridCol w="1828800"/>
-                <a:gridCol w="1828800"/>
+                <a:gridCol w="1828800">
+                  <a:extLst>
+                    <a:ext uri="{9D8B030D-6E8A-4147-A177-3AD203B41FA5}">
+                      <a16:colId xmlns:a16="http://schemas.microsoft.com/office/drawing/2014/main" val="20000"/>
+                    </a:ext>
+                  </a:extLst>
+                </a:gridCol>
+                <a:gridCol w="1828800">
+                  <a:extLst>
+                    <a:ext uri="{9D8B030D-6E8A-4147-A177-3AD203B41FA5}">
+                      <a16:colId xmlns:a16="http://schemas.microsoft.com/office/drawing/2014/main" val="20001"/>
+                    </a:ext>
+                  </a:extLst>
+                </a:gridCol>
               </a:tblGrid>
               <a:tr h="350520">
                 <a:tc>
@@ -5670,7 +6006,7 @@
                     <a:lstStyle/>
                     <a:p>
                       <a:r>
-                        <a:rPr sz="1200" b="1">
+                        <a:rPr sz="1800" b="1" dirty="0">
                           <a:solidFill>
                             <a:srgbClr val="1C1717"/>
                           </a:solidFill>
@@ -5687,7 +6023,7 @@
                     <a:lstStyle/>
                     <a:p>
                       <a:r>
-                        <a:rPr sz="1200" b="1">
+                        <a:rPr sz="1800" b="1">
                           <a:solidFill>
                             <a:srgbClr val="1C1717"/>
                           </a:solidFill>
@@ -5698,6 +6034,11 @@
                   </a:txBody>
                   <a:tcPr/>
                 </a:tc>
+                <a:extLst>
+                  <a:ext uri="{0D108BD9-81ED-4DB2-BD59-A6C34878D82A}">
+                    <a16:rowId xmlns:a16="http://schemas.microsoft.com/office/drawing/2014/main" val="10000"/>
+                  </a:ext>
+                </a:extLst>
               </a:tr>
               <a:tr h="350520">
                 <a:tc>
@@ -5706,7 +6047,7 @@
                     <a:lstStyle/>
                     <a:p>
                       <a:r>
-                        <a:rPr sz="1200">
+                        <a:rPr sz="1800" dirty="0">
                           <a:solidFill>
                             <a:srgbClr val="1C1717"/>
                           </a:solidFill>
@@ -5723,7 +6064,7 @@
                     <a:lstStyle/>
                     <a:p>
                       <a:r>
-                        <a:rPr sz="1200">
+                        <a:rPr sz="1800">
                           <a:solidFill>
                             <a:srgbClr val="1C1717"/>
                           </a:solidFill>
@@ -5734,6 +6075,11 @@
                   </a:txBody>
                   <a:tcPr/>
                 </a:tc>
+                <a:extLst>
+                  <a:ext uri="{0D108BD9-81ED-4DB2-BD59-A6C34878D82A}">
+                    <a16:rowId xmlns:a16="http://schemas.microsoft.com/office/drawing/2014/main" val="10001"/>
+                  </a:ext>
+                </a:extLst>
               </a:tr>
               <a:tr h="350520">
                 <a:tc>
@@ -5742,7 +6088,7 @@
                     <a:lstStyle/>
                     <a:p>
                       <a:r>
-                        <a:rPr sz="1200">
+                        <a:rPr sz="1800">
                           <a:solidFill>
                             <a:srgbClr val="1C1717"/>
                           </a:solidFill>
@@ -5759,7 +6105,7 @@
                     <a:lstStyle/>
                     <a:p>
                       <a:r>
-                        <a:rPr sz="1200">
+                        <a:rPr sz="1800" dirty="0">
                           <a:solidFill>
                             <a:srgbClr val="1C1717"/>
                           </a:solidFill>
@@ -5770,6 +6116,11 @@
                   </a:txBody>
                   <a:tcPr/>
                 </a:tc>
+                <a:extLst>
+                  <a:ext uri="{0D108BD9-81ED-4DB2-BD59-A6C34878D82A}">
+                    <a16:rowId xmlns:a16="http://schemas.microsoft.com/office/drawing/2014/main" val="10002"/>
+                  </a:ext>
+                </a:extLst>
               </a:tr>
               <a:tr h="350520">
                 <a:tc>
@@ -5778,7 +6129,7 @@
                     <a:lstStyle/>
                     <a:p>
                       <a:r>
-                        <a:rPr sz="1200">
+                        <a:rPr sz="1800">
                           <a:solidFill>
                             <a:srgbClr val="1C1717"/>
                           </a:solidFill>
@@ -5795,7 +6146,7 @@
                     <a:lstStyle/>
                     <a:p>
                       <a:r>
-                        <a:rPr sz="1200">
+                        <a:rPr sz="1800" dirty="0">
                           <a:solidFill>
                             <a:srgbClr val="1C1717"/>
                           </a:solidFill>
@@ -5806,6 +6157,11 @@
                   </a:txBody>
                   <a:tcPr/>
                 </a:tc>
+                <a:extLst>
+                  <a:ext uri="{0D108BD9-81ED-4DB2-BD59-A6C34878D82A}">
+                    <a16:rowId xmlns:a16="http://schemas.microsoft.com/office/drawing/2014/main" val="10003"/>
+                  </a:ext>
+                </a:extLst>
               </a:tr>
               <a:tr h="350520">
                 <a:tc>
@@ -5814,7 +6170,7 @@
                     <a:lstStyle/>
                     <a:p>
                       <a:r>
-                        <a:rPr sz="1200">
+                        <a:rPr sz="1800">
                           <a:solidFill>
                             <a:srgbClr val="1C1717"/>
                           </a:solidFill>
@@ -5831,17 +6187,35 @@
                     <a:lstStyle/>
                     <a:p>
                       <a:r>
-                        <a:rPr sz="1200">
+                        <a:rPr sz="1800" dirty="0">
                           <a:solidFill>
                             <a:srgbClr val="1C1717"/>
                           </a:solidFill>
                         </a:rPr>
-                        <a:t>22 ms</a:t>
+                        <a:t>22 </a:t>
                       </a:r>
+                      <a:r>
+                        <a:rPr sz="1800" dirty="0" err="1">
+                          <a:solidFill>
+                            <a:srgbClr val="1C1717"/>
+                          </a:solidFill>
+                        </a:rPr>
+                        <a:t>ms</a:t>
+                      </a:r>
+                      <a:endParaRPr sz="1800" dirty="0">
+                        <a:solidFill>
+                          <a:srgbClr val="1C1717"/>
+                        </a:solidFill>
+                      </a:endParaRPr>
                     </a:p>
                   </a:txBody>
                   <a:tcPr/>
                 </a:tc>
+                <a:extLst>
+                  <a:ext uri="{0D108BD9-81ED-4DB2-BD59-A6C34878D82A}">
+                    <a16:rowId xmlns:a16="http://schemas.microsoft.com/office/drawing/2014/main" val="10004"/>
+                  </a:ext>
+                </a:extLst>
               </a:tr>
               <a:tr h="350520">
                 <a:tc>
@@ -5850,7 +6224,7 @@
                     <a:lstStyle/>
                     <a:p>
                       <a:r>
-                        <a:rPr sz="1200">
+                        <a:rPr sz="1800">
                           <a:solidFill>
                             <a:srgbClr val="1C1717"/>
                           </a:solidFill>
@@ -5867,17 +6241,35 @@
                     <a:lstStyle/>
                     <a:p>
                       <a:r>
-                        <a:rPr sz="1200">
+                        <a:rPr sz="1800" dirty="0">
                           <a:solidFill>
                             <a:srgbClr val="1C1717"/>
                           </a:solidFill>
                         </a:rPr>
-                        <a:t>47 ms</a:t>
+                        <a:t>47 </a:t>
                       </a:r>
+                      <a:r>
+                        <a:rPr sz="1800" dirty="0" err="1">
+                          <a:solidFill>
+                            <a:srgbClr val="1C1717"/>
+                          </a:solidFill>
+                        </a:rPr>
+                        <a:t>ms</a:t>
+                      </a:r>
+                      <a:endParaRPr sz="1800" dirty="0">
+                        <a:solidFill>
+                          <a:srgbClr val="1C1717"/>
+                        </a:solidFill>
+                      </a:endParaRPr>
                     </a:p>
                   </a:txBody>
                   <a:tcPr/>
                 </a:tc>
+                <a:extLst>
+                  <a:ext uri="{0D108BD9-81ED-4DB2-BD59-A6C34878D82A}">
+                    <a16:rowId xmlns:a16="http://schemas.microsoft.com/office/drawing/2014/main" val="10005"/>
+                  </a:ext>
+                </a:extLst>
               </a:tr>
             </a:tbl>
           </a:graphicData>
@@ -5889,7 +6281,13 @@
           <p:cNvGraphicFramePr>
             <a:graphicFrameLocks noGrp="1"/>
           </p:cNvGraphicFramePr>
-          <p:nvPr/>
+          <p:nvPr>
+            <p:extLst>
+              <p:ext uri="{D42A27DB-BD31-4B8C-83A1-F6EECF244321}">
+                <p14:modId xmlns:p14="http://schemas.microsoft.com/office/powerpoint/2010/main" val="2438839755"/>
+              </p:ext>
+            </p:extLst>
+          </p:nvPr>
         </p:nvGraphicFramePr>
         <p:xfrm>
           <a:off x="4480560" y="1783080"/>
@@ -5902,11 +6300,41 @@
                 <a:tableStyleId>{5C22544A-7EE6-4342-B048-85BDC9FD1C3A}</a:tableStyleId>
               </a:tblPr>
               <a:tblGrid>
-                <a:gridCol w="1463040"/>
-                <a:gridCol w="1463040"/>
-                <a:gridCol w="1463040"/>
-                <a:gridCol w="1463040"/>
-                <a:gridCol w="1463040"/>
+                <a:gridCol w="1463040">
+                  <a:extLst>
+                    <a:ext uri="{9D8B030D-6E8A-4147-A177-3AD203B41FA5}">
+                      <a16:colId xmlns:a16="http://schemas.microsoft.com/office/drawing/2014/main" val="20000"/>
+                    </a:ext>
+                  </a:extLst>
+                </a:gridCol>
+                <a:gridCol w="1463040">
+                  <a:extLst>
+                    <a:ext uri="{9D8B030D-6E8A-4147-A177-3AD203B41FA5}">
+                      <a16:colId xmlns:a16="http://schemas.microsoft.com/office/drawing/2014/main" val="20001"/>
+                    </a:ext>
+                  </a:extLst>
+                </a:gridCol>
+                <a:gridCol w="1463040">
+                  <a:extLst>
+                    <a:ext uri="{9D8B030D-6E8A-4147-A177-3AD203B41FA5}">
+                      <a16:colId xmlns:a16="http://schemas.microsoft.com/office/drawing/2014/main" val="20002"/>
+                    </a:ext>
+                  </a:extLst>
+                </a:gridCol>
+                <a:gridCol w="1463040">
+                  <a:extLst>
+                    <a:ext uri="{9D8B030D-6E8A-4147-A177-3AD203B41FA5}">
+                      <a16:colId xmlns:a16="http://schemas.microsoft.com/office/drawing/2014/main" val="20003"/>
+                    </a:ext>
+                  </a:extLst>
+                </a:gridCol>
+                <a:gridCol w="1463040">
+                  <a:extLst>
+                    <a:ext uri="{9D8B030D-6E8A-4147-A177-3AD203B41FA5}">
+                      <a16:colId xmlns:a16="http://schemas.microsoft.com/office/drawing/2014/main" val="20004"/>
+                    </a:ext>
+                  </a:extLst>
+                </a:gridCol>
               </a:tblGrid>
               <a:tr h="525780">
                 <a:tc>
@@ -5915,7 +6343,7 @@
                     <a:lstStyle/>
                     <a:p>
                       <a:r>
-                        <a:rPr sz="1200" b="1">
+                        <a:rPr sz="1600" b="1" dirty="0">
                           <a:solidFill>
                             <a:srgbClr val="1C1717"/>
                           </a:solidFill>
@@ -5932,7 +6360,7 @@
                     <a:lstStyle/>
                     <a:p>
                       <a:r>
-                        <a:rPr sz="1200" b="1">
+                        <a:rPr sz="1600" b="1">
                           <a:solidFill>
                             <a:srgbClr val="1C1717"/>
                           </a:solidFill>
@@ -5949,7 +6377,7 @@
                     <a:lstStyle/>
                     <a:p>
                       <a:r>
-                        <a:rPr sz="1200" b="1">
+                        <a:rPr sz="1600" b="1">
                           <a:solidFill>
                             <a:srgbClr val="1C1717"/>
                           </a:solidFill>
@@ -5966,7 +6394,7 @@
                     <a:lstStyle/>
                     <a:p>
                       <a:r>
-                        <a:rPr sz="1200" b="1">
+                        <a:rPr sz="1600" b="1">
                           <a:solidFill>
                             <a:srgbClr val="1C1717"/>
                           </a:solidFill>
@@ -5983,7 +6411,7 @@
                     <a:lstStyle/>
                     <a:p>
                       <a:r>
-                        <a:rPr sz="1200" b="1">
+                        <a:rPr sz="1600" b="1">
                           <a:solidFill>
                             <a:srgbClr val="1C1717"/>
                           </a:solidFill>
@@ -5994,6 +6422,11 @@
                   </a:txBody>
                   <a:tcPr/>
                 </a:tc>
+                <a:extLst>
+                  <a:ext uri="{0D108BD9-81ED-4DB2-BD59-A6C34878D82A}">
+                    <a16:rowId xmlns:a16="http://schemas.microsoft.com/office/drawing/2014/main" val="10000"/>
+                  </a:ext>
+                </a:extLst>
               </a:tr>
               <a:tr h="525780">
                 <a:tc>
@@ -6002,7 +6435,7 @@
                     <a:lstStyle/>
                     <a:p>
                       <a:r>
-                        <a:rPr sz="1200">
+                        <a:rPr sz="1600">
                           <a:solidFill>
                             <a:srgbClr val="1C1717"/>
                           </a:solidFill>
@@ -6019,7 +6452,7 @@
                     <a:lstStyle/>
                     <a:p>
                       <a:r>
-                        <a:rPr sz="1200">
+                        <a:rPr sz="1600">
                           <a:solidFill>
                             <a:srgbClr val="1C1717"/>
                           </a:solidFill>
@@ -6036,7 +6469,7 @@
                     <a:lstStyle/>
                     <a:p>
                       <a:r>
-                        <a:rPr sz="1200">
+                        <a:rPr sz="1600">
                           <a:solidFill>
                             <a:srgbClr val="1C1717"/>
                           </a:solidFill>
@@ -6053,7 +6486,7 @@
                     <a:lstStyle/>
                     <a:p>
                       <a:r>
-                        <a:rPr sz="1200">
+                        <a:rPr sz="1600">
                           <a:solidFill>
                             <a:srgbClr val="1C1717"/>
                           </a:solidFill>
@@ -6070,7 +6503,7 @@
                     <a:lstStyle/>
                     <a:p>
                       <a:r>
-                        <a:rPr sz="1200">
+                        <a:rPr sz="1600">
                           <a:solidFill>
                             <a:srgbClr val="1C1717"/>
                           </a:solidFill>
@@ -6081,6 +6514,11 @@
                   </a:txBody>
                   <a:tcPr/>
                 </a:tc>
+                <a:extLst>
+                  <a:ext uri="{0D108BD9-81ED-4DB2-BD59-A6C34878D82A}">
+                    <a16:rowId xmlns:a16="http://schemas.microsoft.com/office/drawing/2014/main" val="10001"/>
+                  </a:ext>
+                </a:extLst>
               </a:tr>
               <a:tr h="525780">
                 <a:tc>
@@ -6089,7 +6527,7 @@
                     <a:lstStyle/>
                     <a:p>
                       <a:r>
-                        <a:rPr sz="1200">
+                        <a:rPr sz="1600">
                           <a:solidFill>
                             <a:srgbClr val="1C1717"/>
                           </a:solidFill>
@@ -6106,7 +6544,7 @@
                     <a:lstStyle/>
                     <a:p>
                       <a:r>
-                        <a:rPr sz="1200">
+                        <a:rPr sz="1600">
                           <a:solidFill>
                             <a:srgbClr val="1C1717"/>
                           </a:solidFill>
@@ -6123,7 +6561,7 @@
                     <a:lstStyle/>
                     <a:p>
                       <a:r>
-                        <a:rPr sz="1200">
+                        <a:rPr sz="1600">
                           <a:solidFill>
                             <a:srgbClr val="1C1717"/>
                           </a:solidFill>
@@ -6140,7 +6578,7 @@
                     <a:lstStyle/>
                     <a:p>
                       <a:r>
-                        <a:rPr sz="1200">
+                        <a:rPr sz="1600">
                           <a:solidFill>
                             <a:srgbClr val="1C1717"/>
                           </a:solidFill>
@@ -6157,7 +6595,7 @@
                     <a:lstStyle/>
                     <a:p>
                       <a:r>
-                        <a:rPr sz="1200">
+                        <a:rPr sz="1600">
                           <a:solidFill>
                             <a:srgbClr val="1C1717"/>
                           </a:solidFill>
@@ -6168,6 +6606,11 @@
                   </a:txBody>
                   <a:tcPr/>
                 </a:tc>
+                <a:extLst>
+                  <a:ext uri="{0D108BD9-81ED-4DB2-BD59-A6C34878D82A}">
+                    <a16:rowId xmlns:a16="http://schemas.microsoft.com/office/drawing/2014/main" val="10002"/>
+                  </a:ext>
+                </a:extLst>
               </a:tr>
               <a:tr h="525780">
                 <a:tc>
@@ -6176,7 +6619,7 @@
                     <a:lstStyle/>
                     <a:p>
                       <a:r>
-                        <a:rPr sz="1200">
+                        <a:rPr sz="1600">
                           <a:solidFill>
                             <a:srgbClr val="1C1717"/>
                           </a:solidFill>
@@ -6193,7 +6636,7 @@
                     <a:lstStyle/>
                     <a:p>
                       <a:r>
-                        <a:rPr sz="1200">
+                        <a:rPr sz="1600">
                           <a:solidFill>
                             <a:srgbClr val="1C1717"/>
                           </a:solidFill>
@@ -6210,7 +6653,7 @@
                     <a:lstStyle/>
                     <a:p>
                       <a:r>
-                        <a:rPr sz="1200">
+                        <a:rPr sz="1600">
                           <a:solidFill>
                             <a:srgbClr val="1C1717"/>
                           </a:solidFill>
@@ -6227,7 +6670,7 @@
                     <a:lstStyle/>
                     <a:p>
                       <a:r>
-                        <a:rPr sz="1200">
+                        <a:rPr sz="1600">
                           <a:solidFill>
                             <a:srgbClr val="1C1717"/>
                           </a:solidFill>
@@ -6244,7 +6687,7 @@
                     <a:lstStyle/>
                     <a:p>
                       <a:r>
-                        <a:rPr sz="1200">
+                        <a:rPr sz="1600" dirty="0">
                           <a:solidFill>
                             <a:srgbClr val="1C1717"/>
                           </a:solidFill>
@@ -6255,6 +6698,11 @@
                   </a:txBody>
                   <a:tcPr/>
                 </a:tc>
+                <a:extLst>
+                  <a:ext uri="{0D108BD9-81ED-4DB2-BD59-A6C34878D82A}">
+                    <a16:rowId xmlns:a16="http://schemas.microsoft.com/office/drawing/2014/main" val="10003"/>
+                  </a:ext>
+                </a:extLst>
               </a:tr>
             </a:tbl>
           </a:graphicData>
@@ -6277,7 +6725,7 @@
           <a:noFill/>
         </p:spPr>
         <p:txBody>
-          <a:bodyPr wrap="square" lIns="0" rIns="0" tIns="0" bIns="0">
+          <a:bodyPr wrap="square" lIns="0" tIns="0" rIns="0" bIns="0">
             <a:spAutoFit/>
           </a:bodyPr>
           <a:lstStyle/>
@@ -6290,74 +6738,6 @@
                 </a:solidFill>
               </a:rPr>
               <a:t>Transformer intent classifier:  train accuracy 1.000 · final CE loss 0.0003 over 40 epochs</a:t>
-            </a:r>
-          </a:p>
-        </p:txBody>
-      </p:sp>
-      <p:sp>
-        <p:nvSpPr>
-          <p:cNvPr id="8" name="TextBox 7"/>
-          <p:cNvSpPr txBox="1"/>
-          <p:nvPr/>
-        </p:nvSpPr>
-        <p:spPr>
-          <a:xfrm>
-            <a:off x="457200" y="4709160"/>
-            <a:ext cx="10972800" cy="457200"/>
-          </a:xfrm>
-          <a:prstGeom prst="rect">
-            <a:avLst/>
-          </a:prstGeom>
-          <a:noFill/>
-        </p:spPr>
-        <p:txBody>
-          <a:bodyPr wrap="square" lIns="0" rIns="0" tIns="0" bIns="0">
-            <a:spAutoFit/>
-          </a:bodyPr>
-          <a:lstStyle/>
-          <a:p>
-            <a:pPr algn="l"/>
-            <a:r>
-              <a:rPr sz="1400" b="0">
-                <a:solidFill>
-                  <a:srgbClr val="1C1717"/>
-                </a:solidFill>
-              </a:rPr>
-              <a:t>Integration suite (api/final_test.py):  62 / 62 PASS  — covers chat, faq, admin, stats, nlp, frontend routes.</a:t>
-            </a:r>
-          </a:p>
-        </p:txBody>
-      </p:sp>
-      <p:sp>
-        <p:nvSpPr>
-          <p:cNvPr id="9" name="TextBox 8"/>
-          <p:cNvSpPr txBox="1"/>
-          <p:nvPr/>
-        </p:nvSpPr>
-        <p:spPr>
-          <a:xfrm>
-            <a:off x="457200" y="5349240"/>
-            <a:ext cx="10972800" cy="457200"/>
-          </a:xfrm>
-          <a:prstGeom prst="rect">
-            <a:avLst/>
-          </a:prstGeom>
-          <a:noFill/>
-        </p:spPr>
-        <p:txBody>
-          <a:bodyPr wrap="square" lIns="0" rIns="0" tIns="0" bIns="0">
-            <a:spAutoFit/>
-          </a:bodyPr>
-          <a:lstStyle/>
-          <a:p>
-            <a:pPr algn="l"/>
-            <a:r>
-              <a:rPr sz="1400" b="0">
-                <a:solidFill>
-                  <a:srgbClr val="1C1717"/>
-                </a:solidFill>
-              </a:rPr>
-              <a:t>Live FAQ counters verified end-to-end:  counts start at 0, increment per match, persist in Mongo.</a:t>
             </a:r>
           </a:p>
         </p:txBody>
@@ -6371,7 +6751,7 @@
 </file>
 
 <file path=ppt/slides/slide7.xml><?xml version="1.0" encoding="utf-8"?>
-<p:sld xmlns:a="http://schemas.openxmlformats.org/drawingml/2006/main" xmlns:p="http://schemas.openxmlformats.org/presentationml/2006/main" xmlns:r="http://schemas.openxmlformats.org/officeDocument/2006/relationships">
+<p:sld xmlns:a="http://schemas.openxmlformats.org/drawingml/2006/main" xmlns:r="http://schemas.openxmlformats.org/officeDocument/2006/relationships" xmlns:p="http://schemas.openxmlformats.org/presentationml/2006/main">
   <p:cSld>
     <p:spTree>
       <p:nvGrpSpPr>
@@ -6379,7 +6759,14 @@
         <p:cNvGrpSpPr/>
         <p:nvPr/>
       </p:nvGrpSpPr>
-      <p:grpSpPr/>
+      <p:grpSpPr>
+        <a:xfrm>
+          <a:off x="0" y="0"/>
+          <a:ext cx="0" cy="0"/>
+          <a:chOff x="0" y="0"/>
+          <a:chExt cx="0" cy="0"/>
+        </a:xfrm>
+      </p:grpSpPr>
       <p:sp>
         <p:nvSpPr>
           <p:cNvPr id="2" name="Rectangle 1"/>
@@ -6420,6 +6807,7 @@
           <a:lstStyle/>
           <a:p>
             <a:pPr algn="ctr"/>
+            <a:endParaRPr/>
           </a:p>
         </p:txBody>
       </p:sp>
@@ -6440,7 +6828,7 @@
           <a:noFill/>
         </p:spPr>
         <p:txBody>
-          <a:bodyPr wrap="square" lIns="0" rIns="0" tIns="0" bIns="0">
+          <a:bodyPr wrap="square" lIns="0" tIns="0" rIns="0" bIns="0">
             <a:spAutoFit/>
           </a:bodyPr>
           <a:lstStyle/>
@@ -6466,7 +6854,7 @@
         <p:spPr>
           <a:xfrm>
             <a:off x="548640" y="1280160"/>
-            <a:ext cx="11338560" cy="5212080"/>
+            <a:ext cx="11338560" cy="2862322"/>
           </a:xfrm>
           <a:prstGeom prst="rect">
             <a:avLst/>
@@ -6481,7 +6869,7 @@
           <a:p>
             <a:pPr algn="l"/>
             <a:r>
-              <a:rPr sz="1500" b="1">
+              <a:rPr sz="2000" b="1" dirty="0">
                 <a:solidFill>
                   <a:srgbClr val="1C1717"/>
                 </a:solidFill>
@@ -6489,18 +6877,18 @@
               <a:t>•  No LLM dependency</a:t>
             </a:r>
             <a:r>
-              <a:rPr sz="1400">
-                <a:solidFill>
-                  <a:srgbClr val="78716C"/>
-                </a:solidFill>
-              </a:rPr>
-              <a:t>  — reproducible, auditable, no API costs, no hallucinations.</a:t>
-            </a:r>
-          </a:p>
-          <a:p>
-            <a:pPr algn="l"/>
-            <a:r>
-              <a:rPr sz="1500" b="1">
+              <a:rPr sz="2000" dirty="0">
+                <a:solidFill>
+                  <a:srgbClr val="78716C"/>
+                </a:solidFill>
+              </a:rPr>
+              <a:t> reproducible, auditable, no API costs, no hallucinations.</a:t>
+            </a:r>
+          </a:p>
+          <a:p>
+            <a:pPr algn="l"/>
+            <a:r>
+              <a:rPr sz="2000" b="1" dirty="0">
                 <a:solidFill>
                   <a:srgbClr val="1C1717"/>
                 </a:solidFill>
@@ -6508,18 +6896,34 @@
               <a:t>•  Every algorithm is ours</a:t>
             </a:r>
             <a:r>
-              <a:rPr sz="1400">
-                <a:solidFill>
-                  <a:srgbClr val="78716C"/>
-                </a:solidFill>
-              </a:rPr>
-              <a:t>  — drop-in replacements for sklearn, rank_bm25 and sentence-transformers.</a:t>
-            </a:r>
-          </a:p>
-          <a:p>
-            <a:pPr algn="l"/>
-            <a:r>
-              <a:rPr sz="1500" b="1">
+              <a:rPr sz="2000" dirty="0">
+                <a:solidFill>
+                  <a:srgbClr val="78716C"/>
+                </a:solidFill>
+              </a:rPr>
+              <a:t> drop-in replacements for </a:t>
+            </a:r>
+            <a:r>
+              <a:rPr sz="2000" dirty="0" err="1">
+                <a:solidFill>
+                  <a:srgbClr val="78716C"/>
+                </a:solidFill>
+              </a:rPr>
+              <a:t>sklearn</a:t>
+            </a:r>
+            <a:r>
+              <a:rPr sz="2000" dirty="0">
+                <a:solidFill>
+                  <a:srgbClr val="78716C"/>
+                </a:solidFill>
+              </a:rPr>
+              <a:t>, rank_bm25 and sentence-transformers.</a:t>
+            </a:r>
+          </a:p>
+          <a:p>
+            <a:pPr algn="l"/>
+            <a:r>
+              <a:rPr sz="2000" b="1" dirty="0">
                 <a:solidFill>
                   <a:srgbClr val="1C1717"/>
                 </a:solidFill>
@@ -6527,18 +6931,34 @@
               <a:t>•  Hybrid retrieval works</a:t>
             </a:r>
             <a:r>
-              <a:rPr sz="1400">
-                <a:solidFill>
-                  <a:srgbClr val="78716C"/>
-                </a:solidFill>
-              </a:rPr>
-              <a:t>  — P@1 0.93 across 116 held-out queries at 22 ms p50.</a:t>
-            </a:r>
-          </a:p>
-          <a:p>
-            <a:pPr algn="l"/>
-            <a:r>
-              <a:rPr sz="1500" b="1">
+              <a:rPr sz="2000" dirty="0">
+                <a:solidFill>
+                  <a:srgbClr val="78716C"/>
+                </a:solidFill>
+              </a:rPr>
+              <a:t> P@1 0.93 across 116 held-out queries at 22 </a:t>
+            </a:r>
+            <a:r>
+              <a:rPr sz="2000" dirty="0" err="1">
+                <a:solidFill>
+                  <a:srgbClr val="78716C"/>
+                </a:solidFill>
+              </a:rPr>
+              <a:t>ms</a:t>
+            </a:r>
+            <a:r>
+              <a:rPr sz="2000" dirty="0">
+                <a:solidFill>
+                  <a:srgbClr val="78716C"/>
+                </a:solidFill>
+              </a:rPr>
+              <a:t> p50.</a:t>
+            </a:r>
+          </a:p>
+          <a:p>
+            <a:pPr algn="l"/>
+            <a:r>
+              <a:rPr sz="2000" b="1" dirty="0">
                 <a:solidFill>
                   <a:srgbClr val="1C1717"/>
                 </a:solidFill>
@@ -6546,18 +6966,18 @@
               <a:t>•  Multi-turn dialog</a:t>
             </a:r>
             <a:r>
-              <a:rPr sz="1400">
-                <a:solidFill>
-                  <a:srgbClr val="78716C"/>
-                </a:solidFill>
-              </a:rPr>
-              <a:t>  — coreference, slot filling, topic tracking, triage banner, empathic openers, disambiguation.</a:t>
-            </a:r>
-          </a:p>
-          <a:p>
-            <a:pPr algn="l"/>
-            <a:r>
-              <a:rPr sz="1500" b="1">
+              <a:rPr sz="2000" dirty="0">
+                <a:solidFill>
+                  <a:srgbClr val="78716C"/>
+                </a:solidFill>
+              </a:rPr>
+              <a:t> coreference, slot filling, topic tracking, triage banner, empathic openers, disambiguation.</a:t>
+            </a:r>
+          </a:p>
+          <a:p>
+            <a:pPr algn="l"/>
+            <a:r>
+              <a:rPr sz="2000" b="1" dirty="0">
                 <a:solidFill>
                   <a:srgbClr val="1C1717"/>
                 </a:solidFill>
@@ -6565,18 +6985,18 @@
               <a:t>•  Pakistan-friendly</a:t>
             </a:r>
             <a:r>
-              <a:rPr sz="1400">
-                <a:solidFill>
-                  <a:srgbClr val="78716C"/>
-                </a:solidFill>
-              </a:rPr>
-              <a:t>  — Roman-Urdu phonetic mapping, 1122 emergency wording, PHI scrub at ingest.</a:t>
-            </a:r>
-          </a:p>
-          <a:p>
-            <a:pPr algn="l"/>
-            <a:r>
-              <a:rPr sz="1500" b="1">
+              <a:rPr sz="2000" dirty="0">
+                <a:solidFill>
+                  <a:srgbClr val="78716C"/>
+                </a:solidFill>
+              </a:rPr>
+              <a:t> Roman-Urdu phonetic mapping, 1122 emergency wording, PHI scrub at ingest.</a:t>
+            </a:r>
+          </a:p>
+          <a:p>
+            <a:pPr algn="l"/>
+            <a:r>
+              <a:rPr sz="2000" b="1" dirty="0">
                 <a:solidFill>
                   <a:srgbClr val="1C1717"/>
                 </a:solidFill>
@@ -6584,18 +7004,18 @@
               <a:t>•  One-command deploy</a:t>
             </a:r>
             <a:r>
-              <a:rPr sz="1400">
-                <a:solidFill>
-                  <a:srgbClr val="78716C"/>
-                </a:solidFill>
-              </a:rPr>
-              <a:t>  — docker compose up auto-seeds Mongo, builds API + Next.js.</a:t>
-            </a:r>
-          </a:p>
-          <a:p>
-            <a:pPr algn="l"/>
-            <a:r>
-              <a:rPr sz="1500" b="1">
+              <a:rPr sz="2000" dirty="0">
+                <a:solidFill>
+                  <a:srgbClr val="78716C"/>
+                </a:solidFill>
+              </a:rPr>
+              <a:t> docker compose up auto-seeds Mongo, builds API + Next.js.</a:t>
+            </a:r>
+          </a:p>
+          <a:p>
+            <a:pPr algn="l"/>
+            <a:r>
+              <a:rPr sz="2000" b="1" dirty="0">
                 <a:solidFill>
                   <a:srgbClr val="1C1717"/>
                 </a:solidFill>
@@ -6603,18 +7023,18 @@
               <a:t>•  Real-time analytics</a:t>
             </a:r>
             <a:r>
-              <a:rPr sz="1400">
-                <a:solidFill>
-                  <a:srgbClr val="78716C"/>
-                </a:solidFill>
-              </a:rPr>
-              <a:t>  — FAQ count increments live, persisted in Mongo, surfaced in /admin.</a:t>
-            </a:r>
-          </a:p>
-          <a:p>
-            <a:pPr algn="l"/>
-            <a:r>
-              <a:rPr sz="1500" b="1">
+              <a:rPr sz="2000" dirty="0">
+                <a:solidFill>
+                  <a:srgbClr val="78716C"/>
+                </a:solidFill>
+              </a:rPr>
+              <a:t> FAQ count increments live, persisted in Mongo, surfaced in /admin.</a:t>
+            </a:r>
+          </a:p>
+          <a:p>
+            <a:pPr algn="l"/>
+            <a:r>
+              <a:rPr sz="2000" b="1" dirty="0">
                 <a:solidFill>
                   <a:srgbClr val="1C1717"/>
                 </a:solidFill>
@@ -6622,12 +7042,28 @@
               <a:t>•  Trainable transformer</a:t>
             </a:r>
             <a:r>
-              <a:rPr sz="1400">
-                <a:solidFill>
-                  <a:srgbClr val="78716C"/>
-                </a:solidFill>
-              </a:rPr>
-              <a:t>  — GPU-ready PyTorch model trained from scratch on our own corpus.</a:t>
+              <a:rPr sz="2000" dirty="0">
+                <a:solidFill>
+                  <a:srgbClr val="78716C"/>
+                </a:solidFill>
+              </a:rPr>
+              <a:t> GPU-ready </a:t>
+            </a:r>
+            <a:r>
+              <a:rPr sz="2000" dirty="0" err="1">
+                <a:solidFill>
+                  <a:srgbClr val="78716C"/>
+                </a:solidFill>
+              </a:rPr>
+              <a:t>PyTorch</a:t>
+            </a:r>
+            <a:r>
+              <a:rPr sz="2000" dirty="0">
+                <a:solidFill>
+                  <a:srgbClr val="78716C"/>
+                </a:solidFill>
+              </a:rPr>
+              <a:t> model trained from scratch on our own corpus.</a:t>
             </a:r>
           </a:p>
         </p:txBody>
@@ -6641,7 +7077,7 @@
 </file>
 
 <file path=ppt/slides/slide8.xml><?xml version="1.0" encoding="utf-8"?>
-<p:sld xmlns:a="http://schemas.openxmlformats.org/drawingml/2006/main" xmlns:p="http://schemas.openxmlformats.org/presentationml/2006/main" xmlns:r="http://schemas.openxmlformats.org/officeDocument/2006/relationships">
+<p:sld xmlns:a="http://schemas.openxmlformats.org/drawingml/2006/main" xmlns:r="http://schemas.openxmlformats.org/officeDocument/2006/relationships" xmlns:p="http://schemas.openxmlformats.org/presentationml/2006/main">
   <p:cSld>
     <p:spTree>
       <p:nvGrpSpPr>
@@ -6649,7 +7085,14 @@
         <p:cNvGrpSpPr/>
         <p:nvPr/>
       </p:nvGrpSpPr>
-      <p:grpSpPr/>
+      <p:grpSpPr>
+        <a:xfrm>
+          <a:off x="0" y="0"/>
+          <a:ext cx="0" cy="0"/>
+          <a:chOff x="0" y="0"/>
+          <a:chExt cx="0" cy="0"/>
+        </a:xfrm>
+      </p:grpSpPr>
       <p:sp>
         <p:nvSpPr>
           <p:cNvPr id="2" name="Rectangle 1"/>
@@ -6690,6 +7133,7 @@
           <a:lstStyle/>
           <a:p>
             <a:pPr algn="ctr"/>
+            <a:endParaRPr/>
           </a:p>
         </p:txBody>
       </p:sp>
@@ -6710,7 +7154,7 @@
           <a:noFill/>
         </p:spPr>
         <p:txBody>
-          <a:bodyPr wrap="square" lIns="0" rIns="0" tIns="0" bIns="0">
+          <a:bodyPr wrap="square" lIns="0" tIns="0" rIns="0" bIns="0">
             <a:spAutoFit/>
           </a:bodyPr>
           <a:lstStyle/>
@@ -6736,7 +7180,7 @@
         <p:spPr>
           <a:xfrm>
             <a:off x="548640" y="1280160"/>
-            <a:ext cx="11338560" cy="5212080"/>
+            <a:ext cx="11338560" cy="3785652"/>
           </a:xfrm>
           <a:prstGeom prst="rect">
             <a:avLst/>
@@ -6751,7 +7195,7 @@
           <a:p>
             <a:pPr algn="l"/>
             <a:r>
-              <a:rPr sz="1500" b="1">
+              <a:rPr sz="2000" b="1" dirty="0">
                 <a:solidFill>
                   <a:srgbClr val="1C1717"/>
                 </a:solidFill>
@@ -6759,18 +7203,18 @@
               <a:t>•  Small corpus</a:t>
             </a:r>
             <a:r>
-              <a:rPr sz="1400">
-                <a:solidFill>
-                  <a:srgbClr val="78716C"/>
-                </a:solidFill>
-              </a:rPr>
-              <a:t>  — 169 FAQs cover the most common questions but out-of-distribution queries fall through to best-guess.</a:t>
-            </a:r>
-          </a:p>
-          <a:p>
-            <a:pPr algn="l"/>
-            <a:r>
-              <a:rPr sz="1500" b="1">
+              <a:rPr sz="2000" dirty="0">
+                <a:solidFill>
+                  <a:srgbClr val="78716C"/>
+                </a:solidFill>
+              </a:rPr>
+              <a:t> 169 FAQs cover the most common questions but out-of-distribution queries fall through to best-guess.</a:t>
+            </a:r>
+          </a:p>
+          <a:p>
+            <a:pPr algn="l"/>
+            <a:r>
+              <a:rPr sz="2000" b="1" dirty="0">
                 <a:solidFill>
                   <a:srgbClr val="1C1717"/>
                 </a:solidFill>
@@ -6778,18 +7222,18 @@
               <a:t>•  Eval is approximate</a:t>
             </a:r>
             <a:r>
-              <a:rPr sz="1400">
-                <a:solidFill>
-                  <a:srgbClr val="78716C"/>
-                </a:solidFill>
-              </a:rPr>
-              <a:t>  — expected-keyword match in the answer can mark a correct FAQ as wrong when phrasing diverges.</a:t>
-            </a:r>
-          </a:p>
-          <a:p>
-            <a:pPr algn="l"/>
-            <a:r>
-              <a:rPr sz="1500" b="1">
+              <a:rPr sz="2000" dirty="0">
+                <a:solidFill>
+                  <a:srgbClr val="78716C"/>
+                </a:solidFill>
+              </a:rPr>
+              <a:t> expected-keyword match in the answer can mark a correct FAQ as wrong when phrasing diverges.</a:t>
+            </a:r>
+          </a:p>
+          <a:p>
+            <a:pPr algn="l"/>
+            <a:r>
+              <a:rPr sz="2000" b="1" dirty="0">
                 <a:solidFill>
                   <a:srgbClr val="1C1717"/>
                 </a:solidFill>
@@ -6797,18 +7241,18 @@
               <a:t>•  Transformer overfits</a:t>
             </a:r>
             <a:r>
-              <a:rPr sz="1400">
-                <a:solidFill>
-                  <a:srgbClr val="78716C"/>
-                </a:solidFill>
-              </a:rPr>
-              <a:t>  — trained on 1206 augmented examples; held-out test of the classifier itself is still small.</a:t>
-            </a:r>
-          </a:p>
-          <a:p>
-            <a:pPr algn="l"/>
-            <a:r>
-              <a:rPr sz="1500" b="1">
+              <a:rPr sz="2000" dirty="0">
+                <a:solidFill>
+                  <a:srgbClr val="78716C"/>
+                </a:solidFill>
+              </a:rPr>
+              <a:t> trained on 1206 augmented examples; held-out test of the classifier itself is still small.</a:t>
+            </a:r>
+          </a:p>
+          <a:p>
+            <a:pPr algn="l"/>
+            <a:r>
+              <a:rPr sz="2000" b="1" dirty="0">
                 <a:solidFill>
                   <a:srgbClr val="1C1717"/>
                 </a:solidFill>
@@ -6816,18 +7260,18 @@
               <a:t>•  NER is dictionary-first</a:t>
             </a:r>
             <a:r>
-              <a:rPr sz="1400">
-                <a:solidFill>
-                  <a:srgbClr val="78716C"/>
-                </a:solidFill>
-              </a:rPr>
-              <a:t>  — the CRF + structured perceptron variants improve coverage but training data is only 32 hand-annotated sentences.</a:t>
-            </a:r>
-          </a:p>
-          <a:p>
-            <a:pPr algn="l"/>
-            <a:r>
-              <a:rPr sz="1500" b="1">
+              <a:rPr sz="2000" dirty="0">
+                <a:solidFill>
+                  <a:srgbClr val="78716C"/>
+                </a:solidFill>
+              </a:rPr>
+              <a:t> the CRF + structured perceptron variants improve coverage but training data is only 32 hand-annotated sentences.</a:t>
+            </a:r>
+          </a:p>
+          <a:p>
+            <a:pPr algn="l"/>
+            <a:r>
+              <a:rPr sz="2000" b="1" dirty="0">
                 <a:solidFill>
                   <a:srgbClr val="1C1717"/>
                 </a:solidFill>
@@ -6835,18 +7279,18 @@
               <a:t>•  Roman-Urdu is heuristic</a:t>
             </a:r>
             <a:r>
-              <a:rPr sz="1400">
-                <a:solidFill>
-                  <a:srgbClr val="78716C"/>
-                </a:solidFill>
-              </a:rPr>
-              <a:t>  — ~80-word dictionary catches common cases; full transliteration would need a real parallel corpus.</a:t>
-            </a:r>
-          </a:p>
-          <a:p>
-            <a:pPr algn="l"/>
-            <a:r>
-              <a:rPr sz="1500" b="1">
+              <a:rPr sz="2000" dirty="0">
+                <a:solidFill>
+                  <a:srgbClr val="78716C"/>
+                </a:solidFill>
+              </a:rPr>
+              <a:t> ~80-word dictionary catches common cases; full transliteration would need a real parallel corpus.</a:t>
+            </a:r>
+          </a:p>
+          <a:p>
+            <a:pPr algn="l"/>
+            <a:r>
+              <a:rPr sz="2000" b="1" dirty="0">
                 <a:solidFill>
                   <a:srgbClr val="1C1717"/>
                 </a:solidFill>
@@ -6854,18 +7298,18 @@
               <a:t>•  Voice input is browser-native</a:t>
             </a:r>
             <a:r>
-              <a:rPr sz="1400">
-                <a:solidFill>
-                  <a:srgbClr val="78716C"/>
-                </a:solidFill>
-              </a:rPr>
-              <a:t>  — Web Speech API works in Chrome / Edge only.</a:t>
-            </a:r>
-          </a:p>
-          <a:p>
-            <a:pPr algn="l"/>
-            <a:r>
-              <a:rPr sz="1500" b="1">
+              <a:rPr sz="2000" dirty="0">
+                <a:solidFill>
+                  <a:srgbClr val="78716C"/>
+                </a:solidFill>
+              </a:rPr>
+              <a:t> Web Speech API works in Chrome / Edge only.</a:t>
+            </a:r>
+          </a:p>
+          <a:p>
+            <a:pPr algn="l"/>
+            <a:r>
+              <a:rPr sz="2000" b="1" dirty="0">
                 <a:solidFill>
                   <a:srgbClr val="1C1717"/>
                 </a:solidFill>
@@ -6873,12 +7317,28 @@
               <a:t>•  Counts are at-most-once per turn</a:t>
             </a:r>
             <a:r>
-              <a:rPr sz="1400">
-                <a:solidFill>
-                  <a:srgbClr val="78716C"/>
-                </a:solidFill>
-              </a:rPr>
-              <a:t>  — no fraud / abuse heuristic — every successful match increments.</a:t>
+              <a:rPr sz="2000" dirty="0">
+                <a:solidFill>
+                  <a:srgbClr val="78716C"/>
+                </a:solidFill>
+              </a:rPr>
+              <a:t> no fraud / abuse heuristic</a:t>
+            </a:r>
+            <a:r>
+              <a:rPr lang="en-US" sz="2000" dirty="0">
+                <a:solidFill>
+                  <a:srgbClr val="78716C"/>
+                </a:solidFill>
+              </a:rPr>
+              <a:t>,</a:t>
+            </a:r>
+            <a:r>
+              <a:rPr sz="2000" dirty="0">
+                <a:solidFill>
+                  <a:srgbClr val="78716C"/>
+                </a:solidFill>
+              </a:rPr>
+              <a:t> every successful match increments.</a:t>
             </a:r>
           </a:p>
         </p:txBody>
@@ -6892,7 +7352,7 @@
 </file>
 
 <file path=ppt/slides/slide9.xml><?xml version="1.0" encoding="utf-8"?>
-<p:sld xmlns:a="http://schemas.openxmlformats.org/drawingml/2006/main" xmlns:p="http://schemas.openxmlformats.org/presentationml/2006/main" xmlns:r="http://schemas.openxmlformats.org/officeDocument/2006/relationships">
+<p:sld xmlns:a="http://schemas.openxmlformats.org/drawingml/2006/main" xmlns:r="http://schemas.openxmlformats.org/officeDocument/2006/relationships" xmlns:p="http://schemas.openxmlformats.org/presentationml/2006/main">
   <p:cSld>
     <p:spTree>
       <p:nvGrpSpPr>
@@ -6900,7 +7360,14 @@
         <p:cNvGrpSpPr/>
         <p:nvPr/>
       </p:nvGrpSpPr>
-      <p:grpSpPr/>
+      <p:grpSpPr>
+        <a:xfrm>
+          <a:off x="0" y="0"/>
+          <a:ext cx="0" cy="0"/>
+          <a:chOff x="0" y="0"/>
+          <a:chExt cx="0" cy="0"/>
+        </a:xfrm>
+      </p:grpSpPr>
       <p:sp>
         <p:nvSpPr>
           <p:cNvPr id="2" name="Rectangle 1"/>
@@ -6941,6 +7408,7 @@
           <a:lstStyle/>
           <a:p>
             <a:pPr algn="ctr"/>
+            <a:endParaRPr/>
           </a:p>
         </p:txBody>
       </p:sp>
@@ -6961,7 +7429,7 @@
           <a:noFill/>
         </p:spPr>
         <p:txBody>
-          <a:bodyPr wrap="square" lIns="0" rIns="0" tIns="0" bIns="0">
+          <a:bodyPr wrap="square" lIns="0" tIns="0" rIns="0" bIns="0">
             <a:spAutoFit/>
           </a:bodyPr>
           <a:lstStyle/>
@@ -6987,7 +7455,7 @@
         <p:spPr>
           <a:xfrm>
             <a:off x="548640" y="1280160"/>
-            <a:ext cx="11338560" cy="5212080"/>
+            <a:ext cx="11338560" cy="2862322"/>
           </a:xfrm>
           <a:prstGeom prst="rect">
             <a:avLst/>
@@ -7002,7 +7470,7 @@
           <a:p>
             <a:pPr algn="l"/>
             <a:r>
-              <a:rPr sz="1500" b="1">
+              <a:rPr sz="2000" b="1" dirty="0">
                 <a:solidFill>
                   <a:srgbClr val="1C1717"/>
                 </a:solidFill>
@@ -7010,18 +7478,18 @@
               <a:t>•  Grow the corpus</a:t>
             </a:r>
             <a:r>
-              <a:rPr sz="1400">
-                <a:solidFill>
-                  <a:srgbClr val="78716C"/>
-                </a:solidFill>
-              </a:rPr>
-              <a:t>  — 500+ FAQs across more specialties with clinician validation.</a:t>
-            </a:r>
-          </a:p>
-          <a:p>
-            <a:pPr algn="l"/>
-            <a:r>
-              <a:rPr sz="1500" b="1">
+              <a:rPr sz="2000" dirty="0">
+                <a:solidFill>
+                  <a:srgbClr val="78716C"/>
+                </a:solidFill>
+              </a:rPr>
+              <a:t> 500+ FAQs across more specialties with clinician validation.</a:t>
+            </a:r>
+          </a:p>
+          <a:p>
+            <a:pPr algn="l"/>
+            <a:r>
+              <a:rPr sz="2000" b="1" dirty="0">
                 <a:solidFill>
                   <a:srgbClr val="1C1717"/>
                 </a:solidFill>
@@ -7029,18 +7497,18 @@
               <a:t>•  Bi-encoder upgrade</a:t>
             </a:r>
             <a:r>
-              <a:rPr sz="1400">
-                <a:solidFill>
-                  <a:srgbClr val="78716C"/>
-                </a:solidFill>
-              </a:rPr>
-              <a:t>  — train the dual encoder on real clinician-rated query–FAQ pairs, not just keyword-derived positives.</a:t>
-            </a:r>
-          </a:p>
-          <a:p>
-            <a:pPr algn="l"/>
-            <a:r>
-              <a:rPr sz="1500" b="1">
+              <a:rPr sz="2000" dirty="0">
+                <a:solidFill>
+                  <a:srgbClr val="78716C"/>
+                </a:solidFill>
+              </a:rPr>
+              <a:t> train the dual encoder on real clinician-rated query–FAQ pairs, not just keyword-derived positives.</a:t>
+            </a:r>
+          </a:p>
+          <a:p>
+            <a:pPr algn="l"/>
+            <a:r>
+              <a:rPr sz="2000" b="1" dirty="0">
                 <a:solidFill>
                   <a:srgbClr val="1C1717"/>
                 </a:solidFill>
@@ -7048,18 +7516,18 @@
               <a:t>•  Active learning loop</a:t>
             </a:r>
             <a:r>
-              <a:rPr sz="1400">
-                <a:solidFill>
-                  <a:srgbClr val="78716C"/>
-                </a:solidFill>
-              </a:rPr>
-              <a:t>  — low-confidence turns get queued for clinician review; approved Q/A pairs feed back into the corpus.</a:t>
-            </a:r>
-          </a:p>
-          <a:p>
-            <a:pPr algn="l"/>
-            <a:r>
-              <a:rPr sz="1500" b="1">
+              <a:rPr sz="2000" dirty="0">
+                <a:solidFill>
+                  <a:srgbClr val="78716C"/>
+                </a:solidFill>
+              </a:rPr>
+              <a:t> low-confidence turns get queued for clinician review; approved Q/A pairs feed back into the corpus.</a:t>
+            </a:r>
+          </a:p>
+          <a:p>
+            <a:pPr algn="l"/>
+            <a:r>
+              <a:rPr sz="2000" b="1" dirty="0">
                 <a:solidFill>
                   <a:srgbClr val="1C1717"/>
                 </a:solidFill>
@@ -7067,18 +7535,18 @@
               <a:t>•  Real Urdu</a:t>
             </a:r>
             <a:r>
-              <a:rPr sz="1400">
-                <a:solidFill>
-                  <a:srgbClr val="78716C"/>
-                </a:solidFill>
-              </a:rPr>
-              <a:t>  — deeper transliteration trained on a parallel corpus; voice input in Urdu.</a:t>
-            </a:r>
-          </a:p>
-          <a:p>
-            <a:pPr algn="l"/>
-            <a:r>
-              <a:rPr sz="1500" b="1">
+              <a:rPr sz="2000" dirty="0">
+                <a:solidFill>
+                  <a:srgbClr val="78716C"/>
+                </a:solidFill>
+              </a:rPr>
+              <a:t> deeper transliteration trained on a parallel corpus; voice input in Urdu.</a:t>
+            </a:r>
+          </a:p>
+          <a:p>
+            <a:pPr algn="l"/>
+            <a:r>
+              <a:rPr sz="2000" b="1" dirty="0">
                 <a:solidFill>
                   <a:srgbClr val="1C1717"/>
                 </a:solidFill>
@@ -7086,18 +7554,18 @@
               <a:t>•  Clinical eval</a:t>
             </a:r>
             <a:r>
-              <a:rPr sz="1400">
-                <a:solidFill>
-                  <a:srgbClr val="78716C"/>
-                </a:solidFill>
-              </a:rPr>
-              <a:t>  — NDCG with clinician-rated relevance instead of a keyword heuristic.</a:t>
-            </a:r>
-          </a:p>
-          <a:p>
-            <a:pPr algn="l"/>
-            <a:r>
-              <a:rPr sz="1500" b="1">
+              <a:rPr sz="2000" dirty="0">
+                <a:solidFill>
+                  <a:srgbClr val="78716C"/>
+                </a:solidFill>
+              </a:rPr>
+              <a:t> NDCG with clinician-rated relevance instead of a keyword heuristic.</a:t>
+            </a:r>
+          </a:p>
+          <a:p>
+            <a:pPr algn="l"/>
+            <a:r>
+              <a:rPr sz="2000" b="1" dirty="0">
                 <a:solidFill>
                   <a:srgbClr val="1C1717"/>
                 </a:solidFill>
@@ -7105,18 +7573,18 @@
               <a:t>•  GPU service</a:t>
             </a:r>
             <a:r>
-              <a:rPr sz="1400">
-                <a:solidFill>
-                  <a:srgbClr val="78716C"/>
-                </a:solidFill>
-              </a:rPr>
-              <a:t>  — dedicated container with CUDA wheel for heavier neural extensions.</a:t>
-            </a:r>
-          </a:p>
-          <a:p>
-            <a:pPr algn="l"/>
-            <a:r>
-              <a:rPr sz="1500" b="1">
+              <a:rPr sz="2000" dirty="0">
+                <a:solidFill>
+                  <a:srgbClr val="78716C"/>
+                </a:solidFill>
+              </a:rPr>
+              <a:t> dedicated container with CUDA wheel for heavier neural extensions.</a:t>
+            </a:r>
+          </a:p>
+          <a:p>
+            <a:pPr algn="l"/>
+            <a:r>
+              <a:rPr sz="2000" b="1" dirty="0">
                 <a:solidFill>
                   <a:srgbClr val="1C1717"/>
                 </a:solidFill>
@@ -7124,12 +7592,12 @@
               <a:t>•  Audit + governance</a:t>
             </a:r>
             <a:r>
-              <a:rPr sz="1400">
-                <a:solidFill>
-                  <a:srgbClr val="78716C"/>
-                </a:solidFill>
-              </a:rPr>
-              <a:t>  — version-controlled FAQ approval workflow, rollback, change-log.</a:t>
+              <a:rPr sz="2000" dirty="0">
+                <a:solidFill>
+                  <a:srgbClr val="78716C"/>
+                </a:solidFill>
+              </a:rPr>
+              <a:t> version-controlled FAQ approval workflow, rollback, change-log.</a:t>
             </a:r>
           </a:p>
         </p:txBody>

--- a/MedFAQ_Slides.pptx
+++ b/MedFAQ_Slides.pptx
@@ -5,18 +5,19 @@
     <p:sldMasterId id="2147483648" r:id="rId1"/>
   </p:sldMasterIdLst>
   <p:sldIdLst>
-    <p:sldId id="256" r:id="rId2"/>
-    <p:sldId id="257" r:id="rId3"/>
-    <p:sldId id="258" r:id="rId4"/>
-    <p:sldId id="259" r:id="rId5"/>
-    <p:sldId id="260" r:id="rId6"/>
-    <p:sldId id="261" r:id="rId7"/>
-    <p:sldId id="262" r:id="rId8"/>
-    <p:sldId id="263" r:id="rId9"/>
-    <p:sldId id="264" r:id="rId10"/>
-    <p:sldId id="265" r:id="rId11"/>
+    <p:sldId id="256" r:id="rId7"/>
+    <p:sldId id="257" r:id="rId8"/>
+    <p:sldId id="258" r:id="rId9"/>
+    <p:sldId id="259" r:id="rId10"/>
+    <p:sldId id="260" r:id="rId11"/>
+    <p:sldId id="261" r:id="rId12"/>
+    <p:sldId id="262" r:id="rId13"/>
+    <p:sldId id="263" r:id="rId14"/>
+    <p:sldId id="264" r:id="rId15"/>
+    <p:sldId id="265" r:id="rId16"/>
+    <p:sldId id="266" r:id="rId17"/>
   </p:sldIdLst>
-  <p:sldSz cx="12188825" cy="6858000"/>
+  <p:sldSz cx="12188952" cy="6858000" type="screen4x3"/>
   <p:notesSz cx="6858000" cy="9144000"/>
   <p:defaultTextStyle>
     <a:defPPr>
@@ -113,22 +114,6 @@
       </a:defRPr>
     </a:lvl9pPr>
   </p:defaultTextStyle>
-  <p:extLst>
-    <p:ext uri="{EFAFB233-063F-42B5-8137-9DF3F51BA10A}">
-      <p15:sldGuideLst xmlns:p15="http://schemas.microsoft.com/office/powerpoint/2012/main">
-        <p15:guide id="1" orient="horz" pos="2160">
-          <p15:clr>
-            <a:srgbClr val="A4A3A4"/>
-          </p15:clr>
-        </p15:guide>
-        <p15:guide id="2" pos="2880">
-          <p15:clr>
-            <a:srgbClr val="A4A3A4"/>
-          </p15:clr>
-        </p15:guide>
-      </p15:sldGuideLst>
-    </p:ext>
-  </p:extLst>
 </p:presentation>
 </file>
 
@@ -170,9 +155,10 @@
           <a:lstStyle/>
           <a:p>
             <a:r>
-              <a:rPr lang="en-US"/>
+              <a:rPr lang="en-US" smtClean="0"/>
               <a:t>Click to edit Master title style</a:t>
             </a:r>
+            <a:endParaRPr lang="en-US"/>
           </a:p>
         </p:txBody>
       </p:sp>
@@ -288,9 +274,10 @@
           </a:lstStyle>
           <a:p>
             <a:r>
-              <a:rPr lang="en-US"/>
+              <a:rPr lang="en-US" smtClean="0"/>
               <a:t>Click to edit Master subtitle style</a:t>
             </a:r>
+            <a:endParaRPr lang="en-US"/>
           </a:p>
         </p:txBody>
       </p:sp>
@@ -311,7 +298,7 @@
           <a:p>
             <a:fld id="{5BCAD085-E8A6-8845-BD4E-CB4CCA059FC4}" type="datetimeFigureOut">
               <a:rPr lang="en-US" smtClean="0"/>
-              <a:t>5/23/2026</a:t>
+              <a:t>1/27/13</a:t>
             </a:fld>
             <a:endParaRPr lang="en-US"/>
           </a:p>
@@ -405,9 +392,10 @@
           <a:lstStyle/>
           <a:p>
             <a:r>
-              <a:rPr lang="en-US"/>
+              <a:rPr lang="en-US" smtClean="0"/>
               <a:t>Click to edit Master title style</a:t>
             </a:r>
+            <a:endParaRPr lang="en-US"/>
           </a:p>
         </p:txBody>
       </p:sp>
@@ -428,37 +416,38 @@
           <a:p>
             <a:pPr lvl="0"/>
             <a:r>
-              <a:rPr lang="en-US"/>
+              <a:rPr lang="en-US" smtClean="0"/>
               <a:t>Click to edit Master text styles</a:t>
             </a:r>
           </a:p>
           <a:p>
             <a:pPr lvl="1"/>
             <a:r>
-              <a:rPr lang="en-US"/>
+              <a:rPr lang="en-US" smtClean="0"/>
               <a:t>Second level</a:t>
             </a:r>
           </a:p>
           <a:p>
             <a:pPr lvl="2"/>
             <a:r>
-              <a:rPr lang="en-US"/>
+              <a:rPr lang="en-US" smtClean="0"/>
               <a:t>Third level</a:t>
             </a:r>
           </a:p>
           <a:p>
             <a:pPr lvl="3"/>
             <a:r>
-              <a:rPr lang="en-US"/>
+              <a:rPr lang="en-US" smtClean="0"/>
               <a:t>Fourth level</a:t>
             </a:r>
           </a:p>
           <a:p>
             <a:pPr lvl="4"/>
             <a:r>
-              <a:rPr lang="en-US"/>
+              <a:rPr lang="en-US" smtClean="0"/>
               <a:t>Fifth level</a:t>
             </a:r>
+            <a:endParaRPr lang="en-US"/>
           </a:p>
         </p:txBody>
       </p:sp>
@@ -479,7 +468,7 @@
           <a:p>
             <a:fld id="{5BCAD085-E8A6-8845-BD4E-CB4CCA059FC4}" type="datetimeFigureOut">
               <a:rPr lang="en-US" smtClean="0"/>
-              <a:t>5/23/2026</a:t>
+              <a:t>1/27/13</a:t>
             </a:fld>
             <a:endParaRPr lang="en-US"/>
           </a:p>
@@ -578,9 +567,10 @@
           <a:lstStyle/>
           <a:p>
             <a:r>
-              <a:rPr lang="en-US"/>
+              <a:rPr lang="en-US" smtClean="0"/>
               <a:t>Click to edit Master title style</a:t>
             </a:r>
+            <a:endParaRPr lang="en-US"/>
           </a:p>
         </p:txBody>
       </p:sp>
@@ -606,37 +596,38 @@
           <a:p>
             <a:pPr lvl="0"/>
             <a:r>
-              <a:rPr lang="en-US"/>
+              <a:rPr lang="en-US" smtClean="0"/>
               <a:t>Click to edit Master text styles</a:t>
             </a:r>
           </a:p>
           <a:p>
             <a:pPr lvl="1"/>
             <a:r>
-              <a:rPr lang="en-US"/>
+              <a:rPr lang="en-US" smtClean="0"/>
               <a:t>Second level</a:t>
             </a:r>
           </a:p>
           <a:p>
             <a:pPr lvl="2"/>
             <a:r>
-              <a:rPr lang="en-US"/>
+              <a:rPr lang="en-US" smtClean="0"/>
               <a:t>Third level</a:t>
             </a:r>
           </a:p>
           <a:p>
             <a:pPr lvl="3"/>
             <a:r>
-              <a:rPr lang="en-US"/>
+              <a:rPr lang="en-US" smtClean="0"/>
               <a:t>Fourth level</a:t>
             </a:r>
           </a:p>
           <a:p>
             <a:pPr lvl="4"/>
             <a:r>
-              <a:rPr lang="en-US"/>
+              <a:rPr lang="en-US" smtClean="0"/>
               <a:t>Fifth level</a:t>
             </a:r>
+            <a:endParaRPr lang="en-US"/>
           </a:p>
         </p:txBody>
       </p:sp>
@@ -657,7 +648,7 @@
           <a:p>
             <a:fld id="{5BCAD085-E8A6-8845-BD4E-CB4CCA059FC4}" type="datetimeFigureOut">
               <a:rPr lang="en-US" smtClean="0"/>
-              <a:t>5/23/2026</a:t>
+              <a:t>1/27/13</a:t>
             </a:fld>
             <a:endParaRPr lang="en-US"/>
           </a:p>
@@ -751,9 +742,10 @@
           <a:lstStyle/>
           <a:p>
             <a:r>
-              <a:rPr lang="en-US"/>
+              <a:rPr lang="en-US" smtClean="0"/>
               <a:t>Click to edit Master title style</a:t>
             </a:r>
+            <a:endParaRPr lang="en-US"/>
           </a:p>
         </p:txBody>
       </p:sp>
@@ -774,37 +766,38 @@
           <a:p>
             <a:pPr lvl="0"/>
             <a:r>
-              <a:rPr lang="en-US"/>
+              <a:rPr lang="en-US" smtClean="0"/>
               <a:t>Click to edit Master text styles</a:t>
             </a:r>
           </a:p>
           <a:p>
             <a:pPr lvl="1"/>
             <a:r>
-              <a:rPr lang="en-US"/>
+              <a:rPr lang="en-US" smtClean="0"/>
               <a:t>Second level</a:t>
             </a:r>
           </a:p>
           <a:p>
             <a:pPr lvl="2"/>
             <a:r>
-              <a:rPr lang="en-US"/>
+              <a:rPr lang="en-US" smtClean="0"/>
               <a:t>Third level</a:t>
             </a:r>
           </a:p>
           <a:p>
             <a:pPr lvl="3"/>
             <a:r>
-              <a:rPr lang="en-US"/>
+              <a:rPr lang="en-US" smtClean="0"/>
               <a:t>Fourth level</a:t>
             </a:r>
           </a:p>
           <a:p>
             <a:pPr lvl="4"/>
             <a:r>
-              <a:rPr lang="en-US"/>
+              <a:rPr lang="en-US" smtClean="0"/>
               <a:t>Fifth level</a:t>
             </a:r>
+            <a:endParaRPr lang="en-US"/>
           </a:p>
         </p:txBody>
       </p:sp>
@@ -825,7 +818,7 @@
           <a:p>
             <a:fld id="{5BCAD085-E8A6-8845-BD4E-CB4CCA059FC4}" type="datetimeFigureOut">
               <a:rPr lang="en-US" smtClean="0"/>
-              <a:t>5/23/2026</a:t>
+              <a:t>1/27/13</a:t>
             </a:fld>
             <a:endParaRPr lang="en-US"/>
           </a:p>
@@ -928,9 +921,10 @@
           </a:lstStyle>
           <a:p>
             <a:r>
-              <a:rPr lang="en-US"/>
+              <a:rPr lang="en-US" smtClean="0"/>
               <a:t>Click to edit Master title style</a:t>
             </a:r>
+            <a:endParaRPr lang="en-US"/>
           </a:p>
         </p:txBody>
       </p:sp>
@@ -1047,7 +1041,7 @@
           <a:p>
             <a:pPr lvl="0"/>
             <a:r>
-              <a:rPr lang="en-US"/>
+              <a:rPr lang="en-US" smtClean="0"/>
               <a:t>Click to edit Master text styles</a:t>
             </a:r>
           </a:p>
@@ -1070,7 +1064,7 @@
           <a:p>
             <a:fld id="{5BCAD085-E8A6-8845-BD4E-CB4CCA059FC4}" type="datetimeFigureOut">
               <a:rPr lang="en-US" smtClean="0"/>
-              <a:t>5/23/2026</a:t>
+              <a:t>1/27/13</a:t>
             </a:fld>
             <a:endParaRPr lang="en-US"/>
           </a:p>
@@ -1164,9 +1158,10 @@
           <a:lstStyle/>
           <a:p>
             <a:r>
-              <a:rPr lang="en-US"/>
+              <a:rPr lang="en-US" smtClean="0"/>
               <a:t>Click to edit Master title style</a:t>
             </a:r>
+            <a:endParaRPr lang="en-US"/>
           </a:p>
         </p:txBody>
       </p:sp>
@@ -1220,37 +1215,38 @@
           <a:p>
             <a:pPr lvl="0"/>
             <a:r>
-              <a:rPr lang="en-US"/>
+              <a:rPr lang="en-US" smtClean="0"/>
               <a:t>Click to edit Master text styles</a:t>
             </a:r>
           </a:p>
           <a:p>
             <a:pPr lvl="1"/>
             <a:r>
-              <a:rPr lang="en-US"/>
+              <a:rPr lang="en-US" smtClean="0"/>
               <a:t>Second level</a:t>
             </a:r>
           </a:p>
           <a:p>
             <a:pPr lvl="2"/>
             <a:r>
-              <a:rPr lang="en-US"/>
+              <a:rPr lang="en-US" smtClean="0"/>
               <a:t>Third level</a:t>
             </a:r>
           </a:p>
           <a:p>
             <a:pPr lvl="3"/>
             <a:r>
-              <a:rPr lang="en-US"/>
+              <a:rPr lang="en-US" smtClean="0"/>
               <a:t>Fourth level</a:t>
             </a:r>
           </a:p>
           <a:p>
             <a:pPr lvl="4"/>
             <a:r>
-              <a:rPr lang="en-US"/>
+              <a:rPr lang="en-US" smtClean="0"/>
               <a:t>Fifth level</a:t>
             </a:r>
+            <a:endParaRPr lang="en-US"/>
           </a:p>
         </p:txBody>
       </p:sp>
@@ -1304,37 +1300,38 @@
           <a:p>
             <a:pPr lvl="0"/>
             <a:r>
-              <a:rPr lang="en-US"/>
+              <a:rPr lang="en-US" smtClean="0"/>
               <a:t>Click to edit Master text styles</a:t>
             </a:r>
           </a:p>
           <a:p>
             <a:pPr lvl="1"/>
             <a:r>
-              <a:rPr lang="en-US"/>
+              <a:rPr lang="en-US" smtClean="0"/>
               <a:t>Second level</a:t>
             </a:r>
           </a:p>
           <a:p>
             <a:pPr lvl="2"/>
             <a:r>
-              <a:rPr lang="en-US"/>
+              <a:rPr lang="en-US" smtClean="0"/>
               <a:t>Third level</a:t>
             </a:r>
           </a:p>
           <a:p>
             <a:pPr lvl="3"/>
             <a:r>
-              <a:rPr lang="en-US"/>
+              <a:rPr lang="en-US" smtClean="0"/>
               <a:t>Fourth level</a:t>
             </a:r>
           </a:p>
           <a:p>
             <a:pPr lvl="4"/>
             <a:r>
-              <a:rPr lang="en-US"/>
+              <a:rPr lang="en-US" smtClean="0"/>
               <a:t>Fifth level</a:t>
             </a:r>
+            <a:endParaRPr lang="en-US"/>
           </a:p>
         </p:txBody>
       </p:sp>
@@ -1355,7 +1352,7 @@
           <a:p>
             <a:fld id="{5BCAD085-E8A6-8845-BD4E-CB4CCA059FC4}" type="datetimeFigureOut">
               <a:rPr lang="en-US" smtClean="0"/>
-              <a:t>5/23/2026</a:t>
+              <a:t>1/27/13</a:t>
             </a:fld>
             <a:endParaRPr lang="en-US"/>
           </a:p>
@@ -1453,9 +1450,10 @@
           </a:lstStyle>
           <a:p>
             <a:r>
-              <a:rPr lang="en-US"/>
+              <a:rPr lang="en-US" smtClean="0"/>
               <a:t>Click to edit Master title style</a:t>
             </a:r>
+            <a:endParaRPr lang="en-US"/>
           </a:p>
         </p:txBody>
       </p:sp>
@@ -1518,7 +1516,7 @@
           <a:p>
             <a:pPr lvl="0"/>
             <a:r>
-              <a:rPr lang="en-US"/>
+              <a:rPr lang="en-US" smtClean="0"/>
               <a:t>Click to edit Master text styles</a:t>
             </a:r>
           </a:p>
@@ -1574,37 +1572,38 @@
           <a:p>
             <a:pPr lvl="0"/>
             <a:r>
-              <a:rPr lang="en-US"/>
+              <a:rPr lang="en-US" smtClean="0"/>
               <a:t>Click to edit Master text styles</a:t>
             </a:r>
           </a:p>
           <a:p>
             <a:pPr lvl="1"/>
             <a:r>
-              <a:rPr lang="en-US"/>
+              <a:rPr lang="en-US" smtClean="0"/>
               <a:t>Second level</a:t>
             </a:r>
           </a:p>
           <a:p>
             <a:pPr lvl="2"/>
             <a:r>
-              <a:rPr lang="en-US"/>
+              <a:rPr lang="en-US" smtClean="0"/>
               <a:t>Third level</a:t>
             </a:r>
           </a:p>
           <a:p>
             <a:pPr lvl="3"/>
             <a:r>
-              <a:rPr lang="en-US"/>
+              <a:rPr lang="en-US" smtClean="0"/>
               <a:t>Fourth level</a:t>
             </a:r>
           </a:p>
           <a:p>
             <a:pPr lvl="4"/>
             <a:r>
-              <a:rPr lang="en-US"/>
+              <a:rPr lang="en-US" smtClean="0"/>
               <a:t>Fifth level</a:t>
             </a:r>
+            <a:endParaRPr lang="en-US"/>
           </a:p>
         </p:txBody>
       </p:sp>
@@ -1667,7 +1666,7 @@
           <a:p>
             <a:pPr lvl="0"/>
             <a:r>
-              <a:rPr lang="en-US"/>
+              <a:rPr lang="en-US" smtClean="0"/>
               <a:t>Click to edit Master text styles</a:t>
             </a:r>
           </a:p>
@@ -1723,37 +1722,38 @@
           <a:p>
             <a:pPr lvl="0"/>
             <a:r>
-              <a:rPr lang="en-US"/>
+              <a:rPr lang="en-US" smtClean="0"/>
               <a:t>Click to edit Master text styles</a:t>
             </a:r>
           </a:p>
           <a:p>
             <a:pPr lvl="1"/>
             <a:r>
-              <a:rPr lang="en-US"/>
+              <a:rPr lang="en-US" smtClean="0"/>
               <a:t>Second level</a:t>
             </a:r>
           </a:p>
           <a:p>
             <a:pPr lvl="2"/>
             <a:r>
-              <a:rPr lang="en-US"/>
+              <a:rPr lang="en-US" smtClean="0"/>
               <a:t>Third level</a:t>
             </a:r>
           </a:p>
           <a:p>
             <a:pPr lvl="3"/>
             <a:r>
-              <a:rPr lang="en-US"/>
+              <a:rPr lang="en-US" smtClean="0"/>
               <a:t>Fourth level</a:t>
             </a:r>
           </a:p>
           <a:p>
             <a:pPr lvl="4"/>
             <a:r>
-              <a:rPr lang="en-US"/>
+              <a:rPr lang="en-US" smtClean="0"/>
               <a:t>Fifth level</a:t>
             </a:r>
+            <a:endParaRPr lang="en-US"/>
           </a:p>
         </p:txBody>
       </p:sp>
@@ -1774,7 +1774,7 @@
           <a:p>
             <a:fld id="{5BCAD085-E8A6-8845-BD4E-CB4CCA059FC4}" type="datetimeFigureOut">
               <a:rPr lang="en-US" smtClean="0"/>
-              <a:t>5/23/2026</a:t>
+              <a:t>1/27/13</a:t>
             </a:fld>
             <a:endParaRPr lang="en-US"/>
           </a:p>
@@ -1868,9 +1868,10 @@
           <a:lstStyle/>
           <a:p>
             <a:r>
-              <a:rPr lang="en-US"/>
+              <a:rPr lang="en-US" smtClean="0"/>
               <a:t>Click to edit Master title style</a:t>
             </a:r>
+            <a:endParaRPr lang="en-US"/>
           </a:p>
         </p:txBody>
       </p:sp>
@@ -1891,7 +1892,7 @@
           <a:p>
             <a:fld id="{5BCAD085-E8A6-8845-BD4E-CB4CCA059FC4}" type="datetimeFigureOut">
               <a:rPr lang="en-US" smtClean="0"/>
-              <a:t>5/23/2026</a:t>
+              <a:t>1/27/13</a:t>
             </a:fld>
             <a:endParaRPr lang="en-US"/>
           </a:p>
@@ -1986,7 +1987,7 @@
           <a:p>
             <a:fld id="{5BCAD085-E8A6-8845-BD4E-CB4CCA059FC4}" type="datetimeFigureOut">
               <a:rPr lang="en-US" smtClean="0"/>
-              <a:t>5/23/2026</a:t>
+              <a:t>1/27/13</a:t>
             </a:fld>
             <a:endParaRPr lang="en-US"/>
           </a:p>
@@ -2089,9 +2090,10 @@
           </a:lstStyle>
           <a:p>
             <a:r>
-              <a:rPr lang="en-US"/>
+              <a:rPr lang="en-US" smtClean="0"/>
               <a:t>Click to edit Master title style</a:t>
             </a:r>
+            <a:endParaRPr lang="en-US"/>
           </a:p>
         </p:txBody>
       </p:sp>
@@ -2145,37 +2147,38 @@
           <a:p>
             <a:pPr lvl="0"/>
             <a:r>
-              <a:rPr lang="en-US"/>
+              <a:rPr lang="en-US" smtClean="0"/>
               <a:t>Click to edit Master text styles</a:t>
             </a:r>
           </a:p>
           <a:p>
             <a:pPr lvl="1"/>
             <a:r>
-              <a:rPr lang="en-US"/>
+              <a:rPr lang="en-US" smtClean="0"/>
               <a:t>Second level</a:t>
             </a:r>
           </a:p>
           <a:p>
             <a:pPr lvl="2"/>
             <a:r>
-              <a:rPr lang="en-US"/>
+              <a:rPr lang="en-US" smtClean="0"/>
               <a:t>Third level</a:t>
             </a:r>
           </a:p>
           <a:p>
             <a:pPr lvl="3"/>
             <a:r>
-              <a:rPr lang="en-US"/>
+              <a:rPr lang="en-US" smtClean="0"/>
               <a:t>Fourth level</a:t>
             </a:r>
           </a:p>
           <a:p>
             <a:pPr lvl="4"/>
             <a:r>
-              <a:rPr lang="en-US"/>
+              <a:rPr lang="en-US" smtClean="0"/>
               <a:t>Fifth level</a:t>
             </a:r>
+            <a:endParaRPr lang="en-US"/>
           </a:p>
         </p:txBody>
       </p:sp>
@@ -2238,7 +2241,7 @@
           <a:p>
             <a:pPr lvl="0"/>
             <a:r>
-              <a:rPr lang="en-US"/>
+              <a:rPr lang="en-US" smtClean="0"/>
               <a:t>Click to edit Master text styles</a:t>
             </a:r>
           </a:p>
@@ -2261,7 +2264,7 @@
           <a:p>
             <a:fld id="{5BCAD085-E8A6-8845-BD4E-CB4CCA059FC4}" type="datetimeFigureOut">
               <a:rPr lang="en-US" smtClean="0"/>
-              <a:t>5/23/2026</a:t>
+              <a:t>1/27/13</a:t>
             </a:fld>
             <a:endParaRPr lang="en-US"/>
           </a:p>
@@ -2364,9 +2367,10 @@
           </a:lstStyle>
           <a:p>
             <a:r>
-              <a:rPr lang="en-US"/>
+              <a:rPr lang="en-US" smtClean="0"/>
               <a:t>Click to edit Master title style</a:t>
             </a:r>
+            <a:endParaRPr lang="en-US"/>
           </a:p>
         </p:txBody>
       </p:sp>
@@ -2490,7 +2494,7 @@
           <a:p>
             <a:pPr lvl="0"/>
             <a:r>
-              <a:rPr lang="en-US"/>
+              <a:rPr lang="en-US" smtClean="0"/>
               <a:t>Click to edit Master text styles</a:t>
             </a:r>
           </a:p>
@@ -2513,7 +2517,7 @@
           <a:p>
             <a:fld id="{5BCAD085-E8A6-8845-BD4E-CB4CCA059FC4}" type="datetimeFigureOut">
               <a:rPr lang="en-US" smtClean="0"/>
-              <a:t>5/23/2026</a:t>
+              <a:t>1/27/13</a:t>
             </a:fld>
             <a:endParaRPr lang="en-US"/>
           </a:p>
@@ -2622,9 +2626,10 @@
           <a:lstStyle/>
           <a:p>
             <a:r>
-              <a:rPr lang="en-US"/>
+              <a:rPr lang="en-US" smtClean="0"/>
               <a:t>Click to edit Master title style</a:t>
             </a:r>
+            <a:endParaRPr lang="en-US"/>
           </a:p>
         </p:txBody>
       </p:sp>
@@ -2655,37 +2660,38 @@
           <a:p>
             <a:pPr lvl="0"/>
             <a:r>
-              <a:rPr lang="en-US"/>
+              <a:rPr lang="en-US" smtClean="0"/>
               <a:t>Click to edit Master text styles</a:t>
             </a:r>
           </a:p>
           <a:p>
             <a:pPr lvl="1"/>
             <a:r>
-              <a:rPr lang="en-US"/>
+              <a:rPr lang="en-US" smtClean="0"/>
               <a:t>Second level</a:t>
             </a:r>
           </a:p>
           <a:p>
             <a:pPr lvl="2"/>
             <a:r>
-              <a:rPr lang="en-US"/>
+              <a:rPr lang="en-US" smtClean="0"/>
               <a:t>Third level</a:t>
             </a:r>
           </a:p>
           <a:p>
             <a:pPr lvl="3"/>
             <a:r>
-              <a:rPr lang="en-US"/>
+              <a:rPr lang="en-US" smtClean="0"/>
               <a:t>Fourth level</a:t>
             </a:r>
           </a:p>
           <a:p>
             <a:pPr lvl="4"/>
             <a:r>
-              <a:rPr lang="en-US"/>
+              <a:rPr lang="en-US" smtClean="0"/>
               <a:t>Fifth level</a:t>
             </a:r>
+            <a:endParaRPr lang="en-US"/>
           </a:p>
         </p:txBody>
       </p:sp>
@@ -2724,7 +2730,7 @@
           <a:p>
             <a:fld id="{5BCAD085-E8A6-8845-BD4E-CB4CCA059FC4}" type="datetimeFigureOut">
               <a:rPr lang="en-US" smtClean="0"/>
-              <a:t>5/23/2026</a:t>
+              <a:t>1/27/13</a:t>
             </a:fld>
             <a:endParaRPr lang="en-US"/>
           </a:p>
@@ -3083,7 +3089,7 @@
 </file>
 
 <file path=ppt/slides/slide1.xml><?xml version="1.0" encoding="utf-8"?>
-<p:sld xmlns:a="http://schemas.openxmlformats.org/drawingml/2006/main" xmlns:r="http://schemas.openxmlformats.org/officeDocument/2006/relationships" xmlns:p="http://schemas.openxmlformats.org/presentationml/2006/main">
+<p:sld xmlns:a="http://schemas.openxmlformats.org/drawingml/2006/main" xmlns:p="http://schemas.openxmlformats.org/presentationml/2006/main" xmlns:r="http://schemas.openxmlformats.org/officeDocument/2006/relationships">
   <p:cSld>
     <p:spTree>
       <p:nvGrpSpPr>
@@ -3091,14 +3097,7 @@
         <p:cNvGrpSpPr/>
         <p:nvPr/>
       </p:nvGrpSpPr>
-      <p:grpSpPr>
-        <a:xfrm>
-          <a:off x="0" y="0"/>
-          <a:ext cx="0" cy="0"/>
-          <a:chOff x="0" y="0"/>
-          <a:chExt cx="0" cy="0"/>
-        </a:xfrm>
-      </p:grpSpPr>
+      <p:grpSpPr/>
       <p:sp>
         <p:nvSpPr>
           <p:cNvPr id="2" name="Rectangle 1"/>
@@ -3139,7 +3138,6 @@
           <a:lstStyle/>
           <a:p>
             <a:pPr algn="ctr"/>
-            <a:endParaRPr/>
           </a:p>
         </p:txBody>
       </p:sp>
@@ -3160,7 +3158,7 @@
           <a:noFill/>
         </p:spPr>
         <p:txBody>
-          <a:bodyPr wrap="square" lIns="0" tIns="0" rIns="0" bIns="0">
+          <a:bodyPr wrap="square" lIns="0" rIns="0" tIns="0" bIns="0">
             <a:spAutoFit/>
           </a:bodyPr>
           <a:lstStyle/>
@@ -3194,7 +3192,7 @@
           <a:noFill/>
         </p:spPr>
         <p:txBody>
-          <a:bodyPr wrap="square" lIns="0" tIns="0" rIns="0" bIns="0">
+          <a:bodyPr wrap="square" lIns="0" rIns="0" tIns="0" bIns="0">
             <a:spAutoFit/>
           </a:bodyPr>
           <a:lstStyle/>
@@ -3228,7 +3226,7 @@
           <a:noFill/>
         </p:spPr>
         <p:txBody>
-          <a:bodyPr wrap="square" lIns="0" tIns="0" rIns="0" bIns="0">
+          <a:bodyPr wrap="square" lIns="0" rIns="0" tIns="0" bIns="0">
             <a:spAutoFit/>
           </a:bodyPr>
           <a:lstStyle/>
@@ -3254,7 +3252,7 @@
         <p:spPr>
           <a:xfrm>
             <a:off x="640080" y="4937760"/>
-            <a:ext cx="10972800" cy="215444"/>
+            <a:ext cx="10972800" cy="411480"/>
           </a:xfrm>
           <a:prstGeom prst="rect">
             <a:avLst/>
@@ -3262,33 +3260,20 @@
           <a:noFill/>
         </p:spPr>
         <p:txBody>
-          <a:bodyPr wrap="square" lIns="0" tIns="0" rIns="0" bIns="0">
+          <a:bodyPr wrap="square" lIns="0" rIns="0" tIns="0" bIns="0">
             <a:spAutoFit/>
           </a:bodyPr>
           <a:lstStyle/>
           <a:p>
             <a:pPr algn="l"/>
             <a:r>
-              <a:rPr sz="1400" b="0" dirty="0">
-                <a:solidFill>
-                  <a:srgbClr val="1C1717"/>
-                </a:solidFill>
-              </a:rPr>
-              <a:t>Abdul Ghani · Anas Bhatti · Muhammad Salman · </a:t>
-            </a:r>
-            <a:r>
-              <a:rPr lang="en-US" sz="1400" dirty="0">
-                <a:solidFill>
-                  <a:srgbClr val="1C1717"/>
-                </a:solidFill>
-              </a:rPr>
-              <a:t>Raja Mahad</a:t>
-            </a:r>
-            <a:endParaRPr sz="1400" b="0" dirty="0">
-              <a:solidFill>
-                <a:srgbClr val="1C1717"/>
-              </a:solidFill>
-            </a:endParaRPr>
+              <a:rPr sz="1400" b="0">
+                <a:solidFill>
+                  <a:srgbClr val="1C1717"/>
+                </a:solidFill>
+              </a:rPr>
+              <a:t>Abdul Ghani · Anas Bhatti · Muhammad Salman · 5th member</a:t>
+            </a:r>
           </a:p>
         </p:txBody>
       </p:sp>
@@ -3309,7 +3294,7 @@
           <a:noFill/>
         </p:spPr>
         <p:txBody>
-          <a:bodyPr wrap="square" lIns="0" tIns="0" rIns="0" bIns="0">
+          <a:bodyPr wrap="square" lIns="0" rIns="0" tIns="0" bIns="0">
             <a:spAutoFit/>
           </a:bodyPr>
           <a:lstStyle/>
@@ -3335,7 +3320,7 @@
 </file>
 
 <file path=ppt/slides/slide10.xml><?xml version="1.0" encoding="utf-8"?>
-<p:sld xmlns:a="http://schemas.openxmlformats.org/drawingml/2006/main" xmlns:r="http://schemas.openxmlformats.org/officeDocument/2006/relationships" xmlns:p="http://schemas.openxmlformats.org/presentationml/2006/main">
+<p:sld xmlns:a="http://schemas.openxmlformats.org/drawingml/2006/main" xmlns:p="http://schemas.openxmlformats.org/presentationml/2006/main" xmlns:r="http://schemas.openxmlformats.org/officeDocument/2006/relationships">
   <p:cSld>
     <p:spTree>
       <p:nvGrpSpPr>
@@ -3343,14 +3328,7 @@
         <p:cNvGrpSpPr/>
         <p:nvPr/>
       </p:nvGrpSpPr>
-      <p:grpSpPr>
-        <a:xfrm>
-          <a:off x="0" y="0"/>
-          <a:ext cx="0" cy="0"/>
-          <a:chOff x="0" y="0"/>
-          <a:chExt cx="0" cy="0"/>
-        </a:xfrm>
-      </p:grpSpPr>
+      <p:grpSpPr/>
       <p:sp>
         <p:nvSpPr>
           <p:cNvPr id="2" name="Rectangle 1"/>
@@ -3391,7 +3369,6 @@
           <a:lstStyle/>
           <a:p>
             <a:pPr algn="ctr"/>
-            <a:endParaRPr/>
           </a:p>
         </p:txBody>
       </p:sp>
@@ -3412,7 +3389,7 @@
           <a:noFill/>
         </p:spPr>
         <p:txBody>
-          <a:bodyPr wrap="square" lIns="0" tIns="0" rIns="0" bIns="0">
+          <a:bodyPr wrap="square" lIns="0" rIns="0" tIns="0" bIns="0">
             <a:spAutoFit/>
           </a:bodyPr>
           <a:lstStyle/>
@@ -3424,7 +3401,7 @@
                   <a:srgbClr val="1C1717"/>
                 </a:solidFill>
               </a:rPr>
-              <a:t>Live demo · how to run</a:t>
+              <a:t>Team — 4 NLP-heavy roles</a:t>
             </a:r>
           </a:p>
         </p:txBody>
@@ -3446,7 +3423,7 @@
           <a:noFill/>
         </p:spPr>
         <p:txBody>
-          <a:bodyPr wrap="square" lIns="0" tIns="0" rIns="0" bIns="0">
+          <a:bodyPr wrap="square" lIns="0" rIns="0" tIns="0" bIns="0">
             <a:spAutoFit/>
           </a:bodyPr>
           <a:lstStyle/>
@@ -3458,7 +3435,7 @@
                   <a:srgbClr val="78716C"/>
                 </a:solidFill>
               </a:rPr>
-              <a:t>Single command brings the entire stack up.</a:t>
+              <a:t>Every member owns trained models or classical NLP modules.</a:t>
             </a:r>
           </a:p>
         </p:txBody>
@@ -3471,8 +3448,8 @@
         </p:nvSpPr>
         <p:spPr>
           <a:xfrm>
-            <a:off x="548640" y="1691640"/>
-            <a:ext cx="10972800" cy="457200"/>
+            <a:off x="548640" y="1783080"/>
+            <a:ext cx="11338560" cy="4754880"/>
           </a:xfrm>
           <a:prstGeom prst="rect">
             <a:avLst/>
@@ -3480,40 +3457,6 @@
           <a:noFill/>
         </p:spPr>
         <p:txBody>
-          <a:bodyPr wrap="square" lIns="0" tIns="0" rIns="0" bIns="0">
-            <a:spAutoFit/>
-          </a:bodyPr>
-          <a:lstStyle/>
-          <a:p>
-            <a:pPr algn="l"/>
-            <a:r>
-              <a:rPr sz="1800" b="1">
-                <a:solidFill>
-                  <a:srgbClr val="059669"/>
-                </a:solidFill>
-              </a:rPr>
-              <a:t>docker compose up --build</a:t>
-            </a:r>
-          </a:p>
-        </p:txBody>
-      </p:sp>
-      <p:sp>
-        <p:nvSpPr>
-          <p:cNvPr id="6" name="TextBox 5"/>
-          <p:cNvSpPr txBox="1"/>
-          <p:nvPr/>
-        </p:nvSpPr>
-        <p:spPr>
-          <a:xfrm>
-            <a:off x="548640" y="2468880"/>
-            <a:ext cx="11338560" cy="2246769"/>
-          </a:xfrm>
-          <a:prstGeom prst="rect">
-            <a:avLst/>
-          </a:prstGeom>
-          <a:noFill/>
-        </p:spPr>
-        <p:txBody>
           <a:bodyPr wrap="square">
             <a:spAutoFit/>
           </a:bodyPr>
@@ -3521,259 +3464,77 @@
           <a:p>
             <a:pPr algn="l"/>
             <a:r>
-              <a:rPr sz="2000" b="1" dirty="0">
-                <a:solidFill>
-                  <a:srgbClr val="1C1717"/>
-                </a:solidFill>
-              </a:rPr>
-              <a:t>•  http://localhost:3000/</a:t>
-            </a:r>
-            <a:r>
-              <a:rPr sz="2000" dirty="0">
-                <a:solidFill>
-                  <a:srgbClr val="78716C"/>
-                </a:solidFill>
-              </a:rPr>
-              <a:t>  </a:t>
-            </a:r>
-            <a:r>
-              <a:rPr lang="en-US" sz="2000" dirty="0">
-                <a:solidFill>
-                  <a:srgbClr val="78716C"/>
-                </a:solidFill>
-              </a:rPr>
-              <a:t>=</a:t>
-            </a:r>
-            <a:r>
-              <a:rPr sz="2000" dirty="0">
-                <a:solidFill>
-                  <a:srgbClr val="78716C"/>
-                </a:solidFill>
-              </a:rPr>
-              <a:t> landing page · pick a specialty</a:t>
-            </a:r>
-          </a:p>
-          <a:p>
-            <a:pPr algn="l"/>
-            <a:r>
-              <a:rPr sz="2000" b="1" dirty="0">
-                <a:solidFill>
-                  <a:srgbClr val="1C1717"/>
-                </a:solidFill>
-              </a:rPr>
-              <a:t>•  /chat/radiology</a:t>
-            </a:r>
-            <a:r>
-              <a:rPr sz="2000" dirty="0">
-                <a:solidFill>
-                  <a:srgbClr val="78716C"/>
-                </a:solidFill>
-              </a:rPr>
-              <a:t>  </a:t>
-            </a:r>
-            <a:r>
-              <a:rPr lang="en-US" sz="2000" dirty="0">
-                <a:solidFill>
-                  <a:srgbClr val="78716C"/>
-                </a:solidFill>
-              </a:rPr>
-              <a:t>=</a:t>
-            </a:r>
-            <a:r>
-              <a:rPr sz="2000" dirty="0">
-                <a:solidFill>
-                  <a:srgbClr val="78716C"/>
-                </a:solidFill>
-              </a:rPr>
-              <a:t> full chatbot · NLP debug panel · voice input · reset / topic chip</a:t>
-            </a:r>
-          </a:p>
-          <a:p>
-            <a:pPr algn="l"/>
-            <a:r>
-              <a:rPr sz="2000" b="1" dirty="0">
-                <a:solidFill>
-                  <a:srgbClr val="1C1717"/>
-                </a:solidFill>
-              </a:rPr>
-              <a:t>•  /playground</a:t>
-            </a:r>
-            <a:r>
-              <a:rPr sz="2000" dirty="0">
-                <a:solidFill>
-                  <a:srgbClr val="78716C"/>
-                </a:solidFill>
-              </a:rPr>
-              <a:t>  </a:t>
-            </a:r>
-            <a:r>
-              <a:rPr lang="en-US" sz="2000" dirty="0">
-                <a:solidFill>
-                  <a:srgbClr val="78716C"/>
-                </a:solidFill>
-              </a:rPr>
-              <a:t>=</a:t>
-            </a:r>
-            <a:r>
-              <a:rPr sz="2000" dirty="0">
-                <a:solidFill>
-                  <a:srgbClr val="78716C"/>
-                </a:solidFill>
-              </a:rPr>
-              <a:t> type any sentence, see every NLP layer live</a:t>
-            </a:r>
-          </a:p>
-          <a:p>
-            <a:pPr algn="l"/>
-            <a:r>
-              <a:rPr sz="2000" b="1" dirty="0">
-                <a:solidFill>
-                  <a:srgbClr val="1C1717"/>
-                </a:solidFill>
-              </a:rPr>
-              <a:t>•  /architecture</a:t>
-            </a:r>
-            <a:r>
-              <a:rPr sz="2000" dirty="0">
-                <a:solidFill>
-                  <a:srgbClr val="78716C"/>
-                </a:solidFill>
-              </a:rPr>
-              <a:t>  </a:t>
-            </a:r>
-            <a:r>
-              <a:rPr lang="en-US" sz="2000" dirty="0">
-                <a:solidFill>
-                  <a:srgbClr val="78716C"/>
-                </a:solidFill>
-              </a:rPr>
-              <a:t>=</a:t>
-            </a:r>
-            <a:r>
-              <a:rPr sz="2000" dirty="0">
-                <a:solidFill>
-                  <a:srgbClr val="78716C"/>
-                </a:solidFill>
-              </a:rPr>
-              <a:t> system architecture diagram + technique table + metrics</a:t>
-            </a:r>
-          </a:p>
-          <a:p>
-            <a:pPr algn="l"/>
-            <a:r>
-              <a:rPr sz="2000" b="1" dirty="0">
-                <a:solidFill>
-                  <a:srgbClr val="1C1717"/>
-                </a:solidFill>
-              </a:rPr>
-              <a:t>•  /admin</a:t>
-            </a:r>
-            <a:r>
-              <a:rPr sz="2000" dirty="0">
-                <a:solidFill>
-                  <a:srgbClr val="78716C"/>
-                </a:solidFill>
-              </a:rPr>
-              <a:t>  </a:t>
-            </a:r>
-            <a:r>
-              <a:rPr lang="en-US" sz="2000" dirty="0">
-                <a:solidFill>
-                  <a:srgbClr val="78716C"/>
-                </a:solidFill>
-              </a:rPr>
-              <a:t>=</a:t>
-            </a:r>
-            <a:r>
-              <a:rPr sz="2000" dirty="0">
-                <a:solidFill>
-                  <a:srgbClr val="78716C"/>
-                </a:solidFill>
-              </a:rPr>
-              <a:t> live FAQ counts + chart-rich admin dashboard</a:t>
-            </a:r>
-          </a:p>
-          <a:p>
-            <a:pPr algn="l"/>
-            <a:r>
-              <a:rPr sz="2000" b="1" dirty="0">
-                <a:solidFill>
-                  <a:srgbClr val="1C1717"/>
-                </a:solidFill>
-              </a:rPr>
-              <a:t>•  python api/train_transformer.py --verbose</a:t>
-            </a:r>
-            <a:r>
-              <a:rPr sz="2000" dirty="0">
-                <a:solidFill>
-                  <a:srgbClr val="78716C"/>
-                </a:solidFill>
-              </a:rPr>
-              <a:t>  </a:t>
-            </a:r>
-            <a:r>
-              <a:rPr lang="en-US" sz="2000" dirty="0">
-                <a:solidFill>
-                  <a:srgbClr val="78716C"/>
-                </a:solidFill>
-              </a:rPr>
-              <a:t>=</a:t>
-            </a:r>
-            <a:r>
-              <a:rPr sz="2000" dirty="0">
-                <a:solidFill>
-                  <a:srgbClr val="78716C"/>
-                </a:solidFill>
-              </a:rPr>
-              <a:t> train </a:t>
-            </a:r>
-            <a:r>
-              <a:rPr sz="2000">
-                <a:solidFill>
-                  <a:srgbClr val="78716C"/>
-                </a:solidFill>
-              </a:rPr>
-              <a:t>the transformer</a:t>
-            </a:r>
-            <a:endParaRPr sz="2000" dirty="0">
-              <a:solidFill>
-                <a:srgbClr val="78716C"/>
-              </a:solidFill>
-            </a:endParaRPr>
-          </a:p>
-          <a:p>
-            <a:pPr algn="l"/>
-            <a:r>
-              <a:rPr sz="2000" b="1" dirty="0">
-                <a:solidFill>
-                  <a:srgbClr val="1C1717"/>
-                </a:solidFill>
-              </a:rPr>
-              <a:t>•  python api/eval.py</a:t>
-            </a:r>
-            <a:r>
-              <a:rPr sz="2000" dirty="0">
-                <a:solidFill>
-                  <a:srgbClr val="78716C"/>
-                </a:solidFill>
-              </a:rPr>
-              <a:t>  </a:t>
-            </a:r>
-            <a:r>
-              <a:rPr lang="en-US" sz="2000" dirty="0">
-                <a:solidFill>
-                  <a:srgbClr val="78716C"/>
-                </a:solidFill>
-              </a:rPr>
-              <a:t>=</a:t>
-            </a:r>
-            <a:r>
-              <a:rPr sz="2000" dirty="0">
-                <a:solidFill>
-                  <a:srgbClr val="78716C"/>
-                </a:solidFill>
-              </a:rPr>
-              <a:t> regenerate EVALUATION_REPORT.md from 116 held-out queries</a:t>
+              <a:rPr sz="1200" b="1">
+                <a:solidFill>
+                  <a:srgbClr val="1C1717"/>
+                </a:solidFill>
+              </a:rPr>
+              <a:t>•  Member 1 — Abdul Ghani (F23607005). Token + Retrieval NLP</a:t>
+            </a:r>
+            <a:r>
+              <a:rPr sz="1100">
+                <a:solidFill>
+                  <a:srgbClr val="78716C"/>
+                </a:solidFill>
+              </a:rPr>
+              <a:t>  — tokeniser, Porter stemmer, lemmatiser, lexicon + HMM POS, spell correct, Roman-Urdu, TF-IDF (word + char), BM25, LSA, PPMI, Word2Vec, BPE, Kneser-Ney LM, WMD, PRF, 5-channel blender + chat UI + /playground</a:t>
+            </a:r>
+          </a:p>
+          <a:p>
+            <a:pPr algn="l"/>
+            <a:r>
+              <a:rPr sz="1200" b="1">
+                <a:solidFill>
+                  <a:srgbClr val="1C1717"/>
+                </a:solidFill>
+              </a:rPr>
+              <a:t>•  Member 2 — Anas Bhatti (F23607044). Extraction + Classification NLP</a:t>
+            </a:r>
+            <a:r>
+              <a:rPr sz="1100">
+                <a:solidFill>
+                  <a:srgbClr val="78716C"/>
+                </a:solidFill>
+              </a:rPr>
+              <a:t>  — Medical NER (dict + perceptron + linear-chain CRF), negation, sentiment, triage, question type, slot extractor, TextRank keywords + summary, KG triples, Naive Bayes + MLP + Transformer intent classifier, /architecture</a:t>
+            </a:r>
+          </a:p>
+          <a:p>
+            <a:pPr algn="l"/>
+            <a:r>
+              <a:rPr sz="1200" b="1">
+                <a:solidFill>
+                  <a:srgbClr val="1C1717"/>
+                </a:solidFill>
+              </a:rPr>
+              <a:t>•  Member 3 — Muhammad Salman (F23607037). Generation + Dialog NLP</a:t>
+            </a:r>
+            <a:r>
+              <a:rPr sz="1100">
+                <a:solidFill>
+                  <a:srgbClr val="78716C"/>
+                </a:solidFill>
+              </a:rPr>
+              <a:t>  — Seq2seq encoder-decoder with Bahdanau attention, grounded generator, MLP, dual encoder, K-Means, real-time auto-FAQ miner, dialog manager, MMR diversification, LTR reranker, coreference, live FAQ counters</a:t>
+            </a:r>
+          </a:p>
+          <a:p>
+            <a:pPr algn="l"/>
+            <a:r>
+              <a:rPr sz="1200" b="1">
+                <a:solidFill>
+                  <a:srgbClr val="1C1717"/>
+                </a:solidFill>
+              </a:rPr>
+              <a:t>•  Member 4 — Data + Eval + Deploy</a:t>
+            </a:r>
+            <a:r>
+              <a:rPr sz="1100">
+                <a:solidFill>
+                  <a:srgbClr val="78716C"/>
+                </a:solidFill>
+              </a:rPr>
+              <a:t>  — 214 hand-written FAQs, 6-way intent augmentation (1517 examples), 14,357 synthetic chat sessions, PHI scrub, offline mining pipeline, eval harness (P@1, MRR, Recall@5), 62-test integration suite, Docker</a:t>
             </a:r>
           </a:p>
         </p:txBody>
@@ -3786,8 +3547,8 @@
 </p:sld>
 </file>
 
-<file path=ppt/slides/slide2.xml><?xml version="1.0" encoding="utf-8"?>
-<p:sld xmlns:a="http://schemas.openxmlformats.org/drawingml/2006/main" xmlns:r="http://schemas.openxmlformats.org/officeDocument/2006/relationships" xmlns:p="http://schemas.openxmlformats.org/presentationml/2006/main">
+<file path=ppt/slides/slide11.xml><?xml version="1.0" encoding="utf-8"?>
+<p:sld xmlns:a="http://schemas.openxmlformats.org/drawingml/2006/main" xmlns:p="http://schemas.openxmlformats.org/presentationml/2006/main" xmlns:r="http://schemas.openxmlformats.org/officeDocument/2006/relationships">
   <p:cSld>
     <p:spTree>
       <p:nvGrpSpPr>
@@ -3795,14 +3556,7 @@
         <p:cNvGrpSpPr/>
         <p:nvPr/>
       </p:nvGrpSpPr>
-      <p:grpSpPr>
-        <a:xfrm>
-          <a:off x="0" y="0"/>
-          <a:ext cx="0" cy="0"/>
-          <a:chOff x="0" y="0"/>
-          <a:chExt cx="0" cy="0"/>
-        </a:xfrm>
-      </p:grpSpPr>
+      <p:grpSpPr/>
       <p:sp>
         <p:nvSpPr>
           <p:cNvPr id="2" name="Rectangle 1"/>
@@ -3843,7 +3597,6 @@
           <a:lstStyle/>
           <a:p>
             <a:pPr algn="ctr"/>
-            <a:endParaRPr/>
           </a:p>
         </p:txBody>
       </p:sp>
@@ -3864,7 +3617,7 @@
           <a:noFill/>
         </p:spPr>
         <p:txBody>
-          <a:bodyPr wrap="square" lIns="0" tIns="0" rIns="0" bIns="0">
+          <a:bodyPr wrap="square" lIns="0" rIns="0" tIns="0" bIns="0">
             <a:spAutoFit/>
           </a:bodyPr>
           <a:lstStyle/>
@@ -3876,7 +3629,7 @@
                   <a:srgbClr val="1C1717"/>
                 </a:solidFill>
               </a:rPr>
-              <a:t>Scope and requirements</a:t>
+              <a:t>Live demo · how to run</a:t>
             </a:r>
           </a:p>
         </p:txBody>
@@ -3898,7 +3651,7 @@
           <a:noFill/>
         </p:spPr>
         <p:txBody>
-          <a:bodyPr wrap="square" lIns="0" tIns="0" rIns="0" bIns="0">
+          <a:bodyPr wrap="square" lIns="0" rIns="0" tIns="0" bIns="0">
             <a:spAutoFit/>
           </a:bodyPr>
           <a:lstStyle/>
@@ -3910,7 +3663,7 @@
                   <a:srgbClr val="78716C"/>
                 </a:solidFill>
               </a:rPr>
-              <a:t>Problem · Patients ask the same questions every week.</a:t>
+              <a:t>Single command brings the entire stack up.</a:t>
             </a:r>
           </a:p>
         </p:txBody>
@@ -3923,8 +3676,8 @@
         </p:nvSpPr>
         <p:spPr>
           <a:xfrm>
-            <a:off x="640080" y="1783080"/>
-            <a:ext cx="10972800" cy="2246769"/>
+            <a:off x="548640" y="1691640"/>
+            <a:ext cx="10972800" cy="457200"/>
           </a:xfrm>
           <a:prstGeom prst="rect">
             <a:avLst/>
@@ -3932,6 +3685,40 @@
           <a:noFill/>
         </p:spPr>
         <p:txBody>
+          <a:bodyPr wrap="square" lIns="0" rIns="0" tIns="0" bIns="0">
+            <a:spAutoFit/>
+          </a:bodyPr>
+          <a:lstStyle/>
+          <a:p>
+            <a:pPr algn="l"/>
+            <a:r>
+              <a:rPr sz="1800" b="1">
+                <a:solidFill>
+                  <a:srgbClr val="059669"/>
+                </a:solidFill>
+              </a:rPr>
+              <a:t>docker compose up --build</a:t>
+            </a:r>
+          </a:p>
+        </p:txBody>
+      </p:sp>
+      <p:sp>
+        <p:nvSpPr>
+          <p:cNvPr id="6" name="TextBox 5"/>
+          <p:cNvSpPr txBox="1"/>
+          <p:nvPr/>
+        </p:nvSpPr>
+        <p:spPr>
+          <a:xfrm>
+            <a:off x="548640" y="2468880"/>
+            <a:ext cx="11338560" cy="4114800"/>
+          </a:xfrm>
+          <a:prstGeom prst="rect">
+            <a:avLst/>
+          </a:prstGeom>
+          <a:noFill/>
+        </p:spPr>
+        <p:txBody>
           <a:bodyPr wrap="square">
             <a:spAutoFit/>
           </a:bodyPr>
@@ -3939,136 +3726,153 @@
           <a:p>
             <a:pPr algn="l"/>
             <a:r>
-              <a:rPr sz="2000" b="1" dirty="0">
-                <a:solidFill>
-                  <a:srgbClr val="1C1717"/>
-                </a:solidFill>
-              </a:rPr>
-              <a:t>•  Goal</a:t>
-            </a:r>
-            <a:r>
-              <a:rPr sz="2000" dirty="0">
-                <a:solidFill>
-                  <a:srgbClr val="78716C"/>
-                </a:solidFill>
-              </a:rPr>
-              <a:t> Retrieval chatbot that answers from an approved, clinician-reviewed FAQ index across three specialties.</a:t>
-            </a:r>
-          </a:p>
-          <a:p>
-            <a:pPr algn="l"/>
-            <a:r>
-              <a:rPr sz="2000" b="1" dirty="0">
-                <a:solidFill>
-                  <a:srgbClr val="1C1717"/>
-                </a:solidFill>
-              </a:rPr>
-              <a:t>•  Specialties</a:t>
-            </a:r>
-            <a:r>
-              <a:rPr sz="2000" dirty="0">
-                <a:solidFill>
-                  <a:srgbClr val="78716C"/>
-                </a:solidFill>
-              </a:rPr>
-              <a:t> Radiology · Physiotherapy · Cardiovascular.</a:t>
-            </a:r>
-          </a:p>
-          <a:p>
-            <a:pPr algn="l"/>
-            <a:r>
-              <a:rPr sz="2000" b="1" dirty="0">
-                <a:solidFill>
-                  <a:srgbClr val="1C1717"/>
-                </a:solidFill>
-              </a:rPr>
-              <a:t>•  Honesty</a:t>
-            </a:r>
-            <a:r>
-              <a:rPr sz="2000" dirty="0">
-                <a:solidFill>
-                  <a:srgbClr val="78716C"/>
-                </a:solidFill>
-              </a:rPr>
-              <a:t> Every reply is a real, human-written FAQ entry. No hallucination.</a:t>
-            </a:r>
-          </a:p>
-          <a:p>
-            <a:pPr algn="l"/>
-            <a:r>
-              <a:rPr sz="2000" b="1" dirty="0">
-                <a:solidFill>
-                  <a:srgbClr val="1C1717"/>
-                </a:solidFill>
-              </a:rPr>
-              <a:t>•  Hard constraint</a:t>
-            </a:r>
-            <a:r>
-              <a:rPr sz="2000" dirty="0">
-                <a:solidFill>
-                  <a:srgbClr val="78716C"/>
-                </a:solidFill>
-              </a:rPr>
-              <a:t> No LLM. No pretrained transformer. No sentence-transformers downloaded.</a:t>
-            </a:r>
-            <a:endParaRPr lang="en-US" sz="2000" dirty="0">
-              <a:solidFill>
-                <a:srgbClr val="78716C"/>
-              </a:solidFill>
-            </a:endParaRPr>
-          </a:p>
-          <a:p>
-            <a:pPr algn="l"/>
-            <a:r>
-              <a:rPr sz="2000" b="1" dirty="0">
-                <a:solidFill>
-                  <a:srgbClr val="1C1717"/>
-                </a:solidFill>
-              </a:rPr>
-              <a:t>•  Deploy</a:t>
-            </a:r>
-            <a:r>
-              <a:rPr sz="2000" dirty="0">
-                <a:solidFill>
-                  <a:srgbClr val="78716C"/>
-                </a:solidFill>
-              </a:rPr>
-              <a:t> Single `docker compose up` brings web + </a:t>
-            </a:r>
-            <a:r>
-              <a:rPr sz="2000" dirty="0" err="1">
-                <a:solidFill>
-                  <a:srgbClr val="78716C"/>
-                </a:solidFill>
-              </a:rPr>
-              <a:t>api</a:t>
-            </a:r>
-            <a:r>
-              <a:rPr sz="2000" dirty="0">
-                <a:solidFill>
-                  <a:srgbClr val="78716C"/>
-                </a:solidFill>
-              </a:rPr>
-              <a:t> + mongo live.</a:t>
-            </a:r>
-          </a:p>
-          <a:p>
-            <a:pPr algn="l"/>
-            <a:r>
-              <a:rPr sz="2000" b="1" dirty="0">
-                <a:solidFill>
-                  <a:srgbClr val="1C1717"/>
-                </a:solidFill>
-              </a:rPr>
-              <a:t>•  Pakistan context</a:t>
-            </a:r>
-            <a:r>
-              <a:rPr sz="2000" dirty="0">
-                <a:solidFill>
-                  <a:srgbClr val="78716C"/>
-                </a:solidFill>
-              </a:rPr>
-              <a:t> Roman-Urdu phonetic input · 1122 emergency banner · PHI scrub.</a:t>
+              <a:rPr sz="1400" b="1">
+                <a:solidFill>
+                  <a:srgbClr val="1C1717"/>
+                </a:solidFill>
+              </a:rPr>
+              <a:t>•  http://localhost:3000/</a:t>
+            </a:r>
+            <a:r>
+              <a:rPr sz="1300">
+                <a:solidFill>
+                  <a:srgbClr val="78716C"/>
+                </a:solidFill>
+              </a:rPr>
+              <a:t>  — landing page · pick a specialty</a:t>
+            </a:r>
+          </a:p>
+          <a:p>
+            <a:pPr algn="l"/>
+            <a:r>
+              <a:rPr sz="1400" b="1">
+                <a:solidFill>
+                  <a:srgbClr val="1C1717"/>
+                </a:solidFill>
+              </a:rPr>
+              <a:t>•  /chat/radiology</a:t>
+            </a:r>
+            <a:r>
+              <a:rPr sz="1300">
+                <a:solidFill>
+                  <a:srgbClr val="78716C"/>
+                </a:solidFill>
+              </a:rPr>
+              <a:t>  — full chatbot · NLP debug panel · voice input · reset / topic chip</a:t>
+            </a:r>
+          </a:p>
+          <a:p>
+            <a:pPr algn="l"/>
+            <a:r>
+              <a:rPr sz="1400" b="1">
+                <a:solidFill>
+                  <a:srgbClr val="1C1717"/>
+                </a:solidFill>
+              </a:rPr>
+              <a:t>•  /playground</a:t>
+            </a:r>
+            <a:r>
+              <a:rPr sz="1300">
+                <a:solidFill>
+                  <a:srgbClr val="78716C"/>
+                </a:solidFill>
+              </a:rPr>
+              <a:t>  — type any sentence, see every NLP layer live</a:t>
+            </a:r>
+          </a:p>
+          <a:p>
+            <a:pPr algn="l"/>
+            <a:r>
+              <a:rPr sz="1400" b="1">
+                <a:solidFill>
+                  <a:srgbClr val="1C1717"/>
+                </a:solidFill>
+              </a:rPr>
+              <a:t>•  /architecture</a:t>
+            </a:r>
+            <a:r>
+              <a:rPr sz="1300">
+                <a:solidFill>
+                  <a:srgbClr val="78716C"/>
+                </a:solidFill>
+              </a:rPr>
+              <a:t>  — system architecture diagram + technique table + metrics</a:t>
+            </a:r>
+          </a:p>
+          <a:p>
+            <a:pPr algn="l"/>
+            <a:r>
+              <a:rPr sz="1400" b="1">
+                <a:solidFill>
+                  <a:srgbClr val="1C1717"/>
+                </a:solidFill>
+              </a:rPr>
+              <a:t>•  /admin</a:t>
+            </a:r>
+            <a:r>
+              <a:rPr sz="1300">
+                <a:solidFill>
+                  <a:srgbClr val="78716C"/>
+                </a:solidFill>
+              </a:rPr>
+              <a:t>  — live FAQ counts + chart-rich admin dashboard</a:t>
+            </a:r>
+          </a:p>
+          <a:p>
+            <a:pPr algn="l"/>
+            <a:r>
+              <a:rPr sz="1400" b="1">
+                <a:solidFill>
+                  <a:srgbClr val="1C1717"/>
+                </a:solidFill>
+              </a:rPr>
+              <a:t>•  python api/train_transformer.py --verbose</a:t>
+            </a:r>
+            <a:r>
+              <a:rPr sz="1300">
+                <a:solidFill>
+                  <a:srgbClr val="78716C"/>
+                </a:solidFill>
+              </a:rPr>
+              <a:t>  — train the from-scratch transformer (GPU auto-detected)</a:t>
+            </a:r>
+          </a:p>
+          <a:p>
+            <a:pPr algn="l"/>
+            <a:r>
+              <a:rPr sz="1400" b="1">
+                <a:solidFill>
+                  <a:srgbClr val="1C1717"/>
+                </a:solidFill>
+              </a:rPr>
+              <a:t>•  python api/eval.py</a:t>
+            </a:r>
+            <a:r>
+              <a:rPr sz="1300">
+                <a:solidFill>
+                  <a:srgbClr val="78716C"/>
+                </a:solidFill>
+              </a:rPr>
+              <a:t>  — regenerate EVALUATION_REPORT.md from 116 held-out queries</a:t>
+            </a:r>
+          </a:p>
+          <a:p>
+            <a:pPr algn="l"/>
+            <a:r>
+              <a:rPr sz="1400" b="1">
+                <a:solidFill>
+                  <a:srgbClr val="1C1717"/>
+                </a:solidFill>
+              </a:rPr>
+              <a:t>•  python api/final_test.py</a:t>
+            </a:r>
+            <a:r>
+              <a:rPr sz="1300">
+                <a:solidFill>
+                  <a:srgbClr val="78716C"/>
+                </a:solidFill>
+              </a:rPr>
+              <a:t>  — 62 / 62 integration suite</a:t>
             </a:r>
           </a:p>
         </p:txBody>
@@ -4081,8 +3885,8 @@
 </p:sld>
 </file>
 
-<file path=ppt/slides/slide3.xml><?xml version="1.0" encoding="utf-8"?>
-<p:sld xmlns:a="http://schemas.openxmlformats.org/drawingml/2006/main" xmlns:r="http://schemas.openxmlformats.org/officeDocument/2006/relationships" xmlns:p="http://schemas.openxmlformats.org/presentationml/2006/main">
+<file path=ppt/slides/slide2.xml><?xml version="1.0" encoding="utf-8"?>
+<p:sld xmlns:a="http://schemas.openxmlformats.org/drawingml/2006/main" xmlns:p="http://schemas.openxmlformats.org/presentationml/2006/main" xmlns:r="http://schemas.openxmlformats.org/officeDocument/2006/relationships">
   <p:cSld>
     <p:spTree>
       <p:nvGrpSpPr>
@@ -4090,14 +3894,7 @@
         <p:cNvGrpSpPr/>
         <p:nvPr/>
       </p:nvGrpSpPr>
-      <p:grpSpPr>
-        <a:xfrm>
-          <a:off x="0" y="0"/>
-          <a:ext cx="0" cy="0"/>
-          <a:chOff x="0" y="0"/>
-          <a:chExt cx="0" cy="0"/>
-        </a:xfrm>
-      </p:grpSpPr>
+      <p:grpSpPr/>
       <p:sp>
         <p:nvSpPr>
           <p:cNvPr id="2" name="Rectangle 1"/>
@@ -4138,7 +3935,6 @@
           <a:lstStyle/>
           <a:p>
             <a:pPr algn="ctr"/>
-            <a:endParaRPr/>
           </a:p>
         </p:txBody>
       </p:sp>
@@ -4159,7 +3955,7 @@
           <a:noFill/>
         </p:spPr>
         <p:txBody>
-          <a:bodyPr wrap="square" lIns="0" tIns="0" rIns="0" bIns="0">
+          <a:bodyPr wrap="square" lIns="0" rIns="0" tIns="0" bIns="0">
             <a:spAutoFit/>
           </a:bodyPr>
           <a:lstStyle/>
@@ -4171,7 +3967,7 @@
                   <a:srgbClr val="1C1717"/>
                 </a:solidFill>
               </a:rPr>
-              <a:t>Runtime pipeline</a:t>
+              <a:t>Scope and requirements</a:t>
             </a:r>
           </a:p>
         </p:txBody>
@@ -4193,7 +3989,7 @@
           <a:noFill/>
         </p:spPr>
         <p:txBody>
-          <a:bodyPr wrap="square" lIns="0" tIns="0" rIns="0" bIns="0">
+          <a:bodyPr wrap="square" lIns="0" rIns="0" tIns="0" bIns="0">
             <a:spAutoFit/>
           </a:bodyPr>
           <a:lstStyle/>
@@ -4205,7 +4001,7 @@
                   <a:srgbClr val="78716C"/>
                 </a:solidFill>
               </a:rPr>
-              <a:t>Each user turn flows top-to-bottom in ~22 ms p50.</a:t>
+              <a:t>Problem · Patients ask the same questions every week.</a:t>
             </a:r>
           </a:p>
         </p:txBody>
@@ -4219,7 +4015,7 @@
         <p:spPr>
           <a:xfrm>
             <a:off x="640080" y="1783080"/>
-            <a:ext cx="10972800" cy="2862322"/>
+            <a:ext cx="10972800" cy="4572000"/>
           </a:xfrm>
           <a:prstGeom prst="rect">
             <a:avLst/>
@@ -4234,206 +4030,134 @@
           <a:p>
             <a:pPr algn="l"/>
             <a:r>
-              <a:rPr sz="2000" b="1" dirty="0">
-                <a:solidFill>
-                  <a:srgbClr val="1C1717"/>
-                </a:solidFill>
-              </a:rPr>
-              <a:t>•  Preprocess</a:t>
-            </a:r>
-            <a:r>
-              <a:rPr sz="2000" dirty="0">
-                <a:solidFill>
-                  <a:srgbClr val="78716C"/>
-                </a:solidFill>
-              </a:rPr>
-              <a:t>  PHI scrub → Roman-Urdu expand → coreference → context augment → spell-correct.</a:t>
-            </a:r>
-          </a:p>
-          <a:p>
-            <a:pPr algn="l"/>
-            <a:r>
-              <a:rPr sz="2000" b="1" dirty="0">
-                <a:solidFill>
-                  <a:srgbClr val="1C1717"/>
-                </a:solidFill>
-              </a:rPr>
-              <a:t>•  Understanding</a:t>
-            </a:r>
-            <a:r>
-              <a:rPr sz="2000" dirty="0">
-                <a:solidFill>
-                  <a:srgbClr val="78716C"/>
-                </a:solidFill>
-              </a:rPr>
-              <a:t> </a:t>
-            </a:r>
-            <a:r>
-              <a:rPr sz="2000" dirty="0" err="1">
-                <a:solidFill>
-                  <a:srgbClr val="78716C"/>
-                </a:solidFill>
-              </a:rPr>
-              <a:t>Tokeniser</a:t>
-            </a:r>
-            <a:r>
-              <a:rPr sz="2000" dirty="0">
-                <a:solidFill>
-                  <a:srgbClr val="78716C"/>
-                </a:solidFill>
-              </a:rPr>
-              <a:t> · POS (lexicon + HMM) · NER (</a:t>
-            </a:r>
-            <a:r>
-              <a:rPr sz="2000" dirty="0" err="1">
-                <a:solidFill>
-                  <a:srgbClr val="78716C"/>
-                </a:solidFill>
-              </a:rPr>
-              <a:t>dict</a:t>
-            </a:r>
-            <a:r>
-              <a:rPr sz="2000" dirty="0">
-                <a:solidFill>
-                  <a:srgbClr val="78716C"/>
-                </a:solidFill>
-              </a:rPr>
-              <a:t> + perceptron + CRF) · negation · sentiment · triage · intent (NB / MLP / Transformer).</a:t>
-            </a:r>
-          </a:p>
-          <a:p>
-            <a:pPr algn="l"/>
-            <a:r>
-              <a:rPr sz="2000" b="1" dirty="0">
-                <a:solidFill>
-                  <a:srgbClr val="1C1717"/>
-                </a:solidFill>
-              </a:rPr>
-              <a:t>•  Retrieve (5 channels)</a:t>
-            </a:r>
-            <a:r>
-              <a:rPr sz="2000" dirty="0">
-                <a:solidFill>
-                  <a:srgbClr val="78716C"/>
-                </a:solidFill>
-              </a:rPr>
-              <a:t> TF-IDF word 0.20 · TF-IDF char 0.45 · BM25 0.25 · LSA 0.05 · PPMI 0.05.</a:t>
-            </a:r>
-          </a:p>
-          <a:p>
-            <a:pPr algn="l"/>
-            <a:r>
-              <a:rPr sz="2000" b="1" dirty="0">
-                <a:solidFill>
-                  <a:srgbClr val="1C1717"/>
-                </a:solidFill>
-              </a:rPr>
-              <a:t>•  </a:t>
-            </a:r>
-            <a:r>
-              <a:rPr sz="2000" b="1" dirty="0" err="1">
-                <a:solidFill>
-                  <a:srgbClr val="1C1717"/>
-                </a:solidFill>
-              </a:rPr>
-              <a:t>Rerank</a:t>
-            </a:r>
-            <a:r>
-              <a:rPr sz="2000" dirty="0">
-                <a:solidFill>
-                  <a:srgbClr val="78716C"/>
-                </a:solidFill>
-              </a:rPr>
-              <a:t> PRF (Rocchio) → LTR (</a:t>
-            </a:r>
-            <a:r>
-              <a:rPr sz="2000" dirty="0" err="1">
-                <a:solidFill>
-                  <a:srgbClr val="78716C"/>
-                </a:solidFill>
-              </a:rPr>
-              <a:t>LogReg</a:t>
-            </a:r>
-            <a:r>
-              <a:rPr sz="2000" dirty="0">
-                <a:solidFill>
-                  <a:srgbClr val="78716C"/>
-                </a:solidFill>
-              </a:rPr>
-              <a:t>, 14 features) → MMR diversify.</a:t>
-            </a:r>
-          </a:p>
-          <a:p>
-            <a:pPr algn="l"/>
-            <a:r>
-              <a:rPr sz="2000" b="1" dirty="0">
-                <a:solidFill>
-                  <a:srgbClr val="1C1717"/>
-                </a:solidFill>
-              </a:rPr>
-              <a:t>•  Dialog</a:t>
-            </a:r>
-            <a:r>
-              <a:rPr sz="2000" dirty="0">
-                <a:solidFill>
-                  <a:srgbClr val="78716C"/>
-                </a:solidFill>
-              </a:rPr>
-              <a:t> Empathic opener · triage banner · clarification · disambiguation card · stem-overlap highlight.</a:t>
-            </a:r>
-          </a:p>
-          <a:p>
-            <a:pPr algn="l"/>
-            <a:r>
-              <a:rPr sz="2000" b="1" dirty="0">
-                <a:solidFill>
-                  <a:srgbClr val="1C1717"/>
-                </a:solidFill>
-              </a:rPr>
-              <a:t>•  Reply</a:t>
-            </a:r>
-            <a:r>
-              <a:rPr sz="2000" dirty="0">
-                <a:solidFill>
-                  <a:srgbClr val="78716C"/>
-                </a:solidFill>
-              </a:rPr>
-              <a:t> answer + matched FAQ + score breakdown + NLP analysis + dialog meta.</a:t>
-            </a:r>
-          </a:p>
-          <a:p>
-            <a:pPr algn="l"/>
-            <a:r>
-              <a:rPr sz="2000" b="1" dirty="0">
-                <a:solidFill>
-                  <a:srgbClr val="1C1717"/>
-                </a:solidFill>
-              </a:rPr>
-              <a:t>•  Offline pipeline</a:t>
-            </a:r>
-            <a:r>
-              <a:rPr sz="2000" dirty="0">
-                <a:solidFill>
-                  <a:srgbClr val="78716C"/>
-                </a:solidFill>
-              </a:rPr>
-              <a:t> Chat-log → segment → </a:t>
-            </a:r>
-            <a:r>
-              <a:rPr sz="2000" dirty="0" err="1">
-                <a:solidFill>
-                  <a:srgbClr val="78716C"/>
-                </a:solidFill>
-              </a:rPr>
-              <a:t>normalise</a:t>
-            </a:r>
-            <a:r>
-              <a:rPr sz="2000" dirty="0">
-                <a:solidFill>
-                  <a:srgbClr val="78716C"/>
-                </a:solidFill>
-              </a:rPr>
-              <a:t> → embed (TF-IDF) → cluster (K-Means) → select → polish → publish.</a:t>
+              <a:rPr sz="1500" b="1">
+                <a:solidFill>
+                  <a:srgbClr val="1C1717"/>
+                </a:solidFill>
+              </a:rPr>
+              <a:t>•  Goal</a:t>
+            </a:r>
+            <a:r>
+              <a:rPr sz="1400">
+                <a:solidFill>
+                  <a:srgbClr val="78716C"/>
+                </a:solidFill>
+              </a:rPr>
+              <a:t>  — Retrieval chatbot that answers from an approved, clinician-reviewed FAQ index across three specialties.</a:t>
+            </a:r>
+          </a:p>
+          <a:p>
+            <a:pPr algn="l"/>
+            <a:r>
+              <a:rPr sz="1500" b="1">
+                <a:solidFill>
+                  <a:srgbClr val="1C1717"/>
+                </a:solidFill>
+              </a:rPr>
+              <a:t>•  Specialties</a:t>
+            </a:r>
+            <a:r>
+              <a:rPr sz="1400">
+                <a:solidFill>
+                  <a:srgbClr val="78716C"/>
+                </a:solidFill>
+              </a:rPr>
+              <a:t>  — Radiology · Physiotherapy · Cardiovascular.</a:t>
+            </a:r>
+          </a:p>
+          <a:p>
+            <a:pPr algn="l"/>
+            <a:r>
+              <a:rPr sz="1500" b="1">
+                <a:solidFill>
+                  <a:srgbClr val="1C1717"/>
+                </a:solidFill>
+              </a:rPr>
+              <a:t>•  Honesty</a:t>
+            </a:r>
+            <a:r>
+              <a:rPr sz="1400">
+                <a:solidFill>
+                  <a:srgbClr val="78716C"/>
+                </a:solidFill>
+              </a:rPr>
+              <a:t>  — Every reply is a real, human-written FAQ entry. No hallucination.</a:t>
+            </a:r>
+          </a:p>
+          <a:p>
+            <a:pPr algn="l"/>
+            <a:r>
+              <a:rPr sz="1500" b="1">
+                <a:solidFill>
+                  <a:srgbClr val="1C1717"/>
+                </a:solidFill>
+              </a:rPr>
+              <a:t>•  Hard constraint</a:t>
+            </a:r>
+            <a:r>
+              <a:rPr sz="1400">
+                <a:solidFill>
+                  <a:srgbClr val="78716C"/>
+                </a:solidFill>
+              </a:rPr>
+              <a:t>  — No LLM. No pretrained transformer. No sentence-transformers downloaded.</a:t>
+            </a:r>
+          </a:p>
+          <a:p>
+            <a:pPr algn="l"/>
+            <a:r>
+              <a:rPr sz="1500" b="1">
+                <a:solidFill>
+                  <a:srgbClr val="1C1717"/>
+                </a:solidFill>
+              </a:rPr>
+              <a:t>•  Hard constraint</a:t>
+            </a:r>
+            <a:r>
+              <a:rPr sz="1400">
+                <a:solidFill>
+                  <a:srgbClr val="78716C"/>
+                </a:solidFill>
+              </a:rPr>
+              <a:t>  — Every ML algorithm written by us (numpy or PyTorch tensors). ~3000 LoC.</a:t>
+            </a:r>
+          </a:p>
+          <a:p>
+            <a:pPr algn="l"/>
+            <a:r>
+              <a:rPr sz="1500" b="1">
+                <a:solidFill>
+                  <a:srgbClr val="1C1717"/>
+                </a:solidFill>
+              </a:rPr>
+              <a:t>•  Deploy</a:t>
+            </a:r>
+            <a:r>
+              <a:rPr sz="1400">
+                <a:solidFill>
+                  <a:srgbClr val="78716C"/>
+                </a:solidFill>
+              </a:rPr>
+              <a:t>  — Single `docker compose up` brings web + api + mongo live.</a:t>
+            </a:r>
+          </a:p>
+          <a:p>
+            <a:pPr algn="l"/>
+            <a:r>
+              <a:rPr sz="1500" b="1">
+                <a:solidFill>
+                  <a:srgbClr val="1C1717"/>
+                </a:solidFill>
+              </a:rPr>
+              <a:t>•  Pakistan context</a:t>
+            </a:r>
+            <a:r>
+              <a:rPr sz="1400">
+                <a:solidFill>
+                  <a:srgbClr val="78716C"/>
+                </a:solidFill>
+              </a:rPr>
+              <a:t>  — Roman-Urdu phonetic input · 1122 emergency banner · PHI scrub.</a:t>
             </a:r>
           </a:p>
         </p:txBody>
@@ -4446,8 +4170,8 @@
 </p:sld>
 </file>
 
-<file path=ppt/slides/slide4.xml><?xml version="1.0" encoding="utf-8"?>
-<p:sld xmlns:a="http://schemas.openxmlformats.org/drawingml/2006/main" xmlns:r="http://schemas.openxmlformats.org/officeDocument/2006/relationships" xmlns:p="http://schemas.openxmlformats.org/presentationml/2006/main">
+<file path=ppt/slides/slide3.xml><?xml version="1.0" encoding="utf-8"?>
+<p:sld xmlns:a="http://schemas.openxmlformats.org/drawingml/2006/main" xmlns:p="http://schemas.openxmlformats.org/presentationml/2006/main" xmlns:r="http://schemas.openxmlformats.org/officeDocument/2006/relationships">
   <p:cSld>
     <p:spTree>
       <p:nvGrpSpPr>
@@ -4455,14 +4179,7 @@
         <p:cNvGrpSpPr/>
         <p:nvPr/>
       </p:nvGrpSpPr>
-      <p:grpSpPr>
-        <a:xfrm>
-          <a:off x="0" y="0"/>
-          <a:ext cx="0" cy="0"/>
-          <a:chOff x="0" y="0"/>
-          <a:chExt cx="0" cy="0"/>
-        </a:xfrm>
-      </p:grpSpPr>
+      <p:grpSpPr/>
       <p:sp>
         <p:nvSpPr>
           <p:cNvPr id="2" name="Rectangle 1"/>
@@ -4503,7 +4220,6 @@
           <a:lstStyle/>
           <a:p>
             <a:pPr algn="ctr"/>
-            <a:endParaRPr/>
           </a:p>
         </p:txBody>
       </p:sp>
@@ -4524,7 +4240,7 @@
           <a:noFill/>
         </p:spPr>
         <p:txBody>
-          <a:bodyPr wrap="square" lIns="0" tIns="0" rIns="0" bIns="0">
+          <a:bodyPr wrap="square" lIns="0" rIns="0" tIns="0" bIns="0">
             <a:spAutoFit/>
           </a:bodyPr>
           <a:lstStyle/>
@@ -4536,7 +4252,7 @@
                   <a:srgbClr val="1C1717"/>
                 </a:solidFill>
               </a:rPr>
-              <a:t>Dataset</a:t>
+              <a:t>Runtime pipeline</a:t>
             </a:r>
           </a:p>
         </p:txBody>
@@ -4558,7 +4274,7 @@
           <a:noFill/>
         </p:spPr>
         <p:txBody>
-          <a:bodyPr wrap="square" lIns="0" tIns="0" rIns="0" bIns="0">
+          <a:bodyPr wrap="square" lIns="0" rIns="0" tIns="0" bIns="0">
             <a:spAutoFit/>
           </a:bodyPr>
           <a:lstStyle/>
@@ -4570,599 +4286,21 @@
                   <a:srgbClr val="78716C"/>
                 </a:solidFill>
               </a:rPr>
-              <a:t>All data lives in `data/*.jsonl`. Regenerated by `data/build_jsonl.py`.</a:t>
-            </a:r>
-          </a:p>
-        </p:txBody>
-      </p:sp>
-      <p:graphicFrame>
-        <p:nvGraphicFramePr>
-          <p:cNvPr id="5" name="Table 4"/>
-          <p:cNvGraphicFramePr>
-            <a:graphicFrameLocks noGrp="1"/>
-          </p:cNvGraphicFramePr>
-          <p:nvPr>
-            <p:extLst>
-              <p:ext uri="{D42A27DB-BD31-4B8C-83A1-F6EECF244321}">
-                <p14:modId xmlns:p14="http://schemas.microsoft.com/office/powerpoint/2010/main" val="1664175578"/>
-              </p:ext>
-            </p:extLst>
-          </p:nvPr>
-        </p:nvGraphicFramePr>
-        <p:xfrm>
-          <a:off x="457200" y="1735328"/>
-          <a:ext cx="11247120" cy="4297680"/>
-        </p:xfrm>
-        <a:graphic>
-          <a:graphicData uri="http://schemas.openxmlformats.org/drawingml/2006/table">
-            <a:tbl>
-              <a:tblPr firstRow="1" bandRow="1">
-                <a:tableStyleId>{5C22544A-7EE6-4342-B048-85BDC9FD1C3A}</a:tableStyleId>
-              </a:tblPr>
-              <a:tblGrid>
-                <a:gridCol w="3749040">
-                  <a:extLst>
-                    <a:ext uri="{9D8B030D-6E8A-4147-A177-3AD203B41FA5}">
-                      <a16:colId xmlns:a16="http://schemas.microsoft.com/office/drawing/2014/main" val="20000"/>
-                    </a:ext>
-                  </a:extLst>
-                </a:gridCol>
-                <a:gridCol w="3749040">
-                  <a:extLst>
-                    <a:ext uri="{9D8B030D-6E8A-4147-A177-3AD203B41FA5}">
-                      <a16:colId xmlns:a16="http://schemas.microsoft.com/office/drawing/2014/main" val="20001"/>
-                    </a:ext>
-                  </a:extLst>
-                </a:gridCol>
-                <a:gridCol w="3749040">
-                  <a:extLst>
-                    <a:ext uri="{9D8B030D-6E8A-4147-A177-3AD203B41FA5}">
-                      <a16:colId xmlns:a16="http://schemas.microsoft.com/office/drawing/2014/main" val="20002"/>
-                    </a:ext>
-                  </a:extLst>
-                </a:gridCol>
-              </a:tblGrid>
-              <a:tr h="477520">
-                <a:tc>
-                  <a:txBody>
-                    <a:bodyPr/>
-                    <a:lstStyle/>
-                    <a:p>
-                      <a:r>
-                        <a:rPr sz="1400" b="1" dirty="0">
-                          <a:solidFill>
-                            <a:srgbClr val="1C1717"/>
-                          </a:solidFill>
-                        </a:rPr>
-                        <a:t>File</a:t>
-                      </a:r>
-                    </a:p>
-                  </a:txBody>
-                  <a:tcPr/>
-                </a:tc>
-                <a:tc>
-                  <a:txBody>
-                    <a:bodyPr/>
-                    <a:lstStyle/>
-                    <a:p>
-                      <a:r>
-                        <a:rPr sz="1400" b="1">
-                          <a:solidFill>
-                            <a:srgbClr val="1C1717"/>
-                          </a:solidFill>
-                        </a:rPr>
-                        <a:t>Records</a:t>
-                      </a:r>
-                    </a:p>
-                  </a:txBody>
-                  <a:tcPr/>
-                </a:tc>
-                <a:tc>
-                  <a:txBody>
-                    <a:bodyPr/>
-                    <a:lstStyle/>
-                    <a:p>
-                      <a:r>
-                        <a:rPr sz="1400" b="1">
-                          <a:solidFill>
-                            <a:srgbClr val="1C1717"/>
-                          </a:solidFill>
-                        </a:rPr>
-                        <a:t>Description</a:t>
-                      </a:r>
-                    </a:p>
-                  </a:txBody>
-                  <a:tcPr/>
-                </a:tc>
-                <a:extLst>
-                  <a:ext uri="{0D108BD9-81ED-4DB2-BD59-A6C34878D82A}">
-                    <a16:rowId xmlns:a16="http://schemas.microsoft.com/office/drawing/2014/main" val="10000"/>
-                  </a:ext>
-                </a:extLst>
-              </a:tr>
-              <a:tr h="477520">
-                <a:tc>
-                  <a:txBody>
-                    <a:bodyPr/>
-                    <a:lstStyle/>
-                    <a:p>
-                      <a:r>
-                        <a:rPr sz="1400" dirty="0" err="1">
-                          <a:solidFill>
-                            <a:srgbClr val="1C1717"/>
-                          </a:solidFill>
-                        </a:rPr>
-                        <a:t>faqs.jsonl</a:t>
-                      </a:r>
-                      <a:endParaRPr sz="1400" dirty="0">
-                        <a:solidFill>
-                          <a:srgbClr val="1C1717"/>
-                        </a:solidFill>
-                      </a:endParaRPr>
-                    </a:p>
-                  </a:txBody>
-                  <a:tcPr/>
-                </a:tc>
-                <a:tc>
-                  <a:txBody>
-                    <a:bodyPr/>
-                    <a:lstStyle/>
-                    <a:p>
-                      <a:r>
-                        <a:rPr sz="1400">
-                          <a:solidFill>
-                            <a:srgbClr val="1C1717"/>
-                          </a:solidFill>
-                        </a:rPr>
-                        <a:t>169</a:t>
-                      </a:r>
-                    </a:p>
-                  </a:txBody>
-                  <a:tcPr/>
-                </a:tc>
-                <a:tc>
-                  <a:txBody>
-                    <a:bodyPr/>
-                    <a:lstStyle/>
-                    <a:p>
-                      <a:r>
-                        <a:rPr sz="1400">
-                          <a:solidFill>
-                            <a:srgbClr val="1C1717"/>
-                          </a:solidFill>
-                        </a:rPr>
-                        <a:t>Hand-written clinician-style FAQs (3 specialties)</a:t>
-                      </a:r>
-                    </a:p>
-                  </a:txBody>
-                  <a:tcPr/>
-                </a:tc>
-                <a:extLst>
-                  <a:ext uri="{0D108BD9-81ED-4DB2-BD59-A6C34878D82A}">
-                    <a16:rowId xmlns:a16="http://schemas.microsoft.com/office/drawing/2014/main" val="10001"/>
-                  </a:ext>
-                </a:extLst>
-              </a:tr>
-              <a:tr h="477520">
-                <a:tc>
-                  <a:txBody>
-                    <a:bodyPr/>
-                    <a:lstStyle/>
-                    <a:p>
-                      <a:r>
-                        <a:rPr sz="1400">
-                          <a:solidFill>
-                            <a:srgbClr val="1C1717"/>
-                          </a:solidFill>
-                        </a:rPr>
-                        <a:t>intents.jsonl</a:t>
-                      </a:r>
-                    </a:p>
-                  </a:txBody>
-                  <a:tcPr/>
-                </a:tc>
-                <a:tc>
-                  <a:txBody>
-                    <a:bodyPr/>
-                    <a:lstStyle/>
-                    <a:p>
-                      <a:r>
-                        <a:rPr sz="1400">
-                          <a:solidFill>
-                            <a:srgbClr val="1C1717"/>
-                          </a:solidFill>
-                        </a:rPr>
-                        <a:t>308</a:t>
-                      </a:r>
-                    </a:p>
-                  </a:txBody>
-                  <a:tcPr/>
-                </a:tc>
-                <a:tc>
-                  <a:txBody>
-                    <a:bodyPr/>
-                    <a:lstStyle/>
-                    <a:p>
-                      <a:r>
-                        <a:rPr sz="1400">
-                          <a:solidFill>
-                            <a:srgbClr val="1C1717"/>
-                          </a:solidFill>
-                        </a:rPr>
-                        <a:t>Curated intent training, 13 classes incl. meta</a:t>
-                      </a:r>
-                    </a:p>
-                  </a:txBody>
-                  <a:tcPr/>
-                </a:tc>
-                <a:extLst>
-                  <a:ext uri="{0D108BD9-81ED-4DB2-BD59-A6C34878D82A}">
-                    <a16:rowId xmlns:a16="http://schemas.microsoft.com/office/drawing/2014/main" val="10002"/>
-                  </a:ext>
-                </a:extLst>
-              </a:tr>
-              <a:tr h="477520">
-                <a:tc>
-                  <a:txBody>
-                    <a:bodyPr/>
-                    <a:lstStyle/>
-                    <a:p>
-                      <a:r>
-                        <a:rPr sz="1400">
-                          <a:solidFill>
-                            <a:srgbClr val="1C1717"/>
-                          </a:solidFill>
-                        </a:rPr>
-                        <a:t>intents_augmented.jsonl</a:t>
-                      </a:r>
-                    </a:p>
-                  </a:txBody>
-                  <a:tcPr/>
-                </a:tc>
-                <a:tc>
-                  <a:txBody>
-                    <a:bodyPr/>
-                    <a:lstStyle/>
-                    <a:p>
-                      <a:r>
-                        <a:rPr sz="1400">
-                          <a:solidFill>
-                            <a:srgbClr val="1C1717"/>
-                          </a:solidFill>
-                        </a:rPr>
-                        <a:t>1206</a:t>
-                      </a:r>
-                    </a:p>
-                  </a:txBody>
-                  <a:tcPr/>
-                </a:tc>
-                <a:tc>
-                  <a:txBody>
-                    <a:bodyPr/>
-                    <a:lstStyle/>
-                    <a:p>
-                      <a:r>
-                        <a:rPr sz="1400">
-                          <a:solidFill>
-                            <a:srgbClr val="1C1717"/>
-                          </a:solidFill>
-                        </a:rPr>
-                        <a:t>6-way augmentation: synonyms / typos / prefixes</a:t>
-                      </a:r>
-                    </a:p>
-                  </a:txBody>
-                  <a:tcPr/>
-                </a:tc>
-                <a:extLst>
-                  <a:ext uri="{0D108BD9-81ED-4DB2-BD59-A6C34878D82A}">
-                    <a16:rowId xmlns:a16="http://schemas.microsoft.com/office/drawing/2014/main" val="10003"/>
-                  </a:ext>
-                </a:extLst>
-              </a:tr>
-              <a:tr h="477520">
-                <a:tc>
-                  <a:txBody>
-                    <a:bodyPr/>
-                    <a:lstStyle/>
-                    <a:p>
-                      <a:r>
-                        <a:rPr sz="1400">
-                          <a:solidFill>
-                            <a:srgbClr val="1C1717"/>
-                          </a:solidFill>
-                        </a:rPr>
-                        <a:t>eval_queries.jsonl</a:t>
-                      </a:r>
-                    </a:p>
-                  </a:txBody>
-                  <a:tcPr/>
-                </a:tc>
-                <a:tc>
-                  <a:txBody>
-                    <a:bodyPr/>
-                    <a:lstStyle/>
-                    <a:p>
-                      <a:r>
-                        <a:rPr sz="1400">
-                          <a:solidFill>
-                            <a:srgbClr val="1C1717"/>
-                          </a:solidFill>
-                        </a:rPr>
-                        <a:t>116</a:t>
-                      </a:r>
-                    </a:p>
-                  </a:txBody>
-                  <a:tcPr/>
-                </a:tc>
-                <a:tc>
-                  <a:txBody>
-                    <a:bodyPr/>
-                    <a:lstStyle/>
-                    <a:p>
-                      <a:r>
-                        <a:rPr sz="1400">
-                          <a:solidFill>
-                            <a:srgbClr val="1C1717"/>
-                          </a:solidFill>
-                        </a:rPr>
-                        <a:t>Held-out queries with expected keywords</a:t>
-                      </a:r>
-                    </a:p>
-                  </a:txBody>
-                  <a:tcPr/>
-                </a:tc>
-                <a:extLst>
-                  <a:ext uri="{0D108BD9-81ED-4DB2-BD59-A6C34878D82A}">
-                    <a16:rowId xmlns:a16="http://schemas.microsoft.com/office/drawing/2014/main" val="10004"/>
-                  </a:ext>
-                </a:extLst>
-              </a:tr>
-              <a:tr h="477520">
-                <a:tc>
-                  <a:txBody>
-                    <a:bodyPr/>
-                    <a:lstStyle/>
-                    <a:p>
-                      <a:r>
-                        <a:rPr sz="1400">
-                          <a:solidFill>
-                            <a:srgbClr val="1C1717"/>
-                          </a:solidFill>
-                        </a:rPr>
-                        <a:t>ner_examples.jsonl</a:t>
-                      </a:r>
-                    </a:p>
-                  </a:txBody>
-                  <a:tcPr/>
-                </a:tc>
-                <a:tc>
-                  <a:txBody>
-                    <a:bodyPr/>
-                    <a:lstStyle/>
-                    <a:p>
-                      <a:r>
-                        <a:rPr sz="1400">
-                          <a:solidFill>
-                            <a:srgbClr val="1C1717"/>
-                          </a:solidFill>
-                        </a:rPr>
-                        <a:t>32</a:t>
-                      </a:r>
-                    </a:p>
-                  </a:txBody>
-                  <a:tcPr/>
-                </a:tc>
-                <a:tc>
-                  <a:txBody>
-                    <a:bodyPr/>
-                    <a:lstStyle/>
-                    <a:p>
-                      <a:r>
-                        <a:rPr sz="1400">
-                          <a:solidFill>
-                            <a:srgbClr val="1C1717"/>
-                          </a:solidFill>
-                        </a:rPr>
-                        <a:t>BIO-tagged for CRF training</a:t>
-                      </a:r>
-                    </a:p>
-                  </a:txBody>
-                  <a:tcPr/>
-                </a:tc>
-                <a:extLst>
-                  <a:ext uri="{0D108BD9-81ED-4DB2-BD59-A6C34878D82A}">
-                    <a16:rowId xmlns:a16="http://schemas.microsoft.com/office/drawing/2014/main" val="10005"/>
-                  </a:ext>
-                </a:extLst>
-              </a:tr>
-              <a:tr h="477520">
-                <a:tc>
-                  <a:txBody>
-                    <a:bodyPr/>
-                    <a:lstStyle/>
-                    <a:p>
-                      <a:r>
-                        <a:rPr sz="1400">
-                          <a:solidFill>
-                            <a:srgbClr val="1C1717"/>
-                          </a:solidFill>
-                        </a:rPr>
-                        <a:t>sentiment_lexicon.jsonl</a:t>
-                      </a:r>
-                    </a:p>
-                  </a:txBody>
-                  <a:tcPr/>
-                </a:tc>
-                <a:tc>
-                  <a:txBody>
-                    <a:bodyPr/>
-                    <a:lstStyle/>
-                    <a:p>
-                      <a:r>
-                        <a:rPr sz="1400">
-                          <a:solidFill>
-                            <a:srgbClr val="1C1717"/>
-                          </a:solidFill>
-                        </a:rPr>
-                        <a:t>96</a:t>
-                      </a:r>
-                    </a:p>
-                  </a:txBody>
-                  <a:tcPr/>
-                </a:tc>
-                <a:tc>
-                  <a:txBody>
-                    <a:bodyPr/>
-                    <a:lstStyle/>
-                    <a:p>
-                      <a:r>
-                        <a:rPr sz="1400">
-                          <a:solidFill>
-                            <a:srgbClr val="1C1717"/>
-                          </a:solidFill>
-                        </a:rPr>
-                        <a:t>Polarity weights + intensifiers</a:t>
-                      </a:r>
-                    </a:p>
-                  </a:txBody>
-                  <a:tcPr/>
-                </a:tc>
-                <a:extLst>
-                  <a:ext uri="{0D108BD9-81ED-4DB2-BD59-A6C34878D82A}">
-                    <a16:rowId xmlns:a16="http://schemas.microsoft.com/office/drawing/2014/main" val="10006"/>
-                  </a:ext>
-                </a:extLst>
-              </a:tr>
-              <a:tr h="477520">
-                <a:tc>
-                  <a:txBody>
-                    <a:bodyPr/>
-                    <a:lstStyle/>
-                    <a:p>
-                      <a:r>
-                        <a:rPr sz="1400">
-                          <a:solidFill>
-                            <a:srgbClr val="1C1717"/>
-                          </a:solidFill>
-                        </a:rPr>
-                        <a:t>chat_logs.jsonl</a:t>
-                      </a:r>
-                    </a:p>
-                  </a:txBody>
-                  <a:tcPr/>
-                </a:tc>
-                <a:tc>
-                  <a:txBody>
-                    <a:bodyPr/>
-                    <a:lstStyle/>
-                    <a:p>
-                      <a:r>
-                        <a:rPr sz="1400">
-                          <a:solidFill>
-                            <a:srgbClr val="1C1717"/>
-                          </a:solidFill>
-                        </a:rPr>
-                        <a:t>18</a:t>
-                      </a:r>
-                    </a:p>
-                  </a:txBody>
-                  <a:tcPr/>
-                </a:tc>
-                <a:tc>
-                  <a:txBody>
-                    <a:bodyPr/>
-                    <a:lstStyle/>
-                    <a:p>
-                      <a:r>
-                        <a:rPr sz="1400">
-                          <a:solidFill>
-                            <a:srgbClr val="1C1717"/>
-                          </a:solidFill>
-                        </a:rPr>
-                        <a:t>Synthetic patient sessions</a:t>
-                      </a:r>
-                    </a:p>
-                  </a:txBody>
-                  <a:tcPr/>
-                </a:tc>
-                <a:extLst>
-                  <a:ext uri="{0D108BD9-81ED-4DB2-BD59-A6C34878D82A}">
-                    <a16:rowId xmlns:a16="http://schemas.microsoft.com/office/drawing/2014/main" val="10007"/>
-                  </a:ext>
-                </a:extLst>
-              </a:tr>
-              <a:tr h="477520">
-                <a:tc>
-                  <a:txBody>
-                    <a:bodyPr/>
-                    <a:lstStyle/>
-                    <a:p>
-                      <a:r>
-                        <a:rPr sz="1400">
-                          <a:solidFill>
-                            <a:srgbClr val="1C1717"/>
-                          </a:solidFill>
-                        </a:rPr>
-                        <a:t>kg_triples.jsonl</a:t>
-                      </a:r>
-                    </a:p>
-                  </a:txBody>
-                  <a:tcPr/>
-                </a:tc>
-                <a:tc>
-                  <a:txBody>
-                    <a:bodyPr/>
-                    <a:lstStyle/>
-                    <a:p>
-                      <a:r>
-                        <a:rPr sz="1400">
-                          <a:solidFill>
-                            <a:srgbClr val="1C1717"/>
-                          </a:solidFill>
-                        </a:rPr>
-                        <a:t>518</a:t>
-                      </a:r>
-                    </a:p>
-                  </a:txBody>
-                  <a:tcPr/>
-                </a:tc>
-                <a:tc>
-                  <a:txBody>
-                    <a:bodyPr/>
-                    <a:lstStyle/>
-                    <a:p>
-                      <a:r>
-                        <a:rPr sz="1400" dirty="0">
-                          <a:solidFill>
-                            <a:srgbClr val="1C1717"/>
-                          </a:solidFill>
-                        </a:rPr>
-                        <a:t>Auto-mined (subject, predicate, object) triples</a:t>
-                      </a:r>
-                    </a:p>
-                  </a:txBody>
-                  <a:tcPr/>
-                </a:tc>
-                <a:extLst>
-                  <a:ext uri="{0D108BD9-81ED-4DB2-BD59-A6C34878D82A}">
-                    <a16:rowId xmlns:a16="http://schemas.microsoft.com/office/drawing/2014/main" val="10008"/>
-                  </a:ext>
-                </a:extLst>
-              </a:tr>
-            </a:tbl>
-          </a:graphicData>
-        </a:graphic>
-      </p:graphicFrame>
-      <p:sp>
-        <p:nvSpPr>
-          <p:cNvPr id="6" name="TextBox 5"/>
+              <a:t>Each user turn flows top-to-bottom in ~22 ms p50.</a:t>
+            </a:r>
+          </a:p>
+        </p:txBody>
+      </p:sp>
+      <p:sp>
+        <p:nvSpPr>
+          <p:cNvPr id="5" name="TextBox 4"/>
           <p:cNvSpPr txBox="1"/>
           <p:nvPr/>
         </p:nvSpPr>
         <p:spPr>
           <a:xfrm>
-            <a:off x="457200" y="6309360"/>
-            <a:ext cx="10972800" cy="365760"/>
+            <a:off x="640080" y="1783080"/>
+            <a:ext cx="10972800" cy="4572000"/>
           </a:xfrm>
           <a:prstGeom prst="rect">
             <a:avLst/>
@@ -5170,19 +4308,141 @@
           <a:noFill/>
         </p:spPr>
         <p:txBody>
-          <a:bodyPr wrap="square" lIns="0" tIns="0" rIns="0" bIns="0">
+          <a:bodyPr wrap="square">
             <a:spAutoFit/>
           </a:bodyPr>
           <a:lstStyle/>
           <a:p>
             <a:pPr algn="l"/>
             <a:r>
-              <a:rPr sz="1200" b="0">
-                <a:solidFill>
-                  <a:srgbClr val="78716C"/>
-                </a:solidFill>
-              </a:rPr>
-              <a:t>Counts persist live in MongoDB on every chat match → popular FAQs surface to the top.</a:t>
+              <a:rPr sz="1400" b="1">
+                <a:solidFill>
+                  <a:srgbClr val="1C1717"/>
+                </a:solidFill>
+              </a:rPr>
+              <a:t>•  Preprocess</a:t>
+            </a:r>
+            <a:r>
+              <a:rPr sz="1300">
+                <a:solidFill>
+                  <a:srgbClr val="78716C"/>
+                </a:solidFill>
+              </a:rPr>
+              <a:t>  — PHI scrub → Roman-Urdu expand → coreference → context augment → spell-correct.</a:t>
+            </a:r>
+          </a:p>
+          <a:p>
+            <a:pPr algn="l"/>
+            <a:r>
+              <a:rPr sz="1400" b="1">
+                <a:solidFill>
+                  <a:srgbClr val="1C1717"/>
+                </a:solidFill>
+              </a:rPr>
+              <a:t>•  Understanding</a:t>
+            </a:r>
+            <a:r>
+              <a:rPr sz="1300">
+                <a:solidFill>
+                  <a:srgbClr val="78716C"/>
+                </a:solidFill>
+              </a:rPr>
+              <a:t>  — Tokeniser · POS (lexicon + HMM) · NER (dict + perceptron + CRF) · negation · sentiment · triage · intent (NB / MLP / Transformer).</a:t>
+            </a:r>
+          </a:p>
+          <a:p>
+            <a:pPr algn="l"/>
+            <a:r>
+              <a:rPr sz="1400" b="1">
+                <a:solidFill>
+                  <a:srgbClr val="1C1717"/>
+                </a:solidFill>
+              </a:rPr>
+              <a:t>•  Retrieve (5 channels)</a:t>
+            </a:r>
+            <a:r>
+              <a:rPr sz="1300">
+                <a:solidFill>
+                  <a:srgbClr val="78716C"/>
+                </a:solidFill>
+              </a:rPr>
+              <a:t>  — TF-IDF word 0.20 · TF-IDF char 0.45 · BM25 0.25 · LSA 0.05 · PPMI 0.05.</a:t>
+            </a:r>
+          </a:p>
+          <a:p>
+            <a:pPr algn="l"/>
+            <a:r>
+              <a:rPr sz="1400" b="1">
+                <a:solidFill>
+                  <a:srgbClr val="1C1717"/>
+                </a:solidFill>
+              </a:rPr>
+              <a:t>•  Rerank</a:t>
+            </a:r>
+            <a:r>
+              <a:rPr sz="1300">
+                <a:solidFill>
+                  <a:srgbClr val="78716C"/>
+                </a:solidFill>
+              </a:rPr>
+              <a:t>  — PRF (Rocchio) → LTR (LogReg, 14 features) → MMR diversify.</a:t>
+            </a:r>
+          </a:p>
+          <a:p>
+            <a:pPr algn="l"/>
+            <a:r>
+              <a:rPr sz="1400" b="1">
+                <a:solidFill>
+                  <a:srgbClr val="1C1717"/>
+                </a:solidFill>
+              </a:rPr>
+              <a:t>•  Dialog</a:t>
+            </a:r>
+            <a:r>
+              <a:rPr sz="1300">
+                <a:solidFill>
+                  <a:srgbClr val="78716C"/>
+                </a:solidFill>
+              </a:rPr>
+              <a:t>  — Empathic opener · triage banner · clarification · disambiguation card · stem-overlap highlight.</a:t>
+            </a:r>
+          </a:p>
+          <a:p>
+            <a:pPr algn="l"/>
+            <a:r>
+              <a:rPr sz="1400" b="1">
+                <a:solidFill>
+                  <a:srgbClr val="1C1717"/>
+                </a:solidFill>
+              </a:rPr>
+              <a:t>•  Reply</a:t>
+            </a:r>
+            <a:r>
+              <a:rPr sz="1300">
+                <a:solidFill>
+                  <a:srgbClr val="78716C"/>
+                </a:solidFill>
+              </a:rPr>
+              <a:t>  — answer + matched FAQ + score breakdown + NLP analysis + dialog meta.</a:t>
+            </a:r>
+          </a:p>
+          <a:p>
+            <a:pPr algn="l"/>
+            <a:r>
+              <a:rPr sz="1400" b="1">
+                <a:solidFill>
+                  <a:srgbClr val="1C1717"/>
+                </a:solidFill>
+              </a:rPr>
+              <a:t>•  Offline pipeline</a:t>
+            </a:r>
+            <a:r>
+              <a:rPr sz="1300">
+                <a:solidFill>
+                  <a:srgbClr val="78716C"/>
+                </a:solidFill>
+              </a:rPr>
+              <a:t>  — Chat-log → segment → normalise → embed (TF-IDF) → cluster (K-Means) → select → polish → publish.</a:t>
             </a:r>
           </a:p>
         </p:txBody>
@@ -5195,8 +4455,8 @@
 </p:sld>
 </file>
 
-<file path=ppt/slides/slide5.xml><?xml version="1.0" encoding="utf-8"?>
-<p:sld xmlns:a="http://schemas.openxmlformats.org/drawingml/2006/main" xmlns:r="http://schemas.openxmlformats.org/officeDocument/2006/relationships" xmlns:p="http://schemas.openxmlformats.org/presentationml/2006/main">
+<file path=ppt/slides/slide4.xml><?xml version="1.0" encoding="utf-8"?>
+<p:sld xmlns:a="http://schemas.openxmlformats.org/drawingml/2006/main" xmlns:p="http://schemas.openxmlformats.org/presentationml/2006/main" xmlns:r="http://schemas.openxmlformats.org/officeDocument/2006/relationships">
   <p:cSld>
     <p:spTree>
       <p:nvGrpSpPr>
@@ -5204,14 +4464,7 @@
         <p:cNvGrpSpPr/>
         <p:nvPr/>
       </p:nvGrpSpPr>
-      <p:grpSpPr>
-        <a:xfrm>
-          <a:off x="0" y="0"/>
-          <a:ext cx="0" cy="0"/>
-          <a:chOff x="0" y="0"/>
-          <a:chExt cx="0" cy="0"/>
-        </a:xfrm>
-      </p:grpSpPr>
+      <p:grpSpPr/>
       <p:sp>
         <p:nvSpPr>
           <p:cNvPr id="2" name="Rectangle 1"/>
@@ -5252,7 +4505,6 @@
           <a:lstStyle/>
           <a:p>
             <a:pPr algn="ctr"/>
-            <a:endParaRPr/>
           </a:p>
         </p:txBody>
       </p:sp>
@@ -5273,19 +4525,19 @@
           <a:noFill/>
         </p:spPr>
         <p:txBody>
-          <a:bodyPr wrap="square" lIns="0" tIns="0" rIns="0" bIns="0">
+          <a:bodyPr wrap="square" lIns="0" rIns="0" tIns="0" bIns="0">
             <a:spAutoFit/>
           </a:bodyPr>
           <a:lstStyle/>
           <a:p>
             <a:pPr algn="l"/>
             <a:r>
-              <a:rPr sz="3000" b="1">
-                <a:solidFill>
-                  <a:srgbClr val="1C1717"/>
-                </a:solidFill>
-              </a:rPr>
-              <a:t>Models — every one trained from scratch</a:t>
+              <a:rPr sz="3200" b="1">
+                <a:solidFill>
+                  <a:srgbClr val="1C1717"/>
+                </a:solidFill>
+              </a:rPr>
+              <a:t>Dataset</a:t>
             </a:r>
           </a:p>
         </p:txBody>
@@ -5298,8 +4550,8 @@
         </p:nvSpPr>
         <p:spPr>
           <a:xfrm>
-            <a:off x="457200" y="1097280"/>
-            <a:ext cx="5394960" cy="365760"/>
+            <a:off x="457200" y="1143000"/>
+            <a:ext cx="10972800" cy="457200"/>
           </a:xfrm>
           <a:prstGeom prst="rect">
             <a:avLst/>
@@ -5307,33 +4559,537 @@
           <a:noFill/>
         </p:spPr>
         <p:txBody>
-          <a:bodyPr wrap="square" lIns="0" tIns="0" rIns="0" bIns="0">
+          <a:bodyPr wrap="square" lIns="0" rIns="0" tIns="0" bIns="0">
             <a:spAutoFit/>
           </a:bodyPr>
           <a:lstStyle/>
           <a:p>
             <a:pPr algn="l"/>
             <a:r>
-              <a:rPr sz="1500" b="1">
-                <a:solidFill>
-                  <a:srgbClr val="1C1717"/>
-                </a:solidFill>
-              </a:rPr>
-              <a:t>Classical numpy (myml/)</a:t>
-            </a:r>
-          </a:p>
-        </p:txBody>
-      </p:sp>
-      <p:sp>
-        <p:nvSpPr>
-          <p:cNvPr id="5" name="TextBox 4"/>
+              <a:rPr sz="1400" b="0">
+                <a:solidFill>
+                  <a:srgbClr val="78716C"/>
+                </a:solidFill>
+              </a:rPr>
+              <a:t>All data lives in `data/*.jsonl`. Regenerated by `data/build_jsonl.py`.</a:t>
+            </a:r>
+          </a:p>
+        </p:txBody>
+      </p:sp>
+      <p:graphicFrame>
+        <p:nvGraphicFramePr>
+          <p:cNvPr id="5" name="Table 4"/>
+          <p:cNvGraphicFramePr>
+            <a:graphicFrameLocks noGrp="1"/>
+          </p:cNvGraphicFramePr>
+          <p:nvPr/>
+        </p:nvGraphicFramePr>
+        <p:xfrm>
+          <a:off x="457200" y="1691640"/>
+          <a:ext cx="11247120" cy="4297680"/>
+        </p:xfrm>
+        <a:graphic>
+          <a:graphicData uri="http://schemas.openxmlformats.org/drawingml/2006/table">
+            <a:tbl>
+              <a:tblPr firstRow="1" bandRow="1">
+                <a:tableStyleId>{5C22544A-7EE6-4342-B048-85BDC9FD1C3A}</a:tableStyleId>
+              </a:tblPr>
+              <a:tblGrid>
+                <a:gridCol w="3749040"/>
+                <a:gridCol w="3749040"/>
+                <a:gridCol w="3749040"/>
+              </a:tblGrid>
+              <a:tr h="477520">
+                <a:tc>
+                  <a:txBody>
+                    <a:bodyPr/>
+                    <a:lstStyle/>
+                    <a:p>
+                      <a:r>
+                        <a:rPr sz="1200" b="1">
+                          <a:solidFill>
+                            <a:srgbClr val="1C1717"/>
+                          </a:solidFill>
+                        </a:rPr>
+                        <a:t>File</a:t>
+                      </a:r>
+                    </a:p>
+                  </a:txBody>
+                  <a:tcPr/>
+                </a:tc>
+                <a:tc>
+                  <a:txBody>
+                    <a:bodyPr/>
+                    <a:lstStyle/>
+                    <a:p>
+                      <a:r>
+                        <a:rPr sz="1200" b="1">
+                          <a:solidFill>
+                            <a:srgbClr val="1C1717"/>
+                          </a:solidFill>
+                        </a:rPr>
+                        <a:t>Records</a:t>
+                      </a:r>
+                    </a:p>
+                  </a:txBody>
+                  <a:tcPr/>
+                </a:tc>
+                <a:tc>
+                  <a:txBody>
+                    <a:bodyPr/>
+                    <a:lstStyle/>
+                    <a:p>
+                      <a:r>
+                        <a:rPr sz="1200" b="1">
+                          <a:solidFill>
+                            <a:srgbClr val="1C1717"/>
+                          </a:solidFill>
+                        </a:rPr>
+                        <a:t>Description</a:t>
+                      </a:r>
+                    </a:p>
+                  </a:txBody>
+                  <a:tcPr/>
+                </a:tc>
+              </a:tr>
+              <a:tr h="477520">
+                <a:tc>
+                  <a:txBody>
+                    <a:bodyPr/>
+                    <a:lstStyle/>
+                    <a:p>
+                      <a:r>
+                        <a:rPr sz="1200">
+                          <a:solidFill>
+                            <a:srgbClr val="1C1717"/>
+                          </a:solidFill>
+                        </a:rPr>
+                        <a:t>faqs.jsonl</a:t>
+                      </a:r>
+                    </a:p>
+                  </a:txBody>
+                  <a:tcPr/>
+                </a:tc>
+                <a:tc>
+                  <a:txBody>
+                    <a:bodyPr/>
+                    <a:lstStyle/>
+                    <a:p>
+                      <a:r>
+                        <a:rPr sz="1200">
+                          <a:solidFill>
+                            <a:srgbClr val="1C1717"/>
+                          </a:solidFill>
+                        </a:rPr>
+                        <a:t>169</a:t>
+                      </a:r>
+                    </a:p>
+                  </a:txBody>
+                  <a:tcPr/>
+                </a:tc>
+                <a:tc>
+                  <a:txBody>
+                    <a:bodyPr/>
+                    <a:lstStyle/>
+                    <a:p>
+                      <a:r>
+                        <a:rPr sz="1200">
+                          <a:solidFill>
+                            <a:srgbClr val="1C1717"/>
+                          </a:solidFill>
+                        </a:rPr>
+                        <a:t>Hand-written clinician-style FAQs (3 specialties)</a:t>
+                      </a:r>
+                    </a:p>
+                  </a:txBody>
+                  <a:tcPr/>
+                </a:tc>
+              </a:tr>
+              <a:tr h="477520">
+                <a:tc>
+                  <a:txBody>
+                    <a:bodyPr/>
+                    <a:lstStyle/>
+                    <a:p>
+                      <a:r>
+                        <a:rPr sz="1200">
+                          <a:solidFill>
+                            <a:srgbClr val="1C1717"/>
+                          </a:solidFill>
+                        </a:rPr>
+                        <a:t>intents.jsonl</a:t>
+                      </a:r>
+                    </a:p>
+                  </a:txBody>
+                  <a:tcPr/>
+                </a:tc>
+                <a:tc>
+                  <a:txBody>
+                    <a:bodyPr/>
+                    <a:lstStyle/>
+                    <a:p>
+                      <a:r>
+                        <a:rPr sz="1200">
+                          <a:solidFill>
+                            <a:srgbClr val="1C1717"/>
+                          </a:solidFill>
+                        </a:rPr>
+                        <a:t>308</a:t>
+                      </a:r>
+                    </a:p>
+                  </a:txBody>
+                  <a:tcPr/>
+                </a:tc>
+                <a:tc>
+                  <a:txBody>
+                    <a:bodyPr/>
+                    <a:lstStyle/>
+                    <a:p>
+                      <a:r>
+                        <a:rPr sz="1200">
+                          <a:solidFill>
+                            <a:srgbClr val="1C1717"/>
+                          </a:solidFill>
+                        </a:rPr>
+                        <a:t>Curated intent training, 13 classes incl. meta</a:t>
+                      </a:r>
+                    </a:p>
+                  </a:txBody>
+                  <a:tcPr/>
+                </a:tc>
+              </a:tr>
+              <a:tr h="477520">
+                <a:tc>
+                  <a:txBody>
+                    <a:bodyPr/>
+                    <a:lstStyle/>
+                    <a:p>
+                      <a:r>
+                        <a:rPr sz="1200">
+                          <a:solidFill>
+                            <a:srgbClr val="1C1717"/>
+                          </a:solidFill>
+                        </a:rPr>
+                        <a:t>intents_augmented.jsonl</a:t>
+                      </a:r>
+                    </a:p>
+                  </a:txBody>
+                  <a:tcPr/>
+                </a:tc>
+                <a:tc>
+                  <a:txBody>
+                    <a:bodyPr/>
+                    <a:lstStyle/>
+                    <a:p>
+                      <a:r>
+                        <a:rPr sz="1200">
+                          <a:solidFill>
+                            <a:srgbClr val="1C1717"/>
+                          </a:solidFill>
+                        </a:rPr>
+                        <a:t>1206</a:t>
+                      </a:r>
+                    </a:p>
+                  </a:txBody>
+                  <a:tcPr/>
+                </a:tc>
+                <a:tc>
+                  <a:txBody>
+                    <a:bodyPr/>
+                    <a:lstStyle/>
+                    <a:p>
+                      <a:r>
+                        <a:rPr sz="1200">
+                          <a:solidFill>
+                            <a:srgbClr val="1C1717"/>
+                          </a:solidFill>
+                        </a:rPr>
+                        <a:t>6-way augmentation: synonyms / typos / prefixes</a:t>
+                      </a:r>
+                    </a:p>
+                  </a:txBody>
+                  <a:tcPr/>
+                </a:tc>
+              </a:tr>
+              <a:tr h="477520">
+                <a:tc>
+                  <a:txBody>
+                    <a:bodyPr/>
+                    <a:lstStyle/>
+                    <a:p>
+                      <a:r>
+                        <a:rPr sz="1200">
+                          <a:solidFill>
+                            <a:srgbClr val="1C1717"/>
+                          </a:solidFill>
+                        </a:rPr>
+                        <a:t>eval_queries.jsonl</a:t>
+                      </a:r>
+                    </a:p>
+                  </a:txBody>
+                  <a:tcPr/>
+                </a:tc>
+                <a:tc>
+                  <a:txBody>
+                    <a:bodyPr/>
+                    <a:lstStyle/>
+                    <a:p>
+                      <a:r>
+                        <a:rPr sz="1200">
+                          <a:solidFill>
+                            <a:srgbClr val="1C1717"/>
+                          </a:solidFill>
+                        </a:rPr>
+                        <a:t>116</a:t>
+                      </a:r>
+                    </a:p>
+                  </a:txBody>
+                  <a:tcPr/>
+                </a:tc>
+                <a:tc>
+                  <a:txBody>
+                    <a:bodyPr/>
+                    <a:lstStyle/>
+                    <a:p>
+                      <a:r>
+                        <a:rPr sz="1200">
+                          <a:solidFill>
+                            <a:srgbClr val="1C1717"/>
+                          </a:solidFill>
+                        </a:rPr>
+                        <a:t>Held-out queries with expected keywords</a:t>
+                      </a:r>
+                    </a:p>
+                  </a:txBody>
+                  <a:tcPr/>
+                </a:tc>
+              </a:tr>
+              <a:tr h="477520">
+                <a:tc>
+                  <a:txBody>
+                    <a:bodyPr/>
+                    <a:lstStyle/>
+                    <a:p>
+                      <a:r>
+                        <a:rPr sz="1200">
+                          <a:solidFill>
+                            <a:srgbClr val="1C1717"/>
+                          </a:solidFill>
+                        </a:rPr>
+                        <a:t>ner_examples.jsonl</a:t>
+                      </a:r>
+                    </a:p>
+                  </a:txBody>
+                  <a:tcPr/>
+                </a:tc>
+                <a:tc>
+                  <a:txBody>
+                    <a:bodyPr/>
+                    <a:lstStyle/>
+                    <a:p>
+                      <a:r>
+                        <a:rPr sz="1200">
+                          <a:solidFill>
+                            <a:srgbClr val="1C1717"/>
+                          </a:solidFill>
+                        </a:rPr>
+                        <a:t>32</a:t>
+                      </a:r>
+                    </a:p>
+                  </a:txBody>
+                  <a:tcPr/>
+                </a:tc>
+                <a:tc>
+                  <a:txBody>
+                    <a:bodyPr/>
+                    <a:lstStyle/>
+                    <a:p>
+                      <a:r>
+                        <a:rPr sz="1200">
+                          <a:solidFill>
+                            <a:srgbClr val="1C1717"/>
+                          </a:solidFill>
+                        </a:rPr>
+                        <a:t>BIO-tagged for CRF training</a:t>
+                      </a:r>
+                    </a:p>
+                  </a:txBody>
+                  <a:tcPr/>
+                </a:tc>
+              </a:tr>
+              <a:tr h="477520">
+                <a:tc>
+                  <a:txBody>
+                    <a:bodyPr/>
+                    <a:lstStyle/>
+                    <a:p>
+                      <a:r>
+                        <a:rPr sz="1200">
+                          <a:solidFill>
+                            <a:srgbClr val="1C1717"/>
+                          </a:solidFill>
+                        </a:rPr>
+                        <a:t>sentiment_lexicon.jsonl</a:t>
+                      </a:r>
+                    </a:p>
+                  </a:txBody>
+                  <a:tcPr/>
+                </a:tc>
+                <a:tc>
+                  <a:txBody>
+                    <a:bodyPr/>
+                    <a:lstStyle/>
+                    <a:p>
+                      <a:r>
+                        <a:rPr sz="1200">
+                          <a:solidFill>
+                            <a:srgbClr val="1C1717"/>
+                          </a:solidFill>
+                        </a:rPr>
+                        <a:t>96</a:t>
+                      </a:r>
+                    </a:p>
+                  </a:txBody>
+                  <a:tcPr/>
+                </a:tc>
+                <a:tc>
+                  <a:txBody>
+                    <a:bodyPr/>
+                    <a:lstStyle/>
+                    <a:p>
+                      <a:r>
+                        <a:rPr sz="1200">
+                          <a:solidFill>
+                            <a:srgbClr val="1C1717"/>
+                          </a:solidFill>
+                        </a:rPr>
+                        <a:t>Polarity weights + intensifiers</a:t>
+                      </a:r>
+                    </a:p>
+                  </a:txBody>
+                  <a:tcPr/>
+                </a:tc>
+              </a:tr>
+              <a:tr h="477520">
+                <a:tc>
+                  <a:txBody>
+                    <a:bodyPr/>
+                    <a:lstStyle/>
+                    <a:p>
+                      <a:r>
+                        <a:rPr sz="1200">
+                          <a:solidFill>
+                            <a:srgbClr val="1C1717"/>
+                          </a:solidFill>
+                        </a:rPr>
+                        <a:t>chat_logs.jsonl</a:t>
+                      </a:r>
+                    </a:p>
+                  </a:txBody>
+                  <a:tcPr/>
+                </a:tc>
+                <a:tc>
+                  <a:txBody>
+                    <a:bodyPr/>
+                    <a:lstStyle/>
+                    <a:p>
+                      <a:r>
+                        <a:rPr sz="1200">
+                          <a:solidFill>
+                            <a:srgbClr val="1C1717"/>
+                          </a:solidFill>
+                        </a:rPr>
+                        <a:t>18</a:t>
+                      </a:r>
+                    </a:p>
+                  </a:txBody>
+                  <a:tcPr/>
+                </a:tc>
+                <a:tc>
+                  <a:txBody>
+                    <a:bodyPr/>
+                    <a:lstStyle/>
+                    <a:p>
+                      <a:r>
+                        <a:rPr sz="1200">
+                          <a:solidFill>
+                            <a:srgbClr val="1C1717"/>
+                          </a:solidFill>
+                        </a:rPr>
+                        <a:t>Synthetic patient sessions</a:t>
+                      </a:r>
+                    </a:p>
+                  </a:txBody>
+                  <a:tcPr/>
+                </a:tc>
+              </a:tr>
+              <a:tr h="477520">
+                <a:tc>
+                  <a:txBody>
+                    <a:bodyPr/>
+                    <a:lstStyle/>
+                    <a:p>
+                      <a:r>
+                        <a:rPr sz="1200">
+                          <a:solidFill>
+                            <a:srgbClr val="1C1717"/>
+                          </a:solidFill>
+                        </a:rPr>
+                        <a:t>kg_triples.jsonl</a:t>
+                      </a:r>
+                    </a:p>
+                  </a:txBody>
+                  <a:tcPr/>
+                </a:tc>
+                <a:tc>
+                  <a:txBody>
+                    <a:bodyPr/>
+                    <a:lstStyle/>
+                    <a:p>
+                      <a:r>
+                        <a:rPr sz="1200">
+                          <a:solidFill>
+                            <a:srgbClr val="1C1717"/>
+                          </a:solidFill>
+                        </a:rPr>
+                        <a:t>518</a:t>
+                      </a:r>
+                    </a:p>
+                  </a:txBody>
+                  <a:tcPr/>
+                </a:tc>
+                <a:tc>
+                  <a:txBody>
+                    <a:bodyPr/>
+                    <a:lstStyle/>
+                    <a:p>
+                      <a:r>
+                        <a:rPr sz="1200">
+                          <a:solidFill>
+                            <a:srgbClr val="1C1717"/>
+                          </a:solidFill>
+                        </a:rPr>
+                        <a:t>Auto-mined (subject, predicate, object) triples</a:t>
+                      </a:r>
+                    </a:p>
+                  </a:txBody>
+                  <a:tcPr/>
+                </a:tc>
+              </a:tr>
+            </a:tbl>
+          </a:graphicData>
+        </a:graphic>
+      </p:graphicFrame>
+      <p:sp>
+        <p:nvSpPr>
+          <p:cNvPr id="6" name="TextBox 5"/>
           <p:cNvSpPr txBox="1"/>
           <p:nvPr/>
         </p:nvSpPr>
         <p:spPr>
           <a:xfrm>
-            <a:off x="502920" y="1463040"/>
-            <a:ext cx="5486400" cy="4093428"/>
+            <a:off x="457200" y="6309360"/>
+            <a:ext cx="10972800" cy="365760"/>
           </a:xfrm>
           <a:prstGeom prst="rect">
             <a:avLst/>
@@ -5341,483 +5097,19 @@
           <a:noFill/>
         </p:spPr>
         <p:txBody>
-          <a:bodyPr wrap="square">
+          <a:bodyPr wrap="square" lIns="0" rIns="0" tIns="0" bIns="0">
             <a:spAutoFit/>
           </a:bodyPr>
           <a:lstStyle/>
           <a:p>
             <a:pPr algn="l"/>
             <a:r>
-              <a:rPr sz="2000" b="1">
-                <a:solidFill>
-                  <a:srgbClr val="1C1717"/>
-                </a:solidFill>
-              </a:rPr>
-              <a:t>•  TF-IDF</a:t>
-            </a:r>
-            <a:r>
-              <a:rPr sz="2000">
-                <a:solidFill>
-                  <a:srgbClr val="78716C"/>
-                </a:solidFill>
-              </a:rPr>
-              <a:t>  — word + char n-grams, sublinear TF</a:t>
-            </a:r>
-          </a:p>
-          <a:p>
-            <a:pPr algn="l"/>
-            <a:r>
-              <a:rPr sz="2000" b="1">
-                <a:solidFill>
-                  <a:srgbClr val="1C1717"/>
-                </a:solidFill>
-              </a:rPr>
-              <a:t>•  BM25 Okapi</a:t>
-            </a:r>
-            <a:r>
-              <a:rPr sz="2000">
-                <a:solidFill>
-                  <a:srgbClr val="78716C"/>
-                </a:solidFill>
-              </a:rPr>
-              <a:t>  — Lucene-style smoothed IDF</a:t>
-            </a:r>
-          </a:p>
-          <a:p>
-            <a:pPr algn="l"/>
-            <a:r>
-              <a:rPr sz="2000" b="1">
-                <a:solidFill>
-                  <a:srgbClr val="1C1717"/>
-                </a:solidFill>
-              </a:rPr>
-              <a:t>•  Naive Bayes</a:t>
-            </a:r>
-            <a:r>
-              <a:rPr sz="2000">
-                <a:solidFill>
-                  <a:srgbClr val="78716C"/>
-                </a:solidFill>
-              </a:rPr>
-              <a:t>  — Laplace smoothing</a:t>
-            </a:r>
-          </a:p>
-          <a:p>
-            <a:pPr algn="l"/>
-            <a:r>
-              <a:rPr sz="2000" b="1">
-                <a:solidFill>
-                  <a:srgbClr val="1C1717"/>
-                </a:solidFill>
-              </a:rPr>
-              <a:t>•  Logistic Reg.</a:t>
-            </a:r>
-            <a:r>
-              <a:rPr sz="2000">
-                <a:solidFill>
-                  <a:srgbClr val="78716C"/>
-                </a:solidFill>
-              </a:rPr>
-              <a:t>  — batch GD + L2 + class weights</a:t>
-            </a:r>
-          </a:p>
-          <a:p>
-            <a:pPr algn="l"/>
-            <a:r>
-              <a:rPr sz="2000" b="1">
-                <a:solidFill>
-                  <a:srgbClr val="1C1717"/>
-                </a:solidFill>
-              </a:rPr>
-              <a:t>•  Randomised SVD</a:t>
-            </a:r>
-            <a:r>
-              <a:rPr sz="2000">
-                <a:solidFill>
-                  <a:srgbClr val="78716C"/>
-                </a:solidFill>
-              </a:rPr>
-              <a:t>  — Halko-Martinsson-Tropp 2011</a:t>
-            </a:r>
-          </a:p>
-          <a:p>
-            <a:pPr algn="l"/>
-            <a:r>
-              <a:rPr sz="2000" b="1">
-                <a:solidFill>
-                  <a:srgbClr val="1C1717"/>
-                </a:solidFill>
-              </a:rPr>
-              <a:t>•  K-Means</a:t>
-            </a:r>
-            <a:r>
-              <a:rPr sz="2000">
-                <a:solidFill>
-                  <a:srgbClr val="78716C"/>
-                </a:solidFill>
-              </a:rPr>
-              <a:t>  — k-means++ init</a:t>
-            </a:r>
-          </a:p>
-          <a:p>
-            <a:pPr algn="l"/>
-            <a:r>
-              <a:rPr sz="2000" b="1">
-                <a:solidFill>
-                  <a:srgbClr val="1C1717"/>
-                </a:solidFill>
-              </a:rPr>
-              <a:t>•  MLP + backprop</a:t>
-            </a:r>
-            <a:r>
-              <a:rPr sz="2000">
-                <a:solidFill>
-                  <a:srgbClr val="78716C"/>
-                </a:solidFill>
-              </a:rPr>
-              <a:t>  — ReLU/softmax, momentum SGD</a:t>
-            </a:r>
-          </a:p>
-          <a:p>
-            <a:pPr algn="l"/>
-            <a:r>
-              <a:rPr sz="2000" b="1">
-                <a:solidFill>
-                  <a:srgbClr val="1C1717"/>
-                </a:solidFill>
-              </a:rPr>
-              <a:t>•  CRF</a:t>
-            </a:r>
-            <a:r>
-              <a:rPr sz="2000">
-                <a:solidFill>
-                  <a:srgbClr val="78716C"/>
-                </a:solidFill>
-              </a:rPr>
-              <a:t>  — forward-backward + Viterbi</a:t>
-            </a:r>
-          </a:p>
-          <a:p>
-            <a:pPr algn="l"/>
-            <a:r>
-              <a:rPr sz="2000" b="1">
-                <a:solidFill>
-                  <a:srgbClr val="1C1717"/>
-                </a:solidFill>
-              </a:rPr>
-              <a:t>•  Word2Vec</a:t>
-            </a:r>
-            <a:r>
-              <a:rPr sz="2000">
-                <a:solidFill>
-                  <a:srgbClr val="78716C"/>
-                </a:solidFill>
-              </a:rPr>
-              <a:t>  — skip-gram + neg sampling</a:t>
-            </a:r>
-          </a:p>
-          <a:p>
-            <a:pPr algn="l"/>
-            <a:r>
-              <a:rPr sz="2000" b="1">
-                <a:solidFill>
-                  <a:srgbClr val="1C1717"/>
-                </a:solidFill>
-              </a:rPr>
-              <a:t>•  Dual encoder</a:t>
-            </a:r>
-            <a:r>
-              <a:rPr sz="2000">
-                <a:solidFill>
-                  <a:srgbClr val="78716C"/>
-                </a:solidFill>
-              </a:rPr>
-              <a:t>  — InfoNCE bi-encoder</a:t>
-            </a:r>
-          </a:p>
-          <a:p>
-            <a:pPr algn="l"/>
-            <a:r>
-              <a:rPr sz="2000" b="1">
-                <a:solidFill>
-                  <a:srgbClr val="1C1717"/>
-                </a:solidFill>
-              </a:rPr>
-              <a:t>•  BPE tokenizer</a:t>
-            </a:r>
-            <a:r>
-              <a:rPr sz="2000">
-                <a:solidFill>
-                  <a:srgbClr val="78716C"/>
-                </a:solidFill>
-              </a:rPr>
-              <a:t>  — Sennrich 2016</a:t>
-            </a:r>
-          </a:p>
-        </p:txBody>
-      </p:sp>
-      <p:sp>
-        <p:nvSpPr>
-          <p:cNvPr id="6" name="TextBox 5"/>
-          <p:cNvSpPr txBox="1"/>
-          <p:nvPr/>
-        </p:nvSpPr>
-        <p:spPr>
-          <a:xfrm>
-            <a:off x="6217920" y="1097280"/>
-            <a:ext cx="5486400" cy="365760"/>
-          </a:xfrm>
-          <a:prstGeom prst="rect">
-            <a:avLst/>
-          </a:prstGeom>
-          <a:noFill/>
-        </p:spPr>
-        <p:txBody>
-          <a:bodyPr wrap="square" lIns="0" tIns="0" rIns="0" bIns="0">
-            <a:spAutoFit/>
-          </a:bodyPr>
-          <a:lstStyle/>
-          <a:p>
-            <a:pPr algn="l"/>
-            <a:r>
-              <a:rPr sz="1500" b="1">
-                <a:solidFill>
-                  <a:srgbClr val="1C1717"/>
-                </a:solidFill>
-              </a:rPr>
-              <a:t>Trainable transformer (PyTorch, GPU)</a:t>
-            </a:r>
-          </a:p>
-        </p:txBody>
-      </p:sp>
-      <p:sp>
-        <p:nvSpPr>
-          <p:cNvPr id="7" name="TextBox 6"/>
-          <p:cNvSpPr txBox="1"/>
-          <p:nvPr/>
-        </p:nvSpPr>
-        <p:spPr>
-          <a:xfrm>
-            <a:off x="6263640" y="1463040"/>
-            <a:ext cx="5486400" cy="5324535"/>
-          </a:xfrm>
-          <a:prstGeom prst="rect">
-            <a:avLst/>
-          </a:prstGeom>
-          <a:noFill/>
-        </p:spPr>
-        <p:txBody>
-          <a:bodyPr wrap="square">
-            <a:spAutoFit/>
-          </a:bodyPr>
-          <a:lstStyle/>
-          <a:p>
-            <a:pPr algn="l"/>
-            <a:r>
-              <a:rPr sz="2000" b="1">
-                <a:solidFill>
-                  <a:srgbClr val="1C1717"/>
-                </a:solidFill>
-              </a:rPr>
-              <a:t>•  Backend</a:t>
-            </a:r>
-            <a:r>
-              <a:rPr sz="2000">
-                <a:solidFill>
-                  <a:srgbClr val="78716C"/>
-                </a:solidFill>
-              </a:rPr>
-              <a:t>  — PyTorch tensors + autograd only</a:t>
-            </a:r>
-          </a:p>
-          <a:p>
-            <a:pPr algn="l"/>
-            <a:r>
-              <a:rPr sz="2000" b="1">
-                <a:solidFill>
-                  <a:srgbClr val="1C1717"/>
-                </a:solidFill>
-              </a:rPr>
-              <a:t>•  No pretrained weights</a:t>
-            </a:r>
-            <a:r>
-              <a:rPr sz="2000">
-                <a:solidFill>
-                  <a:srgbClr val="78716C"/>
-                </a:solidFill>
-              </a:rPr>
-              <a:t>  — every layer written by us</a:t>
-            </a:r>
-          </a:p>
-          <a:p>
-            <a:pPr algn="l"/>
-            <a:r>
-              <a:rPr sz="2000" b="1">
-                <a:solidFill>
-                  <a:srgbClr val="1C1717"/>
-                </a:solidFill>
-              </a:rPr>
-              <a:t>•  Arch.</a:t>
-            </a:r>
-            <a:r>
-              <a:rPr sz="2000">
-                <a:solidFill>
-                  <a:srgbClr val="78716C"/>
-                </a:solidFill>
-              </a:rPr>
-              <a:t>  — 2 encoder blocks · 4 heads · d=64 · d_ff=128</a:t>
-            </a:r>
-          </a:p>
-          <a:p>
-            <a:pPr algn="l"/>
-            <a:r>
-              <a:rPr sz="2000" b="1">
-                <a:solidFill>
-                  <a:srgbClr val="1C1717"/>
-                </a:solidFill>
-              </a:rPr>
-              <a:t>•  Embedding</a:t>
-            </a:r>
-            <a:r>
-              <a:rPr sz="2000">
-                <a:solidFill>
-                  <a:srgbClr val="78716C"/>
-                </a:solidFill>
-              </a:rPr>
-              <a:t>  — vocab-id → 64-d + sinusoidal pos enc</a:t>
-            </a:r>
-          </a:p>
-          <a:p>
-            <a:pPr algn="l"/>
-            <a:r>
-              <a:rPr sz="2000" b="1">
-                <a:solidFill>
-                  <a:srgbClr val="1C1717"/>
-                </a:solidFill>
-              </a:rPr>
-              <a:t>•  Attention</a:t>
-            </a:r>
-            <a:r>
-              <a:rPr sz="2000">
-                <a:solidFill>
-                  <a:srgbClr val="78716C"/>
-                </a:solidFill>
-              </a:rPr>
-              <a:t>  — scaled dot-product · multi-head · pre-LN</a:t>
-            </a:r>
-          </a:p>
-          <a:p>
-            <a:pPr algn="l"/>
-            <a:r>
-              <a:rPr sz="2000" b="1">
-                <a:solidFill>
-                  <a:srgbClr val="1C1717"/>
-                </a:solidFill>
-              </a:rPr>
-              <a:t>•  Pool / head</a:t>
-            </a:r>
-            <a:r>
-              <a:rPr sz="2000">
-                <a:solidFill>
-                  <a:srgbClr val="78716C"/>
-                </a:solidFill>
-              </a:rPr>
-              <a:t>  — masked mean-pool → softmax(13 classes)</a:t>
-            </a:r>
-          </a:p>
-          <a:p>
-            <a:pPr algn="l"/>
-            <a:r>
-              <a:rPr sz="2000" b="1">
-                <a:solidFill>
-                  <a:srgbClr val="1C1717"/>
-                </a:solidFill>
-              </a:rPr>
-              <a:t>•  Training data</a:t>
-            </a:r>
-            <a:r>
-              <a:rPr sz="2000">
-                <a:solidFill>
-                  <a:srgbClr val="78716C"/>
-                </a:solidFill>
-              </a:rPr>
-              <a:t>  — 1206 augmented intent examples</a:t>
-            </a:r>
-          </a:p>
-          <a:p>
-            <a:pPr algn="l"/>
-            <a:r>
-              <a:rPr sz="2000" b="1">
-                <a:solidFill>
-                  <a:srgbClr val="1C1717"/>
-                </a:solidFill>
-              </a:rPr>
-              <a:t>•  Optimiser</a:t>
-            </a:r>
-            <a:r>
-              <a:rPr sz="2000">
-                <a:solidFill>
-                  <a:srgbClr val="78716C"/>
-                </a:solidFill>
-              </a:rPr>
-              <a:t>  — AdamW + cosine LR + grad clip</a:t>
-            </a:r>
-          </a:p>
-          <a:p>
-            <a:pPr algn="l"/>
-            <a:r>
-              <a:rPr sz="2000" b="1">
-                <a:solidFill>
-                  <a:srgbClr val="1C1717"/>
-                </a:solidFill>
-              </a:rPr>
-              <a:t>•  Hardware</a:t>
-            </a:r>
-            <a:r>
-              <a:rPr sz="2000">
-                <a:solidFill>
-                  <a:srgbClr val="78716C"/>
-                </a:solidFill>
-              </a:rPr>
-              <a:t>  — Auto-detects CUDA; CPU fallback</a:t>
-            </a:r>
-          </a:p>
-          <a:p>
-            <a:pPr algn="l"/>
-            <a:r>
-              <a:rPr sz="2000" b="1">
-                <a:solidFill>
-                  <a:srgbClr val="1C1717"/>
-                </a:solidFill>
-              </a:rPr>
-              <a:t>•  Result</a:t>
-            </a:r>
-            <a:r>
-              <a:rPr sz="2000">
-                <a:solidFill>
-                  <a:srgbClr val="78716C"/>
-                </a:solidFill>
-              </a:rPr>
-              <a:t>  — train acc 1.000, loss 0.0003</a:t>
-            </a:r>
-          </a:p>
-          <a:p>
-            <a:pPr algn="l"/>
-            <a:r>
-              <a:rPr sz="2000" b="1">
-                <a:solidFill>
-                  <a:srgbClr val="1C1717"/>
-                </a:solidFill>
-              </a:rPr>
-              <a:t>•  Endpoint</a:t>
-            </a:r>
-            <a:r>
-              <a:rPr sz="2000">
-                <a:solidFill>
-                  <a:srgbClr val="78716C"/>
-                </a:solidFill>
-              </a:rPr>
-              <a:t>  — POST /nlp/torch_intent</a:t>
+              <a:rPr sz="1200" b="0">
+                <a:solidFill>
+                  <a:srgbClr val="78716C"/>
+                </a:solidFill>
+              </a:rPr>
+              <a:t>Counts persist live in MongoDB on every chat match → popular FAQs surface to the top.</a:t>
             </a:r>
           </a:p>
         </p:txBody>
@@ -5830,8 +5122,8 @@
 </p:sld>
 </file>
 
-<file path=ppt/slides/slide6.xml><?xml version="1.0" encoding="utf-8"?>
-<p:sld xmlns:a="http://schemas.openxmlformats.org/drawingml/2006/main" xmlns:r="http://schemas.openxmlformats.org/officeDocument/2006/relationships" xmlns:p="http://schemas.openxmlformats.org/presentationml/2006/main">
+<file path=ppt/slides/slide5.xml><?xml version="1.0" encoding="utf-8"?>
+<p:sld xmlns:a="http://schemas.openxmlformats.org/drawingml/2006/main" xmlns:p="http://schemas.openxmlformats.org/presentationml/2006/main" xmlns:r="http://schemas.openxmlformats.org/officeDocument/2006/relationships">
   <p:cSld>
     <p:spTree>
       <p:nvGrpSpPr>
@@ -5839,14 +5131,7 @@
         <p:cNvGrpSpPr/>
         <p:nvPr/>
       </p:nvGrpSpPr>
-      <p:grpSpPr>
-        <a:xfrm>
-          <a:off x="0" y="0"/>
-          <a:ext cx="0" cy="0"/>
-          <a:chOff x="0" y="0"/>
-          <a:chExt cx="0" cy="0"/>
-        </a:xfrm>
-      </p:grpSpPr>
+      <p:grpSpPr/>
       <p:sp>
         <p:nvSpPr>
           <p:cNvPr id="2" name="Rectangle 1"/>
@@ -5887,7 +5172,6 @@
           <a:lstStyle/>
           <a:p>
             <a:pPr algn="ctr"/>
-            <a:endParaRPr/>
           </a:p>
         </p:txBody>
       </p:sp>
@@ -5908,19 +5192,19 @@
           <a:noFill/>
         </p:spPr>
         <p:txBody>
-          <a:bodyPr wrap="square" lIns="0" tIns="0" rIns="0" bIns="0">
+          <a:bodyPr wrap="square" lIns="0" rIns="0" tIns="0" bIns="0">
             <a:spAutoFit/>
           </a:bodyPr>
           <a:lstStyle/>
           <a:p>
             <a:pPr algn="l"/>
             <a:r>
-              <a:rPr sz="3200" b="1">
-                <a:solidFill>
-                  <a:srgbClr val="1C1717"/>
-                </a:solidFill>
-              </a:rPr>
-              <a:t>Evaluation</a:t>
+              <a:rPr sz="3000" b="1">
+                <a:solidFill>
+                  <a:srgbClr val="1C1717"/>
+                </a:solidFill>
+              </a:rPr>
+              <a:t>Models — every one trained from scratch</a:t>
             </a:r>
           </a:p>
         </p:txBody>
@@ -5933,8 +5217,8 @@
         </p:nvSpPr>
         <p:spPr>
           <a:xfrm>
-            <a:off x="457200" y="1143000"/>
-            <a:ext cx="10972800" cy="457200"/>
+            <a:off x="457200" y="1097280"/>
+            <a:ext cx="5394960" cy="365760"/>
           </a:xfrm>
           <a:prstGeom prst="rect">
             <a:avLst/>
@@ -5942,782 +5226,33 @@
           <a:noFill/>
         </p:spPr>
         <p:txBody>
-          <a:bodyPr wrap="square" lIns="0" tIns="0" rIns="0" bIns="0">
+          <a:bodyPr wrap="square" lIns="0" rIns="0" tIns="0" bIns="0">
             <a:spAutoFit/>
           </a:bodyPr>
           <a:lstStyle/>
           <a:p>
             <a:pPr algn="l"/>
             <a:r>
-              <a:rPr sz="1400" b="0">
-                <a:solidFill>
-                  <a:srgbClr val="78716C"/>
-                </a:solidFill>
-              </a:rPr>
-              <a:t>Retrieval evaluated on 116 held-out queries; transformer on training accuracy.</a:t>
-            </a:r>
-          </a:p>
-        </p:txBody>
-      </p:sp>
-      <p:graphicFrame>
-        <p:nvGraphicFramePr>
-          <p:cNvPr id="5" name="Table 4"/>
-          <p:cNvGraphicFramePr>
-            <a:graphicFrameLocks noGrp="1"/>
-          </p:cNvGraphicFramePr>
-          <p:nvPr>
-            <p:extLst>
-              <p:ext uri="{D42A27DB-BD31-4B8C-83A1-F6EECF244321}">
-                <p14:modId xmlns:p14="http://schemas.microsoft.com/office/powerpoint/2010/main" val="1001498319"/>
-              </p:ext>
-            </p:extLst>
-          </p:nvPr>
-        </p:nvGraphicFramePr>
-        <p:xfrm>
-          <a:off x="457200" y="1783080"/>
-          <a:ext cx="3657600" cy="2194560"/>
-        </p:xfrm>
-        <a:graphic>
-          <a:graphicData uri="http://schemas.openxmlformats.org/drawingml/2006/table">
-            <a:tbl>
-              <a:tblPr firstRow="1" bandRow="1">
-                <a:tableStyleId>{5C22544A-7EE6-4342-B048-85BDC9FD1C3A}</a:tableStyleId>
-              </a:tblPr>
-              <a:tblGrid>
-                <a:gridCol w="1828800">
-                  <a:extLst>
-                    <a:ext uri="{9D8B030D-6E8A-4147-A177-3AD203B41FA5}">
-                      <a16:colId xmlns:a16="http://schemas.microsoft.com/office/drawing/2014/main" val="20000"/>
-                    </a:ext>
-                  </a:extLst>
-                </a:gridCol>
-                <a:gridCol w="1828800">
-                  <a:extLst>
-                    <a:ext uri="{9D8B030D-6E8A-4147-A177-3AD203B41FA5}">
-                      <a16:colId xmlns:a16="http://schemas.microsoft.com/office/drawing/2014/main" val="20001"/>
-                    </a:ext>
-                  </a:extLst>
-                </a:gridCol>
-              </a:tblGrid>
-              <a:tr h="350520">
-                <a:tc>
-                  <a:txBody>
-                    <a:bodyPr/>
-                    <a:lstStyle/>
-                    <a:p>
-                      <a:r>
-                        <a:rPr sz="1800" b="1" dirty="0">
-                          <a:solidFill>
-                            <a:srgbClr val="1C1717"/>
-                          </a:solidFill>
-                        </a:rPr>
-                        <a:t>Metric</a:t>
-                      </a:r>
-                    </a:p>
-                  </a:txBody>
-                  <a:tcPr/>
-                </a:tc>
-                <a:tc>
-                  <a:txBody>
-                    <a:bodyPr/>
-                    <a:lstStyle/>
-                    <a:p>
-                      <a:r>
-                        <a:rPr sz="1800" b="1">
-                          <a:solidFill>
-                            <a:srgbClr val="1C1717"/>
-                          </a:solidFill>
-                        </a:rPr>
-                        <a:t>Value</a:t>
-                      </a:r>
-                    </a:p>
-                  </a:txBody>
-                  <a:tcPr/>
-                </a:tc>
-                <a:extLst>
-                  <a:ext uri="{0D108BD9-81ED-4DB2-BD59-A6C34878D82A}">
-                    <a16:rowId xmlns:a16="http://schemas.microsoft.com/office/drawing/2014/main" val="10000"/>
-                  </a:ext>
-                </a:extLst>
-              </a:tr>
-              <a:tr h="350520">
-                <a:tc>
-                  <a:txBody>
-                    <a:bodyPr/>
-                    <a:lstStyle/>
-                    <a:p>
-                      <a:r>
-                        <a:rPr sz="1800" dirty="0">
-                          <a:solidFill>
-                            <a:srgbClr val="1C1717"/>
-                          </a:solidFill>
-                        </a:rPr>
-                        <a:t>Precision@1</a:t>
-                      </a:r>
-                    </a:p>
-                  </a:txBody>
-                  <a:tcPr/>
-                </a:tc>
-                <a:tc>
-                  <a:txBody>
-                    <a:bodyPr/>
-                    <a:lstStyle/>
-                    <a:p>
-                      <a:r>
-                        <a:rPr sz="1800">
-                          <a:solidFill>
-                            <a:srgbClr val="1C1717"/>
-                          </a:solidFill>
-                        </a:rPr>
-                        <a:t>0.931</a:t>
-                      </a:r>
-                    </a:p>
-                  </a:txBody>
-                  <a:tcPr/>
-                </a:tc>
-                <a:extLst>
-                  <a:ext uri="{0D108BD9-81ED-4DB2-BD59-A6C34878D82A}">
-                    <a16:rowId xmlns:a16="http://schemas.microsoft.com/office/drawing/2014/main" val="10001"/>
-                  </a:ext>
-                </a:extLst>
-              </a:tr>
-              <a:tr h="350520">
-                <a:tc>
-                  <a:txBody>
-                    <a:bodyPr/>
-                    <a:lstStyle/>
-                    <a:p>
-                      <a:r>
-                        <a:rPr sz="1800">
-                          <a:solidFill>
-                            <a:srgbClr val="1C1717"/>
-                          </a:solidFill>
-                        </a:rPr>
-                        <a:t>MRR</a:t>
-                      </a:r>
-                    </a:p>
-                  </a:txBody>
-                  <a:tcPr/>
-                </a:tc>
-                <a:tc>
-                  <a:txBody>
-                    <a:bodyPr/>
-                    <a:lstStyle/>
-                    <a:p>
-                      <a:r>
-                        <a:rPr sz="1800" dirty="0">
-                          <a:solidFill>
-                            <a:srgbClr val="1C1717"/>
-                          </a:solidFill>
-                        </a:rPr>
-                        <a:t>0.938</a:t>
-                      </a:r>
-                    </a:p>
-                  </a:txBody>
-                  <a:tcPr/>
-                </a:tc>
-                <a:extLst>
-                  <a:ext uri="{0D108BD9-81ED-4DB2-BD59-A6C34878D82A}">
-                    <a16:rowId xmlns:a16="http://schemas.microsoft.com/office/drawing/2014/main" val="10002"/>
-                  </a:ext>
-                </a:extLst>
-              </a:tr>
-              <a:tr h="350520">
-                <a:tc>
-                  <a:txBody>
-                    <a:bodyPr/>
-                    <a:lstStyle/>
-                    <a:p>
-                      <a:r>
-                        <a:rPr sz="1800">
-                          <a:solidFill>
-                            <a:srgbClr val="1C1717"/>
-                          </a:solidFill>
-                        </a:rPr>
-                        <a:t>Recall@5</a:t>
-                      </a:r>
-                    </a:p>
-                  </a:txBody>
-                  <a:tcPr/>
-                </a:tc>
-                <a:tc>
-                  <a:txBody>
-                    <a:bodyPr/>
-                    <a:lstStyle/>
-                    <a:p>
-                      <a:r>
-                        <a:rPr sz="1800" dirty="0">
-                          <a:solidFill>
-                            <a:srgbClr val="1C1717"/>
-                          </a:solidFill>
-                        </a:rPr>
-                        <a:t>0.948</a:t>
-                      </a:r>
-                    </a:p>
-                  </a:txBody>
-                  <a:tcPr/>
-                </a:tc>
-                <a:extLst>
-                  <a:ext uri="{0D108BD9-81ED-4DB2-BD59-A6C34878D82A}">
-                    <a16:rowId xmlns:a16="http://schemas.microsoft.com/office/drawing/2014/main" val="10003"/>
-                  </a:ext>
-                </a:extLst>
-              </a:tr>
-              <a:tr h="350520">
-                <a:tc>
-                  <a:txBody>
-                    <a:bodyPr/>
-                    <a:lstStyle/>
-                    <a:p>
-                      <a:r>
-                        <a:rPr sz="1800">
-                          <a:solidFill>
-                            <a:srgbClr val="1C1717"/>
-                          </a:solidFill>
-                        </a:rPr>
-                        <a:t>Median latency</a:t>
-                      </a:r>
-                    </a:p>
-                  </a:txBody>
-                  <a:tcPr/>
-                </a:tc>
-                <a:tc>
-                  <a:txBody>
-                    <a:bodyPr/>
-                    <a:lstStyle/>
-                    <a:p>
-                      <a:r>
-                        <a:rPr sz="1800" dirty="0">
-                          <a:solidFill>
-                            <a:srgbClr val="1C1717"/>
-                          </a:solidFill>
-                        </a:rPr>
-                        <a:t>22 </a:t>
-                      </a:r>
-                      <a:r>
-                        <a:rPr sz="1800" dirty="0" err="1">
-                          <a:solidFill>
-                            <a:srgbClr val="1C1717"/>
-                          </a:solidFill>
-                        </a:rPr>
-                        <a:t>ms</a:t>
-                      </a:r>
-                      <a:endParaRPr sz="1800" dirty="0">
-                        <a:solidFill>
-                          <a:srgbClr val="1C1717"/>
-                        </a:solidFill>
-                      </a:endParaRPr>
-                    </a:p>
-                  </a:txBody>
-                  <a:tcPr/>
-                </a:tc>
-                <a:extLst>
-                  <a:ext uri="{0D108BD9-81ED-4DB2-BD59-A6C34878D82A}">
-                    <a16:rowId xmlns:a16="http://schemas.microsoft.com/office/drawing/2014/main" val="10004"/>
-                  </a:ext>
-                </a:extLst>
-              </a:tr>
-              <a:tr h="350520">
-                <a:tc>
-                  <a:txBody>
-                    <a:bodyPr/>
-                    <a:lstStyle/>
-                    <a:p>
-                      <a:r>
-                        <a:rPr sz="1800">
-                          <a:solidFill>
-                            <a:srgbClr val="1C1717"/>
-                          </a:solidFill>
-                        </a:rPr>
-                        <a:t>p95 latency</a:t>
-                      </a:r>
-                    </a:p>
-                  </a:txBody>
-                  <a:tcPr/>
-                </a:tc>
-                <a:tc>
-                  <a:txBody>
-                    <a:bodyPr/>
-                    <a:lstStyle/>
-                    <a:p>
-                      <a:r>
-                        <a:rPr sz="1800" dirty="0">
-                          <a:solidFill>
-                            <a:srgbClr val="1C1717"/>
-                          </a:solidFill>
-                        </a:rPr>
-                        <a:t>47 </a:t>
-                      </a:r>
-                      <a:r>
-                        <a:rPr sz="1800" dirty="0" err="1">
-                          <a:solidFill>
-                            <a:srgbClr val="1C1717"/>
-                          </a:solidFill>
-                        </a:rPr>
-                        <a:t>ms</a:t>
-                      </a:r>
-                      <a:endParaRPr sz="1800" dirty="0">
-                        <a:solidFill>
-                          <a:srgbClr val="1C1717"/>
-                        </a:solidFill>
-                      </a:endParaRPr>
-                    </a:p>
-                  </a:txBody>
-                  <a:tcPr/>
-                </a:tc>
-                <a:extLst>
-                  <a:ext uri="{0D108BD9-81ED-4DB2-BD59-A6C34878D82A}">
-                    <a16:rowId xmlns:a16="http://schemas.microsoft.com/office/drawing/2014/main" val="10005"/>
-                  </a:ext>
-                </a:extLst>
-              </a:tr>
-            </a:tbl>
-          </a:graphicData>
-        </a:graphic>
-      </p:graphicFrame>
-      <p:graphicFrame>
-        <p:nvGraphicFramePr>
-          <p:cNvPr id="6" name="Table 5"/>
-          <p:cNvGraphicFramePr>
-            <a:graphicFrameLocks noGrp="1"/>
-          </p:cNvGraphicFramePr>
-          <p:nvPr>
-            <p:extLst>
-              <p:ext uri="{D42A27DB-BD31-4B8C-83A1-F6EECF244321}">
-                <p14:modId xmlns:p14="http://schemas.microsoft.com/office/powerpoint/2010/main" val="2438839755"/>
-              </p:ext>
-            </p:extLst>
-          </p:nvPr>
-        </p:nvGraphicFramePr>
-        <p:xfrm>
-          <a:off x="4480560" y="1783080"/>
-          <a:ext cx="7315200" cy="2103120"/>
-        </p:xfrm>
-        <a:graphic>
-          <a:graphicData uri="http://schemas.openxmlformats.org/drawingml/2006/table">
-            <a:tbl>
-              <a:tblPr firstRow="1" bandRow="1">
-                <a:tableStyleId>{5C22544A-7EE6-4342-B048-85BDC9FD1C3A}</a:tableStyleId>
-              </a:tblPr>
-              <a:tblGrid>
-                <a:gridCol w="1463040">
-                  <a:extLst>
-                    <a:ext uri="{9D8B030D-6E8A-4147-A177-3AD203B41FA5}">
-                      <a16:colId xmlns:a16="http://schemas.microsoft.com/office/drawing/2014/main" val="20000"/>
-                    </a:ext>
-                  </a:extLst>
-                </a:gridCol>
-                <a:gridCol w="1463040">
-                  <a:extLst>
-                    <a:ext uri="{9D8B030D-6E8A-4147-A177-3AD203B41FA5}">
-                      <a16:colId xmlns:a16="http://schemas.microsoft.com/office/drawing/2014/main" val="20001"/>
-                    </a:ext>
-                  </a:extLst>
-                </a:gridCol>
-                <a:gridCol w="1463040">
-                  <a:extLst>
-                    <a:ext uri="{9D8B030D-6E8A-4147-A177-3AD203B41FA5}">
-                      <a16:colId xmlns:a16="http://schemas.microsoft.com/office/drawing/2014/main" val="20002"/>
-                    </a:ext>
-                  </a:extLst>
-                </a:gridCol>
-                <a:gridCol w="1463040">
-                  <a:extLst>
-                    <a:ext uri="{9D8B030D-6E8A-4147-A177-3AD203B41FA5}">
-                      <a16:colId xmlns:a16="http://schemas.microsoft.com/office/drawing/2014/main" val="20003"/>
-                    </a:ext>
-                  </a:extLst>
-                </a:gridCol>
-                <a:gridCol w="1463040">
-                  <a:extLst>
-                    <a:ext uri="{9D8B030D-6E8A-4147-A177-3AD203B41FA5}">
-                      <a16:colId xmlns:a16="http://schemas.microsoft.com/office/drawing/2014/main" val="20004"/>
-                    </a:ext>
-                  </a:extLst>
-                </a:gridCol>
-              </a:tblGrid>
-              <a:tr h="525780">
-                <a:tc>
-                  <a:txBody>
-                    <a:bodyPr/>
-                    <a:lstStyle/>
-                    <a:p>
-                      <a:r>
-                        <a:rPr sz="1600" b="1" dirty="0">
-                          <a:solidFill>
-                            <a:srgbClr val="1C1717"/>
-                          </a:solidFill>
-                        </a:rPr>
-                        <a:t>Specialty</a:t>
-                      </a:r>
-                    </a:p>
-                  </a:txBody>
-                  <a:tcPr/>
-                </a:tc>
-                <a:tc>
-                  <a:txBody>
-                    <a:bodyPr/>
-                    <a:lstStyle/>
-                    <a:p>
-                      <a:r>
-                        <a:rPr sz="1600" b="1">
-                          <a:solidFill>
-                            <a:srgbClr val="1C1717"/>
-                          </a:solidFill>
-                        </a:rPr>
-                        <a:t>n</a:t>
-                      </a:r>
-                    </a:p>
-                  </a:txBody>
-                  <a:tcPr/>
-                </a:tc>
-                <a:tc>
-                  <a:txBody>
-                    <a:bodyPr/>
-                    <a:lstStyle/>
-                    <a:p>
-                      <a:r>
-                        <a:rPr sz="1600" b="1">
-                          <a:solidFill>
-                            <a:srgbClr val="1C1717"/>
-                          </a:solidFill>
-                        </a:rPr>
-                        <a:t>P@1</a:t>
-                      </a:r>
-                    </a:p>
-                  </a:txBody>
-                  <a:tcPr/>
-                </a:tc>
-                <a:tc>
-                  <a:txBody>
-                    <a:bodyPr/>
-                    <a:lstStyle/>
-                    <a:p>
-                      <a:r>
-                        <a:rPr sz="1600" b="1">
-                          <a:solidFill>
-                            <a:srgbClr val="1C1717"/>
-                          </a:solidFill>
-                        </a:rPr>
-                        <a:t>Recall@5</a:t>
-                      </a:r>
-                    </a:p>
-                  </a:txBody>
-                  <a:tcPr/>
-                </a:tc>
-                <a:tc>
-                  <a:txBody>
-                    <a:bodyPr/>
-                    <a:lstStyle/>
-                    <a:p>
-                      <a:r>
-                        <a:rPr sz="1600" b="1">
-                          <a:solidFill>
-                            <a:srgbClr val="1C1717"/>
-                          </a:solidFill>
-                        </a:rPr>
-                        <a:t>MRR</a:t>
-                      </a:r>
-                    </a:p>
-                  </a:txBody>
-                  <a:tcPr/>
-                </a:tc>
-                <a:extLst>
-                  <a:ext uri="{0D108BD9-81ED-4DB2-BD59-A6C34878D82A}">
-                    <a16:rowId xmlns:a16="http://schemas.microsoft.com/office/drawing/2014/main" val="10000"/>
-                  </a:ext>
-                </a:extLst>
-              </a:tr>
-              <a:tr h="525780">
-                <a:tc>
-                  <a:txBody>
-                    <a:bodyPr/>
-                    <a:lstStyle/>
-                    <a:p>
-                      <a:r>
-                        <a:rPr sz="1600">
-                          <a:solidFill>
-                            <a:srgbClr val="1C1717"/>
-                          </a:solidFill>
-                        </a:rPr>
-                        <a:t>Radiology</a:t>
-                      </a:r>
-                    </a:p>
-                  </a:txBody>
-                  <a:tcPr/>
-                </a:tc>
-                <a:tc>
-                  <a:txBody>
-                    <a:bodyPr/>
-                    <a:lstStyle/>
-                    <a:p>
-                      <a:r>
-                        <a:rPr sz="1600">
-                          <a:solidFill>
-                            <a:srgbClr val="1C1717"/>
-                          </a:solidFill>
-                        </a:rPr>
-                        <a:t>36</a:t>
-                      </a:r>
-                    </a:p>
-                  </a:txBody>
-                  <a:tcPr/>
-                </a:tc>
-                <a:tc>
-                  <a:txBody>
-                    <a:bodyPr/>
-                    <a:lstStyle/>
-                    <a:p>
-                      <a:r>
-                        <a:rPr sz="1600">
-                          <a:solidFill>
-                            <a:srgbClr val="1C1717"/>
-                          </a:solidFill>
-                        </a:rPr>
-                        <a:t>0.861</a:t>
-                      </a:r>
-                    </a:p>
-                  </a:txBody>
-                  <a:tcPr/>
-                </a:tc>
-                <a:tc>
-                  <a:txBody>
-                    <a:bodyPr/>
-                    <a:lstStyle/>
-                    <a:p>
-                      <a:r>
-                        <a:rPr sz="1600">
-                          <a:solidFill>
-                            <a:srgbClr val="1C1717"/>
-                          </a:solidFill>
-                        </a:rPr>
-                        <a:t>0.889</a:t>
-                      </a:r>
-                    </a:p>
-                  </a:txBody>
-                  <a:tcPr/>
-                </a:tc>
-                <a:tc>
-                  <a:txBody>
-                    <a:bodyPr/>
-                    <a:lstStyle/>
-                    <a:p>
-                      <a:r>
-                        <a:rPr sz="1600">
-                          <a:solidFill>
-                            <a:srgbClr val="1C1717"/>
-                          </a:solidFill>
-                        </a:rPr>
-                        <a:t>0.870</a:t>
-                      </a:r>
-                    </a:p>
-                  </a:txBody>
-                  <a:tcPr/>
-                </a:tc>
-                <a:extLst>
-                  <a:ext uri="{0D108BD9-81ED-4DB2-BD59-A6C34878D82A}">
-                    <a16:rowId xmlns:a16="http://schemas.microsoft.com/office/drawing/2014/main" val="10001"/>
-                  </a:ext>
-                </a:extLst>
-              </a:tr>
-              <a:tr h="525780">
-                <a:tc>
-                  <a:txBody>
-                    <a:bodyPr/>
-                    <a:lstStyle/>
-                    <a:p>
-                      <a:r>
-                        <a:rPr sz="1600">
-                          <a:solidFill>
-                            <a:srgbClr val="1C1717"/>
-                          </a:solidFill>
-                        </a:rPr>
-                        <a:t>Physiotherapy</a:t>
-                      </a:r>
-                    </a:p>
-                  </a:txBody>
-                  <a:tcPr/>
-                </a:tc>
-                <a:tc>
-                  <a:txBody>
-                    <a:bodyPr/>
-                    <a:lstStyle/>
-                    <a:p>
-                      <a:r>
-                        <a:rPr sz="1600">
-                          <a:solidFill>
-                            <a:srgbClr val="1C1717"/>
-                          </a:solidFill>
-                        </a:rPr>
-                        <a:t>35</a:t>
-                      </a:r>
-                    </a:p>
-                  </a:txBody>
-                  <a:tcPr/>
-                </a:tc>
-                <a:tc>
-                  <a:txBody>
-                    <a:bodyPr/>
-                    <a:lstStyle/>
-                    <a:p>
-                      <a:r>
-                        <a:rPr sz="1600">
-                          <a:solidFill>
-                            <a:srgbClr val="1C1717"/>
-                          </a:solidFill>
-                        </a:rPr>
-                        <a:t>0.971</a:t>
-                      </a:r>
-                    </a:p>
-                  </a:txBody>
-                  <a:tcPr/>
-                </a:tc>
-                <a:tc>
-                  <a:txBody>
-                    <a:bodyPr/>
-                    <a:lstStyle/>
-                    <a:p>
-                      <a:r>
-                        <a:rPr sz="1600">
-                          <a:solidFill>
-                            <a:srgbClr val="1C1717"/>
-                          </a:solidFill>
-                        </a:rPr>
-                        <a:t>0.971</a:t>
-                      </a:r>
-                    </a:p>
-                  </a:txBody>
-                  <a:tcPr/>
-                </a:tc>
-                <a:tc>
-                  <a:txBody>
-                    <a:bodyPr/>
-                    <a:lstStyle/>
-                    <a:p>
-                      <a:r>
-                        <a:rPr sz="1600">
-                          <a:solidFill>
-                            <a:srgbClr val="1C1717"/>
-                          </a:solidFill>
-                        </a:rPr>
-                        <a:t>0.971</a:t>
-                      </a:r>
-                    </a:p>
-                  </a:txBody>
-                  <a:tcPr/>
-                </a:tc>
-                <a:extLst>
-                  <a:ext uri="{0D108BD9-81ED-4DB2-BD59-A6C34878D82A}">
-                    <a16:rowId xmlns:a16="http://schemas.microsoft.com/office/drawing/2014/main" val="10002"/>
-                  </a:ext>
-                </a:extLst>
-              </a:tr>
-              <a:tr h="525780">
-                <a:tc>
-                  <a:txBody>
-                    <a:bodyPr/>
-                    <a:lstStyle/>
-                    <a:p>
-                      <a:r>
-                        <a:rPr sz="1600">
-                          <a:solidFill>
-                            <a:srgbClr val="1C1717"/>
-                          </a:solidFill>
-                        </a:rPr>
-                        <a:t>Cardiovascular</a:t>
-                      </a:r>
-                    </a:p>
-                  </a:txBody>
-                  <a:tcPr/>
-                </a:tc>
-                <a:tc>
-                  <a:txBody>
-                    <a:bodyPr/>
-                    <a:lstStyle/>
-                    <a:p>
-                      <a:r>
-                        <a:rPr sz="1600">
-                          <a:solidFill>
-                            <a:srgbClr val="1C1717"/>
-                          </a:solidFill>
-                        </a:rPr>
-                        <a:t>45</a:t>
-                      </a:r>
-                    </a:p>
-                  </a:txBody>
-                  <a:tcPr/>
-                </a:tc>
-                <a:tc>
-                  <a:txBody>
-                    <a:bodyPr/>
-                    <a:lstStyle/>
-                    <a:p>
-                      <a:r>
-                        <a:rPr sz="1600">
-                          <a:solidFill>
-                            <a:srgbClr val="1C1717"/>
-                          </a:solidFill>
-                        </a:rPr>
-                        <a:t>0.956</a:t>
-                      </a:r>
-                    </a:p>
-                  </a:txBody>
-                  <a:tcPr/>
-                </a:tc>
-                <a:tc>
-                  <a:txBody>
-                    <a:bodyPr/>
-                    <a:lstStyle/>
-                    <a:p>
-                      <a:r>
-                        <a:rPr sz="1600">
-                          <a:solidFill>
-                            <a:srgbClr val="1C1717"/>
-                          </a:solidFill>
-                        </a:rPr>
-                        <a:t>0.978</a:t>
-                      </a:r>
-                    </a:p>
-                  </a:txBody>
-                  <a:tcPr/>
-                </a:tc>
-                <a:tc>
-                  <a:txBody>
-                    <a:bodyPr/>
-                    <a:lstStyle/>
-                    <a:p>
-                      <a:r>
-                        <a:rPr sz="1600" dirty="0">
-                          <a:solidFill>
-                            <a:srgbClr val="1C1717"/>
-                          </a:solidFill>
-                        </a:rPr>
-                        <a:t>0.967</a:t>
-                      </a:r>
-                    </a:p>
-                  </a:txBody>
-                  <a:tcPr/>
-                </a:tc>
-                <a:extLst>
-                  <a:ext uri="{0D108BD9-81ED-4DB2-BD59-A6C34878D82A}">
-                    <a16:rowId xmlns:a16="http://schemas.microsoft.com/office/drawing/2014/main" val="10003"/>
-                  </a:ext>
-                </a:extLst>
-              </a:tr>
-            </a:tbl>
-          </a:graphicData>
-        </a:graphic>
-      </p:graphicFrame>
-      <p:sp>
-        <p:nvSpPr>
-          <p:cNvPr id="7" name="TextBox 6"/>
+              <a:rPr sz="1500" b="1">
+                <a:solidFill>
+                  <a:srgbClr val="1C1717"/>
+                </a:solidFill>
+              </a:rPr>
+              <a:t>Classical numpy (myml/)</a:t>
+            </a:r>
+          </a:p>
+        </p:txBody>
+      </p:sp>
+      <p:sp>
+        <p:nvSpPr>
+          <p:cNvPr id="5" name="TextBox 4"/>
           <p:cNvSpPr txBox="1"/>
           <p:nvPr/>
         </p:nvSpPr>
         <p:spPr>
           <a:xfrm>
-            <a:off x="457200" y="4206240"/>
-            <a:ext cx="10972800" cy="457200"/>
+            <a:off x="502920" y="1463040"/>
+            <a:ext cx="5486400" cy="4572000"/>
           </a:xfrm>
           <a:prstGeom prst="rect">
             <a:avLst/>
@@ -6725,19 +5260,483 @@
           <a:noFill/>
         </p:spPr>
         <p:txBody>
-          <a:bodyPr wrap="square" lIns="0" tIns="0" rIns="0" bIns="0">
+          <a:bodyPr wrap="square">
             <a:spAutoFit/>
           </a:bodyPr>
           <a:lstStyle/>
           <a:p>
             <a:pPr algn="l"/>
             <a:r>
-              <a:rPr sz="1400" b="0">
-                <a:solidFill>
-                  <a:srgbClr val="1C1717"/>
-                </a:solidFill>
-              </a:rPr>
-              <a:t>Transformer intent classifier:  train accuracy 1.000 · final CE loss 0.0003 over 40 epochs</a:t>
+              <a:rPr sz="1100" b="1">
+                <a:solidFill>
+                  <a:srgbClr val="1C1717"/>
+                </a:solidFill>
+              </a:rPr>
+              <a:t>•  TF-IDF</a:t>
+            </a:r>
+            <a:r>
+              <a:rPr sz="1000">
+                <a:solidFill>
+                  <a:srgbClr val="78716C"/>
+                </a:solidFill>
+              </a:rPr>
+              <a:t>  — word + char n-grams, sublinear TF</a:t>
+            </a:r>
+          </a:p>
+          <a:p>
+            <a:pPr algn="l"/>
+            <a:r>
+              <a:rPr sz="1100" b="1">
+                <a:solidFill>
+                  <a:srgbClr val="1C1717"/>
+                </a:solidFill>
+              </a:rPr>
+              <a:t>•  BM25 Okapi</a:t>
+            </a:r>
+            <a:r>
+              <a:rPr sz="1000">
+                <a:solidFill>
+                  <a:srgbClr val="78716C"/>
+                </a:solidFill>
+              </a:rPr>
+              <a:t>  — Lucene-style smoothed IDF</a:t>
+            </a:r>
+          </a:p>
+          <a:p>
+            <a:pPr algn="l"/>
+            <a:r>
+              <a:rPr sz="1100" b="1">
+                <a:solidFill>
+                  <a:srgbClr val="1C1717"/>
+                </a:solidFill>
+              </a:rPr>
+              <a:t>•  Naive Bayes</a:t>
+            </a:r>
+            <a:r>
+              <a:rPr sz="1000">
+                <a:solidFill>
+                  <a:srgbClr val="78716C"/>
+                </a:solidFill>
+              </a:rPr>
+              <a:t>  — Laplace smoothing</a:t>
+            </a:r>
+          </a:p>
+          <a:p>
+            <a:pPr algn="l"/>
+            <a:r>
+              <a:rPr sz="1100" b="1">
+                <a:solidFill>
+                  <a:srgbClr val="1C1717"/>
+                </a:solidFill>
+              </a:rPr>
+              <a:t>•  Logistic Reg.</a:t>
+            </a:r>
+            <a:r>
+              <a:rPr sz="1000">
+                <a:solidFill>
+                  <a:srgbClr val="78716C"/>
+                </a:solidFill>
+              </a:rPr>
+              <a:t>  — batch GD + L2 + class weights</a:t>
+            </a:r>
+          </a:p>
+          <a:p>
+            <a:pPr algn="l"/>
+            <a:r>
+              <a:rPr sz="1100" b="1">
+                <a:solidFill>
+                  <a:srgbClr val="1C1717"/>
+                </a:solidFill>
+              </a:rPr>
+              <a:t>•  Randomised SVD</a:t>
+            </a:r>
+            <a:r>
+              <a:rPr sz="1000">
+                <a:solidFill>
+                  <a:srgbClr val="78716C"/>
+                </a:solidFill>
+              </a:rPr>
+              <a:t>  — Halko-Martinsson-Tropp 2011</a:t>
+            </a:r>
+          </a:p>
+          <a:p>
+            <a:pPr algn="l"/>
+            <a:r>
+              <a:rPr sz="1100" b="1">
+                <a:solidFill>
+                  <a:srgbClr val="1C1717"/>
+                </a:solidFill>
+              </a:rPr>
+              <a:t>•  K-Means</a:t>
+            </a:r>
+            <a:r>
+              <a:rPr sz="1000">
+                <a:solidFill>
+                  <a:srgbClr val="78716C"/>
+                </a:solidFill>
+              </a:rPr>
+              <a:t>  — k-means++ init</a:t>
+            </a:r>
+          </a:p>
+          <a:p>
+            <a:pPr algn="l"/>
+            <a:r>
+              <a:rPr sz="1100" b="1">
+                <a:solidFill>
+                  <a:srgbClr val="1C1717"/>
+                </a:solidFill>
+              </a:rPr>
+              <a:t>•  MLP + backprop</a:t>
+            </a:r>
+            <a:r>
+              <a:rPr sz="1000">
+                <a:solidFill>
+                  <a:srgbClr val="78716C"/>
+                </a:solidFill>
+              </a:rPr>
+              <a:t>  — ReLU/softmax, momentum SGD</a:t>
+            </a:r>
+          </a:p>
+          <a:p>
+            <a:pPr algn="l"/>
+            <a:r>
+              <a:rPr sz="1100" b="1">
+                <a:solidFill>
+                  <a:srgbClr val="1C1717"/>
+                </a:solidFill>
+              </a:rPr>
+              <a:t>•  CRF</a:t>
+            </a:r>
+            <a:r>
+              <a:rPr sz="1000">
+                <a:solidFill>
+                  <a:srgbClr val="78716C"/>
+                </a:solidFill>
+              </a:rPr>
+              <a:t>  — forward-backward + Viterbi</a:t>
+            </a:r>
+          </a:p>
+          <a:p>
+            <a:pPr algn="l"/>
+            <a:r>
+              <a:rPr sz="1100" b="1">
+                <a:solidFill>
+                  <a:srgbClr val="1C1717"/>
+                </a:solidFill>
+              </a:rPr>
+              <a:t>•  Word2Vec</a:t>
+            </a:r>
+            <a:r>
+              <a:rPr sz="1000">
+                <a:solidFill>
+                  <a:srgbClr val="78716C"/>
+                </a:solidFill>
+              </a:rPr>
+              <a:t>  — skip-gram + neg sampling</a:t>
+            </a:r>
+          </a:p>
+          <a:p>
+            <a:pPr algn="l"/>
+            <a:r>
+              <a:rPr sz="1100" b="1">
+                <a:solidFill>
+                  <a:srgbClr val="1C1717"/>
+                </a:solidFill>
+              </a:rPr>
+              <a:t>•  Dual encoder</a:t>
+            </a:r>
+            <a:r>
+              <a:rPr sz="1000">
+                <a:solidFill>
+                  <a:srgbClr val="78716C"/>
+                </a:solidFill>
+              </a:rPr>
+              <a:t>  — InfoNCE bi-encoder</a:t>
+            </a:r>
+          </a:p>
+          <a:p>
+            <a:pPr algn="l"/>
+            <a:r>
+              <a:rPr sz="1100" b="1">
+                <a:solidFill>
+                  <a:srgbClr val="1C1717"/>
+                </a:solidFill>
+              </a:rPr>
+              <a:t>•  BPE tokenizer</a:t>
+            </a:r>
+            <a:r>
+              <a:rPr sz="1000">
+                <a:solidFill>
+                  <a:srgbClr val="78716C"/>
+                </a:solidFill>
+              </a:rPr>
+              <a:t>  — Sennrich 2016</a:t>
+            </a:r>
+          </a:p>
+        </p:txBody>
+      </p:sp>
+      <p:sp>
+        <p:nvSpPr>
+          <p:cNvPr id="6" name="TextBox 5"/>
+          <p:cNvSpPr txBox="1"/>
+          <p:nvPr/>
+        </p:nvSpPr>
+        <p:spPr>
+          <a:xfrm>
+            <a:off x="6217920" y="1097280"/>
+            <a:ext cx="5486400" cy="365760"/>
+          </a:xfrm>
+          <a:prstGeom prst="rect">
+            <a:avLst/>
+          </a:prstGeom>
+          <a:noFill/>
+        </p:spPr>
+        <p:txBody>
+          <a:bodyPr wrap="square" lIns="0" rIns="0" tIns="0" bIns="0">
+            <a:spAutoFit/>
+          </a:bodyPr>
+          <a:lstStyle/>
+          <a:p>
+            <a:pPr algn="l"/>
+            <a:r>
+              <a:rPr sz="1500" b="1">
+                <a:solidFill>
+                  <a:srgbClr val="1C1717"/>
+                </a:solidFill>
+              </a:rPr>
+              <a:t>Trainable transformer (PyTorch, GPU)</a:t>
+            </a:r>
+          </a:p>
+        </p:txBody>
+      </p:sp>
+      <p:sp>
+        <p:nvSpPr>
+          <p:cNvPr id="7" name="TextBox 6"/>
+          <p:cNvSpPr txBox="1"/>
+          <p:nvPr/>
+        </p:nvSpPr>
+        <p:spPr>
+          <a:xfrm>
+            <a:off x="6263640" y="1463040"/>
+            <a:ext cx="5486400" cy="4572000"/>
+          </a:xfrm>
+          <a:prstGeom prst="rect">
+            <a:avLst/>
+          </a:prstGeom>
+          <a:noFill/>
+        </p:spPr>
+        <p:txBody>
+          <a:bodyPr wrap="square">
+            <a:spAutoFit/>
+          </a:bodyPr>
+          <a:lstStyle/>
+          <a:p>
+            <a:pPr algn="l"/>
+            <a:r>
+              <a:rPr sz="1100" b="1">
+                <a:solidFill>
+                  <a:srgbClr val="1C1717"/>
+                </a:solidFill>
+              </a:rPr>
+              <a:t>•  Backend</a:t>
+            </a:r>
+            <a:r>
+              <a:rPr sz="1000">
+                <a:solidFill>
+                  <a:srgbClr val="78716C"/>
+                </a:solidFill>
+              </a:rPr>
+              <a:t>  — PyTorch tensors + autograd only</a:t>
+            </a:r>
+          </a:p>
+          <a:p>
+            <a:pPr algn="l"/>
+            <a:r>
+              <a:rPr sz="1100" b="1">
+                <a:solidFill>
+                  <a:srgbClr val="1C1717"/>
+                </a:solidFill>
+              </a:rPr>
+              <a:t>•  No pretrained weights</a:t>
+            </a:r>
+            <a:r>
+              <a:rPr sz="1000">
+                <a:solidFill>
+                  <a:srgbClr val="78716C"/>
+                </a:solidFill>
+              </a:rPr>
+              <a:t>  — every layer written by us</a:t>
+            </a:r>
+          </a:p>
+          <a:p>
+            <a:pPr algn="l"/>
+            <a:r>
+              <a:rPr sz="1100" b="1">
+                <a:solidFill>
+                  <a:srgbClr val="1C1717"/>
+                </a:solidFill>
+              </a:rPr>
+              <a:t>•  Arch.</a:t>
+            </a:r>
+            <a:r>
+              <a:rPr sz="1000">
+                <a:solidFill>
+                  <a:srgbClr val="78716C"/>
+                </a:solidFill>
+              </a:rPr>
+              <a:t>  — 2 encoder blocks · 4 heads · d=64 · d_ff=128</a:t>
+            </a:r>
+          </a:p>
+          <a:p>
+            <a:pPr algn="l"/>
+            <a:r>
+              <a:rPr sz="1100" b="1">
+                <a:solidFill>
+                  <a:srgbClr val="1C1717"/>
+                </a:solidFill>
+              </a:rPr>
+              <a:t>•  Embedding</a:t>
+            </a:r>
+            <a:r>
+              <a:rPr sz="1000">
+                <a:solidFill>
+                  <a:srgbClr val="78716C"/>
+                </a:solidFill>
+              </a:rPr>
+              <a:t>  — vocab-id → 64-d + sinusoidal pos enc</a:t>
+            </a:r>
+          </a:p>
+          <a:p>
+            <a:pPr algn="l"/>
+            <a:r>
+              <a:rPr sz="1100" b="1">
+                <a:solidFill>
+                  <a:srgbClr val="1C1717"/>
+                </a:solidFill>
+              </a:rPr>
+              <a:t>•  Attention</a:t>
+            </a:r>
+            <a:r>
+              <a:rPr sz="1000">
+                <a:solidFill>
+                  <a:srgbClr val="78716C"/>
+                </a:solidFill>
+              </a:rPr>
+              <a:t>  — scaled dot-product · multi-head · pre-LN</a:t>
+            </a:r>
+          </a:p>
+          <a:p>
+            <a:pPr algn="l"/>
+            <a:r>
+              <a:rPr sz="1100" b="1">
+                <a:solidFill>
+                  <a:srgbClr val="1C1717"/>
+                </a:solidFill>
+              </a:rPr>
+              <a:t>•  Pool / head</a:t>
+            </a:r>
+            <a:r>
+              <a:rPr sz="1000">
+                <a:solidFill>
+                  <a:srgbClr val="78716C"/>
+                </a:solidFill>
+              </a:rPr>
+              <a:t>  — masked mean-pool → softmax(13 classes)</a:t>
+            </a:r>
+          </a:p>
+          <a:p>
+            <a:pPr algn="l"/>
+            <a:r>
+              <a:rPr sz="1100" b="1">
+                <a:solidFill>
+                  <a:srgbClr val="1C1717"/>
+                </a:solidFill>
+              </a:rPr>
+              <a:t>•  Training data</a:t>
+            </a:r>
+            <a:r>
+              <a:rPr sz="1000">
+                <a:solidFill>
+                  <a:srgbClr val="78716C"/>
+                </a:solidFill>
+              </a:rPr>
+              <a:t>  — 1206 augmented intent examples</a:t>
+            </a:r>
+          </a:p>
+          <a:p>
+            <a:pPr algn="l"/>
+            <a:r>
+              <a:rPr sz="1100" b="1">
+                <a:solidFill>
+                  <a:srgbClr val="1C1717"/>
+                </a:solidFill>
+              </a:rPr>
+              <a:t>•  Optimiser</a:t>
+            </a:r>
+            <a:r>
+              <a:rPr sz="1000">
+                <a:solidFill>
+                  <a:srgbClr val="78716C"/>
+                </a:solidFill>
+              </a:rPr>
+              <a:t>  — AdamW + cosine LR + grad clip</a:t>
+            </a:r>
+          </a:p>
+          <a:p>
+            <a:pPr algn="l"/>
+            <a:r>
+              <a:rPr sz="1100" b="1">
+                <a:solidFill>
+                  <a:srgbClr val="1C1717"/>
+                </a:solidFill>
+              </a:rPr>
+              <a:t>•  Hardware</a:t>
+            </a:r>
+            <a:r>
+              <a:rPr sz="1000">
+                <a:solidFill>
+                  <a:srgbClr val="78716C"/>
+                </a:solidFill>
+              </a:rPr>
+              <a:t>  — Auto-detects CUDA; CPU fallback</a:t>
+            </a:r>
+          </a:p>
+          <a:p>
+            <a:pPr algn="l"/>
+            <a:r>
+              <a:rPr sz="1100" b="1">
+                <a:solidFill>
+                  <a:srgbClr val="1C1717"/>
+                </a:solidFill>
+              </a:rPr>
+              <a:t>•  Result</a:t>
+            </a:r>
+            <a:r>
+              <a:rPr sz="1000">
+                <a:solidFill>
+                  <a:srgbClr val="78716C"/>
+                </a:solidFill>
+              </a:rPr>
+              <a:t>  — train acc 1.000, loss 0.0003</a:t>
+            </a:r>
+          </a:p>
+          <a:p>
+            <a:pPr algn="l"/>
+            <a:r>
+              <a:rPr sz="1100" b="1">
+                <a:solidFill>
+                  <a:srgbClr val="1C1717"/>
+                </a:solidFill>
+              </a:rPr>
+              <a:t>•  Endpoint</a:t>
+            </a:r>
+            <a:r>
+              <a:rPr sz="1000">
+                <a:solidFill>
+                  <a:srgbClr val="78716C"/>
+                </a:solidFill>
+              </a:rPr>
+              <a:t>  — POST /nlp/torch_intent</a:t>
             </a:r>
           </a:p>
         </p:txBody>
@@ -6750,8 +5749,8 @@
 </p:sld>
 </file>
 
-<file path=ppt/slides/slide7.xml><?xml version="1.0" encoding="utf-8"?>
-<p:sld xmlns:a="http://schemas.openxmlformats.org/drawingml/2006/main" xmlns:r="http://schemas.openxmlformats.org/officeDocument/2006/relationships" xmlns:p="http://schemas.openxmlformats.org/presentationml/2006/main">
+<file path=ppt/slides/slide6.xml><?xml version="1.0" encoding="utf-8"?>
+<p:sld xmlns:a="http://schemas.openxmlformats.org/drawingml/2006/main" xmlns:p="http://schemas.openxmlformats.org/presentationml/2006/main" xmlns:r="http://schemas.openxmlformats.org/officeDocument/2006/relationships">
   <p:cSld>
     <p:spTree>
       <p:nvGrpSpPr>
@@ -6759,14 +5758,7 @@
         <p:cNvGrpSpPr/>
         <p:nvPr/>
       </p:nvGrpSpPr>
-      <p:grpSpPr>
-        <a:xfrm>
-          <a:off x="0" y="0"/>
-          <a:ext cx="0" cy="0"/>
-          <a:chOff x="0" y="0"/>
-          <a:chExt cx="0" cy="0"/>
-        </a:xfrm>
-      </p:grpSpPr>
+      <p:grpSpPr/>
       <p:sp>
         <p:nvSpPr>
           <p:cNvPr id="2" name="Rectangle 1"/>
@@ -6807,7 +5799,6 @@
           <a:lstStyle/>
           <a:p>
             <a:pPr algn="ctr"/>
-            <a:endParaRPr/>
           </a:p>
         </p:txBody>
       </p:sp>
@@ -6828,7 +5819,7 @@
           <a:noFill/>
         </p:spPr>
         <p:txBody>
-          <a:bodyPr wrap="square" lIns="0" tIns="0" rIns="0" bIns="0">
+          <a:bodyPr wrap="square" lIns="0" rIns="0" tIns="0" bIns="0">
             <a:spAutoFit/>
           </a:bodyPr>
           <a:lstStyle/>
@@ -6840,7 +5831,7 @@
                   <a:srgbClr val="1C1717"/>
                 </a:solidFill>
               </a:rPr>
-              <a:t>Strengths</a:t>
+              <a:t>Evaluation</a:t>
             </a:r>
           </a:p>
         </p:txBody>
@@ -6853,8 +5844,8 @@
         </p:nvSpPr>
         <p:spPr>
           <a:xfrm>
-            <a:off x="548640" y="1280160"/>
-            <a:ext cx="11338560" cy="2862322"/>
+            <a:off x="457200" y="1143000"/>
+            <a:ext cx="10972800" cy="457200"/>
           </a:xfrm>
           <a:prstGeom prst="rect">
             <a:avLst/>
@@ -6862,208 +5853,740 @@
           <a:noFill/>
         </p:spPr>
         <p:txBody>
-          <a:bodyPr wrap="square">
+          <a:bodyPr wrap="square" lIns="0" rIns="0" tIns="0" bIns="0">
             <a:spAutoFit/>
           </a:bodyPr>
           <a:lstStyle/>
           <a:p>
             <a:pPr algn="l"/>
             <a:r>
-              <a:rPr sz="2000" b="1" dirty="0">
-                <a:solidFill>
-                  <a:srgbClr val="1C1717"/>
-                </a:solidFill>
-              </a:rPr>
-              <a:t>•  No LLM dependency</a:t>
-            </a:r>
-            <a:r>
-              <a:rPr sz="2000" dirty="0">
-                <a:solidFill>
-                  <a:srgbClr val="78716C"/>
-                </a:solidFill>
-              </a:rPr>
-              <a:t> reproducible, auditable, no API costs, no hallucinations.</a:t>
-            </a:r>
-          </a:p>
-          <a:p>
-            <a:pPr algn="l"/>
-            <a:r>
-              <a:rPr sz="2000" b="1" dirty="0">
-                <a:solidFill>
-                  <a:srgbClr val="1C1717"/>
-                </a:solidFill>
-              </a:rPr>
-              <a:t>•  Every algorithm is ours</a:t>
-            </a:r>
-            <a:r>
-              <a:rPr sz="2000" dirty="0">
-                <a:solidFill>
-                  <a:srgbClr val="78716C"/>
-                </a:solidFill>
-              </a:rPr>
-              <a:t> drop-in replacements for </a:t>
-            </a:r>
-            <a:r>
-              <a:rPr sz="2000" dirty="0" err="1">
-                <a:solidFill>
-                  <a:srgbClr val="78716C"/>
-                </a:solidFill>
-              </a:rPr>
-              <a:t>sklearn</a:t>
-            </a:r>
-            <a:r>
-              <a:rPr sz="2000" dirty="0">
-                <a:solidFill>
-                  <a:srgbClr val="78716C"/>
-                </a:solidFill>
-              </a:rPr>
-              <a:t>, rank_bm25 and sentence-transformers.</a:t>
-            </a:r>
-          </a:p>
-          <a:p>
-            <a:pPr algn="l"/>
-            <a:r>
-              <a:rPr sz="2000" b="1" dirty="0">
-                <a:solidFill>
-                  <a:srgbClr val="1C1717"/>
-                </a:solidFill>
-              </a:rPr>
-              <a:t>•  Hybrid retrieval works</a:t>
-            </a:r>
-            <a:r>
-              <a:rPr sz="2000" dirty="0">
-                <a:solidFill>
-                  <a:srgbClr val="78716C"/>
-                </a:solidFill>
-              </a:rPr>
-              <a:t> P@1 0.93 across 116 held-out queries at 22 </a:t>
-            </a:r>
-            <a:r>
-              <a:rPr sz="2000" dirty="0" err="1">
-                <a:solidFill>
-                  <a:srgbClr val="78716C"/>
-                </a:solidFill>
-              </a:rPr>
-              <a:t>ms</a:t>
-            </a:r>
-            <a:r>
-              <a:rPr sz="2000" dirty="0">
-                <a:solidFill>
-                  <a:srgbClr val="78716C"/>
-                </a:solidFill>
-              </a:rPr>
-              <a:t> p50.</a:t>
-            </a:r>
-          </a:p>
-          <a:p>
-            <a:pPr algn="l"/>
-            <a:r>
-              <a:rPr sz="2000" b="1" dirty="0">
-                <a:solidFill>
-                  <a:srgbClr val="1C1717"/>
-                </a:solidFill>
-              </a:rPr>
-              <a:t>•  Multi-turn dialog</a:t>
-            </a:r>
-            <a:r>
-              <a:rPr sz="2000" dirty="0">
-                <a:solidFill>
-                  <a:srgbClr val="78716C"/>
-                </a:solidFill>
-              </a:rPr>
-              <a:t> coreference, slot filling, topic tracking, triage banner, empathic openers, disambiguation.</a:t>
-            </a:r>
-          </a:p>
-          <a:p>
-            <a:pPr algn="l"/>
-            <a:r>
-              <a:rPr sz="2000" b="1" dirty="0">
-                <a:solidFill>
-                  <a:srgbClr val="1C1717"/>
-                </a:solidFill>
-              </a:rPr>
-              <a:t>•  Pakistan-friendly</a:t>
-            </a:r>
-            <a:r>
-              <a:rPr sz="2000" dirty="0">
-                <a:solidFill>
-                  <a:srgbClr val="78716C"/>
-                </a:solidFill>
-              </a:rPr>
-              <a:t> Roman-Urdu phonetic mapping, 1122 emergency wording, PHI scrub at ingest.</a:t>
-            </a:r>
-          </a:p>
-          <a:p>
-            <a:pPr algn="l"/>
-            <a:r>
-              <a:rPr sz="2000" b="1" dirty="0">
-                <a:solidFill>
-                  <a:srgbClr val="1C1717"/>
-                </a:solidFill>
-              </a:rPr>
-              <a:t>•  One-command deploy</a:t>
-            </a:r>
-            <a:r>
-              <a:rPr sz="2000" dirty="0">
-                <a:solidFill>
-                  <a:srgbClr val="78716C"/>
-                </a:solidFill>
-              </a:rPr>
-              <a:t> docker compose up auto-seeds Mongo, builds API + Next.js.</a:t>
-            </a:r>
-          </a:p>
-          <a:p>
-            <a:pPr algn="l"/>
-            <a:r>
-              <a:rPr sz="2000" b="1" dirty="0">
-                <a:solidFill>
-                  <a:srgbClr val="1C1717"/>
-                </a:solidFill>
-              </a:rPr>
-              <a:t>•  Real-time analytics</a:t>
-            </a:r>
-            <a:r>
-              <a:rPr sz="2000" dirty="0">
-                <a:solidFill>
-                  <a:srgbClr val="78716C"/>
-                </a:solidFill>
-              </a:rPr>
-              <a:t> FAQ count increments live, persisted in Mongo, surfaced in /admin.</a:t>
-            </a:r>
-          </a:p>
-          <a:p>
-            <a:pPr algn="l"/>
-            <a:r>
-              <a:rPr sz="2000" b="1" dirty="0">
-                <a:solidFill>
-                  <a:srgbClr val="1C1717"/>
-                </a:solidFill>
-              </a:rPr>
-              <a:t>•  Trainable transformer</a:t>
-            </a:r>
-            <a:r>
-              <a:rPr sz="2000" dirty="0">
-                <a:solidFill>
-                  <a:srgbClr val="78716C"/>
-                </a:solidFill>
-              </a:rPr>
-              <a:t> GPU-ready </a:t>
-            </a:r>
-            <a:r>
-              <a:rPr sz="2000" dirty="0" err="1">
-                <a:solidFill>
-                  <a:srgbClr val="78716C"/>
-                </a:solidFill>
-              </a:rPr>
-              <a:t>PyTorch</a:t>
-            </a:r>
-            <a:r>
-              <a:rPr sz="2000" dirty="0">
-                <a:solidFill>
-                  <a:srgbClr val="78716C"/>
-                </a:solidFill>
-              </a:rPr>
-              <a:t> model trained from scratch on our own corpus.</a:t>
+              <a:rPr sz="1400" b="0">
+                <a:solidFill>
+                  <a:srgbClr val="78716C"/>
+                </a:solidFill>
+              </a:rPr>
+              <a:t>Retrieval evaluated on 116 held-out queries; transformer on training accuracy.</a:t>
+            </a:r>
+          </a:p>
+        </p:txBody>
+      </p:sp>
+      <p:graphicFrame>
+        <p:nvGraphicFramePr>
+          <p:cNvPr id="5" name="Table 4"/>
+          <p:cNvGraphicFramePr>
+            <a:graphicFrameLocks noGrp="1"/>
+          </p:cNvGraphicFramePr>
+          <p:nvPr/>
+        </p:nvGraphicFramePr>
+        <p:xfrm>
+          <a:off x="457200" y="1783080"/>
+          <a:ext cx="3657600" cy="2103120"/>
+        </p:xfrm>
+        <a:graphic>
+          <a:graphicData uri="http://schemas.openxmlformats.org/drawingml/2006/table">
+            <a:tbl>
+              <a:tblPr firstRow="1" bandRow="1">
+                <a:tableStyleId>{5C22544A-7EE6-4342-B048-85BDC9FD1C3A}</a:tableStyleId>
+              </a:tblPr>
+              <a:tblGrid>
+                <a:gridCol w="1828800"/>
+                <a:gridCol w="1828800"/>
+              </a:tblGrid>
+              <a:tr h="350520">
+                <a:tc>
+                  <a:txBody>
+                    <a:bodyPr/>
+                    <a:lstStyle/>
+                    <a:p>
+                      <a:r>
+                        <a:rPr sz="1200" b="1">
+                          <a:solidFill>
+                            <a:srgbClr val="1C1717"/>
+                          </a:solidFill>
+                        </a:rPr>
+                        <a:t>Metric</a:t>
+                      </a:r>
+                    </a:p>
+                  </a:txBody>
+                  <a:tcPr/>
+                </a:tc>
+                <a:tc>
+                  <a:txBody>
+                    <a:bodyPr/>
+                    <a:lstStyle/>
+                    <a:p>
+                      <a:r>
+                        <a:rPr sz="1200" b="1">
+                          <a:solidFill>
+                            <a:srgbClr val="1C1717"/>
+                          </a:solidFill>
+                        </a:rPr>
+                        <a:t>Value</a:t>
+                      </a:r>
+                    </a:p>
+                  </a:txBody>
+                  <a:tcPr/>
+                </a:tc>
+              </a:tr>
+              <a:tr h="350520">
+                <a:tc>
+                  <a:txBody>
+                    <a:bodyPr/>
+                    <a:lstStyle/>
+                    <a:p>
+                      <a:r>
+                        <a:rPr sz="1200">
+                          <a:solidFill>
+                            <a:srgbClr val="1C1717"/>
+                          </a:solidFill>
+                        </a:rPr>
+                        <a:t>Precision@1</a:t>
+                      </a:r>
+                    </a:p>
+                  </a:txBody>
+                  <a:tcPr/>
+                </a:tc>
+                <a:tc>
+                  <a:txBody>
+                    <a:bodyPr/>
+                    <a:lstStyle/>
+                    <a:p>
+                      <a:r>
+                        <a:rPr sz="1200">
+                          <a:solidFill>
+                            <a:srgbClr val="1C1717"/>
+                          </a:solidFill>
+                        </a:rPr>
+                        <a:t>0.931</a:t>
+                      </a:r>
+                    </a:p>
+                  </a:txBody>
+                  <a:tcPr/>
+                </a:tc>
+              </a:tr>
+              <a:tr h="350520">
+                <a:tc>
+                  <a:txBody>
+                    <a:bodyPr/>
+                    <a:lstStyle/>
+                    <a:p>
+                      <a:r>
+                        <a:rPr sz="1200">
+                          <a:solidFill>
+                            <a:srgbClr val="1C1717"/>
+                          </a:solidFill>
+                        </a:rPr>
+                        <a:t>MRR</a:t>
+                      </a:r>
+                    </a:p>
+                  </a:txBody>
+                  <a:tcPr/>
+                </a:tc>
+                <a:tc>
+                  <a:txBody>
+                    <a:bodyPr/>
+                    <a:lstStyle/>
+                    <a:p>
+                      <a:r>
+                        <a:rPr sz="1200">
+                          <a:solidFill>
+                            <a:srgbClr val="1C1717"/>
+                          </a:solidFill>
+                        </a:rPr>
+                        <a:t>0.938</a:t>
+                      </a:r>
+                    </a:p>
+                  </a:txBody>
+                  <a:tcPr/>
+                </a:tc>
+              </a:tr>
+              <a:tr h="350520">
+                <a:tc>
+                  <a:txBody>
+                    <a:bodyPr/>
+                    <a:lstStyle/>
+                    <a:p>
+                      <a:r>
+                        <a:rPr sz="1200">
+                          <a:solidFill>
+                            <a:srgbClr val="1C1717"/>
+                          </a:solidFill>
+                        </a:rPr>
+                        <a:t>Recall@5</a:t>
+                      </a:r>
+                    </a:p>
+                  </a:txBody>
+                  <a:tcPr/>
+                </a:tc>
+                <a:tc>
+                  <a:txBody>
+                    <a:bodyPr/>
+                    <a:lstStyle/>
+                    <a:p>
+                      <a:r>
+                        <a:rPr sz="1200">
+                          <a:solidFill>
+                            <a:srgbClr val="1C1717"/>
+                          </a:solidFill>
+                        </a:rPr>
+                        <a:t>0.948</a:t>
+                      </a:r>
+                    </a:p>
+                  </a:txBody>
+                  <a:tcPr/>
+                </a:tc>
+              </a:tr>
+              <a:tr h="350520">
+                <a:tc>
+                  <a:txBody>
+                    <a:bodyPr/>
+                    <a:lstStyle/>
+                    <a:p>
+                      <a:r>
+                        <a:rPr sz="1200">
+                          <a:solidFill>
+                            <a:srgbClr val="1C1717"/>
+                          </a:solidFill>
+                        </a:rPr>
+                        <a:t>Median latency</a:t>
+                      </a:r>
+                    </a:p>
+                  </a:txBody>
+                  <a:tcPr/>
+                </a:tc>
+                <a:tc>
+                  <a:txBody>
+                    <a:bodyPr/>
+                    <a:lstStyle/>
+                    <a:p>
+                      <a:r>
+                        <a:rPr sz="1200">
+                          <a:solidFill>
+                            <a:srgbClr val="1C1717"/>
+                          </a:solidFill>
+                        </a:rPr>
+                        <a:t>22 ms</a:t>
+                      </a:r>
+                    </a:p>
+                  </a:txBody>
+                  <a:tcPr/>
+                </a:tc>
+              </a:tr>
+              <a:tr h="350520">
+                <a:tc>
+                  <a:txBody>
+                    <a:bodyPr/>
+                    <a:lstStyle/>
+                    <a:p>
+                      <a:r>
+                        <a:rPr sz="1200">
+                          <a:solidFill>
+                            <a:srgbClr val="1C1717"/>
+                          </a:solidFill>
+                        </a:rPr>
+                        <a:t>p95 latency</a:t>
+                      </a:r>
+                    </a:p>
+                  </a:txBody>
+                  <a:tcPr/>
+                </a:tc>
+                <a:tc>
+                  <a:txBody>
+                    <a:bodyPr/>
+                    <a:lstStyle/>
+                    <a:p>
+                      <a:r>
+                        <a:rPr sz="1200">
+                          <a:solidFill>
+                            <a:srgbClr val="1C1717"/>
+                          </a:solidFill>
+                        </a:rPr>
+                        <a:t>47 ms</a:t>
+                      </a:r>
+                    </a:p>
+                  </a:txBody>
+                  <a:tcPr/>
+                </a:tc>
+              </a:tr>
+            </a:tbl>
+          </a:graphicData>
+        </a:graphic>
+      </p:graphicFrame>
+      <p:graphicFrame>
+        <p:nvGraphicFramePr>
+          <p:cNvPr id="6" name="Table 5"/>
+          <p:cNvGraphicFramePr>
+            <a:graphicFrameLocks noGrp="1"/>
+          </p:cNvGraphicFramePr>
+          <p:nvPr/>
+        </p:nvGraphicFramePr>
+        <p:xfrm>
+          <a:off x="4480560" y="1783080"/>
+          <a:ext cx="7315200" cy="2103120"/>
+        </p:xfrm>
+        <a:graphic>
+          <a:graphicData uri="http://schemas.openxmlformats.org/drawingml/2006/table">
+            <a:tbl>
+              <a:tblPr firstRow="1" bandRow="1">
+                <a:tableStyleId>{5C22544A-7EE6-4342-B048-85BDC9FD1C3A}</a:tableStyleId>
+              </a:tblPr>
+              <a:tblGrid>
+                <a:gridCol w="1463040"/>
+                <a:gridCol w="1463040"/>
+                <a:gridCol w="1463040"/>
+                <a:gridCol w="1463040"/>
+                <a:gridCol w="1463040"/>
+              </a:tblGrid>
+              <a:tr h="525780">
+                <a:tc>
+                  <a:txBody>
+                    <a:bodyPr/>
+                    <a:lstStyle/>
+                    <a:p>
+                      <a:r>
+                        <a:rPr sz="1200" b="1">
+                          <a:solidFill>
+                            <a:srgbClr val="1C1717"/>
+                          </a:solidFill>
+                        </a:rPr>
+                        <a:t>Specialty</a:t>
+                      </a:r>
+                    </a:p>
+                  </a:txBody>
+                  <a:tcPr/>
+                </a:tc>
+                <a:tc>
+                  <a:txBody>
+                    <a:bodyPr/>
+                    <a:lstStyle/>
+                    <a:p>
+                      <a:r>
+                        <a:rPr sz="1200" b="1">
+                          <a:solidFill>
+                            <a:srgbClr val="1C1717"/>
+                          </a:solidFill>
+                        </a:rPr>
+                        <a:t>n</a:t>
+                      </a:r>
+                    </a:p>
+                  </a:txBody>
+                  <a:tcPr/>
+                </a:tc>
+                <a:tc>
+                  <a:txBody>
+                    <a:bodyPr/>
+                    <a:lstStyle/>
+                    <a:p>
+                      <a:r>
+                        <a:rPr sz="1200" b="1">
+                          <a:solidFill>
+                            <a:srgbClr val="1C1717"/>
+                          </a:solidFill>
+                        </a:rPr>
+                        <a:t>P@1</a:t>
+                      </a:r>
+                    </a:p>
+                  </a:txBody>
+                  <a:tcPr/>
+                </a:tc>
+                <a:tc>
+                  <a:txBody>
+                    <a:bodyPr/>
+                    <a:lstStyle/>
+                    <a:p>
+                      <a:r>
+                        <a:rPr sz="1200" b="1">
+                          <a:solidFill>
+                            <a:srgbClr val="1C1717"/>
+                          </a:solidFill>
+                        </a:rPr>
+                        <a:t>Recall@5</a:t>
+                      </a:r>
+                    </a:p>
+                  </a:txBody>
+                  <a:tcPr/>
+                </a:tc>
+                <a:tc>
+                  <a:txBody>
+                    <a:bodyPr/>
+                    <a:lstStyle/>
+                    <a:p>
+                      <a:r>
+                        <a:rPr sz="1200" b="1">
+                          <a:solidFill>
+                            <a:srgbClr val="1C1717"/>
+                          </a:solidFill>
+                        </a:rPr>
+                        <a:t>MRR</a:t>
+                      </a:r>
+                    </a:p>
+                  </a:txBody>
+                  <a:tcPr/>
+                </a:tc>
+              </a:tr>
+              <a:tr h="525780">
+                <a:tc>
+                  <a:txBody>
+                    <a:bodyPr/>
+                    <a:lstStyle/>
+                    <a:p>
+                      <a:r>
+                        <a:rPr sz="1200">
+                          <a:solidFill>
+                            <a:srgbClr val="1C1717"/>
+                          </a:solidFill>
+                        </a:rPr>
+                        <a:t>Radiology</a:t>
+                      </a:r>
+                    </a:p>
+                  </a:txBody>
+                  <a:tcPr/>
+                </a:tc>
+                <a:tc>
+                  <a:txBody>
+                    <a:bodyPr/>
+                    <a:lstStyle/>
+                    <a:p>
+                      <a:r>
+                        <a:rPr sz="1200">
+                          <a:solidFill>
+                            <a:srgbClr val="1C1717"/>
+                          </a:solidFill>
+                        </a:rPr>
+                        <a:t>36</a:t>
+                      </a:r>
+                    </a:p>
+                  </a:txBody>
+                  <a:tcPr/>
+                </a:tc>
+                <a:tc>
+                  <a:txBody>
+                    <a:bodyPr/>
+                    <a:lstStyle/>
+                    <a:p>
+                      <a:r>
+                        <a:rPr sz="1200">
+                          <a:solidFill>
+                            <a:srgbClr val="1C1717"/>
+                          </a:solidFill>
+                        </a:rPr>
+                        <a:t>0.861</a:t>
+                      </a:r>
+                    </a:p>
+                  </a:txBody>
+                  <a:tcPr/>
+                </a:tc>
+                <a:tc>
+                  <a:txBody>
+                    <a:bodyPr/>
+                    <a:lstStyle/>
+                    <a:p>
+                      <a:r>
+                        <a:rPr sz="1200">
+                          <a:solidFill>
+                            <a:srgbClr val="1C1717"/>
+                          </a:solidFill>
+                        </a:rPr>
+                        <a:t>0.889</a:t>
+                      </a:r>
+                    </a:p>
+                  </a:txBody>
+                  <a:tcPr/>
+                </a:tc>
+                <a:tc>
+                  <a:txBody>
+                    <a:bodyPr/>
+                    <a:lstStyle/>
+                    <a:p>
+                      <a:r>
+                        <a:rPr sz="1200">
+                          <a:solidFill>
+                            <a:srgbClr val="1C1717"/>
+                          </a:solidFill>
+                        </a:rPr>
+                        <a:t>0.870</a:t>
+                      </a:r>
+                    </a:p>
+                  </a:txBody>
+                  <a:tcPr/>
+                </a:tc>
+              </a:tr>
+              <a:tr h="525780">
+                <a:tc>
+                  <a:txBody>
+                    <a:bodyPr/>
+                    <a:lstStyle/>
+                    <a:p>
+                      <a:r>
+                        <a:rPr sz="1200">
+                          <a:solidFill>
+                            <a:srgbClr val="1C1717"/>
+                          </a:solidFill>
+                        </a:rPr>
+                        <a:t>Physiotherapy</a:t>
+                      </a:r>
+                    </a:p>
+                  </a:txBody>
+                  <a:tcPr/>
+                </a:tc>
+                <a:tc>
+                  <a:txBody>
+                    <a:bodyPr/>
+                    <a:lstStyle/>
+                    <a:p>
+                      <a:r>
+                        <a:rPr sz="1200">
+                          <a:solidFill>
+                            <a:srgbClr val="1C1717"/>
+                          </a:solidFill>
+                        </a:rPr>
+                        <a:t>35</a:t>
+                      </a:r>
+                    </a:p>
+                  </a:txBody>
+                  <a:tcPr/>
+                </a:tc>
+                <a:tc>
+                  <a:txBody>
+                    <a:bodyPr/>
+                    <a:lstStyle/>
+                    <a:p>
+                      <a:r>
+                        <a:rPr sz="1200">
+                          <a:solidFill>
+                            <a:srgbClr val="1C1717"/>
+                          </a:solidFill>
+                        </a:rPr>
+                        <a:t>0.971</a:t>
+                      </a:r>
+                    </a:p>
+                  </a:txBody>
+                  <a:tcPr/>
+                </a:tc>
+                <a:tc>
+                  <a:txBody>
+                    <a:bodyPr/>
+                    <a:lstStyle/>
+                    <a:p>
+                      <a:r>
+                        <a:rPr sz="1200">
+                          <a:solidFill>
+                            <a:srgbClr val="1C1717"/>
+                          </a:solidFill>
+                        </a:rPr>
+                        <a:t>0.971</a:t>
+                      </a:r>
+                    </a:p>
+                  </a:txBody>
+                  <a:tcPr/>
+                </a:tc>
+                <a:tc>
+                  <a:txBody>
+                    <a:bodyPr/>
+                    <a:lstStyle/>
+                    <a:p>
+                      <a:r>
+                        <a:rPr sz="1200">
+                          <a:solidFill>
+                            <a:srgbClr val="1C1717"/>
+                          </a:solidFill>
+                        </a:rPr>
+                        <a:t>0.971</a:t>
+                      </a:r>
+                    </a:p>
+                  </a:txBody>
+                  <a:tcPr/>
+                </a:tc>
+              </a:tr>
+              <a:tr h="525780">
+                <a:tc>
+                  <a:txBody>
+                    <a:bodyPr/>
+                    <a:lstStyle/>
+                    <a:p>
+                      <a:r>
+                        <a:rPr sz="1200">
+                          <a:solidFill>
+                            <a:srgbClr val="1C1717"/>
+                          </a:solidFill>
+                        </a:rPr>
+                        <a:t>Cardiovascular</a:t>
+                      </a:r>
+                    </a:p>
+                  </a:txBody>
+                  <a:tcPr/>
+                </a:tc>
+                <a:tc>
+                  <a:txBody>
+                    <a:bodyPr/>
+                    <a:lstStyle/>
+                    <a:p>
+                      <a:r>
+                        <a:rPr sz="1200">
+                          <a:solidFill>
+                            <a:srgbClr val="1C1717"/>
+                          </a:solidFill>
+                        </a:rPr>
+                        <a:t>45</a:t>
+                      </a:r>
+                    </a:p>
+                  </a:txBody>
+                  <a:tcPr/>
+                </a:tc>
+                <a:tc>
+                  <a:txBody>
+                    <a:bodyPr/>
+                    <a:lstStyle/>
+                    <a:p>
+                      <a:r>
+                        <a:rPr sz="1200">
+                          <a:solidFill>
+                            <a:srgbClr val="1C1717"/>
+                          </a:solidFill>
+                        </a:rPr>
+                        <a:t>0.956</a:t>
+                      </a:r>
+                    </a:p>
+                  </a:txBody>
+                  <a:tcPr/>
+                </a:tc>
+                <a:tc>
+                  <a:txBody>
+                    <a:bodyPr/>
+                    <a:lstStyle/>
+                    <a:p>
+                      <a:r>
+                        <a:rPr sz="1200">
+                          <a:solidFill>
+                            <a:srgbClr val="1C1717"/>
+                          </a:solidFill>
+                        </a:rPr>
+                        <a:t>0.978</a:t>
+                      </a:r>
+                    </a:p>
+                  </a:txBody>
+                  <a:tcPr/>
+                </a:tc>
+                <a:tc>
+                  <a:txBody>
+                    <a:bodyPr/>
+                    <a:lstStyle/>
+                    <a:p>
+                      <a:r>
+                        <a:rPr sz="1200">
+                          <a:solidFill>
+                            <a:srgbClr val="1C1717"/>
+                          </a:solidFill>
+                        </a:rPr>
+                        <a:t>0.967</a:t>
+                      </a:r>
+                    </a:p>
+                  </a:txBody>
+                  <a:tcPr/>
+                </a:tc>
+              </a:tr>
+            </a:tbl>
+          </a:graphicData>
+        </a:graphic>
+      </p:graphicFrame>
+      <p:sp>
+        <p:nvSpPr>
+          <p:cNvPr id="7" name="TextBox 6"/>
+          <p:cNvSpPr txBox="1"/>
+          <p:nvPr/>
+        </p:nvSpPr>
+        <p:spPr>
+          <a:xfrm>
+            <a:off x="457200" y="4206240"/>
+            <a:ext cx="10972800" cy="457200"/>
+          </a:xfrm>
+          <a:prstGeom prst="rect">
+            <a:avLst/>
+          </a:prstGeom>
+          <a:noFill/>
+        </p:spPr>
+        <p:txBody>
+          <a:bodyPr wrap="square" lIns="0" rIns="0" tIns="0" bIns="0">
+            <a:spAutoFit/>
+          </a:bodyPr>
+          <a:lstStyle/>
+          <a:p>
+            <a:pPr algn="l"/>
+            <a:r>
+              <a:rPr sz="1400" b="0">
+                <a:solidFill>
+                  <a:srgbClr val="1C1717"/>
+                </a:solidFill>
+              </a:rPr>
+              <a:t>Transformer intent classifier:  train accuracy 1.000 · final CE loss 0.0003 over 40 epochs</a:t>
+            </a:r>
+          </a:p>
+        </p:txBody>
+      </p:sp>
+      <p:sp>
+        <p:nvSpPr>
+          <p:cNvPr id="8" name="TextBox 7"/>
+          <p:cNvSpPr txBox="1"/>
+          <p:nvPr/>
+        </p:nvSpPr>
+        <p:spPr>
+          <a:xfrm>
+            <a:off x="457200" y="4709160"/>
+            <a:ext cx="10972800" cy="457200"/>
+          </a:xfrm>
+          <a:prstGeom prst="rect">
+            <a:avLst/>
+          </a:prstGeom>
+          <a:noFill/>
+        </p:spPr>
+        <p:txBody>
+          <a:bodyPr wrap="square" lIns="0" rIns="0" tIns="0" bIns="0">
+            <a:spAutoFit/>
+          </a:bodyPr>
+          <a:lstStyle/>
+          <a:p>
+            <a:pPr algn="l"/>
+            <a:r>
+              <a:rPr sz="1400" b="0">
+                <a:solidFill>
+                  <a:srgbClr val="1C1717"/>
+                </a:solidFill>
+              </a:rPr>
+              <a:t>Integration suite (api/final_test.py):  62 / 62 PASS  — covers chat, faq, admin, stats, nlp, frontend routes.</a:t>
+            </a:r>
+          </a:p>
+        </p:txBody>
+      </p:sp>
+      <p:sp>
+        <p:nvSpPr>
+          <p:cNvPr id="9" name="TextBox 8"/>
+          <p:cNvSpPr txBox="1"/>
+          <p:nvPr/>
+        </p:nvSpPr>
+        <p:spPr>
+          <a:xfrm>
+            <a:off x="457200" y="5349240"/>
+            <a:ext cx="10972800" cy="457200"/>
+          </a:xfrm>
+          <a:prstGeom prst="rect">
+            <a:avLst/>
+          </a:prstGeom>
+          <a:noFill/>
+        </p:spPr>
+        <p:txBody>
+          <a:bodyPr wrap="square" lIns="0" rIns="0" tIns="0" bIns="0">
+            <a:spAutoFit/>
+          </a:bodyPr>
+          <a:lstStyle/>
+          <a:p>
+            <a:pPr algn="l"/>
+            <a:r>
+              <a:rPr sz="1400" b="0">
+                <a:solidFill>
+                  <a:srgbClr val="1C1717"/>
+                </a:solidFill>
+              </a:rPr>
+              <a:t>Live FAQ counters verified end-to-end:  counts start at 0, increment per match, persist in Mongo.</a:t>
             </a:r>
           </a:p>
         </p:txBody>
@@ -7076,8 +6599,8 @@
 </p:sld>
 </file>
 
-<file path=ppt/slides/slide8.xml><?xml version="1.0" encoding="utf-8"?>
-<p:sld xmlns:a="http://schemas.openxmlformats.org/drawingml/2006/main" xmlns:r="http://schemas.openxmlformats.org/officeDocument/2006/relationships" xmlns:p="http://schemas.openxmlformats.org/presentationml/2006/main">
+<file path=ppt/slides/slide7.xml><?xml version="1.0" encoding="utf-8"?>
+<p:sld xmlns:a="http://schemas.openxmlformats.org/drawingml/2006/main" xmlns:p="http://schemas.openxmlformats.org/presentationml/2006/main" xmlns:r="http://schemas.openxmlformats.org/officeDocument/2006/relationships">
   <p:cSld>
     <p:spTree>
       <p:nvGrpSpPr>
@@ -7085,14 +6608,7 @@
         <p:cNvGrpSpPr/>
         <p:nvPr/>
       </p:nvGrpSpPr>
-      <p:grpSpPr>
-        <a:xfrm>
-          <a:off x="0" y="0"/>
-          <a:ext cx="0" cy="0"/>
-          <a:chOff x="0" y="0"/>
-          <a:chExt cx="0" cy="0"/>
-        </a:xfrm>
-      </p:grpSpPr>
+      <p:grpSpPr/>
       <p:sp>
         <p:nvSpPr>
           <p:cNvPr id="2" name="Rectangle 1"/>
@@ -7133,7 +6649,6 @@
           <a:lstStyle/>
           <a:p>
             <a:pPr algn="ctr"/>
-            <a:endParaRPr/>
           </a:p>
         </p:txBody>
       </p:sp>
@@ -7154,7 +6669,7 @@
           <a:noFill/>
         </p:spPr>
         <p:txBody>
-          <a:bodyPr wrap="square" lIns="0" tIns="0" rIns="0" bIns="0">
+          <a:bodyPr wrap="square" lIns="0" rIns="0" tIns="0" bIns="0">
             <a:spAutoFit/>
           </a:bodyPr>
           <a:lstStyle/>
@@ -7166,7 +6681,7 @@
                   <a:srgbClr val="1C1717"/>
                 </a:solidFill>
               </a:rPr>
-              <a:t>Limitations</a:t>
+              <a:t>Strengths</a:t>
             </a:r>
           </a:p>
         </p:txBody>
@@ -7180,7 +6695,7 @@
         <p:spPr>
           <a:xfrm>
             <a:off x="548640" y="1280160"/>
-            <a:ext cx="11338560" cy="3785652"/>
+            <a:ext cx="11338560" cy="5212080"/>
           </a:xfrm>
           <a:prstGeom prst="rect">
             <a:avLst/>
@@ -7195,150 +6710,153 @@
           <a:p>
             <a:pPr algn="l"/>
             <a:r>
-              <a:rPr sz="2000" b="1" dirty="0">
-                <a:solidFill>
-                  <a:srgbClr val="1C1717"/>
-                </a:solidFill>
-              </a:rPr>
-              <a:t>•  Small corpus</a:t>
-            </a:r>
-            <a:r>
-              <a:rPr sz="2000" dirty="0">
-                <a:solidFill>
-                  <a:srgbClr val="78716C"/>
-                </a:solidFill>
-              </a:rPr>
-              <a:t> 169 FAQs cover the most common questions but out-of-distribution queries fall through to best-guess.</a:t>
-            </a:r>
-          </a:p>
-          <a:p>
-            <a:pPr algn="l"/>
-            <a:r>
-              <a:rPr sz="2000" b="1" dirty="0">
-                <a:solidFill>
-                  <a:srgbClr val="1C1717"/>
-                </a:solidFill>
-              </a:rPr>
-              <a:t>•  Eval is approximate</a:t>
-            </a:r>
-            <a:r>
-              <a:rPr sz="2000" dirty="0">
-                <a:solidFill>
-                  <a:srgbClr val="78716C"/>
-                </a:solidFill>
-              </a:rPr>
-              <a:t> expected-keyword match in the answer can mark a correct FAQ as wrong when phrasing diverges.</a:t>
-            </a:r>
-          </a:p>
-          <a:p>
-            <a:pPr algn="l"/>
-            <a:r>
-              <a:rPr sz="2000" b="1" dirty="0">
-                <a:solidFill>
-                  <a:srgbClr val="1C1717"/>
-                </a:solidFill>
-              </a:rPr>
-              <a:t>•  Transformer overfits</a:t>
-            </a:r>
-            <a:r>
-              <a:rPr sz="2000" dirty="0">
-                <a:solidFill>
-                  <a:srgbClr val="78716C"/>
-                </a:solidFill>
-              </a:rPr>
-              <a:t> trained on 1206 augmented examples; held-out test of the classifier itself is still small.</a:t>
-            </a:r>
-          </a:p>
-          <a:p>
-            <a:pPr algn="l"/>
-            <a:r>
-              <a:rPr sz="2000" b="1" dirty="0">
-                <a:solidFill>
-                  <a:srgbClr val="1C1717"/>
-                </a:solidFill>
-              </a:rPr>
-              <a:t>•  NER is dictionary-first</a:t>
-            </a:r>
-            <a:r>
-              <a:rPr sz="2000" dirty="0">
-                <a:solidFill>
-                  <a:srgbClr val="78716C"/>
-                </a:solidFill>
-              </a:rPr>
-              <a:t> the CRF + structured perceptron variants improve coverage but training data is only 32 hand-annotated sentences.</a:t>
-            </a:r>
-          </a:p>
-          <a:p>
-            <a:pPr algn="l"/>
-            <a:r>
-              <a:rPr sz="2000" b="1" dirty="0">
-                <a:solidFill>
-                  <a:srgbClr val="1C1717"/>
-                </a:solidFill>
-              </a:rPr>
-              <a:t>•  Roman-Urdu is heuristic</a:t>
-            </a:r>
-            <a:r>
-              <a:rPr sz="2000" dirty="0">
-                <a:solidFill>
-                  <a:srgbClr val="78716C"/>
-                </a:solidFill>
-              </a:rPr>
-              <a:t> ~80-word dictionary catches common cases; full transliteration would need a real parallel corpus.</a:t>
-            </a:r>
-          </a:p>
-          <a:p>
-            <a:pPr algn="l"/>
-            <a:r>
-              <a:rPr sz="2000" b="1" dirty="0">
-                <a:solidFill>
-                  <a:srgbClr val="1C1717"/>
-                </a:solidFill>
-              </a:rPr>
-              <a:t>•  Voice input is browser-native</a:t>
-            </a:r>
-            <a:r>
-              <a:rPr sz="2000" dirty="0">
-                <a:solidFill>
-                  <a:srgbClr val="78716C"/>
-                </a:solidFill>
-              </a:rPr>
-              <a:t> Web Speech API works in Chrome / Edge only.</a:t>
-            </a:r>
-          </a:p>
-          <a:p>
-            <a:pPr algn="l"/>
-            <a:r>
-              <a:rPr sz="2000" b="1" dirty="0">
-                <a:solidFill>
-                  <a:srgbClr val="1C1717"/>
-                </a:solidFill>
-              </a:rPr>
-              <a:t>•  Counts are at-most-once per turn</a:t>
-            </a:r>
-            <a:r>
-              <a:rPr sz="2000" dirty="0">
-                <a:solidFill>
-                  <a:srgbClr val="78716C"/>
-                </a:solidFill>
-              </a:rPr>
-              <a:t> no fraud / abuse heuristic</a:t>
-            </a:r>
-            <a:r>
-              <a:rPr lang="en-US" sz="2000" dirty="0">
-                <a:solidFill>
-                  <a:srgbClr val="78716C"/>
-                </a:solidFill>
-              </a:rPr>
-              <a:t>,</a:t>
-            </a:r>
-            <a:r>
-              <a:rPr sz="2000" dirty="0">
-                <a:solidFill>
-                  <a:srgbClr val="78716C"/>
-                </a:solidFill>
-              </a:rPr>
-              <a:t> every successful match increments.</a:t>
+              <a:rPr sz="1500" b="1">
+                <a:solidFill>
+                  <a:srgbClr val="1C1717"/>
+                </a:solidFill>
+              </a:rPr>
+              <a:t>•  No LLM dependency</a:t>
+            </a:r>
+            <a:r>
+              <a:rPr sz="1400">
+                <a:solidFill>
+                  <a:srgbClr val="78716C"/>
+                </a:solidFill>
+              </a:rPr>
+              <a:t>  — reproducible, auditable, no API costs, no hallucinations.</a:t>
+            </a:r>
+          </a:p>
+          <a:p>
+            <a:pPr algn="l"/>
+            <a:r>
+              <a:rPr sz="1500" b="1">
+                <a:solidFill>
+                  <a:srgbClr val="1C1717"/>
+                </a:solidFill>
+              </a:rPr>
+              <a:t>•  Every algorithm is ours</a:t>
+            </a:r>
+            <a:r>
+              <a:rPr sz="1400">
+                <a:solidFill>
+                  <a:srgbClr val="78716C"/>
+                </a:solidFill>
+              </a:rPr>
+              <a:t>  — drop-in replacements for sklearn, rank_bm25 and sentence-transformers.</a:t>
+            </a:r>
+          </a:p>
+          <a:p>
+            <a:pPr algn="l"/>
+            <a:r>
+              <a:rPr sz="1500" b="1">
+                <a:solidFill>
+                  <a:srgbClr val="1C1717"/>
+                </a:solidFill>
+              </a:rPr>
+              <a:t>•  Hybrid retrieval works</a:t>
+            </a:r>
+            <a:r>
+              <a:rPr sz="1400">
+                <a:solidFill>
+                  <a:srgbClr val="78716C"/>
+                </a:solidFill>
+              </a:rPr>
+              <a:t>  — P@1 0.93 across 116 held-out queries at 22 ms p50.</a:t>
+            </a:r>
+          </a:p>
+          <a:p>
+            <a:pPr algn="l"/>
+            <a:r>
+              <a:rPr sz="1500" b="1">
+                <a:solidFill>
+                  <a:srgbClr val="1C1717"/>
+                </a:solidFill>
+              </a:rPr>
+              <a:t>•  Multi-turn dialog</a:t>
+            </a:r>
+            <a:r>
+              <a:rPr sz="1400">
+                <a:solidFill>
+                  <a:srgbClr val="78716C"/>
+                </a:solidFill>
+              </a:rPr>
+              <a:t>  — coreference, slot filling, topic tracking, triage banner, empathic openers, disambiguation.</a:t>
+            </a:r>
+          </a:p>
+          <a:p>
+            <a:pPr algn="l"/>
+            <a:r>
+              <a:rPr sz="1500" b="1">
+                <a:solidFill>
+                  <a:srgbClr val="1C1717"/>
+                </a:solidFill>
+              </a:rPr>
+              <a:t>•  Pakistan-friendly</a:t>
+            </a:r>
+            <a:r>
+              <a:rPr sz="1400">
+                <a:solidFill>
+                  <a:srgbClr val="78716C"/>
+                </a:solidFill>
+              </a:rPr>
+              <a:t>  — Roman-Urdu phonetic mapping, 1122 emergency wording, PHI scrub at ingest.</a:t>
+            </a:r>
+          </a:p>
+          <a:p>
+            <a:pPr algn="l"/>
+            <a:r>
+              <a:rPr sz="1500" b="1">
+                <a:solidFill>
+                  <a:srgbClr val="1C1717"/>
+                </a:solidFill>
+              </a:rPr>
+              <a:t>•  One-command deploy</a:t>
+            </a:r>
+            <a:r>
+              <a:rPr sz="1400">
+                <a:solidFill>
+                  <a:srgbClr val="78716C"/>
+                </a:solidFill>
+              </a:rPr>
+              <a:t>  — docker compose up auto-seeds Mongo, builds API + Next.js.</a:t>
+            </a:r>
+          </a:p>
+          <a:p>
+            <a:pPr algn="l"/>
+            <a:r>
+              <a:rPr sz="1500" b="1">
+                <a:solidFill>
+                  <a:srgbClr val="1C1717"/>
+                </a:solidFill>
+              </a:rPr>
+              <a:t>•  Real-time analytics</a:t>
+            </a:r>
+            <a:r>
+              <a:rPr sz="1400">
+                <a:solidFill>
+                  <a:srgbClr val="78716C"/>
+                </a:solidFill>
+              </a:rPr>
+              <a:t>  — FAQ count increments live, persisted in Mongo, surfaced in /admin.</a:t>
+            </a:r>
+          </a:p>
+          <a:p>
+            <a:pPr algn="l"/>
+            <a:r>
+              <a:rPr sz="1500" b="1">
+                <a:solidFill>
+                  <a:srgbClr val="1C1717"/>
+                </a:solidFill>
+              </a:rPr>
+              <a:t>•  Trainable transformer</a:t>
+            </a:r>
+            <a:r>
+              <a:rPr sz="1400">
+                <a:solidFill>
+                  <a:srgbClr val="78716C"/>
+                </a:solidFill>
+              </a:rPr>
+              <a:t>  — GPU-ready PyTorch model trained from scratch on our own corpus.</a:t>
             </a:r>
           </a:p>
         </p:txBody>
@@ -7351,8 +6869,8 @@
 </p:sld>
 </file>
 
-<file path=ppt/slides/slide9.xml><?xml version="1.0" encoding="utf-8"?>
-<p:sld xmlns:a="http://schemas.openxmlformats.org/drawingml/2006/main" xmlns:r="http://schemas.openxmlformats.org/officeDocument/2006/relationships" xmlns:p="http://schemas.openxmlformats.org/presentationml/2006/main">
+<file path=ppt/slides/slide8.xml><?xml version="1.0" encoding="utf-8"?>
+<p:sld xmlns:a="http://schemas.openxmlformats.org/drawingml/2006/main" xmlns:p="http://schemas.openxmlformats.org/presentationml/2006/main" xmlns:r="http://schemas.openxmlformats.org/officeDocument/2006/relationships">
   <p:cSld>
     <p:spTree>
       <p:nvGrpSpPr>
@@ -7360,14 +6878,7 @@
         <p:cNvGrpSpPr/>
         <p:nvPr/>
       </p:nvGrpSpPr>
-      <p:grpSpPr>
-        <a:xfrm>
-          <a:off x="0" y="0"/>
-          <a:ext cx="0" cy="0"/>
-          <a:chOff x="0" y="0"/>
-          <a:chExt cx="0" cy="0"/>
-        </a:xfrm>
-      </p:grpSpPr>
+      <p:grpSpPr/>
       <p:sp>
         <p:nvSpPr>
           <p:cNvPr id="2" name="Rectangle 1"/>
@@ -7408,7 +6919,6 @@
           <a:lstStyle/>
           <a:p>
             <a:pPr algn="ctr"/>
-            <a:endParaRPr/>
           </a:p>
         </p:txBody>
       </p:sp>
@@ -7429,7 +6939,7 @@
           <a:noFill/>
         </p:spPr>
         <p:txBody>
-          <a:bodyPr wrap="square" lIns="0" tIns="0" rIns="0" bIns="0">
+          <a:bodyPr wrap="square" lIns="0" rIns="0" tIns="0" bIns="0">
             <a:spAutoFit/>
           </a:bodyPr>
           <a:lstStyle/>
@@ -7441,7 +6951,7 @@
                   <a:srgbClr val="1C1717"/>
                 </a:solidFill>
               </a:rPr>
-              <a:t>Future direction</a:t>
+              <a:t>Limitations</a:t>
             </a:r>
           </a:p>
         </p:txBody>
@@ -7455,7 +6965,7 @@
         <p:spPr>
           <a:xfrm>
             <a:off x="548640" y="1280160"/>
-            <a:ext cx="11338560" cy="2862322"/>
+            <a:ext cx="11338560" cy="5212080"/>
           </a:xfrm>
           <a:prstGeom prst="rect">
             <a:avLst/>
@@ -7470,7 +6980,258 @@
           <a:p>
             <a:pPr algn="l"/>
             <a:r>
-              <a:rPr sz="2000" b="1" dirty="0">
+              <a:rPr sz="1500" b="1">
+                <a:solidFill>
+                  <a:srgbClr val="1C1717"/>
+                </a:solidFill>
+              </a:rPr>
+              <a:t>•  Small corpus</a:t>
+            </a:r>
+            <a:r>
+              <a:rPr sz="1400">
+                <a:solidFill>
+                  <a:srgbClr val="78716C"/>
+                </a:solidFill>
+              </a:rPr>
+              <a:t>  — 169 FAQs cover the most common questions but out-of-distribution queries fall through to best-guess.</a:t>
+            </a:r>
+          </a:p>
+          <a:p>
+            <a:pPr algn="l"/>
+            <a:r>
+              <a:rPr sz="1500" b="1">
+                <a:solidFill>
+                  <a:srgbClr val="1C1717"/>
+                </a:solidFill>
+              </a:rPr>
+              <a:t>•  Eval is approximate</a:t>
+            </a:r>
+            <a:r>
+              <a:rPr sz="1400">
+                <a:solidFill>
+                  <a:srgbClr val="78716C"/>
+                </a:solidFill>
+              </a:rPr>
+              <a:t>  — expected-keyword match in the answer can mark a correct FAQ as wrong when phrasing diverges.</a:t>
+            </a:r>
+          </a:p>
+          <a:p>
+            <a:pPr algn="l"/>
+            <a:r>
+              <a:rPr sz="1500" b="1">
+                <a:solidFill>
+                  <a:srgbClr val="1C1717"/>
+                </a:solidFill>
+              </a:rPr>
+              <a:t>•  Transformer overfits</a:t>
+            </a:r>
+            <a:r>
+              <a:rPr sz="1400">
+                <a:solidFill>
+                  <a:srgbClr val="78716C"/>
+                </a:solidFill>
+              </a:rPr>
+              <a:t>  — trained on 1206 augmented examples; held-out test of the classifier itself is still small.</a:t>
+            </a:r>
+          </a:p>
+          <a:p>
+            <a:pPr algn="l"/>
+            <a:r>
+              <a:rPr sz="1500" b="1">
+                <a:solidFill>
+                  <a:srgbClr val="1C1717"/>
+                </a:solidFill>
+              </a:rPr>
+              <a:t>•  NER is dictionary-first</a:t>
+            </a:r>
+            <a:r>
+              <a:rPr sz="1400">
+                <a:solidFill>
+                  <a:srgbClr val="78716C"/>
+                </a:solidFill>
+              </a:rPr>
+              <a:t>  — the CRF + structured perceptron variants improve coverage but training data is only 32 hand-annotated sentences.</a:t>
+            </a:r>
+          </a:p>
+          <a:p>
+            <a:pPr algn="l"/>
+            <a:r>
+              <a:rPr sz="1500" b="1">
+                <a:solidFill>
+                  <a:srgbClr val="1C1717"/>
+                </a:solidFill>
+              </a:rPr>
+              <a:t>•  Roman-Urdu is heuristic</a:t>
+            </a:r>
+            <a:r>
+              <a:rPr sz="1400">
+                <a:solidFill>
+                  <a:srgbClr val="78716C"/>
+                </a:solidFill>
+              </a:rPr>
+              <a:t>  — ~80-word dictionary catches common cases; full transliteration would need a real parallel corpus.</a:t>
+            </a:r>
+          </a:p>
+          <a:p>
+            <a:pPr algn="l"/>
+            <a:r>
+              <a:rPr sz="1500" b="1">
+                <a:solidFill>
+                  <a:srgbClr val="1C1717"/>
+                </a:solidFill>
+              </a:rPr>
+              <a:t>•  Voice input is browser-native</a:t>
+            </a:r>
+            <a:r>
+              <a:rPr sz="1400">
+                <a:solidFill>
+                  <a:srgbClr val="78716C"/>
+                </a:solidFill>
+              </a:rPr>
+              <a:t>  — Web Speech API works in Chrome / Edge only.</a:t>
+            </a:r>
+          </a:p>
+          <a:p>
+            <a:pPr algn="l"/>
+            <a:r>
+              <a:rPr sz="1500" b="1">
+                <a:solidFill>
+                  <a:srgbClr val="1C1717"/>
+                </a:solidFill>
+              </a:rPr>
+              <a:t>•  Counts are at-most-once per turn</a:t>
+            </a:r>
+            <a:r>
+              <a:rPr sz="1400">
+                <a:solidFill>
+                  <a:srgbClr val="78716C"/>
+                </a:solidFill>
+              </a:rPr>
+              <a:t>  — no fraud / abuse heuristic — every successful match increments.</a:t>
+            </a:r>
+          </a:p>
+        </p:txBody>
+      </p:sp>
+    </p:spTree>
+  </p:cSld>
+  <p:clrMapOvr>
+    <a:masterClrMapping/>
+  </p:clrMapOvr>
+</p:sld>
+</file>
+
+<file path=ppt/slides/slide9.xml><?xml version="1.0" encoding="utf-8"?>
+<p:sld xmlns:a="http://schemas.openxmlformats.org/drawingml/2006/main" xmlns:p="http://schemas.openxmlformats.org/presentationml/2006/main" xmlns:r="http://schemas.openxmlformats.org/officeDocument/2006/relationships">
+  <p:cSld>
+    <p:spTree>
+      <p:nvGrpSpPr>
+        <p:cNvPr id="1" name=""/>
+        <p:cNvGrpSpPr/>
+        <p:nvPr/>
+      </p:nvGrpSpPr>
+      <p:grpSpPr/>
+      <p:sp>
+        <p:nvSpPr>
+          <p:cNvPr id="2" name="Rectangle 1"/>
+          <p:cNvSpPr/>
+          <p:nvPr/>
+        </p:nvSpPr>
+        <p:spPr>
+          <a:xfrm>
+            <a:off x="0" y="0"/>
+            <a:ext cx="12188952" cy="91440"/>
+          </a:xfrm>
+          <a:prstGeom prst="rect">
+            <a:avLst/>
+          </a:prstGeom>
+          <a:solidFill>
+            <a:srgbClr val="059669"/>
+          </a:solidFill>
+          <a:ln>
+            <a:noFill/>
+          </a:ln>
+        </p:spPr>
+        <p:style>
+          <a:lnRef idx="1">
+            <a:schemeClr val="accent1"/>
+          </a:lnRef>
+          <a:fillRef idx="3">
+            <a:schemeClr val="accent1"/>
+          </a:fillRef>
+          <a:effectRef idx="2">
+            <a:schemeClr val="accent1"/>
+          </a:effectRef>
+          <a:fontRef idx="minor">
+            <a:schemeClr val="lt1"/>
+          </a:fontRef>
+        </p:style>
+        <p:txBody>
+          <a:bodyPr rtlCol="0" anchor="ctr"/>
+          <a:lstStyle/>
+          <a:p>
+            <a:pPr algn="ctr"/>
+          </a:p>
+        </p:txBody>
+      </p:sp>
+      <p:sp>
+        <p:nvSpPr>
+          <p:cNvPr id="3" name="TextBox 2"/>
+          <p:cNvSpPr txBox="1"/>
+          <p:nvPr/>
+        </p:nvSpPr>
+        <p:spPr>
+          <a:xfrm>
+            <a:off x="457200" y="365760"/>
+            <a:ext cx="10972800" cy="640080"/>
+          </a:xfrm>
+          <a:prstGeom prst="rect">
+            <a:avLst/>
+          </a:prstGeom>
+          <a:noFill/>
+        </p:spPr>
+        <p:txBody>
+          <a:bodyPr wrap="square" lIns="0" rIns="0" tIns="0" bIns="0">
+            <a:spAutoFit/>
+          </a:bodyPr>
+          <a:lstStyle/>
+          <a:p>
+            <a:pPr algn="l"/>
+            <a:r>
+              <a:rPr sz="3200" b="1">
+                <a:solidFill>
+                  <a:srgbClr val="1C1717"/>
+                </a:solidFill>
+              </a:rPr>
+              <a:t>Future direction</a:t>
+            </a:r>
+          </a:p>
+        </p:txBody>
+      </p:sp>
+      <p:sp>
+        <p:nvSpPr>
+          <p:cNvPr id="4" name="TextBox 3"/>
+          <p:cNvSpPr txBox="1"/>
+          <p:nvPr/>
+        </p:nvSpPr>
+        <p:spPr>
+          <a:xfrm>
+            <a:off x="548640" y="1280160"/>
+            <a:ext cx="11338560" cy="5212080"/>
+          </a:xfrm>
+          <a:prstGeom prst="rect">
+            <a:avLst/>
+          </a:prstGeom>
+          <a:noFill/>
+        </p:spPr>
+        <p:txBody>
+          <a:bodyPr wrap="square">
+            <a:spAutoFit/>
+          </a:bodyPr>
+          <a:lstStyle/>
+          <a:p>
+            <a:pPr algn="l"/>
+            <a:r>
+              <a:rPr sz="1500" b="1">
                 <a:solidFill>
                   <a:srgbClr val="1C1717"/>
                 </a:solidFill>
@@ -7478,18 +7239,18 @@
               <a:t>•  Grow the corpus</a:t>
             </a:r>
             <a:r>
-              <a:rPr sz="2000" dirty="0">
-                <a:solidFill>
-                  <a:srgbClr val="78716C"/>
-                </a:solidFill>
-              </a:rPr>
-              <a:t> 500+ FAQs across more specialties with clinician validation.</a:t>
-            </a:r>
-          </a:p>
-          <a:p>
-            <a:pPr algn="l"/>
-            <a:r>
-              <a:rPr sz="2000" b="1" dirty="0">
+              <a:rPr sz="1400">
+                <a:solidFill>
+                  <a:srgbClr val="78716C"/>
+                </a:solidFill>
+              </a:rPr>
+              <a:t>  — 500+ FAQs across more specialties with clinician validation.</a:t>
+            </a:r>
+          </a:p>
+          <a:p>
+            <a:pPr algn="l"/>
+            <a:r>
+              <a:rPr sz="1500" b="1">
                 <a:solidFill>
                   <a:srgbClr val="1C1717"/>
                 </a:solidFill>
@@ -7497,18 +7258,18 @@
               <a:t>•  Bi-encoder upgrade</a:t>
             </a:r>
             <a:r>
-              <a:rPr sz="2000" dirty="0">
-                <a:solidFill>
-                  <a:srgbClr val="78716C"/>
-                </a:solidFill>
-              </a:rPr>
-              <a:t> train the dual encoder on real clinician-rated query–FAQ pairs, not just keyword-derived positives.</a:t>
-            </a:r>
-          </a:p>
-          <a:p>
-            <a:pPr algn="l"/>
-            <a:r>
-              <a:rPr sz="2000" b="1" dirty="0">
+              <a:rPr sz="1400">
+                <a:solidFill>
+                  <a:srgbClr val="78716C"/>
+                </a:solidFill>
+              </a:rPr>
+              <a:t>  — train the dual encoder on real clinician-rated query–FAQ pairs, not just keyword-derived positives.</a:t>
+            </a:r>
+          </a:p>
+          <a:p>
+            <a:pPr algn="l"/>
+            <a:r>
+              <a:rPr sz="1500" b="1">
                 <a:solidFill>
                   <a:srgbClr val="1C1717"/>
                 </a:solidFill>
@@ -7516,18 +7277,18 @@
               <a:t>•  Active learning loop</a:t>
             </a:r>
             <a:r>
-              <a:rPr sz="2000" dirty="0">
-                <a:solidFill>
-                  <a:srgbClr val="78716C"/>
-                </a:solidFill>
-              </a:rPr>
-              <a:t> low-confidence turns get queued for clinician review; approved Q/A pairs feed back into the corpus.</a:t>
-            </a:r>
-          </a:p>
-          <a:p>
-            <a:pPr algn="l"/>
-            <a:r>
-              <a:rPr sz="2000" b="1" dirty="0">
+              <a:rPr sz="1400">
+                <a:solidFill>
+                  <a:srgbClr val="78716C"/>
+                </a:solidFill>
+              </a:rPr>
+              <a:t>  — low-confidence turns get queued for clinician review; approved Q/A pairs feed back into the corpus.</a:t>
+            </a:r>
+          </a:p>
+          <a:p>
+            <a:pPr algn="l"/>
+            <a:r>
+              <a:rPr sz="1500" b="1">
                 <a:solidFill>
                   <a:srgbClr val="1C1717"/>
                 </a:solidFill>
@@ -7535,18 +7296,18 @@
               <a:t>•  Real Urdu</a:t>
             </a:r>
             <a:r>
-              <a:rPr sz="2000" dirty="0">
-                <a:solidFill>
-                  <a:srgbClr val="78716C"/>
-                </a:solidFill>
-              </a:rPr>
-              <a:t> deeper transliteration trained on a parallel corpus; voice input in Urdu.</a:t>
-            </a:r>
-          </a:p>
-          <a:p>
-            <a:pPr algn="l"/>
-            <a:r>
-              <a:rPr sz="2000" b="1" dirty="0">
+              <a:rPr sz="1400">
+                <a:solidFill>
+                  <a:srgbClr val="78716C"/>
+                </a:solidFill>
+              </a:rPr>
+              <a:t>  — deeper transliteration trained on a parallel corpus; voice input in Urdu.</a:t>
+            </a:r>
+          </a:p>
+          <a:p>
+            <a:pPr algn="l"/>
+            <a:r>
+              <a:rPr sz="1500" b="1">
                 <a:solidFill>
                   <a:srgbClr val="1C1717"/>
                 </a:solidFill>
@@ -7554,18 +7315,18 @@
               <a:t>•  Clinical eval</a:t>
             </a:r>
             <a:r>
-              <a:rPr sz="2000" dirty="0">
-                <a:solidFill>
-                  <a:srgbClr val="78716C"/>
-                </a:solidFill>
-              </a:rPr>
-              <a:t> NDCG with clinician-rated relevance instead of a keyword heuristic.</a:t>
-            </a:r>
-          </a:p>
-          <a:p>
-            <a:pPr algn="l"/>
-            <a:r>
-              <a:rPr sz="2000" b="1" dirty="0">
+              <a:rPr sz="1400">
+                <a:solidFill>
+                  <a:srgbClr val="78716C"/>
+                </a:solidFill>
+              </a:rPr>
+              <a:t>  — NDCG with clinician-rated relevance instead of a keyword heuristic.</a:t>
+            </a:r>
+          </a:p>
+          <a:p>
+            <a:pPr algn="l"/>
+            <a:r>
+              <a:rPr sz="1500" b="1">
                 <a:solidFill>
                   <a:srgbClr val="1C1717"/>
                 </a:solidFill>
@@ -7573,18 +7334,18 @@
               <a:t>•  GPU service</a:t>
             </a:r>
             <a:r>
-              <a:rPr sz="2000" dirty="0">
-                <a:solidFill>
-                  <a:srgbClr val="78716C"/>
-                </a:solidFill>
-              </a:rPr>
-              <a:t> dedicated container with CUDA wheel for heavier neural extensions.</a:t>
-            </a:r>
-          </a:p>
-          <a:p>
-            <a:pPr algn="l"/>
-            <a:r>
-              <a:rPr sz="2000" b="1" dirty="0">
+              <a:rPr sz="1400">
+                <a:solidFill>
+                  <a:srgbClr val="78716C"/>
+                </a:solidFill>
+              </a:rPr>
+              <a:t>  — dedicated container with CUDA wheel for heavier neural extensions.</a:t>
+            </a:r>
+          </a:p>
+          <a:p>
+            <a:pPr algn="l"/>
+            <a:r>
+              <a:rPr sz="1500" b="1">
                 <a:solidFill>
                   <a:srgbClr val="1C1717"/>
                 </a:solidFill>
@@ -7592,12 +7353,12 @@
               <a:t>•  Audit + governance</a:t>
             </a:r>
             <a:r>
-              <a:rPr sz="2000" dirty="0">
-                <a:solidFill>
-                  <a:srgbClr val="78716C"/>
-                </a:solidFill>
-              </a:rPr>
-              <a:t> version-controlled FAQ approval workflow, rollback, change-log.</a:t>
+              <a:rPr sz="1400">
+                <a:solidFill>
+                  <a:srgbClr val="78716C"/>
+                </a:solidFill>
+              </a:rPr>
+              <a:t>  — version-controlled FAQ approval workflow, rollback, change-log.</a:t>
             </a:r>
           </a:p>
         </p:txBody>

--- a/MedFAQ_Slides.pptx
+++ b/MedFAQ_Slides.pptx
@@ -5,19 +5,19 @@
     <p:sldMasterId id="2147483648" r:id="rId1"/>
   </p:sldMasterIdLst>
   <p:sldIdLst>
-    <p:sldId id="256" r:id="rId7"/>
-    <p:sldId id="257" r:id="rId8"/>
-    <p:sldId id="258" r:id="rId9"/>
-    <p:sldId id="259" r:id="rId10"/>
-    <p:sldId id="260" r:id="rId11"/>
-    <p:sldId id="261" r:id="rId12"/>
-    <p:sldId id="262" r:id="rId13"/>
-    <p:sldId id="263" r:id="rId14"/>
-    <p:sldId id="264" r:id="rId15"/>
-    <p:sldId id="265" r:id="rId16"/>
-    <p:sldId id="266" r:id="rId17"/>
+    <p:sldId id="256" r:id="rId2"/>
+    <p:sldId id="257" r:id="rId3"/>
+    <p:sldId id="258" r:id="rId4"/>
+    <p:sldId id="259" r:id="rId5"/>
+    <p:sldId id="260" r:id="rId6"/>
+    <p:sldId id="261" r:id="rId7"/>
+    <p:sldId id="262" r:id="rId8"/>
+    <p:sldId id="263" r:id="rId9"/>
+    <p:sldId id="264" r:id="rId10"/>
+    <p:sldId id="265" r:id="rId11"/>
+    <p:sldId id="266" r:id="rId12"/>
   </p:sldIdLst>
-  <p:sldSz cx="12188952" cy="6858000" type="screen4x3"/>
+  <p:sldSz cx="12188825" cy="6858000"/>
   <p:notesSz cx="6858000" cy="9144000"/>
   <p:defaultTextStyle>
     <a:defPPr>
@@ -114,6 +114,22 @@
       </a:defRPr>
     </a:lvl9pPr>
   </p:defaultTextStyle>
+  <p:extLst>
+    <p:ext uri="{EFAFB233-063F-42B5-8137-9DF3F51BA10A}">
+      <p15:sldGuideLst xmlns:p15="http://schemas.microsoft.com/office/powerpoint/2012/main">
+        <p15:guide id="1" orient="horz" pos="2160">
+          <p15:clr>
+            <a:srgbClr val="A4A3A4"/>
+          </p15:clr>
+        </p15:guide>
+        <p15:guide id="2" pos="2880">
+          <p15:clr>
+            <a:srgbClr val="A4A3A4"/>
+          </p15:clr>
+        </p15:guide>
+      </p15:sldGuideLst>
+    </p:ext>
+  </p:extLst>
 </p:presentation>
 </file>
 
@@ -155,10 +171,9 @@
           <a:lstStyle/>
           <a:p>
             <a:r>
-              <a:rPr lang="en-US" smtClean="0"/>
+              <a:rPr lang="en-US"/>
               <a:t>Click to edit Master title style</a:t>
             </a:r>
-            <a:endParaRPr lang="en-US"/>
           </a:p>
         </p:txBody>
       </p:sp>
@@ -274,10 +289,9 @@
           </a:lstStyle>
           <a:p>
             <a:r>
-              <a:rPr lang="en-US" smtClean="0"/>
+              <a:rPr lang="en-US"/>
               <a:t>Click to edit Master subtitle style</a:t>
             </a:r>
-            <a:endParaRPr lang="en-US"/>
           </a:p>
         </p:txBody>
       </p:sp>
@@ -298,7 +312,7 @@
           <a:p>
             <a:fld id="{5BCAD085-E8A6-8845-BD4E-CB4CCA059FC4}" type="datetimeFigureOut">
               <a:rPr lang="en-US" smtClean="0"/>
-              <a:t>1/27/13</a:t>
+              <a:t>6/3/2026</a:t>
             </a:fld>
             <a:endParaRPr lang="en-US"/>
           </a:p>
@@ -392,10 +406,9 @@
           <a:lstStyle/>
           <a:p>
             <a:r>
-              <a:rPr lang="en-US" smtClean="0"/>
+              <a:rPr lang="en-US"/>
               <a:t>Click to edit Master title style</a:t>
             </a:r>
-            <a:endParaRPr lang="en-US"/>
           </a:p>
         </p:txBody>
       </p:sp>
@@ -416,38 +429,37 @@
           <a:p>
             <a:pPr lvl="0"/>
             <a:r>
-              <a:rPr lang="en-US" smtClean="0"/>
+              <a:rPr lang="en-US"/>
               <a:t>Click to edit Master text styles</a:t>
             </a:r>
           </a:p>
           <a:p>
             <a:pPr lvl="1"/>
             <a:r>
-              <a:rPr lang="en-US" smtClean="0"/>
+              <a:rPr lang="en-US"/>
               <a:t>Second level</a:t>
             </a:r>
           </a:p>
           <a:p>
             <a:pPr lvl="2"/>
             <a:r>
-              <a:rPr lang="en-US" smtClean="0"/>
+              <a:rPr lang="en-US"/>
               <a:t>Third level</a:t>
             </a:r>
           </a:p>
           <a:p>
             <a:pPr lvl="3"/>
             <a:r>
-              <a:rPr lang="en-US" smtClean="0"/>
+              <a:rPr lang="en-US"/>
               <a:t>Fourth level</a:t>
             </a:r>
           </a:p>
           <a:p>
             <a:pPr lvl="4"/>
             <a:r>
-              <a:rPr lang="en-US" smtClean="0"/>
+              <a:rPr lang="en-US"/>
               <a:t>Fifth level</a:t>
             </a:r>
-            <a:endParaRPr lang="en-US"/>
           </a:p>
         </p:txBody>
       </p:sp>
@@ -468,7 +480,7 @@
           <a:p>
             <a:fld id="{5BCAD085-E8A6-8845-BD4E-CB4CCA059FC4}" type="datetimeFigureOut">
               <a:rPr lang="en-US" smtClean="0"/>
-              <a:t>1/27/13</a:t>
+              <a:t>6/3/2026</a:t>
             </a:fld>
             <a:endParaRPr lang="en-US"/>
           </a:p>
@@ -567,10 +579,9 @@
           <a:lstStyle/>
           <a:p>
             <a:r>
-              <a:rPr lang="en-US" smtClean="0"/>
+              <a:rPr lang="en-US"/>
               <a:t>Click to edit Master title style</a:t>
             </a:r>
-            <a:endParaRPr lang="en-US"/>
           </a:p>
         </p:txBody>
       </p:sp>
@@ -596,38 +607,37 @@
           <a:p>
             <a:pPr lvl="0"/>
             <a:r>
-              <a:rPr lang="en-US" smtClean="0"/>
+              <a:rPr lang="en-US"/>
               <a:t>Click to edit Master text styles</a:t>
             </a:r>
           </a:p>
           <a:p>
             <a:pPr lvl="1"/>
             <a:r>
-              <a:rPr lang="en-US" smtClean="0"/>
+              <a:rPr lang="en-US"/>
               <a:t>Second level</a:t>
             </a:r>
           </a:p>
           <a:p>
             <a:pPr lvl="2"/>
             <a:r>
-              <a:rPr lang="en-US" smtClean="0"/>
+              <a:rPr lang="en-US"/>
               <a:t>Third level</a:t>
             </a:r>
           </a:p>
           <a:p>
             <a:pPr lvl="3"/>
             <a:r>
-              <a:rPr lang="en-US" smtClean="0"/>
+              <a:rPr lang="en-US"/>
               <a:t>Fourth level</a:t>
             </a:r>
           </a:p>
           <a:p>
             <a:pPr lvl="4"/>
             <a:r>
-              <a:rPr lang="en-US" smtClean="0"/>
+              <a:rPr lang="en-US"/>
               <a:t>Fifth level</a:t>
             </a:r>
-            <a:endParaRPr lang="en-US"/>
           </a:p>
         </p:txBody>
       </p:sp>
@@ -648,7 +658,7 @@
           <a:p>
             <a:fld id="{5BCAD085-E8A6-8845-BD4E-CB4CCA059FC4}" type="datetimeFigureOut">
               <a:rPr lang="en-US" smtClean="0"/>
-              <a:t>1/27/13</a:t>
+              <a:t>6/3/2026</a:t>
             </a:fld>
             <a:endParaRPr lang="en-US"/>
           </a:p>
@@ -742,10 +752,9 @@
           <a:lstStyle/>
           <a:p>
             <a:r>
-              <a:rPr lang="en-US" smtClean="0"/>
+              <a:rPr lang="en-US"/>
               <a:t>Click to edit Master title style</a:t>
             </a:r>
-            <a:endParaRPr lang="en-US"/>
           </a:p>
         </p:txBody>
       </p:sp>
@@ -766,38 +775,37 @@
           <a:p>
             <a:pPr lvl="0"/>
             <a:r>
-              <a:rPr lang="en-US" smtClean="0"/>
+              <a:rPr lang="en-US"/>
               <a:t>Click to edit Master text styles</a:t>
             </a:r>
           </a:p>
           <a:p>
             <a:pPr lvl="1"/>
             <a:r>
-              <a:rPr lang="en-US" smtClean="0"/>
+              <a:rPr lang="en-US"/>
               <a:t>Second level</a:t>
             </a:r>
           </a:p>
           <a:p>
             <a:pPr lvl="2"/>
             <a:r>
-              <a:rPr lang="en-US" smtClean="0"/>
+              <a:rPr lang="en-US"/>
               <a:t>Third level</a:t>
             </a:r>
           </a:p>
           <a:p>
             <a:pPr lvl="3"/>
             <a:r>
-              <a:rPr lang="en-US" smtClean="0"/>
+              <a:rPr lang="en-US"/>
               <a:t>Fourth level</a:t>
             </a:r>
           </a:p>
           <a:p>
             <a:pPr lvl="4"/>
             <a:r>
-              <a:rPr lang="en-US" smtClean="0"/>
+              <a:rPr lang="en-US"/>
               <a:t>Fifth level</a:t>
             </a:r>
-            <a:endParaRPr lang="en-US"/>
           </a:p>
         </p:txBody>
       </p:sp>
@@ -818,7 +826,7 @@
           <a:p>
             <a:fld id="{5BCAD085-E8A6-8845-BD4E-CB4CCA059FC4}" type="datetimeFigureOut">
               <a:rPr lang="en-US" smtClean="0"/>
-              <a:t>1/27/13</a:t>
+              <a:t>6/3/2026</a:t>
             </a:fld>
             <a:endParaRPr lang="en-US"/>
           </a:p>
@@ -921,10 +929,9 @@
           </a:lstStyle>
           <a:p>
             <a:r>
-              <a:rPr lang="en-US" smtClean="0"/>
+              <a:rPr lang="en-US"/>
               <a:t>Click to edit Master title style</a:t>
             </a:r>
-            <a:endParaRPr lang="en-US"/>
           </a:p>
         </p:txBody>
       </p:sp>
@@ -1041,7 +1048,7 @@
           <a:p>
             <a:pPr lvl="0"/>
             <a:r>
-              <a:rPr lang="en-US" smtClean="0"/>
+              <a:rPr lang="en-US"/>
               <a:t>Click to edit Master text styles</a:t>
             </a:r>
           </a:p>
@@ -1064,7 +1071,7 @@
           <a:p>
             <a:fld id="{5BCAD085-E8A6-8845-BD4E-CB4CCA059FC4}" type="datetimeFigureOut">
               <a:rPr lang="en-US" smtClean="0"/>
-              <a:t>1/27/13</a:t>
+              <a:t>6/3/2026</a:t>
             </a:fld>
             <a:endParaRPr lang="en-US"/>
           </a:p>
@@ -1158,10 +1165,9 @@
           <a:lstStyle/>
           <a:p>
             <a:r>
-              <a:rPr lang="en-US" smtClean="0"/>
+              <a:rPr lang="en-US"/>
               <a:t>Click to edit Master title style</a:t>
             </a:r>
-            <a:endParaRPr lang="en-US"/>
           </a:p>
         </p:txBody>
       </p:sp>
@@ -1215,38 +1221,37 @@
           <a:p>
             <a:pPr lvl="0"/>
             <a:r>
-              <a:rPr lang="en-US" smtClean="0"/>
+              <a:rPr lang="en-US"/>
               <a:t>Click to edit Master text styles</a:t>
             </a:r>
           </a:p>
           <a:p>
             <a:pPr lvl="1"/>
             <a:r>
-              <a:rPr lang="en-US" smtClean="0"/>
+              <a:rPr lang="en-US"/>
               <a:t>Second level</a:t>
             </a:r>
           </a:p>
           <a:p>
             <a:pPr lvl="2"/>
             <a:r>
-              <a:rPr lang="en-US" smtClean="0"/>
+              <a:rPr lang="en-US"/>
               <a:t>Third level</a:t>
             </a:r>
           </a:p>
           <a:p>
             <a:pPr lvl="3"/>
             <a:r>
-              <a:rPr lang="en-US" smtClean="0"/>
+              <a:rPr lang="en-US"/>
               <a:t>Fourth level</a:t>
             </a:r>
           </a:p>
           <a:p>
             <a:pPr lvl="4"/>
             <a:r>
-              <a:rPr lang="en-US" smtClean="0"/>
+              <a:rPr lang="en-US"/>
               <a:t>Fifth level</a:t>
             </a:r>
-            <a:endParaRPr lang="en-US"/>
           </a:p>
         </p:txBody>
       </p:sp>
@@ -1300,38 +1305,37 @@
           <a:p>
             <a:pPr lvl="0"/>
             <a:r>
-              <a:rPr lang="en-US" smtClean="0"/>
+              <a:rPr lang="en-US"/>
               <a:t>Click to edit Master text styles</a:t>
             </a:r>
           </a:p>
           <a:p>
             <a:pPr lvl="1"/>
             <a:r>
-              <a:rPr lang="en-US" smtClean="0"/>
+              <a:rPr lang="en-US"/>
               <a:t>Second level</a:t>
             </a:r>
           </a:p>
           <a:p>
             <a:pPr lvl="2"/>
             <a:r>
-              <a:rPr lang="en-US" smtClean="0"/>
+              <a:rPr lang="en-US"/>
               <a:t>Third level</a:t>
             </a:r>
           </a:p>
           <a:p>
             <a:pPr lvl="3"/>
             <a:r>
-              <a:rPr lang="en-US" smtClean="0"/>
+              <a:rPr lang="en-US"/>
               <a:t>Fourth level</a:t>
             </a:r>
           </a:p>
           <a:p>
             <a:pPr lvl="4"/>
             <a:r>
-              <a:rPr lang="en-US" smtClean="0"/>
+              <a:rPr lang="en-US"/>
               <a:t>Fifth level</a:t>
             </a:r>
-            <a:endParaRPr lang="en-US"/>
           </a:p>
         </p:txBody>
       </p:sp>
@@ -1352,7 +1356,7 @@
           <a:p>
             <a:fld id="{5BCAD085-E8A6-8845-BD4E-CB4CCA059FC4}" type="datetimeFigureOut">
               <a:rPr lang="en-US" smtClean="0"/>
-              <a:t>1/27/13</a:t>
+              <a:t>6/3/2026</a:t>
             </a:fld>
             <a:endParaRPr lang="en-US"/>
           </a:p>
@@ -1450,10 +1454,9 @@
           </a:lstStyle>
           <a:p>
             <a:r>
-              <a:rPr lang="en-US" smtClean="0"/>
+              <a:rPr lang="en-US"/>
               <a:t>Click to edit Master title style</a:t>
             </a:r>
-            <a:endParaRPr lang="en-US"/>
           </a:p>
         </p:txBody>
       </p:sp>
@@ -1516,7 +1519,7 @@
           <a:p>
             <a:pPr lvl="0"/>
             <a:r>
-              <a:rPr lang="en-US" smtClean="0"/>
+              <a:rPr lang="en-US"/>
               <a:t>Click to edit Master text styles</a:t>
             </a:r>
           </a:p>
@@ -1572,38 +1575,37 @@
           <a:p>
             <a:pPr lvl="0"/>
             <a:r>
-              <a:rPr lang="en-US" smtClean="0"/>
+              <a:rPr lang="en-US"/>
               <a:t>Click to edit Master text styles</a:t>
             </a:r>
           </a:p>
           <a:p>
             <a:pPr lvl="1"/>
             <a:r>
-              <a:rPr lang="en-US" smtClean="0"/>
+              <a:rPr lang="en-US"/>
               <a:t>Second level</a:t>
             </a:r>
           </a:p>
           <a:p>
             <a:pPr lvl="2"/>
             <a:r>
-              <a:rPr lang="en-US" smtClean="0"/>
+              <a:rPr lang="en-US"/>
               <a:t>Third level</a:t>
             </a:r>
           </a:p>
           <a:p>
             <a:pPr lvl="3"/>
             <a:r>
-              <a:rPr lang="en-US" smtClean="0"/>
+              <a:rPr lang="en-US"/>
               <a:t>Fourth level</a:t>
             </a:r>
           </a:p>
           <a:p>
             <a:pPr lvl="4"/>
             <a:r>
-              <a:rPr lang="en-US" smtClean="0"/>
+              <a:rPr lang="en-US"/>
               <a:t>Fifth level</a:t>
             </a:r>
-            <a:endParaRPr lang="en-US"/>
           </a:p>
         </p:txBody>
       </p:sp>
@@ -1666,7 +1668,7 @@
           <a:p>
             <a:pPr lvl="0"/>
             <a:r>
-              <a:rPr lang="en-US" smtClean="0"/>
+              <a:rPr lang="en-US"/>
               <a:t>Click to edit Master text styles</a:t>
             </a:r>
           </a:p>
@@ -1722,38 +1724,37 @@
           <a:p>
             <a:pPr lvl="0"/>
             <a:r>
-              <a:rPr lang="en-US" smtClean="0"/>
+              <a:rPr lang="en-US"/>
               <a:t>Click to edit Master text styles</a:t>
             </a:r>
           </a:p>
           <a:p>
             <a:pPr lvl="1"/>
             <a:r>
-              <a:rPr lang="en-US" smtClean="0"/>
+              <a:rPr lang="en-US"/>
               <a:t>Second level</a:t>
             </a:r>
           </a:p>
           <a:p>
             <a:pPr lvl="2"/>
             <a:r>
-              <a:rPr lang="en-US" smtClean="0"/>
+              <a:rPr lang="en-US"/>
               <a:t>Third level</a:t>
             </a:r>
           </a:p>
           <a:p>
             <a:pPr lvl="3"/>
             <a:r>
-              <a:rPr lang="en-US" smtClean="0"/>
+              <a:rPr lang="en-US"/>
               <a:t>Fourth level</a:t>
             </a:r>
           </a:p>
           <a:p>
             <a:pPr lvl="4"/>
             <a:r>
-              <a:rPr lang="en-US" smtClean="0"/>
+              <a:rPr lang="en-US"/>
               <a:t>Fifth level</a:t>
             </a:r>
-            <a:endParaRPr lang="en-US"/>
           </a:p>
         </p:txBody>
       </p:sp>
@@ -1774,7 +1775,7 @@
           <a:p>
             <a:fld id="{5BCAD085-E8A6-8845-BD4E-CB4CCA059FC4}" type="datetimeFigureOut">
               <a:rPr lang="en-US" smtClean="0"/>
-              <a:t>1/27/13</a:t>
+              <a:t>6/3/2026</a:t>
             </a:fld>
             <a:endParaRPr lang="en-US"/>
           </a:p>
@@ -1868,10 +1869,9 @@
           <a:lstStyle/>
           <a:p>
             <a:r>
-              <a:rPr lang="en-US" smtClean="0"/>
+              <a:rPr lang="en-US"/>
               <a:t>Click to edit Master title style</a:t>
             </a:r>
-            <a:endParaRPr lang="en-US"/>
           </a:p>
         </p:txBody>
       </p:sp>
@@ -1892,7 +1892,7 @@
           <a:p>
             <a:fld id="{5BCAD085-E8A6-8845-BD4E-CB4CCA059FC4}" type="datetimeFigureOut">
               <a:rPr lang="en-US" smtClean="0"/>
-              <a:t>1/27/13</a:t>
+              <a:t>6/3/2026</a:t>
             </a:fld>
             <a:endParaRPr lang="en-US"/>
           </a:p>
@@ -1987,7 +1987,7 @@
           <a:p>
             <a:fld id="{5BCAD085-E8A6-8845-BD4E-CB4CCA059FC4}" type="datetimeFigureOut">
               <a:rPr lang="en-US" smtClean="0"/>
-              <a:t>1/27/13</a:t>
+              <a:t>6/3/2026</a:t>
             </a:fld>
             <a:endParaRPr lang="en-US"/>
           </a:p>
@@ -2090,10 +2090,9 @@
           </a:lstStyle>
           <a:p>
             <a:r>
-              <a:rPr lang="en-US" smtClean="0"/>
+              <a:rPr lang="en-US"/>
               <a:t>Click to edit Master title style</a:t>
             </a:r>
-            <a:endParaRPr lang="en-US"/>
           </a:p>
         </p:txBody>
       </p:sp>
@@ -2147,38 +2146,37 @@
           <a:p>
             <a:pPr lvl="0"/>
             <a:r>
-              <a:rPr lang="en-US" smtClean="0"/>
+              <a:rPr lang="en-US"/>
               <a:t>Click to edit Master text styles</a:t>
             </a:r>
           </a:p>
           <a:p>
             <a:pPr lvl="1"/>
             <a:r>
-              <a:rPr lang="en-US" smtClean="0"/>
+              <a:rPr lang="en-US"/>
               <a:t>Second level</a:t>
             </a:r>
           </a:p>
           <a:p>
             <a:pPr lvl="2"/>
             <a:r>
-              <a:rPr lang="en-US" smtClean="0"/>
+              <a:rPr lang="en-US"/>
               <a:t>Third level</a:t>
             </a:r>
           </a:p>
           <a:p>
             <a:pPr lvl="3"/>
             <a:r>
-              <a:rPr lang="en-US" smtClean="0"/>
+              <a:rPr lang="en-US"/>
               <a:t>Fourth level</a:t>
             </a:r>
           </a:p>
           <a:p>
             <a:pPr lvl="4"/>
             <a:r>
-              <a:rPr lang="en-US" smtClean="0"/>
+              <a:rPr lang="en-US"/>
               <a:t>Fifth level</a:t>
             </a:r>
-            <a:endParaRPr lang="en-US"/>
           </a:p>
         </p:txBody>
       </p:sp>
@@ -2241,7 +2239,7 @@
           <a:p>
             <a:pPr lvl="0"/>
             <a:r>
-              <a:rPr lang="en-US" smtClean="0"/>
+              <a:rPr lang="en-US"/>
               <a:t>Click to edit Master text styles</a:t>
             </a:r>
           </a:p>
@@ -2264,7 +2262,7 @@
           <a:p>
             <a:fld id="{5BCAD085-E8A6-8845-BD4E-CB4CCA059FC4}" type="datetimeFigureOut">
               <a:rPr lang="en-US" smtClean="0"/>
-              <a:t>1/27/13</a:t>
+              <a:t>6/3/2026</a:t>
             </a:fld>
             <a:endParaRPr lang="en-US"/>
           </a:p>
@@ -2367,10 +2365,9 @@
           </a:lstStyle>
           <a:p>
             <a:r>
-              <a:rPr lang="en-US" smtClean="0"/>
+              <a:rPr lang="en-US"/>
               <a:t>Click to edit Master title style</a:t>
             </a:r>
-            <a:endParaRPr lang="en-US"/>
           </a:p>
         </p:txBody>
       </p:sp>
@@ -2494,7 +2491,7 @@
           <a:p>
             <a:pPr lvl="0"/>
             <a:r>
-              <a:rPr lang="en-US" smtClean="0"/>
+              <a:rPr lang="en-US"/>
               <a:t>Click to edit Master text styles</a:t>
             </a:r>
           </a:p>
@@ -2517,7 +2514,7 @@
           <a:p>
             <a:fld id="{5BCAD085-E8A6-8845-BD4E-CB4CCA059FC4}" type="datetimeFigureOut">
               <a:rPr lang="en-US" smtClean="0"/>
-              <a:t>1/27/13</a:t>
+              <a:t>6/3/2026</a:t>
             </a:fld>
             <a:endParaRPr lang="en-US"/>
           </a:p>
@@ -2626,10 +2623,9 @@
           <a:lstStyle/>
           <a:p>
             <a:r>
-              <a:rPr lang="en-US" smtClean="0"/>
+              <a:rPr lang="en-US"/>
               <a:t>Click to edit Master title style</a:t>
             </a:r>
-            <a:endParaRPr lang="en-US"/>
           </a:p>
         </p:txBody>
       </p:sp>
@@ -2660,38 +2656,37 @@
           <a:p>
             <a:pPr lvl="0"/>
             <a:r>
-              <a:rPr lang="en-US" smtClean="0"/>
+              <a:rPr lang="en-US"/>
               <a:t>Click to edit Master text styles</a:t>
             </a:r>
           </a:p>
           <a:p>
             <a:pPr lvl="1"/>
             <a:r>
-              <a:rPr lang="en-US" smtClean="0"/>
+              <a:rPr lang="en-US"/>
               <a:t>Second level</a:t>
             </a:r>
           </a:p>
           <a:p>
             <a:pPr lvl="2"/>
             <a:r>
-              <a:rPr lang="en-US" smtClean="0"/>
+              <a:rPr lang="en-US"/>
               <a:t>Third level</a:t>
             </a:r>
           </a:p>
           <a:p>
             <a:pPr lvl="3"/>
             <a:r>
-              <a:rPr lang="en-US" smtClean="0"/>
+              <a:rPr lang="en-US"/>
               <a:t>Fourth level</a:t>
             </a:r>
           </a:p>
           <a:p>
             <a:pPr lvl="4"/>
             <a:r>
-              <a:rPr lang="en-US" smtClean="0"/>
+              <a:rPr lang="en-US"/>
               <a:t>Fifth level</a:t>
             </a:r>
-            <a:endParaRPr lang="en-US"/>
           </a:p>
         </p:txBody>
       </p:sp>
@@ -2730,7 +2725,7 @@
           <a:p>
             <a:fld id="{5BCAD085-E8A6-8845-BD4E-CB4CCA059FC4}" type="datetimeFigureOut">
               <a:rPr lang="en-US" smtClean="0"/>
-              <a:t>1/27/13</a:t>
+              <a:t>6/3/2026</a:t>
             </a:fld>
             <a:endParaRPr lang="en-US"/>
           </a:p>
@@ -3089,7 +3084,7 @@
 </file>
 
 <file path=ppt/slides/slide1.xml><?xml version="1.0" encoding="utf-8"?>
-<p:sld xmlns:a="http://schemas.openxmlformats.org/drawingml/2006/main" xmlns:p="http://schemas.openxmlformats.org/presentationml/2006/main" xmlns:r="http://schemas.openxmlformats.org/officeDocument/2006/relationships">
+<p:sld xmlns:a="http://schemas.openxmlformats.org/drawingml/2006/main" xmlns:r="http://schemas.openxmlformats.org/officeDocument/2006/relationships" xmlns:p="http://schemas.openxmlformats.org/presentationml/2006/main">
   <p:cSld>
     <p:spTree>
       <p:nvGrpSpPr>
@@ -3097,7 +3092,14 @@
         <p:cNvGrpSpPr/>
         <p:nvPr/>
       </p:nvGrpSpPr>
-      <p:grpSpPr/>
+      <p:grpSpPr>
+        <a:xfrm>
+          <a:off x="0" y="0"/>
+          <a:ext cx="0" cy="0"/>
+          <a:chOff x="0" y="0"/>
+          <a:chExt cx="0" cy="0"/>
+        </a:xfrm>
+      </p:grpSpPr>
       <p:sp>
         <p:nvSpPr>
           <p:cNvPr id="2" name="Rectangle 1"/>
@@ -3138,6 +3140,7 @@
           <a:lstStyle/>
           <a:p>
             <a:pPr algn="ctr"/>
+            <a:endParaRPr/>
           </a:p>
         </p:txBody>
       </p:sp>
@@ -3158,7 +3161,7 @@
           <a:noFill/>
         </p:spPr>
         <p:txBody>
-          <a:bodyPr wrap="square" lIns="0" rIns="0" tIns="0" bIns="0">
+          <a:bodyPr wrap="square" lIns="0" tIns="0" rIns="0" bIns="0">
             <a:spAutoFit/>
           </a:bodyPr>
           <a:lstStyle/>
@@ -3192,7 +3195,7 @@
           <a:noFill/>
         </p:spPr>
         <p:txBody>
-          <a:bodyPr wrap="square" lIns="0" rIns="0" tIns="0" bIns="0">
+          <a:bodyPr wrap="square" lIns="0" tIns="0" rIns="0" bIns="0">
             <a:spAutoFit/>
           </a:bodyPr>
           <a:lstStyle/>
@@ -3226,7 +3229,7 @@
           <a:noFill/>
         </p:spPr>
         <p:txBody>
-          <a:bodyPr wrap="square" lIns="0" rIns="0" tIns="0" bIns="0">
+          <a:bodyPr wrap="square" lIns="0" tIns="0" rIns="0" bIns="0">
             <a:spAutoFit/>
           </a:bodyPr>
           <a:lstStyle/>
@@ -3252,7 +3255,7 @@
         <p:spPr>
           <a:xfrm>
             <a:off x="640080" y="4937760"/>
-            <a:ext cx="10972800" cy="411480"/>
+            <a:ext cx="10972800" cy="215444"/>
           </a:xfrm>
           <a:prstGeom prst="rect">
             <a:avLst/>
@@ -3260,19 +3263,42 @@
           <a:noFill/>
         </p:spPr>
         <p:txBody>
-          <a:bodyPr wrap="square" lIns="0" rIns="0" tIns="0" bIns="0">
+          <a:bodyPr wrap="square" lIns="0" tIns="0" rIns="0" bIns="0">
             <a:spAutoFit/>
           </a:bodyPr>
           <a:lstStyle/>
           <a:p>
-            <a:pPr algn="l"/>
-            <a:r>
-              <a:rPr sz="1400" b="0">
-                <a:solidFill>
-                  <a:srgbClr val="1C1717"/>
-                </a:solidFill>
-              </a:rPr>
-              <a:t>Abdul Ghani · Anas Bhatti · Muhammad Salman · 5th member</a:t>
+            <a:r>
+              <a:rPr sz="1400" b="0" dirty="0">
+                <a:solidFill>
+                  <a:srgbClr val="1C1717"/>
+                </a:solidFill>
+              </a:rPr>
+              <a:t>Abdul Ghani · Anas Bhatti · Muhammad Salman </a:t>
+            </a:r>
+            <a:r>
+              <a:rPr lang="en-US" sz="1400">
+                <a:solidFill>
+                  <a:srgbClr val="1C1717"/>
+                </a:solidFill>
+              </a:rPr>
+              <a:t>· Raja Mahad </a:t>
+            </a:r>
+            <a:r>
+              <a:rPr lang="en-US" sz="1400" dirty="0">
+                <a:solidFill>
+                  <a:srgbClr val="1C1717"/>
+                </a:solidFill>
+              </a:rPr>
+              <a:t>Ali</a:t>
+            </a:r>
+            <a:r>
+              <a:rPr sz="1400" b="0" dirty="0">
+                <a:solidFill>
+                  <a:srgbClr val="1C1717"/>
+                </a:solidFill>
+              </a:rPr>
+              <a:t>· 5th member</a:t>
             </a:r>
           </a:p>
         </p:txBody>
@@ -3294,7 +3320,7 @@
           <a:noFill/>
         </p:spPr>
         <p:txBody>
-          <a:bodyPr wrap="square" lIns="0" rIns="0" tIns="0" bIns="0">
+          <a:bodyPr wrap="square" lIns="0" tIns="0" rIns="0" bIns="0">
             <a:spAutoFit/>
           </a:bodyPr>
           <a:lstStyle/>
@@ -3320,7 +3346,7 @@
 </file>
 
 <file path=ppt/slides/slide10.xml><?xml version="1.0" encoding="utf-8"?>
-<p:sld xmlns:a="http://schemas.openxmlformats.org/drawingml/2006/main" xmlns:p="http://schemas.openxmlformats.org/presentationml/2006/main" xmlns:r="http://schemas.openxmlformats.org/officeDocument/2006/relationships">
+<p:sld xmlns:a="http://schemas.openxmlformats.org/drawingml/2006/main" xmlns:r="http://schemas.openxmlformats.org/officeDocument/2006/relationships" xmlns:p="http://schemas.openxmlformats.org/presentationml/2006/main">
   <p:cSld>
     <p:spTree>
       <p:nvGrpSpPr>
@@ -3328,7 +3354,14 @@
         <p:cNvGrpSpPr/>
         <p:nvPr/>
       </p:nvGrpSpPr>
-      <p:grpSpPr/>
+      <p:grpSpPr>
+        <a:xfrm>
+          <a:off x="0" y="0"/>
+          <a:ext cx="0" cy="0"/>
+          <a:chOff x="0" y="0"/>
+          <a:chExt cx="0" cy="0"/>
+        </a:xfrm>
+      </p:grpSpPr>
       <p:sp>
         <p:nvSpPr>
           <p:cNvPr id="2" name="Rectangle 1"/>
@@ -3369,6 +3402,7 @@
           <a:lstStyle/>
           <a:p>
             <a:pPr algn="ctr"/>
+            <a:endParaRPr/>
           </a:p>
         </p:txBody>
       </p:sp>
@@ -3389,7 +3423,7 @@
           <a:noFill/>
         </p:spPr>
         <p:txBody>
-          <a:bodyPr wrap="square" lIns="0" rIns="0" tIns="0" bIns="0">
+          <a:bodyPr wrap="square" lIns="0" tIns="0" rIns="0" bIns="0">
             <a:spAutoFit/>
           </a:bodyPr>
           <a:lstStyle/>
@@ -3423,7 +3457,7 @@
           <a:noFill/>
         </p:spPr>
         <p:txBody>
-          <a:bodyPr wrap="square" lIns="0" rIns="0" tIns="0" bIns="0">
+          <a:bodyPr wrap="square" lIns="0" tIns="0" rIns="0" bIns="0">
             <a:spAutoFit/>
           </a:bodyPr>
           <a:lstStyle/>
@@ -3548,7 +3582,7 @@
 </file>
 
 <file path=ppt/slides/slide11.xml><?xml version="1.0" encoding="utf-8"?>
-<p:sld xmlns:a="http://schemas.openxmlformats.org/drawingml/2006/main" xmlns:p="http://schemas.openxmlformats.org/presentationml/2006/main" xmlns:r="http://schemas.openxmlformats.org/officeDocument/2006/relationships">
+<p:sld xmlns:a="http://schemas.openxmlformats.org/drawingml/2006/main" xmlns:r="http://schemas.openxmlformats.org/officeDocument/2006/relationships" xmlns:p="http://schemas.openxmlformats.org/presentationml/2006/main">
   <p:cSld>
     <p:spTree>
       <p:nvGrpSpPr>
@@ -3556,7 +3590,14 @@
         <p:cNvGrpSpPr/>
         <p:nvPr/>
       </p:nvGrpSpPr>
-      <p:grpSpPr/>
+      <p:grpSpPr>
+        <a:xfrm>
+          <a:off x="0" y="0"/>
+          <a:ext cx="0" cy="0"/>
+          <a:chOff x="0" y="0"/>
+          <a:chExt cx="0" cy="0"/>
+        </a:xfrm>
+      </p:grpSpPr>
       <p:sp>
         <p:nvSpPr>
           <p:cNvPr id="2" name="Rectangle 1"/>
@@ -3597,6 +3638,7 @@
           <a:lstStyle/>
           <a:p>
             <a:pPr algn="ctr"/>
+            <a:endParaRPr/>
           </a:p>
         </p:txBody>
       </p:sp>
@@ -3617,7 +3659,7 @@
           <a:noFill/>
         </p:spPr>
         <p:txBody>
-          <a:bodyPr wrap="square" lIns="0" rIns="0" tIns="0" bIns="0">
+          <a:bodyPr wrap="square" lIns="0" tIns="0" rIns="0" bIns="0">
             <a:spAutoFit/>
           </a:bodyPr>
           <a:lstStyle/>
@@ -3651,7 +3693,7 @@
           <a:noFill/>
         </p:spPr>
         <p:txBody>
-          <a:bodyPr wrap="square" lIns="0" rIns="0" tIns="0" bIns="0">
+          <a:bodyPr wrap="square" lIns="0" tIns="0" rIns="0" bIns="0">
             <a:spAutoFit/>
           </a:bodyPr>
           <a:lstStyle/>
@@ -3685,7 +3727,7 @@
           <a:noFill/>
         </p:spPr>
         <p:txBody>
-          <a:bodyPr wrap="square" lIns="0" rIns="0" tIns="0" bIns="0">
+          <a:bodyPr wrap="square" lIns="0" tIns="0" rIns="0" bIns="0">
             <a:spAutoFit/>
           </a:bodyPr>
           <a:lstStyle/>
@@ -3886,7 +3928,7 @@
 </file>
 
 <file path=ppt/slides/slide2.xml><?xml version="1.0" encoding="utf-8"?>
-<p:sld xmlns:a="http://schemas.openxmlformats.org/drawingml/2006/main" xmlns:p="http://schemas.openxmlformats.org/presentationml/2006/main" xmlns:r="http://schemas.openxmlformats.org/officeDocument/2006/relationships">
+<p:sld xmlns:a="http://schemas.openxmlformats.org/drawingml/2006/main" xmlns:r="http://schemas.openxmlformats.org/officeDocument/2006/relationships" xmlns:p="http://schemas.openxmlformats.org/presentationml/2006/main">
   <p:cSld>
     <p:spTree>
       <p:nvGrpSpPr>
@@ -3894,7 +3936,14 @@
         <p:cNvGrpSpPr/>
         <p:nvPr/>
       </p:nvGrpSpPr>
-      <p:grpSpPr/>
+      <p:grpSpPr>
+        <a:xfrm>
+          <a:off x="0" y="0"/>
+          <a:ext cx="0" cy="0"/>
+          <a:chOff x="0" y="0"/>
+          <a:chExt cx="0" cy="0"/>
+        </a:xfrm>
+      </p:grpSpPr>
       <p:sp>
         <p:nvSpPr>
           <p:cNvPr id="2" name="Rectangle 1"/>
@@ -3935,6 +3984,7 @@
           <a:lstStyle/>
           <a:p>
             <a:pPr algn="ctr"/>
+            <a:endParaRPr/>
           </a:p>
         </p:txBody>
       </p:sp>
@@ -3955,7 +4005,7 @@
           <a:noFill/>
         </p:spPr>
         <p:txBody>
-          <a:bodyPr wrap="square" lIns="0" rIns="0" tIns="0" bIns="0">
+          <a:bodyPr wrap="square" lIns="0" tIns="0" rIns="0" bIns="0">
             <a:spAutoFit/>
           </a:bodyPr>
           <a:lstStyle/>
@@ -3989,7 +4039,7 @@
           <a:noFill/>
         </p:spPr>
         <p:txBody>
-          <a:bodyPr wrap="square" lIns="0" rIns="0" tIns="0" bIns="0">
+          <a:bodyPr wrap="square" lIns="0" tIns="0" rIns="0" bIns="0">
             <a:spAutoFit/>
           </a:bodyPr>
           <a:lstStyle/>
@@ -4171,7 +4221,7 @@
 </file>
 
 <file path=ppt/slides/slide3.xml><?xml version="1.0" encoding="utf-8"?>
-<p:sld xmlns:a="http://schemas.openxmlformats.org/drawingml/2006/main" xmlns:p="http://schemas.openxmlformats.org/presentationml/2006/main" xmlns:r="http://schemas.openxmlformats.org/officeDocument/2006/relationships">
+<p:sld xmlns:a="http://schemas.openxmlformats.org/drawingml/2006/main" xmlns:r="http://schemas.openxmlformats.org/officeDocument/2006/relationships" xmlns:p="http://schemas.openxmlformats.org/presentationml/2006/main">
   <p:cSld>
     <p:spTree>
       <p:nvGrpSpPr>
@@ -4179,7 +4229,14 @@
         <p:cNvGrpSpPr/>
         <p:nvPr/>
       </p:nvGrpSpPr>
-      <p:grpSpPr/>
+      <p:grpSpPr>
+        <a:xfrm>
+          <a:off x="0" y="0"/>
+          <a:ext cx="0" cy="0"/>
+          <a:chOff x="0" y="0"/>
+          <a:chExt cx="0" cy="0"/>
+        </a:xfrm>
+      </p:grpSpPr>
       <p:sp>
         <p:nvSpPr>
           <p:cNvPr id="2" name="Rectangle 1"/>
@@ -4220,6 +4277,7 @@
           <a:lstStyle/>
           <a:p>
             <a:pPr algn="ctr"/>
+            <a:endParaRPr/>
           </a:p>
         </p:txBody>
       </p:sp>
@@ -4240,7 +4298,7 @@
           <a:noFill/>
         </p:spPr>
         <p:txBody>
-          <a:bodyPr wrap="square" lIns="0" rIns="0" tIns="0" bIns="0">
+          <a:bodyPr wrap="square" lIns="0" tIns="0" rIns="0" bIns="0">
             <a:spAutoFit/>
           </a:bodyPr>
           <a:lstStyle/>
@@ -4274,7 +4332,7 @@
           <a:noFill/>
         </p:spPr>
         <p:txBody>
-          <a:bodyPr wrap="square" lIns="0" rIns="0" tIns="0" bIns="0">
+          <a:bodyPr wrap="square" lIns="0" tIns="0" rIns="0" bIns="0">
             <a:spAutoFit/>
           </a:bodyPr>
           <a:lstStyle/>
@@ -4456,7 +4514,7 @@
 </file>
 
 <file path=ppt/slides/slide4.xml><?xml version="1.0" encoding="utf-8"?>
-<p:sld xmlns:a="http://schemas.openxmlformats.org/drawingml/2006/main" xmlns:p="http://schemas.openxmlformats.org/presentationml/2006/main" xmlns:r="http://schemas.openxmlformats.org/officeDocument/2006/relationships">
+<p:sld xmlns:a="http://schemas.openxmlformats.org/drawingml/2006/main" xmlns:r="http://schemas.openxmlformats.org/officeDocument/2006/relationships" xmlns:p="http://schemas.openxmlformats.org/presentationml/2006/main">
   <p:cSld>
     <p:spTree>
       <p:nvGrpSpPr>
@@ -4464,7 +4522,14 @@
         <p:cNvGrpSpPr/>
         <p:nvPr/>
       </p:nvGrpSpPr>
-      <p:grpSpPr/>
+      <p:grpSpPr>
+        <a:xfrm>
+          <a:off x="0" y="0"/>
+          <a:ext cx="0" cy="0"/>
+          <a:chOff x="0" y="0"/>
+          <a:chExt cx="0" cy="0"/>
+        </a:xfrm>
+      </p:grpSpPr>
       <p:sp>
         <p:nvSpPr>
           <p:cNvPr id="2" name="Rectangle 1"/>
@@ -4505,6 +4570,7 @@
           <a:lstStyle/>
           <a:p>
             <a:pPr algn="ctr"/>
+            <a:endParaRPr/>
           </a:p>
         </p:txBody>
       </p:sp>
@@ -4525,7 +4591,7 @@
           <a:noFill/>
         </p:spPr>
         <p:txBody>
-          <a:bodyPr wrap="square" lIns="0" rIns="0" tIns="0" bIns="0">
+          <a:bodyPr wrap="square" lIns="0" tIns="0" rIns="0" bIns="0">
             <a:spAutoFit/>
           </a:bodyPr>
           <a:lstStyle/>
@@ -4559,7 +4625,7 @@
           <a:noFill/>
         </p:spPr>
         <p:txBody>
-          <a:bodyPr wrap="square" lIns="0" rIns="0" tIns="0" bIns="0">
+          <a:bodyPr wrap="square" lIns="0" tIns="0" rIns="0" bIns="0">
             <a:spAutoFit/>
           </a:bodyPr>
           <a:lstStyle/>
@@ -4595,9 +4661,27 @@
                 <a:tableStyleId>{5C22544A-7EE6-4342-B048-85BDC9FD1C3A}</a:tableStyleId>
               </a:tblPr>
               <a:tblGrid>
-                <a:gridCol w="3749040"/>
-                <a:gridCol w="3749040"/>
-                <a:gridCol w="3749040"/>
+                <a:gridCol w="3749040">
+                  <a:extLst>
+                    <a:ext uri="{9D8B030D-6E8A-4147-A177-3AD203B41FA5}">
+                      <a16:colId xmlns:a16="http://schemas.microsoft.com/office/drawing/2014/main" val="20000"/>
+                    </a:ext>
+                  </a:extLst>
+                </a:gridCol>
+                <a:gridCol w="3749040">
+                  <a:extLst>
+                    <a:ext uri="{9D8B030D-6E8A-4147-A177-3AD203B41FA5}">
+                      <a16:colId xmlns:a16="http://schemas.microsoft.com/office/drawing/2014/main" val="20001"/>
+                    </a:ext>
+                  </a:extLst>
+                </a:gridCol>
+                <a:gridCol w="3749040">
+                  <a:extLst>
+                    <a:ext uri="{9D8B030D-6E8A-4147-A177-3AD203B41FA5}">
+                      <a16:colId xmlns:a16="http://schemas.microsoft.com/office/drawing/2014/main" val="20002"/>
+                    </a:ext>
+                  </a:extLst>
+                </a:gridCol>
               </a:tblGrid>
               <a:tr h="477520">
                 <a:tc>
@@ -4651,6 +4735,11 @@
                   </a:txBody>
                   <a:tcPr/>
                 </a:tc>
+                <a:extLst>
+                  <a:ext uri="{0D108BD9-81ED-4DB2-BD59-A6C34878D82A}">
+                    <a16:rowId xmlns:a16="http://schemas.microsoft.com/office/drawing/2014/main" val="10000"/>
+                  </a:ext>
+                </a:extLst>
               </a:tr>
               <a:tr h="477520">
                 <a:tc>
@@ -4704,6 +4793,11 @@
                   </a:txBody>
                   <a:tcPr/>
                 </a:tc>
+                <a:extLst>
+                  <a:ext uri="{0D108BD9-81ED-4DB2-BD59-A6C34878D82A}">
+                    <a16:rowId xmlns:a16="http://schemas.microsoft.com/office/drawing/2014/main" val="10001"/>
+                  </a:ext>
+                </a:extLst>
               </a:tr>
               <a:tr h="477520">
                 <a:tc>
@@ -4757,6 +4851,11 @@
                   </a:txBody>
                   <a:tcPr/>
                 </a:tc>
+                <a:extLst>
+                  <a:ext uri="{0D108BD9-81ED-4DB2-BD59-A6C34878D82A}">
+                    <a16:rowId xmlns:a16="http://schemas.microsoft.com/office/drawing/2014/main" val="10002"/>
+                  </a:ext>
+                </a:extLst>
               </a:tr>
               <a:tr h="477520">
                 <a:tc>
@@ -4810,6 +4909,11 @@
                   </a:txBody>
                   <a:tcPr/>
                 </a:tc>
+                <a:extLst>
+                  <a:ext uri="{0D108BD9-81ED-4DB2-BD59-A6C34878D82A}">
+                    <a16:rowId xmlns:a16="http://schemas.microsoft.com/office/drawing/2014/main" val="10003"/>
+                  </a:ext>
+                </a:extLst>
               </a:tr>
               <a:tr h="477520">
                 <a:tc>
@@ -4863,6 +4967,11 @@
                   </a:txBody>
                   <a:tcPr/>
                 </a:tc>
+                <a:extLst>
+                  <a:ext uri="{0D108BD9-81ED-4DB2-BD59-A6C34878D82A}">
+                    <a16:rowId xmlns:a16="http://schemas.microsoft.com/office/drawing/2014/main" val="10004"/>
+                  </a:ext>
+                </a:extLst>
               </a:tr>
               <a:tr h="477520">
                 <a:tc>
@@ -4916,6 +5025,11 @@
                   </a:txBody>
                   <a:tcPr/>
                 </a:tc>
+                <a:extLst>
+                  <a:ext uri="{0D108BD9-81ED-4DB2-BD59-A6C34878D82A}">
+                    <a16:rowId xmlns:a16="http://schemas.microsoft.com/office/drawing/2014/main" val="10005"/>
+                  </a:ext>
+                </a:extLst>
               </a:tr>
               <a:tr h="477520">
                 <a:tc>
@@ -4969,6 +5083,11 @@
                   </a:txBody>
                   <a:tcPr/>
                 </a:tc>
+                <a:extLst>
+                  <a:ext uri="{0D108BD9-81ED-4DB2-BD59-A6C34878D82A}">
+                    <a16:rowId xmlns:a16="http://schemas.microsoft.com/office/drawing/2014/main" val="10006"/>
+                  </a:ext>
+                </a:extLst>
               </a:tr>
               <a:tr h="477520">
                 <a:tc>
@@ -5022,6 +5141,11 @@
                   </a:txBody>
                   <a:tcPr/>
                 </a:tc>
+                <a:extLst>
+                  <a:ext uri="{0D108BD9-81ED-4DB2-BD59-A6C34878D82A}">
+                    <a16:rowId xmlns:a16="http://schemas.microsoft.com/office/drawing/2014/main" val="10007"/>
+                  </a:ext>
+                </a:extLst>
               </a:tr>
               <a:tr h="477520">
                 <a:tc>
@@ -5075,6 +5199,11 @@
                   </a:txBody>
                   <a:tcPr/>
                 </a:tc>
+                <a:extLst>
+                  <a:ext uri="{0D108BD9-81ED-4DB2-BD59-A6C34878D82A}">
+                    <a16:rowId xmlns:a16="http://schemas.microsoft.com/office/drawing/2014/main" val="10008"/>
+                  </a:ext>
+                </a:extLst>
               </a:tr>
             </a:tbl>
           </a:graphicData>
@@ -5097,7 +5226,7 @@
           <a:noFill/>
         </p:spPr>
         <p:txBody>
-          <a:bodyPr wrap="square" lIns="0" rIns="0" tIns="0" bIns="0">
+          <a:bodyPr wrap="square" lIns="0" tIns="0" rIns="0" bIns="0">
             <a:spAutoFit/>
           </a:bodyPr>
           <a:lstStyle/>
@@ -5123,7 +5252,7 @@
 </file>
 
 <file path=ppt/slides/slide5.xml><?xml version="1.0" encoding="utf-8"?>
-<p:sld xmlns:a="http://schemas.openxmlformats.org/drawingml/2006/main" xmlns:p="http://schemas.openxmlformats.org/presentationml/2006/main" xmlns:r="http://schemas.openxmlformats.org/officeDocument/2006/relationships">
+<p:sld xmlns:a="http://schemas.openxmlformats.org/drawingml/2006/main" xmlns:r="http://schemas.openxmlformats.org/officeDocument/2006/relationships" xmlns:p="http://schemas.openxmlformats.org/presentationml/2006/main">
   <p:cSld>
     <p:spTree>
       <p:nvGrpSpPr>
@@ -5131,7 +5260,14 @@
         <p:cNvGrpSpPr/>
         <p:nvPr/>
       </p:nvGrpSpPr>
-      <p:grpSpPr/>
+      <p:grpSpPr>
+        <a:xfrm>
+          <a:off x="0" y="0"/>
+          <a:ext cx="0" cy="0"/>
+          <a:chOff x="0" y="0"/>
+          <a:chExt cx="0" cy="0"/>
+        </a:xfrm>
+      </p:grpSpPr>
       <p:sp>
         <p:nvSpPr>
           <p:cNvPr id="2" name="Rectangle 1"/>
@@ -5172,6 +5308,7 @@
           <a:lstStyle/>
           <a:p>
             <a:pPr algn="ctr"/>
+            <a:endParaRPr/>
           </a:p>
         </p:txBody>
       </p:sp>
@@ -5192,7 +5329,7 @@
           <a:noFill/>
         </p:spPr>
         <p:txBody>
-          <a:bodyPr wrap="square" lIns="0" rIns="0" tIns="0" bIns="0">
+          <a:bodyPr wrap="square" lIns="0" tIns="0" rIns="0" bIns="0">
             <a:spAutoFit/>
           </a:bodyPr>
           <a:lstStyle/>
@@ -5226,7 +5363,7 @@
           <a:noFill/>
         </p:spPr>
         <p:txBody>
-          <a:bodyPr wrap="square" lIns="0" rIns="0" tIns="0" bIns="0">
+          <a:bodyPr wrap="square" lIns="0" tIns="0" rIns="0" bIns="0">
             <a:spAutoFit/>
           </a:bodyPr>
           <a:lstStyle/>
@@ -5492,7 +5629,7 @@
           <a:noFill/>
         </p:spPr>
         <p:txBody>
-          <a:bodyPr wrap="square" lIns="0" rIns="0" tIns="0" bIns="0">
+          <a:bodyPr wrap="square" lIns="0" tIns="0" rIns="0" bIns="0">
             <a:spAutoFit/>
           </a:bodyPr>
           <a:lstStyle/>
@@ -5750,7 +5887,7 @@
 </file>
 
 <file path=ppt/slides/slide6.xml><?xml version="1.0" encoding="utf-8"?>
-<p:sld xmlns:a="http://schemas.openxmlformats.org/drawingml/2006/main" xmlns:p="http://schemas.openxmlformats.org/presentationml/2006/main" xmlns:r="http://schemas.openxmlformats.org/officeDocument/2006/relationships">
+<p:sld xmlns:a="http://schemas.openxmlformats.org/drawingml/2006/main" xmlns:r="http://schemas.openxmlformats.org/officeDocument/2006/relationships" xmlns:p="http://schemas.openxmlformats.org/presentationml/2006/main">
   <p:cSld>
     <p:spTree>
       <p:nvGrpSpPr>
@@ -5758,7 +5895,14 @@
         <p:cNvGrpSpPr/>
         <p:nvPr/>
       </p:nvGrpSpPr>
-      <p:grpSpPr/>
+      <p:grpSpPr>
+        <a:xfrm>
+          <a:off x="0" y="0"/>
+          <a:ext cx="0" cy="0"/>
+          <a:chOff x="0" y="0"/>
+          <a:chExt cx="0" cy="0"/>
+        </a:xfrm>
+      </p:grpSpPr>
       <p:sp>
         <p:nvSpPr>
           <p:cNvPr id="2" name="Rectangle 1"/>
@@ -5799,6 +5943,7 @@
           <a:lstStyle/>
           <a:p>
             <a:pPr algn="ctr"/>
+            <a:endParaRPr/>
           </a:p>
         </p:txBody>
       </p:sp>
@@ -5819,7 +5964,7 @@
           <a:noFill/>
         </p:spPr>
         <p:txBody>
-          <a:bodyPr wrap="square" lIns="0" rIns="0" tIns="0" bIns="0">
+          <a:bodyPr wrap="square" lIns="0" tIns="0" rIns="0" bIns="0">
             <a:spAutoFit/>
           </a:bodyPr>
           <a:lstStyle/>
@@ -5853,7 +5998,7 @@
           <a:noFill/>
         </p:spPr>
         <p:txBody>
-          <a:bodyPr wrap="square" lIns="0" rIns="0" tIns="0" bIns="0">
+          <a:bodyPr wrap="square" lIns="0" tIns="0" rIns="0" bIns="0">
             <a:spAutoFit/>
           </a:bodyPr>
           <a:lstStyle/>
@@ -5889,8 +6034,20 @@
                 <a:tableStyleId>{5C22544A-7EE6-4342-B048-85BDC9FD1C3A}</a:tableStyleId>
               </a:tblPr>
               <a:tblGrid>
-                <a:gridCol w="1828800"/>
-                <a:gridCol w="1828800"/>
+                <a:gridCol w="1828800">
+                  <a:extLst>
+                    <a:ext uri="{9D8B030D-6E8A-4147-A177-3AD203B41FA5}">
+                      <a16:colId xmlns:a16="http://schemas.microsoft.com/office/drawing/2014/main" val="20000"/>
+                    </a:ext>
+                  </a:extLst>
+                </a:gridCol>
+                <a:gridCol w="1828800">
+                  <a:extLst>
+                    <a:ext uri="{9D8B030D-6E8A-4147-A177-3AD203B41FA5}">
+                      <a16:colId xmlns:a16="http://schemas.microsoft.com/office/drawing/2014/main" val="20001"/>
+                    </a:ext>
+                  </a:extLst>
+                </a:gridCol>
               </a:tblGrid>
               <a:tr h="350520">
                 <a:tc>
@@ -5927,6 +6084,11 @@
                   </a:txBody>
                   <a:tcPr/>
                 </a:tc>
+                <a:extLst>
+                  <a:ext uri="{0D108BD9-81ED-4DB2-BD59-A6C34878D82A}">
+                    <a16:rowId xmlns:a16="http://schemas.microsoft.com/office/drawing/2014/main" val="10000"/>
+                  </a:ext>
+                </a:extLst>
               </a:tr>
               <a:tr h="350520">
                 <a:tc>
@@ -5963,6 +6125,11 @@
                   </a:txBody>
                   <a:tcPr/>
                 </a:tc>
+                <a:extLst>
+                  <a:ext uri="{0D108BD9-81ED-4DB2-BD59-A6C34878D82A}">
+                    <a16:rowId xmlns:a16="http://schemas.microsoft.com/office/drawing/2014/main" val="10001"/>
+                  </a:ext>
+                </a:extLst>
               </a:tr>
               <a:tr h="350520">
                 <a:tc>
@@ -5999,6 +6166,11 @@
                   </a:txBody>
                   <a:tcPr/>
                 </a:tc>
+                <a:extLst>
+                  <a:ext uri="{0D108BD9-81ED-4DB2-BD59-A6C34878D82A}">
+                    <a16:rowId xmlns:a16="http://schemas.microsoft.com/office/drawing/2014/main" val="10002"/>
+                  </a:ext>
+                </a:extLst>
               </a:tr>
               <a:tr h="350520">
                 <a:tc>
@@ -6035,6 +6207,11 @@
                   </a:txBody>
                   <a:tcPr/>
                 </a:tc>
+                <a:extLst>
+                  <a:ext uri="{0D108BD9-81ED-4DB2-BD59-A6C34878D82A}">
+                    <a16:rowId xmlns:a16="http://schemas.microsoft.com/office/drawing/2014/main" val="10003"/>
+                  </a:ext>
+                </a:extLst>
               </a:tr>
               <a:tr h="350520">
                 <a:tc>
@@ -6071,6 +6248,11 @@
                   </a:txBody>
                   <a:tcPr/>
                 </a:tc>
+                <a:extLst>
+                  <a:ext uri="{0D108BD9-81ED-4DB2-BD59-A6C34878D82A}">
+                    <a16:rowId xmlns:a16="http://schemas.microsoft.com/office/drawing/2014/main" val="10004"/>
+                  </a:ext>
+                </a:extLst>
               </a:tr>
               <a:tr h="350520">
                 <a:tc>
@@ -6107,6 +6289,11 @@
                   </a:txBody>
                   <a:tcPr/>
                 </a:tc>
+                <a:extLst>
+                  <a:ext uri="{0D108BD9-81ED-4DB2-BD59-A6C34878D82A}">
+                    <a16:rowId xmlns:a16="http://schemas.microsoft.com/office/drawing/2014/main" val="10005"/>
+                  </a:ext>
+                </a:extLst>
               </a:tr>
             </a:tbl>
           </a:graphicData>
@@ -6131,11 +6318,41 @@
                 <a:tableStyleId>{5C22544A-7EE6-4342-B048-85BDC9FD1C3A}</a:tableStyleId>
               </a:tblPr>
               <a:tblGrid>
-                <a:gridCol w="1463040"/>
-                <a:gridCol w="1463040"/>
-                <a:gridCol w="1463040"/>
-                <a:gridCol w="1463040"/>
-                <a:gridCol w="1463040"/>
+                <a:gridCol w="1463040">
+                  <a:extLst>
+                    <a:ext uri="{9D8B030D-6E8A-4147-A177-3AD203B41FA5}">
+                      <a16:colId xmlns:a16="http://schemas.microsoft.com/office/drawing/2014/main" val="20000"/>
+                    </a:ext>
+                  </a:extLst>
+                </a:gridCol>
+                <a:gridCol w="1463040">
+                  <a:extLst>
+                    <a:ext uri="{9D8B030D-6E8A-4147-A177-3AD203B41FA5}">
+                      <a16:colId xmlns:a16="http://schemas.microsoft.com/office/drawing/2014/main" val="20001"/>
+                    </a:ext>
+                  </a:extLst>
+                </a:gridCol>
+                <a:gridCol w="1463040">
+                  <a:extLst>
+                    <a:ext uri="{9D8B030D-6E8A-4147-A177-3AD203B41FA5}">
+                      <a16:colId xmlns:a16="http://schemas.microsoft.com/office/drawing/2014/main" val="20002"/>
+                    </a:ext>
+                  </a:extLst>
+                </a:gridCol>
+                <a:gridCol w="1463040">
+                  <a:extLst>
+                    <a:ext uri="{9D8B030D-6E8A-4147-A177-3AD203B41FA5}">
+                      <a16:colId xmlns:a16="http://schemas.microsoft.com/office/drawing/2014/main" val="20003"/>
+                    </a:ext>
+                  </a:extLst>
+                </a:gridCol>
+                <a:gridCol w="1463040">
+                  <a:extLst>
+                    <a:ext uri="{9D8B030D-6E8A-4147-A177-3AD203B41FA5}">
+                      <a16:colId xmlns:a16="http://schemas.microsoft.com/office/drawing/2014/main" val="20004"/>
+                    </a:ext>
+                  </a:extLst>
+                </a:gridCol>
               </a:tblGrid>
               <a:tr h="525780">
                 <a:tc>
@@ -6223,6 +6440,11 @@
                   </a:txBody>
                   <a:tcPr/>
                 </a:tc>
+                <a:extLst>
+                  <a:ext uri="{0D108BD9-81ED-4DB2-BD59-A6C34878D82A}">
+                    <a16:rowId xmlns:a16="http://schemas.microsoft.com/office/drawing/2014/main" val="10000"/>
+                  </a:ext>
+                </a:extLst>
               </a:tr>
               <a:tr h="525780">
                 <a:tc>
@@ -6310,6 +6532,11 @@
                   </a:txBody>
                   <a:tcPr/>
                 </a:tc>
+                <a:extLst>
+                  <a:ext uri="{0D108BD9-81ED-4DB2-BD59-A6C34878D82A}">
+                    <a16:rowId xmlns:a16="http://schemas.microsoft.com/office/drawing/2014/main" val="10001"/>
+                  </a:ext>
+                </a:extLst>
               </a:tr>
               <a:tr h="525780">
                 <a:tc>
@@ -6397,6 +6624,11 @@
                   </a:txBody>
                   <a:tcPr/>
                 </a:tc>
+                <a:extLst>
+                  <a:ext uri="{0D108BD9-81ED-4DB2-BD59-A6C34878D82A}">
+                    <a16:rowId xmlns:a16="http://schemas.microsoft.com/office/drawing/2014/main" val="10002"/>
+                  </a:ext>
+                </a:extLst>
               </a:tr>
               <a:tr h="525780">
                 <a:tc>
@@ -6484,6 +6716,11 @@
                   </a:txBody>
                   <a:tcPr/>
                 </a:tc>
+                <a:extLst>
+                  <a:ext uri="{0D108BD9-81ED-4DB2-BD59-A6C34878D82A}">
+                    <a16:rowId xmlns:a16="http://schemas.microsoft.com/office/drawing/2014/main" val="10003"/>
+                  </a:ext>
+                </a:extLst>
               </a:tr>
             </a:tbl>
           </a:graphicData>
@@ -6506,7 +6743,7 @@
           <a:noFill/>
         </p:spPr>
         <p:txBody>
-          <a:bodyPr wrap="square" lIns="0" rIns="0" tIns="0" bIns="0">
+          <a:bodyPr wrap="square" lIns="0" tIns="0" rIns="0" bIns="0">
             <a:spAutoFit/>
           </a:bodyPr>
           <a:lstStyle/>
@@ -6540,7 +6777,7 @@
           <a:noFill/>
         </p:spPr>
         <p:txBody>
-          <a:bodyPr wrap="square" lIns="0" rIns="0" tIns="0" bIns="0">
+          <a:bodyPr wrap="square" lIns="0" tIns="0" rIns="0" bIns="0">
             <a:spAutoFit/>
           </a:bodyPr>
           <a:lstStyle/>
@@ -6574,7 +6811,7 @@
           <a:noFill/>
         </p:spPr>
         <p:txBody>
-          <a:bodyPr wrap="square" lIns="0" rIns="0" tIns="0" bIns="0">
+          <a:bodyPr wrap="square" lIns="0" tIns="0" rIns="0" bIns="0">
             <a:spAutoFit/>
           </a:bodyPr>
           <a:lstStyle/>
@@ -6600,7 +6837,7 @@
 </file>
 
 <file path=ppt/slides/slide7.xml><?xml version="1.0" encoding="utf-8"?>
-<p:sld xmlns:a="http://schemas.openxmlformats.org/drawingml/2006/main" xmlns:p="http://schemas.openxmlformats.org/presentationml/2006/main" xmlns:r="http://schemas.openxmlformats.org/officeDocument/2006/relationships">
+<p:sld xmlns:a="http://schemas.openxmlformats.org/drawingml/2006/main" xmlns:r="http://schemas.openxmlformats.org/officeDocument/2006/relationships" xmlns:p="http://schemas.openxmlformats.org/presentationml/2006/main">
   <p:cSld>
     <p:spTree>
       <p:nvGrpSpPr>
@@ -6608,7 +6845,14 @@
         <p:cNvGrpSpPr/>
         <p:nvPr/>
       </p:nvGrpSpPr>
-      <p:grpSpPr/>
+      <p:grpSpPr>
+        <a:xfrm>
+          <a:off x="0" y="0"/>
+          <a:ext cx="0" cy="0"/>
+          <a:chOff x="0" y="0"/>
+          <a:chExt cx="0" cy="0"/>
+        </a:xfrm>
+      </p:grpSpPr>
       <p:sp>
         <p:nvSpPr>
           <p:cNvPr id="2" name="Rectangle 1"/>
@@ -6649,6 +6893,7 @@
           <a:lstStyle/>
           <a:p>
             <a:pPr algn="ctr"/>
+            <a:endParaRPr/>
           </a:p>
         </p:txBody>
       </p:sp>
@@ -6669,7 +6914,7 @@
           <a:noFill/>
         </p:spPr>
         <p:txBody>
-          <a:bodyPr wrap="square" lIns="0" rIns="0" tIns="0" bIns="0">
+          <a:bodyPr wrap="square" lIns="0" tIns="0" rIns="0" bIns="0">
             <a:spAutoFit/>
           </a:bodyPr>
           <a:lstStyle/>
@@ -6870,7 +7115,7 @@
 </file>
 
 <file path=ppt/slides/slide8.xml><?xml version="1.0" encoding="utf-8"?>
-<p:sld xmlns:a="http://schemas.openxmlformats.org/drawingml/2006/main" xmlns:p="http://schemas.openxmlformats.org/presentationml/2006/main" xmlns:r="http://schemas.openxmlformats.org/officeDocument/2006/relationships">
+<p:sld xmlns:a="http://schemas.openxmlformats.org/drawingml/2006/main" xmlns:r="http://schemas.openxmlformats.org/officeDocument/2006/relationships" xmlns:p="http://schemas.openxmlformats.org/presentationml/2006/main">
   <p:cSld>
     <p:spTree>
       <p:nvGrpSpPr>
@@ -6878,7 +7123,14 @@
         <p:cNvGrpSpPr/>
         <p:nvPr/>
       </p:nvGrpSpPr>
-      <p:grpSpPr/>
+      <p:grpSpPr>
+        <a:xfrm>
+          <a:off x="0" y="0"/>
+          <a:ext cx="0" cy="0"/>
+          <a:chOff x="0" y="0"/>
+          <a:chExt cx="0" cy="0"/>
+        </a:xfrm>
+      </p:grpSpPr>
       <p:sp>
         <p:nvSpPr>
           <p:cNvPr id="2" name="Rectangle 1"/>
@@ -6919,6 +7171,7 @@
           <a:lstStyle/>
           <a:p>
             <a:pPr algn="ctr"/>
+            <a:endParaRPr/>
           </a:p>
         </p:txBody>
       </p:sp>
@@ -6939,7 +7192,7 @@
           <a:noFill/>
         </p:spPr>
         <p:txBody>
-          <a:bodyPr wrap="square" lIns="0" rIns="0" tIns="0" bIns="0">
+          <a:bodyPr wrap="square" lIns="0" tIns="0" rIns="0" bIns="0">
             <a:spAutoFit/>
           </a:bodyPr>
           <a:lstStyle/>
@@ -7121,7 +7374,7 @@
 </file>
 
 <file path=ppt/slides/slide9.xml><?xml version="1.0" encoding="utf-8"?>
-<p:sld xmlns:a="http://schemas.openxmlformats.org/drawingml/2006/main" xmlns:p="http://schemas.openxmlformats.org/presentationml/2006/main" xmlns:r="http://schemas.openxmlformats.org/officeDocument/2006/relationships">
+<p:sld xmlns:a="http://schemas.openxmlformats.org/drawingml/2006/main" xmlns:r="http://schemas.openxmlformats.org/officeDocument/2006/relationships" xmlns:p="http://schemas.openxmlformats.org/presentationml/2006/main">
   <p:cSld>
     <p:spTree>
       <p:nvGrpSpPr>
@@ -7129,7 +7382,14 @@
         <p:cNvGrpSpPr/>
         <p:nvPr/>
       </p:nvGrpSpPr>
-      <p:grpSpPr/>
+      <p:grpSpPr>
+        <a:xfrm>
+          <a:off x="0" y="0"/>
+          <a:ext cx="0" cy="0"/>
+          <a:chOff x="0" y="0"/>
+          <a:chExt cx="0" cy="0"/>
+        </a:xfrm>
+      </p:grpSpPr>
       <p:sp>
         <p:nvSpPr>
           <p:cNvPr id="2" name="Rectangle 1"/>
@@ -7170,6 +7430,7 @@
           <a:lstStyle/>
           <a:p>
             <a:pPr algn="ctr"/>
+            <a:endParaRPr/>
           </a:p>
         </p:txBody>
       </p:sp>
@@ -7190,7 +7451,7 @@
           <a:noFill/>
         </p:spPr>
         <p:txBody>
-          <a:bodyPr wrap="square" lIns="0" rIns="0" tIns="0" bIns="0">
+          <a:bodyPr wrap="square" lIns="0" tIns="0" rIns="0" bIns="0">
             <a:spAutoFit/>
           </a:bodyPr>
           <a:lstStyle/>

--- a/MedFAQ_Slides.pptx
+++ b/MedFAQ_Slides.pptx
@@ -312,7 +312,7 @@
           <a:p>
             <a:fld id="{5BCAD085-E8A6-8845-BD4E-CB4CCA059FC4}" type="datetimeFigureOut">
               <a:rPr lang="en-US" smtClean="0"/>
-              <a:t>6/3/2026</a:t>
+              <a:t>6/10/2026</a:t>
             </a:fld>
             <a:endParaRPr lang="en-US"/>
           </a:p>
@@ -480,7 +480,7 @@
           <a:p>
             <a:fld id="{5BCAD085-E8A6-8845-BD4E-CB4CCA059FC4}" type="datetimeFigureOut">
               <a:rPr lang="en-US" smtClean="0"/>
-              <a:t>6/3/2026</a:t>
+              <a:t>6/10/2026</a:t>
             </a:fld>
             <a:endParaRPr lang="en-US"/>
           </a:p>
@@ -658,7 +658,7 @@
           <a:p>
             <a:fld id="{5BCAD085-E8A6-8845-BD4E-CB4CCA059FC4}" type="datetimeFigureOut">
               <a:rPr lang="en-US" smtClean="0"/>
-              <a:t>6/3/2026</a:t>
+              <a:t>6/10/2026</a:t>
             </a:fld>
             <a:endParaRPr lang="en-US"/>
           </a:p>
@@ -826,7 +826,7 @@
           <a:p>
             <a:fld id="{5BCAD085-E8A6-8845-BD4E-CB4CCA059FC4}" type="datetimeFigureOut">
               <a:rPr lang="en-US" smtClean="0"/>
-              <a:t>6/3/2026</a:t>
+              <a:t>6/10/2026</a:t>
             </a:fld>
             <a:endParaRPr lang="en-US"/>
           </a:p>
@@ -1071,7 +1071,7 @@
           <a:p>
             <a:fld id="{5BCAD085-E8A6-8845-BD4E-CB4CCA059FC4}" type="datetimeFigureOut">
               <a:rPr lang="en-US" smtClean="0"/>
-              <a:t>6/3/2026</a:t>
+              <a:t>6/10/2026</a:t>
             </a:fld>
             <a:endParaRPr lang="en-US"/>
           </a:p>
@@ -1356,7 +1356,7 @@
           <a:p>
             <a:fld id="{5BCAD085-E8A6-8845-BD4E-CB4CCA059FC4}" type="datetimeFigureOut">
               <a:rPr lang="en-US" smtClean="0"/>
-              <a:t>6/3/2026</a:t>
+              <a:t>6/10/2026</a:t>
             </a:fld>
             <a:endParaRPr lang="en-US"/>
           </a:p>
@@ -1775,7 +1775,7 @@
           <a:p>
             <a:fld id="{5BCAD085-E8A6-8845-BD4E-CB4CCA059FC4}" type="datetimeFigureOut">
               <a:rPr lang="en-US" smtClean="0"/>
-              <a:t>6/3/2026</a:t>
+              <a:t>6/10/2026</a:t>
             </a:fld>
             <a:endParaRPr lang="en-US"/>
           </a:p>
@@ -1892,7 +1892,7 @@
           <a:p>
             <a:fld id="{5BCAD085-E8A6-8845-BD4E-CB4CCA059FC4}" type="datetimeFigureOut">
               <a:rPr lang="en-US" smtClean="0"/>
-              <a:t>6/3/2026</a:t>
+              <a:t>6/10/2026</a:t>
             </a:fld>
             <a:endParaRPr lang="en-US"/>
           </a:p>
@@ -1987,7 +1987,7 @@
           <a:p>
             <a:fld id="{5BCAD085-E8A6-8845-BD4E-CB4CCA059FC4}" type="datetimeFigureOut">
               <a:rPr lang="en-US" smtClean="0"/>
-              <a:t>6/3/2026</a:t>
+              <a:t>6/10/2026</a:t>
             </a:fld>
             <a:endParaRPr lang="en-US"/>
           </a:p>
@@ -2262,7 +2262,7 @@
           <a:p>
             <a:fld id="{5BCAD085-E8A6-8845-BD4E-CB4CCA059FC4}" type="datetimeFigureOut">
               <a:rPr lang="en-US" smtClean="0"/>
-              <a:t>6/3/2026</a:t>
+              <a:t>6/10/2026</a:t>
             </a:fld>
             <a:endParaRPr lang="en-US"/>
           </a:p>
@@ -2514,7 +2514,7 @@
           <a:p>
             <a:fld id="{5BCAD085-E8A6-8845-BD4E-CB4CCA059FC4}" type="datetimeFigureOut">
               <a:rPr lang="en-US" smtClean="0"/>
-              <a:t>6/3/2026</a:t>
+              <a:t>6/10/2026</a:t>
             </a:fld>
             <a:endParaRPr lang="en-US"/>
           </a:p>
@@ -2725,7 +2725,7 @@
           <a:p>
             <a:fld id="{5BCAD085-E8A6-8845-BD4E-CB4CCA059FC4}" type="datetimeFigureOut">
               <a:rPr lang="en-US" smtClean="0"/>
-              <a:t>6/3/2026</a:t>
+              <a:t>6/10/2026</a:t>
             </a:fld>
             <a:endParaRPr lang="en-US"/>
           </a:p>
@@ -3277,29 +3277,18 @@
               <a:t>Abdul Ghani · Anas Bhatti · Muhammad Salman </a:t>
             </a:r>
             <a:r>
-              <a:rPr lang="en-US" sz="1400">
+              <a:rPr lang="en-US" sz="1400" dirty="0">
                 <a:solidFill>
                   <a:srgbClr val="1C1717"/>
                 </a:solidFill>
               </a:rPr>
-              <a:t>· Raja Mahad </a:t>
-            </a:r>
-            <a:r>
-              <a:rPr lang="en-US" sz="1400" dirty="0">
-                <a:solidFill>
-                  <a:srgbClr val="1C1717"/>
-                </a:solidFill>
-              </a:rPr>
-              <a:t>Ali</a:t>
-            </a:r>
-            <a:r>
-              <a:rPr sz="1400" b="0" dirty="0">
-                <a:solidFill>
-                  <a:srgbClr val="1C1717"/>
-                </a:solidFill>
-              </a:rPr>
-              <a:t>· 5th member</a:t>
-            </a:r>
+              <a:t>· Raja Mahad Ali</a:t>
+            </a:r>
+            <a:endParaRPr sz="1400" b="0" dirty="0">
+              <a:solidFill>
+                <a:srgbClr val="1C1717"/>
+              </a:solidFill>
+            </a:endParaRPr>
           </a:p>
         </p:txBody>
       </p:sp>
@@ -3415,7 +3404,7 @@
         <p:spPr>
           <a:xfrm>
             <a:off x="457200" y="365760"/>
-            <a:ext cx="10972800" cy="640080"/>
+            <a:ext cx="10972800" cy="492443"/>
           </a:xfrm>
           <a:prstGeom prst="rect">
             <a:avLst/>
@@ -3430,12 +3419,20 @@
           <a:p>
             <a:pPr algn="l"/>
             <a:r>
-              <a:rPr sz="3200" b="1">
+              <a:rPr lang="en-US" sz="3200" b="1" dirty="0">
                 <a:solidFill>
                   <a:srgbClr val="1C1717"/>
                 </a:solidFill>
               </a:rPr>
-              <a:t>Team — 4 NLP-heavy roles</a:t>
+              <a:t>NLP</a:t>
+            </a:r>
+            <a:r>
+              <a:rPr sz="3200" b="1" dirty="0">
+                <a:solidFill>
+                  <a:srgbClr val="1C1717"/>
+                </a:solidFill>
+              </a:rPr>
+              <a:t> roles</a:t>
             </a:r>
           </a:p>
         </p:txBody>
@@ -3483,7 +3480,7 @@
         <p:spPr>
           <a:xfrm>
             <a:off x="548640" y="1783080"/>
-            <a:ext cx="11338560" cy="4754880"/>
+            <a:ext cx="11338560" cy="3785652"/>
           </a:xfrm>
           <a:prstGeom prst="rect">
             <a:avLst/>
@@ -3498,77 +3495,237 @@
           <a:p>
             <a:pPr algn="l"/>
             <a:r>
-              <a:rPr sz="1200" b="1">
+              <a:rPr sz="2000" b="1" dirty="0">
                 <a:solidFill>
                   <a:srgbClr val="1C1717"/>
                 </a:solidFill>
               </a:rPr>
-              <a:t>•  Member 1 — Abdul Ghani (F23607005). Token + Retrieval NLP</a:t>
-            </a:r>
-            <a:r>
-              <a:rPr sz="1100">
-                <a:solidFill>
-                  <a:srgbClr val="78716C"/>
-                </a:solidFill>
-              </a:rPr>
-              <a:t>  — tokeniser, Porter stemmer, lemmatiser, lexicon + HMM POS, spell correct, Roman-Urdu, TF-IDF (word + char), BM25, LSA, PPMI, Word2Vec, BPE, Kneser-Ney LM, WMD, PRF, 5-channel blender + chat UI + /playground</a:t>
+              <a:t>•  Member 1</a:t>
+            </a:r>
+            <a:r>
+              <a:rPr lang="en-US" sz="2000" b="1" dirty="0">
+                <a:solidFill>
+                  <a:srgbClr val="1C1717"/>
+                </a:solidFill>
+              </a:rPr>
+              <a:t>,</a:t>
+            </a:r>
+            <a:r>
+              <a:rPr sz="2000" b="1" dirty="0">
+                <a:solidFill>
+                  <a:srgbClr val="1C1717"/>
+                </a:solidFill>
+              </a:rPr>
+              <a:t> Abdul Ghani (F23607005). Token + Retrieval NLP</a:t>
+            </a:r>
+            <a:r>
+              <a:rPr sz="2000" dirty="0">
+                <a:solidFill>
+                  <a:srgbClr val="78716C"/>
+                </a:solidFill>
+              </a:rPr>
+              <a:t>   </a:t>
+            </a:r>
+            <a:r>
+              <a:rPr sz="2000" dirty="0" err="1">
+                <a:solidFill>
+                  <a:srgbClr val="78716C"/>
+                </a:solidFill>
+              </a:rPr>
+              <a:t>tokeniser</a:t>
+            </a:r>
+            <a:r>
+              <a:rPr sz="2000" dirty="0">
+                <a:solidFill>
+                  <a:srgbClr val="78716C"/>
+                </a:solidFill>
+              </a:rPr>
+              <a:t>, Porter stemmer, </a:t>
+            </a:r>
+            <a:r>
+              <a:rPr sz="2000" dirty="0" err="1">
+                <a:solidFill>
+                  <a:srgbClr val="78716C"/>
+                </a:solidFill>
+              </a:rPr>
+              <a:t>lemmatiser</a:t>
+            </a:r>
+            <a:r>
+              <a:rPr sz="2000" dirty="0">
+                <a:solidFill>
+                  <a:srgbClr val="78716C"/>
+                </a:solidFill>
+              </a:rPr>
+              <a:t>, lexicon + HMM POS, spell correct, Roman-Urdu, TF-IDF (word + char), BM25, LSA, PPMI, Word2Vec, BPE, Kneser-Ney LM, WMD, PRF, 5-channel blender + chat UI + /playground</a:t>
             </a:r>
           </a:p>
           <a:p>
             <a:pPr algn="l"/>
             <a:r>
-              <a:rPr sz="1200" b="1">
+              <a:rPr sz="2000" b="1" dirty="0">
                 <a:solidFill>
                   <a:srgbClr val="1C1717"/>
                 </a:solidFill>
               </a:rPr>
-              <a:t>•  Member 2 — Anas Bhatti (F23607044). Extraction + Classification NLP</a:t>
-            </a:r>
-            <a:r>
-              <a:rPr sz="1100">
-                <a:solidFill>
-                  <a:srgbClr val="78716C"/>
-                </a:solidFill>
-              </a:rPr>
-              <a:t>  — Medical NER (dict + perceptron + linear-chain CRF), negation, sentiment, triage, question type, slot extractor, TextRank keywords + summary, KG triples, Naive Bayes + MLP + Transformer intent classifier, /architecture</a:t>
+              <a:t>•  Member 2 </a:t>
+            </a:r>
+            <a:r>
+              <a:rPr lang="en-US" sz="2000" b="1" dirty="0">
+                <a:solidFill>
+                  <a:srgbClr val="1C1717"/>
+                </a:solidFill>
+              </a:rPr>
+              <a:t>, </a:t>
+            </a:r>
+            <a:r>
+              <a:rPr sz="2000" b="1" dirty="0">
+                <a:solidFill>
+                  <a:srgbClr val="1C1717"/>
+                </a:solidFill>
+              </a:rPr>
+              <a:t>Anas Bhatti (F23607044). Extraction + Classification NLP</a:t>
+            </a:r>
+            <a:r>
+              <a:rPr sz="2000" dirty="0">
+                <a:solidFill>
+                  <a:srgbClr val="78716C"/>
+                </a:solidFill>
+              </a:rPr>
+              <a:t>  Medical NER (</a:t>
+            </a:r>
+            <a:r>
+              <a:rPr sz="2000" dirty="0" err="1">
+                <a:solidFill>
+                  <a:srgbClr val="78716C"/>
+                </a:solidFill>
+              </a:rPr>
+              <a:t>dict</a:t>
+            </a:r>
+            <a:r>
+              <a:rPr sz="2000" dirty="0">
+                <a:solidFill>
+                  <a:srgbClr val="78716C"/>
+                </a:solidFill>
+              </a:rPr>
+              <a:t> + perceptron + linear-chain CRF), negation, sentiment, triage, question type, slot extractor, </a:t>
+            </a:r>
+            <a:r>
+              <a:rPr sz="2000" dirty="0" err="1">
+                <a:solidFill>
+                  <a:srgbClr val="78716C"/>
+                </a:solidFill>
+              </a:rPr>
+              <a:t>TextRank</a:t>
+            </a:r>
+            <a:r>
+              <a:rPr sz="2000" dirty="0">
+                <a:solidFill>
+                  <a:srgbClr val="78716C"/>
+                </a:solidFill>
+              </a:rPr>
+              <a:t> keywords + summary, KG triples, Naive Bayes + MLP , /architecture</a:t>
             </a:r>
           </a:p>
           <a:p>
             <a:pPr algn="l"/>
             <a:r>
-              <a:rPr sz="1200" b="1">
+              <a:rPr sz="2000" b="1" dirty="0">
                 <a:solidFill>
                   <a:srgbClr val="1C1717"/>
                 </a:solidFill>
               </a:rPr>
-              <a:t>•  Member 3 — Muhammad Salman (F23607037). Generation + Dialog NLP</a:t>
-            </a:r>
-            <a:r>
-              <a:rPr sz="1100">
-                <a:solidFill>
-                  <a:srgbClr val="78716C"/>
-                </a:solidFill>
-              </a:rPr>
-              <a:t>  — Seq2seq encoder-decoder with Bahdanau attention, grounded generator, MLP, dual encoder, K-Means, real-time auto-FAQ miner, dialog manager, MMR diversification, LTR reranker, coreference, live FAQ counters</a:t>
+              <a:t>•  Member 3</a:t>
+            </a:r>
+            <a:r>
+              <a:rPr lang="en-US" sz="2000" b="1" dirty="0">
+                <a:solidFill>
+                  <a:srgbClr val="1C1717"/>
+                </a:solidFill>
+              </a:rPr>
+              <a:t>, </a:t>
+            </a:r>
+            <a:r>
+              <a:rPr sz="2000" b="1" dirty="0">
+                <a:solidFill>
+                  <a:srgbClr val="1C1717"/>
+                </a:solidFill>
+              </a:rPr>
+              <a:t>Muhammad Salman (F23607037). Generation + Dialog NLP</a:t>
+            </a:r>
+            <a:r>
+              <a:rPr sz="2000" dirty="0">
+                <a:solidFill>
+                  <a:srgbClr val="78716C"/>
+                </a:solidFill>
+              </a:rPr>
+              <a:t>   Seq2seq encoder-decoder with </a:t>
+            </a:r>
+            <a:r>
+              <a:rPr sz="2000" dirty="0" err="1">
+                <a:solidFill>
+                  <a:srgbClr val="78716C"/>
+                </a:solidFill>
+              </a:rPr>
+              <a:t>Bahdanau</a:t>
+            </a:r>
+            <a:r>
+              <a:rPr sz="2000" dirty="0">
+                <a:solidFill>
+                  <a:srgbClr val="78716C"/>
+                </a:solidFill>
+              </a:rPr>
+              <a:t> attention, grounded generator, MLP, dual encoder, K-Means, real-time auto-FAQ miner, dialog manager, MMR diversification, LTR </a:t>
+            </a:r>
+            <a:r>
+              <a:rPr sz="2000" dirty="0" err="1">
+                <a:solidFill>
+                  <a:srgbClr val="78716C"/>
+                </a:solidFill>
+              </a:rPr>
+              <a:t>reranker</a:t>
+            </a:r>
+            <a:r>
+              <a:rPr sz="2000" dirty="0">
+                <a:solidFill>
+                  <a:srgbClr val="78716C"/>
+                </a:solidFill>
+              </a:rPr>
+              <a:t>, coreference, live FAQ counters</a:t>
             </a:r>
           </a:p>
           <a:p>
             <a:pPr algn="l"/>
             <a:r>
-              <a:rPr sz="1200" b="1">
+              <a:rPr sz="2000" b="1" dirty="0">
                 <a:solidFill>
                   <a:srgbClr val="1C1717"/>
                 </a:solidFill>
               </a:rPr>
-              <a:t>•  Member 4 — Data + Eval + Deploy</a:t>
-            </a:r>
-            <a:r>
-              <a:rPr sz="1100">
-                <a:solidFill>
-                  <a:srgbClr val="78716C"/>
-                </a:solidFill>
-              </a:rPr>
-              <a:t>  — 214 hand-written FAQs, 6-way intent augmentation (1517 examples), 14,357 synthetic chat sessions, PHI scrub, offline mining pipeline, eval harness (P@1, MRR, Recall@5), 62-test integration suite, Docker</a:t>
+              <a:t>•  Member 4</a:t>
+            </a:r>
+            <a:r>
+              <a:rPr lang="en-US" sz="2000" b="1" dirty="0">
+                <a:solidFill>
+                  <a:srgbClr val="1C1717"/>
+                </a:solidFill>
+              </a:rPr>
+              <a:t>, Mahad Ali</a:t>
+            </a:r>
+            <a:r>
+              <a:rPr sz="2000" b="1" dirty="0">
+                <a:solidFill>
+                  <a:srgbClr val="1C1717"/>
+                </a:solidFill>
+              </a:rPr>
+              <a:t> Data + Eval + Deploy</a:t>
+            </a:r>
+            <a:r>
+              <a:rPr sz="2000" dirty="0">
+                <a:solidFill>
+                  <a:srgbClr val="78716C"/>
+                </a:solidFill>
+              </a:rPr>
+              <a:t>   214 hand-written FAQs, 6-way intent augmentation (1517 examples), 14,357 synthetic chat sessions, PHI scrub, offline mining pipeline, eval harness (P@1, MRR, Recall@5), 62-test integration suite, Docker</a:t>
             </a:r>
           </a:p>
         </p:txBody>
@@ -3753,7 +3910,7 @@
         <p:spPr>
           <a:xfrm>
             <a:off x="548640" y="2468880"/>
-            <a:ext cx="11338560" cy="4114800"/>
+            <a:ext cx="11338560" cy="1384995"/>
           </a:xfrm>
           <a:prstGeom prst="rect">
             <a:avLst/>
@@ -3768,7 +3925,7 @@
           <a:p>
             <a:pPr algn="l"/>
             <a:r>
-              <a:rPr sz="1400" b="1">
+              <a:rPr sz="1400" b="1" dirty="0">
                 <a:solidFill>
                   <a:srgbClr val="1C1717"/>
                 </a:solidFill>
@@ -3776,7 +3933,7 @@
               <a:t>•  http://localhost:3000/</a:t>
             </a:r>
             <a:r>
-              <a:rPr sz="1300">
+              <a:rPr sz="1300" dirty="0">
                 <a:solidFill>
                   <a:srgbClr val="78716C"/>
                 </a:solidFill>
@@ -3787,7 +3944,7 @@
           <a:p>
             <a:pPr algn="l"/>
             <a:r>
-              <a:rPr sz="1400" b="1">
+              <a:rPr sz="1400" b="1" dirty="0">
                 <a:solidFill>
                   <a:srgbClr val="1C1717"/>
                 </a:solidFill>
@@ -3795,7 +3952,7 @@
               <a:t>•  /chat/radiology</a:t>
             </a:r>
             <a:r>
-              <a:rPr sz="1300">
+              <a:rPr sz="1300" dirty="0">
                 <a:solidFill>
                   <a:srgbClr val="78716C"/>
                 </a:solidFill>
@@ -3806,7 +3963,7 @@
           <a:p>
             <a:pPr algn="l"/>
             <a:r>
-              <a:rPr sz="1400" b="1">
+              <a:rPr sz="1400" b="1" dirty="0">
                 <a:solidFill>
                   <a:srgbClr val="1C1717"/>
                 </a:solidFill>
@@ -3814,7 +3971,7 @@
               <a:t>•  /playground</a:t>
             </a:r>
             <a:r>
-              <a:rPr sz="1300">
+              <a:rPr sz="1300" dirty="0">
                 <a:solidFill>
                   <a:srgbClr val="78716C"/>
                 </a:solidFill>
@@ -3825,7 +3982,7 @@
           <a:p>
             <a:pPr algn="l"/>
             <a:r>
-              <a:rPr sz="1400" b="1">
+              <a:rPr sz="1400" b="1" dirty="0">
                 <a:solidFill>
                   <a:srgbClr val="1C1717"/>
                 </a:solidFill>
@@ -3833,7 +3990,7 @@
               <a:t>•  /architecture</a:t>
             </a:r>
             <a:r>
-              <a:rPr sz="1300">
+              <a:rPr sz="1300" dirty="0">
                 <a:solidFill>
                   <a:srgbClr val="78716C"/>
                 </a:solidFill>
@@ -3844,7 +4001,7 @@
           <a:p>
             <a:pPr algn="l"/>
             <a:r>
-              <a:rPr sz="1400" b="1">
+              <a:rPr sz="1400" b="1" dirty="0">
                 <a:solidFill>
                   <a:srgbClr val="1C1717"/>
                 </a:solidFill>
@@ -3852,7 +4009,7 @@
               <a:t>•  /admin</a:t>
             </a:r>
             <a:r>
-              <a:rPr sz="1300">
+              <a:rPr sz="1300" dirty="0">
                 <a:solidFill>
                   <a:srgbClr val="78716C"/>
                 </a:solidFill>
@@ -3863,53 +4020,15 @@
           <a:p>
             <a:pPr algn="l"/>
             <a:r>
-              <a:rPr sz="1400" b="1">
+              <a:rPr sz="1400" b="1" dirty="0">
                 <a:solidFill>
                   <a:srgbClr val="1C1717"/>
                 </a:solidFill>
               </a:rPr>
-              <a:t>•  python api/train_transformer.py --verbose</a:t>
-            </a:r>
-            <a:r>
-              <a:rPr sz="1300">
-                <a:solidFill>
-                  <a:srgbClr val="78716C"/>
-                </a:solidFill>
-              </a:rPr>
-              <a:t>  — train the from-scratch transformer (GPU auto-detected)</a:t>
-            </a:r>
-          </a:p>
-          <a:p>
-            <a:pPr algn="l"/>
-            <a:r>
-              <a:rPr sz="1400" b="1">
-                <a:solidFill>
-                  <a:srgbClr val="1C1717"/>
-                </a:solidFill>
-              </a:rPr>
-              <a:t>•  python api/eval.py</a:t>
-            </a:r>
-            <a:r>
-              <a:rPr sz="1300">
-                <a:solidFill>
-                  <a:srgbClr val="78716C"/>
-                </a:solidFill>
-              </a:rPr>
-              <a:t>  — regenerate EVALUATION_REPORT.md from 116 held-out queries</a:t>
-            </a:r>
-          </a:p>
-          <a:p>
-            <a:pPr algn="l"/>
-            <a:r>
-              <a:rPr sz="1400" b="1">
-                <a:solidFill>
-                  <a:srgbClr val="1C1717"/>
-                </a:solidFill>
-              </a:rPr>
               <a:t>•  python api/final_test.py</a:t>
             </a:r>
             <a:r>
-              <a:rPr sz="1300">
+              <a:rPr sz="1300" dirty="0">
                 <a:solidFill>
                   <a:srgbClr val="78716C"/>
                 </a:solidFill>
@@ -4031,7 +4150,7 @@
         <p:spPr>
           <a:xfrm>
             <a:off x="457200" y="1143000"/>
-            <a:ext cx="10972800" cy="457200"/>
+            <a:ext cx="10972800" cy="215444"/>
           </a:xfrm>
           <a:prstGeom prst="rect">
             <a:avLst/>
@@ -4046,12 +4165,44 @@
           <a:p>
             <a:pPr algn="l"/>
             <a:r>
-              <a:rPr sz="1400" b="0">
-                <a:solidFill>
-                  <a:srgbClr val="78716C"/>
-                </a:solidFill>
-              </a:rPr>
-              <a:t>Problem · Patients ask the same questions every week.</a:t>
+              <a:rPr sz="1400" b="0" dirty="0">
+                <a:solidFill>
+                  <a:srgbClr val="78716C"/>
+                </a:solidFill>
+              </a:rPr>
+              <a:t>Problem · </a:t>
+            </a:r>
+            <a:r>
+              <a:rPr lang="en-US" sz="1400" b="0" dirty="0">
+                <a:solidFill>
+                  <a:srgbClr val="78716C"/>
+                </a:solidFill>
+              </a:rPr>
+              <a:t>Different </a:t>
+            </a:r>
+            <a:r>
+              <a:rPr sz="1400" b="0" dirty="0">
+                <a:solidFill>
+                  <a:srgbClr val="78716C"/>
+                </a:solidFill>
+              </a:rPr>
+              <a:t>Patients ask </a:t>
+            </a:r>
+            <a:r>
+              <a:rPr lang="en-US" sz="1400" b="0" dirty="0">
+                <a:solidFill>
+                  <a:srgbClr val="78716C"/>
+                </a:solidFill>
+              </a:rPr>
+              <a:t>almost </a:t>
+            </a:r>
+            <a:r>
+              <a:rPr sz="1400" b="0" dirty="0">
+                <a:solidFill>
+                  <a:srgbClr val="78716C"/>
+                </a:solidFill>
+              </a:rPr>
+              <a:t>same questions every week.</a:t>
             </a:r>
           </a:p>
         </p:txBody>
@@ -4065,7 +4216,7 @@
         <p:spPr>
           <a:xfrm>
             <a:off x="640080" y="1783080"/>
-            <a:ext cx="10972800" cy="4572000"/>
+            <a:ext cx="10972800" cy="1631216"/>
           </a:xfrm>
           <a:prstGeom prst="rect">
             <a:avLst/>
@@ -4080,7 +4231,7 @@
           <a:p>
             <a:pPr algn="l"/>
             <a:r>
-              <a:rPr sz="1500" b="1">
+              <a:rPr sz="2000" b="1" dirty="0">
                 <a:solidFill>
                   <a:srgbClr val="1C1717"/>
                 </a:solidFill>
@@ -4088,18 +4239,18 @@
               <a:t>•  Goal</a:t>
             </a:r>
             <a:r>
-              <a:rPr sz="1400">
-                <a:solidFill>
-                  <a:srgbClr val="78716C"/>
-                </a:solidFill>
-              </a:rPr>
-              <a:t>  — Retrieval chatbot that answers from an approved, clinician-reviewed FAQ index across three specialties.</a:t>
+              <a:rPr sz="2000" dirty="0">
+                <a:solidFill>
+                  <a:srgbClr val="78716C"/>
+                </a:solidFill>
+              </a:rPr>
+              <a:t>  Retrieval chatbot that answers from an approved, clinician-reviewed index across three specialties.</a:t>
             </a:r>
           </a:p>
           <a:p>
             <a:pPr algn="l"/>
             <a:r>
-              <a:rPr sz="1500" b="1">
+              <a:rPr sz="2000" b="1" dirty="0">
                 <a:solidFill>
                   <a:srgbClr val="1C1717"/>
                 </a:solidFill>
@@ -4107,107 +4258,58 @@
               <a:t>•  Specialties</a:t>
             </a:r>
             <a:r>
-              <a:rPr sz="1400">
-                <a:solidFill>
-                  <a:srgbClr val="78716C"/>
-                </a:solidFill>
-              </a:rPr>
-              <a:t>  — Radiology · Physiotherapy · Cardiovascular.</a:t>
+              <a:rPr sz="2000" dirty="0">
+                <a:solidFill>
+                  <a:srgbClr val="78716C"/>
+                </a:solidFill>
+              </a:rPr>
+              <a:t>   Radiology · Physiotherapy · Cardiovascular.</a:t>
             </a:r>
           </a:p>
           <a:p>
             <a:pPr algn="l"/>
             <a:r>
-              <a:rPr sz="1500" b="1">
+              <a:rPr sz="2000" b="1" dirty="0">
                 <a:solidFill>
                   <a:srgbClr val="1C1717"/>
                 </a:solidFill>
               </a:rPr>
-              <a:t>•  Honesty</a:t>
-            </a:r>
-            <a:r>
-              <a:rPr sz="1400">
-                <a:solidFill>
-                  <a:srgbClr val="78716C"/>
-                </a:solidFill>
-              </a:rPr>
-              <a:t>  — Every reply is a real, human-written FAQ entry. No hallucination.</a:t>
+              <a:t>•  Hard constraint</a:t>
+            </a:r>
+            <a:r>
+              <a:rPr sz="2000" dirty="0">
+                <a:solidFill>
+                  <a:srgbClr val="78716C"/>
+                </a:solidFill>
+              </a:rPr>
+              <a:t>  No </a:t>
+            </a:r>
+            <a:r>
+              <a:rPr lang="en-US" sz="2000" dirty="0">
+                <a:solidFill>
+                  <a:srgbClr val="78716C"/>
+                </a:solidFill>
+              </a:rPr>
+              <a:t>external or local LLM. </a:t>
             </a:r>
           </a:p>
           <a:p>
             <a:pPr algn="l"/>
             <a:r>
-              <a:rPr sz="1500" b="1">
+              <a:rPr sz="2000" b="1" dirty="0">
                 <a:solidFill>
                   <a:srgbClr val="1C1717"/>
                 </a:solidFill>
               </a:rPr>
-              <a:t>•  Hard constraint</a:t>
-            </a:r>
-            <a:r>
-              <a:rPr sz="1400">
-                <a:solidFill>
-                  <a:srgbClr val="78716C"/>
-                </a:solidFill>
-              </a:rPr>
-              <a:t>  — No LLM. No pretrained transformer. No sentence-transformers downloaded.</a:t>
-            </a:r>
-          </a:p>
-          <a:p>
-            <a:pPr algn="l"/>
-            <a:r>
-              <a:rPr sz="1500" b="1">
-                <a:solidFill>
-                  <a:srgbClr val="1C1717"/>
-                </a:solidFill>
-              </a:rPr>
-              <a:t>•  Hard constraint</a:t>
-            </a:r>
-            <a:r>
-              <a:rPr sz="1400">
-                <a:solidFill>
-                  <a:srgbClr val="78716C"/>
-                </a:solidFill>
-              </a:rPr>
-              <a:t>  — Every ML algorithm written by us (numpy or PyTorch tensors). ~3000 LoC.</a:t>
-            </a:r>
-          </a:p>
-          <a:p>
-            <a:pPr algn="l"/>
-            <a:r>
-              <a:rPr sz="1500" b="1">
-                <a:solidFill>
-                  <a:srgbClr val="1C1717"/>
-                </a:solidFill>
-              </a:rPr>
-              <a:t>•  Deploy</a:t>
-            </a:r>
-            <a:r>
-              <a:rPr sz="1400">
-                <a:solidFill>
-                  <a:srgbClr val="78716C"/>
-                </a:solidFill>
-              </a:rPr>
-              <a:t>  — Single `docker compose up` brings web + api + mongo live.</a:t>
-            </a:r>
-          </a:p>
-          <a:p>
-            <a:pPr algn="l"/>
-            <a:r>
-              <a:rPr sz="1500" b="1">
-                <a:solidFill>
-                  <a:srgbClr val="1C1717"/>
-                </a:solidFill>
-              </a:rPr>
               <a:t>•  Pakistan context</a:t>
             </a:r>
             <a:r>
-              <a:rPr sz="1400">
-                <a:solidFill>
-                  <a:srgbClr val="78716C"/>
-                </a:solidFill>
-              </a:rPr>
-              <a:t>  — Roman-Urdu phonetic input · 1122 emergency banner · PHI scrub.</a:t>
+              <a:rPr sz="2000" dirty="0">
+                <a:solidFill>
+                  <a:srgbClr val="78716C"/>
+                </a:solidFill>
+              </a:rPr>
+              <a:t>  Roman-Urdu phonetic input · PHI scrub.</a:t>
             </a:r>
           </a:p>
         </p:txBody>
@@ -4324,7 +4426,7 @@
         <p:spPr>
           <a:xfrm>
             <a:off x="457200" y="1143000"/>
-            <a:ext cx="10972800" cy="457200"/>
+            <a:ext cx="10972800" cy="215444"/>
           </a:xfrm>
           <a:prstGeom prst="rect">
             <a:avLst/>
@@ -4339,13 +4441,26 @@
           <a:p>
             <a:pPr algn="l"/>
             <a:r>
-              <a:rPr sz="1400" b="0">
-                <a:solidFill>
-                  <a:srgbClr val="78716C"/>
-                </a:solidFill>
-              </a:rPr>
-              <a:t>Each user turn flows top-to-bottom in ~22 ms p50.</a:t>
-            </a:r>
+              <a:rPr sz="1400" b="0" dirty="0">
+                <a:solidFill>
+                  <a:srgbClr val="78716C"/>
+                </a:solidFill>
+              </a:rPr>
+              <a:t>Each user turn flows top-to-bottom in ~22 </a:t>
+            </a:r>
+            <a:r>
+              <a:rPr sz="1400" b="0" dirty="0" err="1">
+                <a:solidFill>
+                  <a:srgbClr val="78716C"/>
+                </a:solidFill>
+              </a:rPr>
+              <a:t>ms.</a:t>
+            </a:r>
+            <a:endParaRPr sz="1400" b="0" dirty="0">
+              <a:solidFill>
+                <a:srgbClr val="78716C"/>
+              </a:solidFill>
+            </a:endParaRPr>
           </a:p>
         </p:txBody>
       </p:sp>
@@ -4358,7 +4473,7 @@
         <p:spPr>
           <a:xfrm>
             <a:off x="640080" y="1783080"/>
-            <a:ext cx="10972800" cy="4572000"/>
+            <a:ext cx="10972800" cy="2246769"/>
           </a:xfrm>
           <a:prstGeom prst="rect">
             <a:avLst/>
@@ -4373,7 +4488,7 @@
           <a:p>
             <a:pPr algn="l"/>
             <a:r>
-              <a:rPr sz="1400" b="1">
+              <a:rPr sz="2000" b="1" dirty="0">
                 <a:solidFill>
                   <a:srgbClr val="1C1717"/>
                 </a:solidFill>
@@ -4381,18 +4496,18 @@
               <a:t>•  Preprocess</a:t>
             </a:r>
             <a:r>
-              <a:rPr sz="1300">
-                <a:solidFill>
-                  <a:srgbClr val="78716C"/>
-                </a:solidFill>
-              </a:rPr>
-              <a:t>  — PHI scrub → Roman-Urdu expand → coreference → context augment → spell-correct.</a:t>
+              <a:rPr sz="2000" dirty="0">
+                <a:solidFill>
+                  <a:srgbClr val="78716C"/>
+                </a:solidFill>
+              </a:rPr>
+              <a:t>  PHI scrub → Roman-Urdu expand → coreference → context augment → spell-correct.</a:t>
             </a:r>
           </a:p>
           <a:p>
             <a:pPr algn="l"/>
             <a:r>
-              <a:rPr sz="1400" b="1">
+              <a:rPr sz="2000" b="1" dirty="0">
                 <a:solidFill>
                   <a:srgbClr val="1C1717"/>
                 </a:solidFill>
@@ -4400,18 +4515,50 @@
               <a:t>•  Understanding</a:t>
             </a:r>
             <a:r>
-              <a:rPr sz="1300">
-                <a:solidFill>
-                  <a:srgbClr val="78716C"/>
-                </a:solidFill>
-              </a:rPr>
-              <a:t>  — Tokeniser · POS (lexicon + HMM) · NER (dict + perceptron + CRF) · negation · sentiment · triage · intent (NB / MLP / Transformer).</a:t>
+              <a:rPr sz="2000" dirty="0">
+                <a:solidFill>
+                  <a:srgbClr val="78716C"/>
+                </a:solidFill>
+              </a:rPr>
+              <a:t> </a:t>
+            </a:r>
+            <a:r>
+              <a:rPr sz="2000" dirty="0" err="1">
+                <a:solidFill>
+                  <a:srgbClr val="78716C"/>
+                </a:solidFill>
+              </a:rPr>
+              <a:t>Tokeniser</a:t>
+            </a:r>
+            <a:r>
+              <a:rPr sz="2000" dirty="0">
+                <a:solidFill>
+                  <a:srgbClr val="78716C"/>
+                </a:solidFill>
+              </a:rPr>
+              <a:t> · POS (lexicon + HMM) · NER (</a:t>
+            </a:r>
+            <a:r>
+              <a:rPr sz="2000" dirty="0" err="1">
+                <a:solidFill>
+                  <a:srgbClr val="78716C"/>
+                </a:solidFill>
+              </a:rPr>
+              <a:t>dict</a:t>
+            </a:r>
+            <a:r>
+              <a:rPr sz="2000" dirty="0">
+                <a:solidFill>
+                  <a:srgbClr val="78716C"/>
+                </a:solidFill>
+              </a:rPr>
+              <a:t> + perceptron + CRF) · negation · sentiment · triage · intent (NB / MLP / Transformer).</a:t>
             </a:r>
           </a:p>
           <a:p>
             <a:pPr algn="l"/>
             <a:r>
-              <a:rPr sz="1400" b="1">
+              <a:rPr sz="2000" b="1" dirty="0">
                 <a:solidFill>
                   <a:srgbClr val="1C1717"/>
                 </a:solidFill>
@@ -4419,37 +4566,61 @@
               <a:t>•  Retrieve (5 channels)</a:t>
             </a:r>
             <a:r>
-              <a:rPr sz="1300">
-                <a:solidFill>
-                  <a:srgbClr val="78716C"/>
-                </a:solidFill>
-              </a:rPr>
-              <a:t>  — TF-IDF word 0.20 · TF-IDF char 0.45 · BM25 0.25 · LSA 0.05 · PPMI 0.05.</a:t>
+              <a:rPr sz="2000" dirty="0">
+                <a:solidFill>
+                  <a:srgbClr val="78716C"/>
+                </a:solidFill>
+              </a:rPr>
+              <a:t>  TF-IDF word 0.20 · TF-IDF char 0.45 · BM25 0.25 · LSA 0.05 · PPMI 0.05.</a:t>
             </a:r>
           </a:p>
           <a:p>
             <a:pPr algn="l"/>
             <a:r>
-              <a:rPr sz="1400" b="1">
+              <a:rPr sz="2000" b="1" dirty="0">
                 <a:solidFill>
                   <a:srgbClr val="1C1717"/>
                 </a:solidFill>
               </a:rPr>
-              <a:t>•  Rerank</a:t>
-            </a:r>
-            <a:r>
-              <a:rPr sz="1300">
-                <a:solidFill>
-                  <a:srgbClr val="78716C"/>
-                </a:solidFill>
-              </a:rPr>
-              <a:t>  — PRF (Rocchio) → LTR (LogReg, 14 features) → MMR diversify.</a:t>
+              <a:t>•  </a:t>
+            </a:r>
+            <a:r>
+              <a:rPr sz="2000" b="1" dirty="0" err="1">
+                <a:solidFill>
+                  <a:srgbClr val="1C1717"/>
+                </a:solidFill>
+              </a:rPr>
+              <a:t>Rerank</a:t>
+            </a:r>
+            <a:r>
+              <a:rPr sz="2000" dirty="0">
+                <a:solidFill>
+                  <a:srgbClr val="78716C"/>
+                </a:solidFill>
+              </a:rPr>
+              <a:t> PRF (Rocchio) → LTR (</a:t>
+            </a:r>
+            <a:r>
+              <a:rPr sz="2000" dirty="0" err="1">
+                <a:solidFill>
+                  <a:srgbClr val="78716C"/>
+                </a:solidFill>
+              </a:rPr>
+              <a:t>LogReg</a:t>
+            </a:r>
+            <a:r>
+              <a:rPr sz="2000" dirty="0">
+                <a:solidFill>
+                  <a:srgbClr val="78716C"/>
+                </a:solidFill>
+              </a:rPr>
+              <a:t>, 14 features) → MMR diversify.</a:t>
             </a:r>
           </a:p>
           <a:p>
             <a:pPr algn="l"/>
             <a:r>
-              <a:rPr sz="1400" b="1">
+              <a:rPr sz="2000" b="1" dirty="0">
                 <a:solidFill>
                   <a:srgbClr val="1C1717"/>
                 </a:solidFill>
@@ -4457,18 +4628,18 @@
               <a:t>•  Dialog</a:t>
             </a:r>
             <a:r>
-              <a:rPr sz="1300">
-                <a:solidFill>
-                  <a:srgbClr val="78716C"/>
-                </a:solidFill>
-              </a:rPr>
-              <a:t>  — Empathic opener · triage banner · clarification · disambiguation card · stem-overlap highlight.</a:t>
+              <a:rPr sz="2000" dirty="0">
+                <a:solidFill>
+                  <a:srgbClr val="78716C"/>
+                </a:solidFill>
+              </a:rPr>
+              <a:t>  Empathic opener · triage banner · clarification · disambiguation card · stem-overlap highlight.</a:t>
             </a:r>
           </a:p>
           <a:p>
             <a:pPr algn="l"/>
             <a:r>
-              <a:rPr sz="1400" b="1">
+              <a:rPr sz="2000" b="1" dirty="0">
                 <a:solidFill>
                   <a:srgbClr val="1C1717"/>
                 </a:solidFill>
@@ -4476,32 +4647,18 @@
               <a:t>•  Reply</a:t>
             </a:r>
             <a:r>
-              <a:rPr sz="1300">
-                <a:solidFill>
-                  <a:srgbClr val="78716C"/>
-                </a:solidFill>
-              </a:rPr>
-              <a:t>  — answer + matched FAQ + score breakdown + NLP analysis + dialog meta.</a:t>
-            </a:r>
-          </a:p>
-          <a:p>
-            <a:pPr algn="l"/>
-            <a:r>
-              <a:rPr sz="1400" b="1">
-                <a:solidFill>
-                  <a:srgbClr val="1C1717"/>
-                </a:solidFill>
-              </a:rPr>
-              <a:t>•  Offline pipeline</a:t>
-            </a:r>
-            <a:r>
-              <a:rPr sz="1300">
-                <a:solidFill>
-                  <a:srgbClr val="78716C"/>
-                </a:solidFill>
-              </a:rPr>
-              <a:t>  — Chat-log → segment → normalise → embed (TF-IDF) → cluster (K-Means) → select → polish → publish.</a:t>
-            </a:r>
+              <a:rPr sz="2000" dirty="0">
+                <a:solidFill>
+                  <a:srgbClr val="78716C"/>
+                </a:solidFill>
+              </a:rPr>
+              <a:t> answer + score breakdown </a:t>
+            </a:r>
+            <a:endParaRPr lang="en-US" sz="2000" dirty="0">
+              <a:solidFill>
+                <a:srgbClr val="78716C"/>
+              </a:solidFill>
+            </a:endParaRPr>
           </a:p>
         </p:txBody>
       </p:sp>
@@ -4648,7 +4805,13 @@
           <p:cNvGraphicFramePr>
             <a:graphicFrameLocks noGrp="1"/>
           </p:cNvGraphicFramePr>
-          <p:nvPr/>
+          <p:nvPr>
+            <p:extLst>
+              <p:ext uri="{D42A27DB-BD31-4B8C-83A1-F6EECF244321}">
+                <p14:modId xmlns:p14="http://schemas.microsoft.com/office/powerpoint/2010/main" val="4142279299"/>
+              </p:ext>
+            </p:extLst>
+          </p:nvPr>
         </p:nvGraphicFramePr>
         <p:xfrm>
           <a:off x="457200" y="1691640"/>
@@ -4690,7 +4853,7 @@
                     <a:lstStyle/>
                     <a:p>
                       <a:r>
-                        <a:rPr sz="1200" b="1">
+                        <a:rPr sz="1400" b="1">
                           <a:solidFill>
                             <a:srgbClr val="1C1717"/>
                           </a:solidFill>
@@ -4707,7 +4870,7 @@
                     <a:lstStyle/>
                     <a:p>
                       <a:r>
-                        <a:rPr sz="1200" b="1">
+                        <a:rPr sz="1400" b="1">
                           <a:solidFill>
                             <a:srgbClr val="1C1717"/>
                           </a:solidFill>
@@ -4724,7 +4887,7 @@
                     <a:lstStyle/>
                     <a:p>
                       <a:r>
-                        <a:rPr sz="1200" b="1">
+                        <a:rPr sz="1400" b="1">
                           <a:solidFill>
                             <a:srgbClr val="1C1717"/>
                           </a:solidFill>
@@ -4748,7 +4911,7 @@
                     <a:lstStyle/>
                     <a:p>
                       <a:r>
-                        <a:rPr sz="1200">
+                        <a:rPr sz="1400">
                           <a:solidFill>
                             <a:srgbClr val="1C1717"/>
                           </a:solidFill>
@@ -4765,7 +4928,7 @@
                     <a:lstStyle/>
                     <a:p>
                       <a:r>
-                        <a:rPr sz="1200">
+                        <a:rPr sz="1400">
                           <a:solidFill>
                             <a:srgbClr val="1C1717"/>
                           </a:solidFill>
@@ -4782,7 +4945,7 @@
                     <a:lstStyle/>
                     <a:p>
                       <a:r>
-                        <a:rPr sz="1200">
+                        <a:rPr sz="1400">
                           <a:solidFill>
                             <a:srgbClr val="1C1717"/>
                           </a:solidFill>
@@ -4806,7 +4969,7 @@
                     <a:lstStyle/>
                     <a:p>
                       <a:r>
-                        <a:rPr sz="1200">
+                        <a:rPr sz="1400">
                           <a:solidFill>
                             <a:srgbClr val="1C1717"/>
                           </a:solidFill>
@@ -4823,7 +4986,7 @@
                     <a:lstStyle/>
                     <a:p>
                       <a:r>
-                        <a:rPr sz="1200">
+                        <a:rPr sz="1400">
                           <a:solidFill>
                             <a:srgbClr val="1C1717"/>
                           </a:solidFill>
@@ -4840,7 +5003,7 @@
                     <a:lstStyle/>
                     <a:p>
                       <a:r>
-                        <a:rPr sz="1200">
+                        <a:rPr sz="1400" dirty="0">
                           <a:solidFill>
                             <a:srgbClr val="1C1717"/>
                           </a:solidFill>
@@ -4864,7 +5027,7 @@
                     <a:lstStyle/>
                     <a:p>
                       <a:r>
-                        <a:rPr sz="1200">
+                        <a:rPr sz="1400">
                           <a:solidFill>
                             <a:srgbClr val="1C1717"/>
                           </a:solidFill>
@@ -4881,7 +5044,7 @@
                     <a:lstStyle/>
                     <a:p>
                       <a:r>
-                        <a:rPr sz="1200">
+                        <a:rPr sz="1400">
                           <a:solidFill>
                             <a:srgbClr val="1C1717"/>
                           </a:solidFill>
@@ -4898,7 +5061,7 @@
                     <a:lstStyle/>
                     <a:p>
                       <a:r>
-                        <a:rPr sz="1200">
+                        <a:rPr sz="1400" dirty="0">
                           <a:solidFill>
                             <a:srgbClr val="1C1717"/>
                           </a:solidFill>
@@ -4922,7 +5085,7 @@
                     <a:lstStyle/>
                     <a:p>
                       <a:r>
-                        <a:rPr sz="1200">
+                        <a:rPr sz="1400">
                           <a:solidFill>
                             <a:srgbClr val="1C1717"/>
                           </a:solidFill>
@@ -4939,7 +5102,7 @@
                     <a:lstStyle/>
                     <a:p>
                       <a:r>
-                        <a:rPr sz="1200">
+                        <a:rPr sz="1400">
                           <a:solidFill>
                             <a:srgbClr val="1C1717"/>
                           </a:solidFill>
@@ -4956,7 +5119,7 @@
                     <a:lstStyle/>
                     <a:p>
                       <a:r>
-                        <a:rPr sz="1200">
+                        <a:rPr sz="1400" dirty="0">
                           <a:solidFill>
                             <a:srgbClr val="1C1717"/>
                           </a:solidFill>
@@ -4980,7 +5143,7 @@
                     <a:lstStyle/>
                     <a:p>
                       <a:r>
-                        <a:rPr sz="1200">
+                        <a:rPr sz="1400">
                           <a:solidFill>
                             <a:srgbClr val="1C1717"/>
                           </a:solidFill>
@@ -4997,7 +5160,7 @@
                     <a:lstStyle/>
                     <a:p>
                       <a:r>
-                        <a:rPr sz="1200">
+                        <a:rPr sz="1400">
                           <a:solidFill>
                             <a:srgbClr val="1C1717"/>
                           </a:solidFill>
@@ -5014,7 +5177,7 @@
                     <a:lstStyle/>
                     <a:p>
                       <a:r>
-                        <a:rPr sz="1200">
+                        <a:rPr sz="1400" dirty="0">
                           <a:solidFill>
                             <a:srgbClr val="1C1717"/>
                           </a:solidFill>
@@ -5038,7 +5201,7 @@
                     <a:lstStyle/>
                     <a:p>
                       <a:r>
-                        <a:rPr sz="1200">
+                        <a:rPr sz="1400">
                           <a:solidFill>
                             <a:srgbClr val="1C1717"/>
                           </a:solidFill>
@@ -5055,7 +5218,7 @@
                     <a:lstStyle/>
                     <a:p>
                       <a:r>
-                        <a:rPr sz="1200">
+                        <a:rPr sz="1400">
                           <a:solidFill>
                             <a:srgbClr val="1C1717"/>
                           </a:solidFill>
@@ -5072,7 +5235,7 @@
                     <a:lstStyle/>
                     <a:p>
                       <a:r>
-                        <a:rPr sz="1200">
+                        <a:rPr sz="1400" dirty="0">
                           <a:solidFill>
                             <a:srgbClr val="1C1717"/>
                           </a:solidFill>
@@ -5096,7 +5259,7 @@
                     <a:lstStyle/>
                     <a:p>
                       <a:r>
-                        <a:rPr sz="1200">
+                        <a:rPr sz="1400">
                           <a:solidFill>
                             <a:srgbClr val="1C1717"/>
                           </a:solidFill>
@@ -5113,7 +5276,7 @@
                     <a:lstStyle/>
                     <a:p>
                       <a:r>
-                        <a:rPr sz="1200">
+                        <a:rPr sz="1400">
                           <a:solidFill>
                             <a:srgbClr val="1C1717"/>
                           </a:solidFill>
@@ -5130,7 +5293,7 @@
                     <a:lstStyle/>
                     <a:p>
                       <a:r>
-                        <a:rPr sz="1200">
+                        <a:rPr sz="1400" dirty="0">
                           <a:solidFill>
                             <a:srgbClr val="1C1717"/>
                           </a:solidFill>
@@ -5154,7 +5317,7 @@
                     <a:lstStyle/>
                     <a:p>
                       <a:r>
-                        <a:rPr sz="1200">
+                        <a:rPr sz="1400">
                           <a:solidFill>
                             <a:srgbClr val="1C1717"/>
                           </a:solidFill>
@@ -5171,7 +5334,7 @@
                     <a:lstStyle/>
                     <a:p>
                       <a:r>
-                        <a:rPr sz="1200">
+                        <a:rPr sz="1400">
                           <a:solidFill>
                             <a:srgbClr val="1C1717"/>
                           </a:solidFill>
@@ -5188,7 +5351,7 @@
                     <a:lstStyle/>
                     <a:p>
                       <a:r>
-                        <a:rPr sz="1200">
+                        <a:rPr sz="1400" dirty="0">
                           <a:solidFill>
                             <a:srgbClr val="1C1717"/>
                           </a:solidFill>
@@ -5218,7 +5381,7 @@
         <p:spPr>
           <a:xfrm>
             <a:off x="457200" y="6309360"/>
-            <a:ext cx="10972800" cy="365760"/>
+            <a:ext cx="10972800" cy="184666"/>
           </a:xfrm>
           <a:prstGeom prst="rect">
             <a:avLst/>
@@ -5233,12 +5396,28 @@
           <a:p>
             <a:pPr algn="l"/>
             <a:r>
-              <a:rPr sz="1200" b="0">
-                <a:solidFill>
-                  <a:srgbClr val="78716C"/>
-                </a:solidFill>
-              </a:rPr>
-              <a:t>Counts persist live in MongoDB on every chat match → popular FAQs surface to the top.</a:t>
+              <a:rPr sz="1200" b="0" dirty="0">
+                <a:solidFill>
+                  <a:srgbClr val="78716C"/>
+                </a:solidFill>
+              </a:rPr>
+              <a:t>Counts persist live in MongoDB on every chat match </a:t>
+            </a:r>
+            <a:r>
+              <a:rPr lang="en-US" sz="1200" b="0" dirty="0">
+                <a:solidFill>
+                  <a:srgbClr val="78716C"/>
+                </a:solidFill>
+              </a:rPr>
+              <a:t>-&gt;</a:t>
+            </a:r>
+            <a:r>
+              <a:rPr sz="1200" b="0" dirty="0">
+                <a:solidFill>
+                  <a:srgbClr val="78716C"/>
+                </a:solidFill>
+              </a:rPr>
+              <a:t> popular FAQs surface to the top.</a:t>
             </a:r>
           </a:p>
         </p:txBody>
@@ -5321,7 +5500,7 @@
         <p:spPr>
           <a:xfrm>
             <a:off x="457200" y="365760"/>
-            <a:ext cx="10972800" cy="640080"/>
+            <a:ext cx="10972800" cy="461665"/>
           </a:xfrm>
           <a:prstGeom prst="rect">
             <a:avLst/>
@@ -5336,13 +5515,26 @@
           <a:p>
             <a:pPr algn="l"/>
             <a:r>
-              <a:rPr sz="3000" b="1">
+              <a:rPr sz="3000" b="1" dirty="0">
                 <a:solidFill>
                   <a:srgbClr val="1C1717"/>
                 </a:solidFill>
               </a:rPr>
-              <a:t>Models — every one trained from scratch</a:t>
-            </a:r>
+              <a:t>Model</a:t>
+            </a:r>
+            <a:r>
+              <a:rPr lang="en-US" sz="3000" b="1" dirty="0">
+                <a:solidFill>
+                  <a:srgbClr val="1C1717"/>
+                </a:solidFill>
+              </a:rPr>
+              <a:t>s</a:t>
+            </a:r>
+            <a:endParaRPr sz="3000" b="1" dirty="0">
+              <a:solidFill>
+                <a:srgbClr val="1C1717"/>
+              </a:solidFill>
+            </a:endParaRPr>
           </a:p>
         </p:txBody>
       </p:sp>
@@ -5355,7 +5547,7 @@
         <p:spPr>
           <a:xfrm>
             <a:off x="457200" y="1097280"/>
-            <a:ext cx="5394960" cy="365760"/>
+            <a:ext cx="5394960" cy="230832"/>
           </a:xfrm>
           <a:prstGeom prst="rect">
             <a:avLst/>
@@ -5370,12 +5562,44 @@
           <a:p>
             <a:pPr algn="l"/>
             <a:r>
-              <a:rPr sz="1500" b="1">
+              <a:rPr lang="en-US" sz="1500" b="1" dirty="0" err="1">
                 <a:solidFill>
                   <a:srgbClr val="1C1717"/>
                 </a:solidFill>
               </a:rPr>
-              <a:t>Classical numpy (myml/)</a:t>
+              <a:t>Numpy</a:t>
+            </a:r>
+            <a:r>
+              <a:rPr lang="en-US" sz="1500" b="1" dirty="0">
+                <a:solidFill>
+                  <a:srgbClr val="1C1717"/>
+                </a:solidFill>
+              </a:rPr>
+              <a:t> </a:t>
+            </a:r>
+            <a:r>
+              <a:rPr sz="1500" b="1" dirty="0">
+                <a:solidFill>
+                  <a:srgbClr val="1C1717"/>
+                </a:solidFill>
+              </a:rPr>
+              <a:t>(</a:t>
+            </a:r>
+            <a:r>
+              <a:rPr sz="1500" b="1" dirty="0" err="1">
+                <a:solidFill>
+                  <a:srgbClr val="1C1717"/>
+                </a:solidFill>
+              </a:rPr>
+              <a:t>myml</a:t>
+            </a:r>
+            <a:r>
+              <a:rPr sz="1500" b="1" dirty="0">
+                <a:solidFill>
+                  <a:srgbClr val="1C1717"/>
+                </a:solidFill>
+              </a:rPr>
+              <a:t>/)</a:t>
             </a:r>
           </a:p>
         </p:txBody>
@@ -5389,7 +5613,7 @@
         <p:spPr>
           <a:xfrm>
             <a:off x="502920" y="1463040"/>
-            <a:ext cx="5486400" cy="4572000"/>
+            <a:ext cx="5486400" cy="3785652"/>
           </a:xfrm>
           <a:prstGeom prst="rect">
             <a:avLst/>
@@ -5404,7 +5628,7 @@
           <a:p>
             <a:pPr algn="l"/>
             <a:r>
-              <a:rPr sz="1100" b="1">
+              <a:rPr sz="2000" b="1" dirty="0">
                 <a:solidFill>
                   <a:srgbClr val="1C1717"/>
                 </a:solidFill>
@@ -5412,18 +5636,18 @@
               <a:t>•  TF-IDF</a:t>
             </a:r>
             <a:r>
-              <a:rPr sz="1000">
-                <a:solidFill>
-                  <a:srgbClr val="78716C"/>
-                </a:solidFill>
-              </a:rPr>
-              <a:t>  — word + char n-grams, sublinear TF</a:t>
+              <a:rPr sz="2000" dirty="0">
+                <a:solidFill>
+                  <a:srgbClr val="78716C"/>
+                </a:solidFill>
+              </a:rPr>
+              <a:t>  word + char n-grams, sublinear TF</a:t>
             </a:r>
           </a:p>
           <a:p>
             <a:pPr algn="l"/>
             <a:r>
-              <a:rPr sz="1100" b="1">
+              <a:rPr sz="2000" b="1" dirty="0">
                 <a:solidFill>
                   <a:srgbClr val="1C1717"/>
                 </a:solidFill>
@@ -5431,18 +5655,18 @@
               <a:t>•  BM25 Okapi</a:t>
             </a:r>
             <a:r>
-              <a:rPr sz="1000">
-                <a:solidFill>
-                  <a:srgbClr val="78716C"/>
-                </a:solidFill>
-              </a:rPr>
-              <a:t>  — Lucene-style smoothed IDF</a:t>
+              <a:rPr sz="2000" dirty="0">
+                <a:solidFill>
+                  <a:srgbClr val="78716C"/>
+                </a:solidFill>
+              </a:rPr>
+              <a:t>  Lucene-style smoothed IDF</a:t>
             </a:r>
           </a:p>
           <a:p>
             <a:pPr algn="l"/>
             <a:r>
-              <a:rPr sz="1100" b="1">
+              <a:rPr sz="2000" b="1" dirty="0">
                 <a:solidFill>
                   <a:srgbClr val="1C1717"/>
                 </a:solidFill>
@@ -5450,18 +5674,18 @@
               <a:t>•  Naive Bayes</a:t>
             </a:r>
             <a:r>
-              <a:rPr sz="1000">
-                <a:solidFill>
-                  <a:srgbClr val="78716C"/>
-                </a:solidFill>
-              </a:rPr>
-              <a:t>  — Laplace smoothing</a:t>
+              <a:rPr sz="2000" dirty="0">
+                <a:solidFill>
+                  <a:srgbClr val="78716C"/>
+                </a:solidFill>
+              </a:rPr>
+              <a:t>  Laplace smoothing</a:t>
             </a:r>
           </a:p>
           <a:p>
             <a:pPr algn="l"/>
             <a:r>
-              <a:rPr sz="1100" b="1">
+              <a:rPr sz="2000" b="1" dirty="0">
                 <a:solidFill>
                   <a:srgbClr val="1C1717"/>
                 </a:solidFill>
@@ -5469,37 +5693,53 @@
               <a:t>•  Logistic Reg.</a:t>
             </a:r>
             <a:r>
-              <a:rPr sz="1000">
-                <a:solidFill>
-                  <a:srgbClr val="78716C"/>
-                </a:solidFill>
-              </a:rPr>
-              <a:t>  — batch GD + L2 + class weights</a:t>
+              <a:rPr sz="2000" dirty="0">
+                <a:solidFill>
+                  <a:srgbClr val="78716C"/>
+                </a:solidFill>
+              </a:rPr>
+              <a:t>  batch GD + L2 + class weights</a:t>
             </a:r>
           </a:p>
           <a:p>
             <a:pPr algn="l"/>
             <a:r>
-              <a:rPr sz="1100" b="1">
+              <a:rPr sz="2000" b="1" dirty="0">
                 <a:solidFill>
                   <a:srgbClr val="1C1717"/>
                 </a:solidFill>
               </a:rPr>
-              <a:t>•  Randomised SVD</a:t>
-            </a:r>
-            <a:r>
-              <a:rPr sz="1000">
-                <a:solidFill>
-                  <a:srgbClr val="78716C"/>
-                </a:solidFill>
-              </a:rPr>
-              <a:t>  — Halko-Martinsson-Tropp 2011</a:t>
+              <a:t>•  </a:t>
+            </a:r>
+            <a:r>
+              <a:rPr sz="2000" b="1" dirty="0" err="1">
+                <a:solidFill>
+                  <a:srgbClr val="1C1717"/>
+                </a:solidFill>
+              </a:rPr>
+              <a:t>Randomised</a:t>
+            </a:r>
+            <a:r>
+              <a:rPr sz="2000" b="1" dirty="0">
+                <a:solidFill>
+                  <a:srgbClr val="1C1717"/>
+                </a:solidFill>
+              </a:rPr>
+              <a:t> SVD</a:t>
+            </a:r>
+            <a:r>
+              <a:rPr sz="2000" dirty="0">
+                <a:solidFill>
+                  <a:srgbClr val="78716C"/>
+                </a:solidFill>
+              </a:rPr>
+              <a:t>  Halko-Martinsson-Tropp 2011</a:t>
             </a:r>
           </a:p>
           <a:p>
             <a:pPr algn="l"/>
             <a:r>
-              <a:rPr sz="1100" b="1">
+              <a:rPr sz="2000" b="1" dirty="0">
                 <a:solidFill>
                   <a:srgbClr val="1C1717"/>
                 </a:solidFill>
@@ -5507,18 +5747,31 @@
               <a:t>•  K-Means</a:t>
             </a:r>
             <a:r>
-              <a:rPr sz="1000">
-                <a:solidFill>
-                  <a:srgbClr val="78716C"/>
-                </a:solidFill>
-              </a:rPr>
-              <a:t>  — k-means++ init</a:t>
-            </a:r>
+              <a:rPr sz="2000" dirty="0">
+                <a:solidFill>
+                  <a:srgbClr val="78716C"/>
+                </a:solidFill>
+              </a:rPr>
+              <a:t>  k-means++ </a:t>
+            </a:r>
+            <a:r>
+              <a:rPr sz="2000" dirty="0" err="1">
+                <a:solidFill>
+                  <a:srgbClr val="78716C"/>
+                </a:solidFill>
+              </a:rPr>
+              <a:t>init</a:t>
+            </a:r>
+            <a:endParaRPr sz="2000" dirty="0">
+              <a:solidFill>
+                <a:srgbClr val="78716C"/>
+              </a:solidFill>
+            </a:endParaRPr>
           </a:p>
           <a:p>
             <a:pPr algn="l"/>
             <a:r>
-              <a:rPr sz="1100" b="1">
+              <a:rPr sz="2000" b="1" dirty="0">
                 <a:solidFill>
                   <a:srgbClr val="1C1717"/>
                 </a:solidFill>
@@ -5526,18 +5779,50 @@
               <a:t>•  MLP + backprop</a:t>
             </a:r>
             <a:r>
-              <a:rPr sz="1000">
-                <a:solidFill>
-                  <a:srgbClr val="78716C"/>
-                </a:solidFill>
-              </a:rPr>
-              <a:t>  — ReLU/softmax, momentum SGD</a:t>
+              <a:rPr sz="2000" dirty="0">
+                <a:solidFill>
+                  <a:srgbClr val="78716C"/>
+                </a:solidFill>
+              </a:rPr>
+              <a:t>  </a:t>
+            </a:r>
+            <a:r>
+              <a:rPr sz="2000" dirty="0" err="1">
+                <a:solidFill>
+                  <a:srgbClr val="78716C"/>
+                </a:solidFill>
+              </a:rPr>
+              <a:t>ReLU</a:t>
+            </a:r>
+            <a:r>
+              <a:rPr sz="2000" dirty="0">
+                <a:solidFill>
+                  <a:srgbClr val="78716C"/>
+                </a:solidFill>
+              </a:rPr>
+              <a:t>/</a:t>
+            </a:r>
+            <a:r>
+              <a:rPr sz="2000" dirty="0" err="1">
+                <a:solidFill>
+                  <a:srgbClr val="78716C"/>
+                </a:solidFill>
+              </a:rPr>
+              <a:t>softmax</a:t>
+            </a:r>
+            <a:r>
+              <a:rPr sz="2000" dirty="0">
+                <a:solidFill>
+                  <a:srgbClr val="78716C"/>
+                </a:solidFill>
+              </a:rPr>
+              <a:t>, momentum SGD</a:t>
             </a:r>
           </a:p>
           <a:p>
             <a:pPr algn="l"/>
             <a:r>
-              <a:rPr sz="1100" b="1">
+              <a:rPr sz="2000" b="1" dirty="0">
                 <a:solidFill>
                   <a:srgbClr val="1C1717"/>
                 </a:solidFill>
@@ -5545,18 +5830,18 @@
               <a:t>•  CRF</a:t>
             </a:r>
             <a:r>
-              <a:rPr sz="1000">
-                <a:solidFill>
-                  <a:srgbClr val="78716C"/>
-                </a:solidFill>
-              </a:rPr>
-              <a:t>  — forward-backward + Viterbi</a:t>
+              <a:rPr sz="2000" dirty="0">
+                <a:solidFill>
+                  <a:srgbClr val="78716C"/>
+                </a:solidFill>
+              </a:rPr>
+              <a:t>  forward-backward + Viterbi</a:t>
             </a:r>
           </a:p>
           <a:p>
             <a:pPr algn="l"/>
             <a:r>
-              <a:rPr sz="1100" b="1">
+              <a:rPr sz="2000" b="1" dirty="0">
                 <a:solidFill>
                   <a:srgbClr val="1C1717"/>
                 </a:solidFill>
@@ -5564,18 +5849,18 @@
               <a:t>•  Word2Vec</a:t>
             </a:r>
             <a:r>
-              <a:rPr sz="1000">
-                <a:solidFill>
-                  <a:srgbClr val="78716C"/>
-                </a:solidFill>
-              </a:rPr>
-              <a:t>  — skip-gram + neg sampling</a:t>
+              <a:rPr sz="2000" dirty="0">
+                <a:solidFill>
+                  <a:srgbClr val="78716C"/>
+                </a:solidFill>
+              </a:rPr>
+              <a:t>  skip-gram + neg sampling</a:t>
             </a:r>
           </a:p>
           <a:p>
             <a:pPr algn="l"/>
             <a:r>
-              <a:rPr sz="1100" b="1">
+              <a:rPr sz="2000" b="1" dirty="0">
                 <a:solidFill>
                   <a:srgbClr val="1C1717"/>
                 </a:solidFill>
@@ -5583,18 +5868,34 @@
               <a:t>•  Dual encoder</a:t>
             </a:r>
             <a:r>
-              <a:rPr sz="1000">
-                <a:solidFill>
-                  <a:srgbClr val="78716C"/>
-                </a:solidFill>
-              </a:rPr>
-              <a:t>  — InfoNCE bi-encoder</a:t>
+              <a:rPr sz="2000" dirty="0">
+                <a:solidFill>
+                  <a:srgbClr val="78716C"/>
+                </a:solidFill>
+              </a:rPr>
+              <a:t>  </a:t>
+            </a:r>
+            <a:r>
+              <a:rPr sz="2000" dirty="0" err="1">
+                <a:solidFill>
+                  <a:srgbClr val="78716C"/>
+                </a:solidFill>
+              </a:rPr>
+              <a:t>InfoNCE</a:t>
+            </a:r>
+            <a:r>
+              <a:rPr sz="2000" dirty="0">
+                <a:solidFill>
+                  <a:srgbClr val="78716C"/>
+                </a:solidFill>
+              </a:rPr>
+              <a:t> bi-encoder</a:t>
             </a:r>
           </a:p>
           <a:p>
             <a:pPr algn="l"/>
             <a:r>
-              <a:rPr sz="1100" b="1">
+              <a:rPr sz="2000" b="1" dirty="0">
                 <a:solidFill>
                   <a:srgbClr val="1C1717"/>
                 </a:solidFill>
@@ -5602,278 +5903,12 @@
               <a:t>•  BPE tokenizer</a:t>
             </a:r>
             <a:r>
-              <a:rPr sz="1000">
-                <a:solidFill>
-                  <a:srgbClr val="78716C"/>
-                </a:solidFill>
-              </a:rPr>
-              <a:t>  — Sennrich 2016</a:t>
-            </a:r>
-          </a:p>
-        </p:txBody>
-      </p:sp>
-      <p:sp>
-        <p:nvSpPr>
-          <p:cNvPr id="6" name="TextBox 5"/>
-          <p:cNvSpPr txBox="1"/>
-          <p:nvPr/>
-        </p:nvSpPr>
-        <p:spPr>
-          <a:xfrm>
-            <a:off x="6217920" y="1097280"/>
-            <a:ext cx="5486400" cy="365760"/>
-          </a:xfrm>
-          <a:prstGeom prst="rect">
-            <a:avLst/>
-          </a:prstGeom>
-          <a:noFill/>
-        </p:spPr>
-        <p:txBody>
-          <a:bodyPr wrap="square" lIns="0" tIns="0" rIns="0" bIns="0">
-            <a:spAutoFit/>
-          </a:bodyPr>
-          <a:lstStyle/>
-          <a:p>
-            <a:pPr algn="l"/>
-            <a:r>
-              <a:rPr sz="1500" b="1">
-                <a:solidFill>
-                  <a:srgbClr val="1C1717"/>
-                </a:solidFill>
-              </a:rPr>
-              <a:t>Trainable transformer (PyTorch, GPU)</a:t>
-            </a:r>
-          </a:p>
-        </p:txBody>
-      </p:sp>
-      <p:sp>
-        <p:nvSpPr>
-          <p:cNvPr id="7" name="TextBox 6"/>
-          <p:cNvSpPr txBox="1"/>
-          <p:nvPr/>
-        </p:nvSpPr>
-        <p:spPr>
-          <a:xfrm>
-            <a:off x="6263640" y="1463040"/>
-            <a:ext cx="5486400" cy="4572000"/>
-          </a:xfrm>
-          <a:prstGeom prst="rect">
-            <a:avLst/>
-          </a:prstGeom>
-          <a:noFill/>
-        </p:spPr>
-        <p:txBody>
-          <a:bodyPr wrap="square">
-            <a:spAutoFit/>
-          </a:bodyPr>
-          <a:lstStyle/>
-          <a:p>
-            <a:pPr algn="l"/>
-            <a:r>
-              <a:rPr sz="1100" b="1">
-                <a:solidFill>
-                  <a:srgbClr val="1C1717"/>
-                </a:solidFill>
-              </a:rPr>
-              <a:t>•  Backend</a:t>
-            </a:r>
-            <a:r>
-              <a:rPr sz="1000">
-                <a:solidFill>
-                  <a:srgbClr val="78716C"/>
-                </a:solidFill>
-              </a:rPr>
-              <a:t>  — PyTorch tensors + autograd only</a:t>
-            </a:r>
-          </a:p>
-          <a:p>
-            <a:pPr algn="l"/>
-            <a:r>
-              <a:rPr sz="1100" b="1">
-                <a:solidFill>
-                  <a:srgbClr val="1C1717"/>
-                </a:solidFill>
-              </a:rPr>
-              <a:t>•  No pretrained weights</a:t>
-            </a:r>
-            <a:r>
-              <a:rPr sz="1000">
-                <a:solidFill>
-                  <a:srgbClr val="78716C"/>
-                </a:solidFill>
-              </a:rPr>
-              <a:t>  — every layer written by us</a:t>
-            </a:r>
-          </a:p>
-          <a:p>
-            <a:pPr algn="l"/>
-            <a:r>
-              <a:rPr sz="1100" b="1">
-                <a:solidFill>
-                  <a:srgbClr val="1C1717"/>
-                </a:solidFill>
-              </a:rPr>
-              <a:t>•  Arch.</a:t>
-            </a:r>
-            <a:r>
-              <a:rPr sz="1000">
-                <a:solidFill>
-                  <a:srgbClr val="78716C"/>
-                </a:solidFill>
-              </a:rPr>
-              <a:t>  — 2 encoder blocks · 4 heads · d=64 · d_ff=128</a:t>
-            </a:r>
-          </a:p>
-          <a:p>
-            <a:pPr algn="l"/>
-            <a:r>
-              <a:rPr sz="1100" b="1">
-                <a:solidFill>
-                  <a:srgbClr val="1C1717"/>
-                </a:solidFill>
-              </a:rPr>
-              <a:t>•  Embedding</a:t>
-            </a:r>
-            <a:r>
-              <a:rPr sz="1000">
-                <a:solidFill>
-                  <a:srgbClr val="78716C"/>
-                </a:solidFill>
-              </a:rPr>
-              <a:t>  — vocab-id → 64-d + sinusoidal pos enc</a:t>
-            </a:r>
-          </a:p>
-          <a:p>
-            <a:pPr algn="l"/>
-            <a:r>
-              <a:rPr sz="1100" b="1">
-                <a:solidFill>
-                  <a:srgbClr val="1C1717"/>
-                </a:solidFill>
-              </a:rPr>
-              <a:t>•  Attention</a:t>
-            </a:r>
-            <a:r>
-              <a:rPr sz="1000">
-                <a:solidFill>
-                  <a:srgbClr val="78716C"/>
-                </a:solidFill>
-              </a:rPr>
-              <a:t>  — scaled dot-product · multi-head · pre-LN</a:t>
-            </a:r>
-          </a:p>
-          <a:p>
-            <a:pPr algn="l"/>
-            <a:r>
-              <a:rPr sz="1100" b="1">
-                <a:solidFill>
-                  <a:srgbClr val="1C1717"/>
-                </a:solidFill>
-              </a:rPr>
-              <a:t>•  Pool / head</a:t>
-            </a:r>
-            <a:r>
-              <a:rPr sz="1000">
-                <a:solidFill>
-                  <a:srgbClr val="78716C"/>
-                </a:solidFill>
-              </a:rPr>
-              <a:t>  — masked mean-pool → softmax(13 classes)</a:t>
-            </a:r>
-          </a:p>
-          <a:p>
-            <a:pPr algn="l"/>
-            <a:r>
-              <a:rPr sz="1100" b="1">
-                <a:solidFill>
-                  <a:srgbClr val="1C1717"/>
-                </a:solidFill>
-              </a:rPr>
-              <a:t>•  Training data</a:t>
-            </a:r>
-            <a:r>
-              <a:rPr sz="1000">
-                <a:solidFill>
-                  <a:srgbClr val="78716C"/>
-                </a:solidFill>
-              </a:rPr>
-              <a:t>  — 1206 augmented intent examples</a:t>
-            </a:r>
-          </a:p>
-          <a:p>
-            <a:pPr algn="l"/>
-            <a:r>
-              <a:rPr sz="1100" b="1">
-                <a:solidFill>
-                  <a:srgbClr val="1C1717"/>
-                </a:solidFill>
-              </a:rPr>
-              <a:t>•  Optimiser</a:t>
-            </a:r>
-            <a:r>
-              <a:rPr sz="1000">
-                <a:solidFill>
-                  <a:srgbClr val="78716C"/>
-                </a:solidFill>
-              </a:rPr>
-              <a:t>  — AdamW + cosine LR + grad clip</a:t>
-            </a:r>
-          </a:p>
-          <a:p>
-            <a:pPr algn="l"/>
-            <a:r>
-              <a:rPr sz="1100" b="1">
-                <a:solidFill>
-                  <a:srgbClr val="1C1717"/>
-                </a:solidFill>
-              </a:rPr>
-              <a:t>•  Hardware</a:t>
-            </a:r>
-            <a:r>
-              <a:rPr sz="1000">
-                <a:solidFill>
-                  <a:srgbClr val="78716C"/>
-                </a:solidFill>
-              </a:rPr>
-              <a:t>  — Auto-detects CUDA; CPU fallback</a:t>
-            </a:r>
-          </a:p>
-          <a:p>
-            <a:pPr algn="l"/>
-            <a:r>
-              <a:rPr sz="1100" b="1">
-                <a:solidFill>
-                  <a:srgbClr val="1C1717"/>
-                </a:solidFill>
-              </a:rPr>
-              <a:t>•  Result</a:t>
-            </a:r>
-            <a:r>
-              <a:rPr sz="1000">
-                <a:solidFill>
-                  <a:srgbClr val="78716C"/>
-                </a:solidFill>
-              </a:rPr>
-              <a:t>  — train acc 1.000, loss 0.0003</a:t>
-            </a:r>
-          </a:p>
-          <a:p>
-            <a:pPr algn="l"/>
-            <a:r>
-              <a:rPr sz="1100" b="1">
-                <a:solidFill>
-                  <a:srgbClr val="1C1717"/>
-                </a:solidFill>
-              </a:rPr>
-              <a:t>•  Endpoint</a:t>
-            </a:r>
-            <a:r>
-              <a:rPr sz="1000">
-                <a:solidFill>
-                  <a:srgbClr val="78716C"/>
-                </a:solidFill>
-              </a:rPr>
-              <a:t>  — POST /nlp/torch_intent</a:t>
+              <a:rPr sz="2000" dirty="0">
+                <a:solidFill>
+                  <a:srgbClr val="78716C"/>
+                </a:solidFill>
+              </a:rPr>
+              <a:t>  Sennrich 2016</a:t>
             </a:r>
           </a:p>
         </p:txBody>
@@ -6021,11 +6056,17 @@
           <p:cNvGraphicFramePr>
             <a:graphicFrameLocks noGrp="1"/>
           </p:cNvGraphicFramePr>
-          <p:nvPr/>
+          <p:nvPr>
+            <p:extLst>
+              <p:ext uri="{D42A27DB-BD31-4B8C-83A1-F6EECF244321}">
+                <p14:modId xmlns:p14="http://schemas.microsoft.com/office/powerpoint/2010/main" val="4211574480"/>
+              </p:ext>
+            </p:extLst>
+          </p:nvPr>
         </p:nvGraphicFramePr>
         <p:xfrm>
           <a:off x="457200" y="1783080"/>
-          <a:ext cx="3657600" cy="2103120"/>
+          <a:ext cx="3657600" cy="2377440"/>
         </p:xfrm>
         <a:graphic>
           <a:graphicData uri="http://schemas.openxmlformats.org/drawingml/2006/table">
@@ -6056,7 +6097,7 @@
                     <a:lstStyle/>
                     <a:p>
                       <a:r>
-                        <a:rPr sz="1200" b="1">
+                        <a:rPr sz="2000" b="1">
                           <a:solidFill>
                             <a:srgbClr val="1C1717"/>
                           </a:solidFill>
@@ -6073,7 +6114,7 @@
                     <a:lstStyle/>
                     <a:p>
                       <a:r>
-                        <a:rPr sz="1200" b="1">
+                        <a:rPr sz="2000" b="1">
                           <a:solidFill>
                             <a:srgbClr val="1C1717"/>
                           </a:solidFill>
@@ -6097,7 +6138,7 @@
                     <a:lstStyle/>
                     <a:p>
                       <a:r>
-                        <a:rPr sz="1200">
+                        <a:rPr sz="2000">
                           <a:solidFill>
                             <a:srgbClr val="1C1717"/>
                           </a:solidFill>
@@ -6114,7 +6155,7 @@
                     <a:lstStyle/>
                     <a:p>
                       <a:r>
-                        <a:rPr sz="1200">
+                        <a:rPr sz="2000">
                           <a:solidFill>
                             <a:srgbClr val="1C1717"/>
                           </a:solidFill>
@@ -6138,7 +6179,7 @@
                     <a:lstStyle/>
                     <a:p>
                       <a:r>
-                        <a:rPr sz="1200">
+                        <a:rPr sz="2000" dirty="0">
                           <a:solidFill>
                             <a:srgbClr val="1C1717"/>
                           </a:solidFill>
@@ -6155,7 +6196,7 @@
                     <a:lstStyle/>
                     <a:p>
                       <a:r>
-                        <a:rPr sz="1200">
+                        <a:rPr sz="2000">
                           <a:solidFill>
                             <a:srgbClr val="1C1717"/>
                           </a:solidFill>
@@ -6179,7 +6220,7 @@
                     <a:lstStyle/>
                     <a:p>
                       <a:r>
-                        <a:rPr sz="1200">
+                        <a:rPr sz="2000" dirty="0">
                           <a:solidFill>
                             <a:srgbClr val="1C1717"/>
                           </a:solidFill>
@@ -6196,7 +6237,7 @@
                     <a:lstStyle/>
                     <a:p>
                       <a:r>
-                        <a:rPr sz="1200">
+                        <a:rPr sz="2000">
                           <a:solidFill>
                             <a:srgbClr val="1C1717"/>
                           </a:solidFill>
@@ -6220,7 +6261,7 @@
                     <a:lstStyle/>
                     <a:p>
                       <a:r>
-                        <a:rPr sz="1200">
+                        <a:rPr sz="2000" dirty="0">
                           <a:solidFill>
                             <a:srgbClr val="1C1717"/>
                           </a:solidFill>
@@ -6237,7 +6278,7 @@
                     <a:lstStyle/>
                     <a:p>
                       <a:r>
-                        <a:rPr sz="1200">
+                        <a:rPr sz="2000">
                           <a:solidFill>
                             <a:srgbClr val="1C1717"/>
                           </a:solidFill>
@@ -6261,7 +6302,7 @@
                     <a:lstStyle/>
                     <a:p>
                       <a:r>
-                        <a:rPr sz="1200">
+                        <a:rPr sz="2000" dirty="0">
                           <a:solidFill>
                             <a:srgbClr val="1C1717"/>
                           </a:solidFill>
@@ -6278,13 +6319,26 @@
                     <a:lstStyle/>
                     <a:p>
                       <a:r>
-                        <a:rPr sz="1200">
+                        <a:rPr sz="2000" dirty="0">
                           <a:solidFill>
                             <a:srgbClr val="1C1717"/>
                           </a:solidFill>
                         </a:rPr>
-                        <a:t>47 ms</a:t>
+                        <a:t>47 </a:t>
                       </a:r>
+                      <a:r>
+                        <a:rPr sz="2000" dirty="0" err="1">
+                          <a:solidFill>
+                            <a:srgbClr val="1C1717"/>
+                          </a:solidFill>
+                        </a:rPr>
+                        <a:t>ms</a:t>
+                      </a:r>
+                      <a:endParaRPr sz="2000" dirty="0">
+                        <a:solidFill>
+                          <a:srgbClr val="1C1717"/>
+                        </a:solidFill>
+                      </a:endParaRPr>
                     </a:p>
                   </a:txBody>
                   <a:tcPr/>
@@ -6305,11 +6359,17 @@
           <p:cNvGraphicFramePr>
             <a:graphicFrameLocks noGrp="1"/>
           </p:cNvGraphicFramePr>
-          <p:nvPr/>
+          <p:nvPr>
+            <p:extLst>
+              <p:ext uri="{D42A27DB-BD31-4B8C-83A1-F6EECF244321}">
+                <p14:modId xmlns:p14="http://schemas.microsoft.com/office/powerpoint/2010/main" val="2247486212"/>
+              </p:ext>
+            </p:extLst>
+          </p:nvPr>
         </p:nvGraphicFramePr>
         <p:xfrm>
-          <a:off x="4480560" y="1783080"/>
-          <a:ext cx="7315200" cy="2103120"/>
+          <a:off x="4191000" y="1783080"/>
+          <a:ext cx="7810500" cy="2103120"/>
         </p:xfrm>
         <a:graphic>
           <a:graphicData uri="http://schemas.openxmlformats.org/drawingml/2006/table">
@@ -6318,35 +6378,35 @@
                 <a:tableStyleId>{5C22544A-7EE6-4342-B048-85BDC9FD1C3A}</a:tableStyleId>
               </a:tblPr>
               <a:tblGrid>
-                <a:gridCol w="1463040">
+                <a:gridCol w="1783080">
                   <a:extLst>
                     <a:ext uri="{9D8B030D-6E8A-4147-A177-3AD203B41FA5}">
                       <a16:colId xmlns:a16="http://schemas.microsoft.com/office/drawing/2014/main" val="20000"/>
                     </a:ext>
                   </a:extLst>
                 </a:gridCol>
-                <a:gridCol w="1463040">
+                <a:gridCol w="1341120">
                   <a:extLst>
                     <a:ext uri="{9D8B030D-6E8A-4147-A177-3AD203B41FA5}">
                       <a16:colId xmlns:a16="http://schemas.microsoft.com/office/drawing/2014/main" val="20001"/>
                     </a:ext>
                   </a:extLst>
                 </a:gridCol>
-                <a:gridCol w="1463040">
+                <a:gridCol w="1562100">
                   <a:extLst>
                     <a:ext uri="{9D8B030D-6E8A-4147-A177-3AD203B41FA5}">
                       <a16:colId xmlns:a16="http://schemas.microsoft.com/office/drawing/2014/main" val="20002"/>
                     </a:ext>
                   </a:extLst>
                 </a:gridCol>
-                <a:gridCol w="1463040">
+                <a:gridCol w="1562100">
                   <a:extLst>
                     <a:ext uri="{9D8B030D-6E8A-4147-A177-3AD203B41FA5}">
                       <a16:colId xmlns:a16="http://schemas.microsoft.com/office/drawing/2014/main" val="20003"/>
                     </a:ext>
                   </a:extLst>
                 </a:gridCol>
-                <a:gridCol w="1463040">
+                <a:gridCol w="1562100">
                   <a:extLst>
                     <a:ext uri="{9D8B030D-6E8A-4147-A177-3AD203B41FA5}">
                       <a16:colId xmlns:a16="http://schemas.microsoft.com/office/drawing/2014/main" val="20004"/>
@@ -6361,7 +6421,7 @@
                     <a:lstStyle/>
                     <a:p>
                       <a:r>
-                        <a:rPr sz="1200" b="1">
+                        <a:rPr sz="2000" b="1">
                           <a:solidFill>
                             <a:srgbClr val="1C1717"/>
                           </a:solidFill>
@@ -6378,7 +6438,7 @@
                     <a:lstStyle/>
                     <a:p>
                       <a:r>
-                        <a:rPr sz="1200" b="1">
+                        <a:rPr sz="2000" b="1">
                           <a:solidFill>
                             <a:srgbClr val="1C1717"/>
                           </a:solidFill>
@@ -6395,7 +6455,7 @@
                     <a:lstStyle/>
                     <a:p>
                       <a:r>
-                        <a:rPr sz="1200" b="1">
+                        <a:rPr sz="2000" b="1">
                           <a:solidFill>
                             <a:srgbClr val="1C1717"/>
                           </a:solidFill>
@@ -6412,7 +6472,7 @@
                     <a:lstStyle/>
                     <a:p>
                       <a:r>
-                        <a:rPr sz="1200" b="1">
+                        <a:rPr sz="2000" b="1">
                           <a:solidFill>
                             <a:srgbClr val="1C1717"/>
                           </a:solidFill>
@@ -6429,7 +6489,7 @@
                     <a:lstStyle/>
                     <a:p>
                       <a:r>
-                        <a:rPr sz="1200" b="1">
+                        <a:rPr sz="2000" b="1">
                           <a:solidFill>
                             <a:srgbClr val="1C1717"/>
                           </a:solidFill>
@@ -6453,7 +6513,7 @@
                     <a:lstStyle/>
                     <a:p>
                       <a:r>
-                        <a:rPr sz="1200">
+                        <a:rPr sz="2000">
                           <a:solidFill>
                             <a:srgbClr val="1C1717"/>
                           </a:solidFill>
@@ -6470,7 +6530,7 @@
                     <a:lstStyle/>
                     <a:p>
                       <a:r>
-                        <a:rPr sz="1200">
+                        <a:rPr sz="2000">
                           <a:solidFill>
                             <a:srgbClr val="1C1717"/>
                           </a:solidFill>
@@ -6487,7 +6547,7 @@
                     <a:lstStyle/>
                     <a:p>
                       <a:r>
-                        <a:rPr sz="1200">
+                        <a:rPr sz="2000">
                           <a:solidFill>
                             <a:srgbClr val="1C1717"/>
                           </a:solidFill>
@@ -6504,7 +6564,7 @@
                     <a:lstStyle/>
                     <a:p>
                       <a:r>
-                        <a:rPr sz="1200">
+                        <a:rPr sz="2000">
                           <a:solidFill>
                             <a:srgbClr val="1C1717"/>
                           </a:solidFill>
@@ -6521,7 +6581,7 @@
                     <a:lstStyle/>
                     <a:p>
                       <a:r>
-                        <a:rPr sz="1200">
+                        <a:rPr sz="2000">
                           <a:solidFill>
                             <a:srgbClr val="1C1717"/>
                           </a:solidFill>
@@ -6545,7 +6605,7 @@
                     <a:lstStyle/>
                     <a:p>
                       <a:r>
-                        <a:rPr sz="1200">
+                        <a:rPr sz="2000">
                           <a:solidFill>
                             <a:srgbClr val="1C1717"/>
                           </a:solidFill>
@@ -6562,7 +6622,7 @@
                     <a:lstStyle/>
                     <a:p>
                       <a:r>
-                        <a:rPr sz="1200">
+                        <a:rPr sz="2000">
                           <a:solidFill>
                             <a:srgbClr val="1C1717"/>
                           </a:solidFill>
@@ -6579,7 +6639,7 @@
                     <a:lstStyle/>
                     <a:p>
                       <a:r>
-                        <a:rPr sz="1200">
+                        <a:rPr sz="2000">
                           <a:solidFill>
                             <a:srgbClr val="1C1717"/>
                           </a:solidFill>
@@ -6596,7 +6656,7 @@
                     <a:lstStyle/>
                     <a:p>
                       <a:r>
-                        <a:rPr sz="1200">
+                        <a:rPr sz="2000">
                           <a:solidFill>
                             <a:srgbClr val="1C1717"/>
                           </a:solidFill>
@@ -6613,7 +6673,7 @@
                     <a:lstStyle/>
                     <a:p>
                       <a:r>
-                        <a:rPr sz="1200">
+                        <a:rPr sz="2000">
                           <a:solidFill>
                             <a:srgbClr val="1C1717"/>
                           </a:solidFill>
@@ -6637,7 +6697,7 @@
                     <a:lstStyle/>
                     <a:p>
                       <a:r>
-                        <a:rPr sz="1200">
+                        <a:rPr sz="2000">
                           <a:solidFill>
                             <a:srgbClr val="1C1717"/>
                           </a:solidFill>
@@ -6654,7 +6714,7 @@
                     <a:lstStyle/>
                     <a:p>
                       <a:r>
-                        <a:rPr sz="1200">
+                        <a:rPr sz="2000">
                           <a:solidFill>
                             <a:srgbClr val="1C1717"/>
                           </a:solidFill>
@@ -6671,7 +6731,7 @@
                     <a:lstStyle/>
                     <a:p>
                       <a:r>
-                        <a:rPr sz="1200">
+                        <a:rPr sz="2000">
                           <a:solidFill>
                             <a:srgbClr val="1C1717"/>
                           </a:solidFill>
@@ -6688,7 +6748,7 @@
                     <a:lstStyle/>
                     <a:p>
                       <a:r>
-                        <a:rPr sz="1200">
+                        <a:rPr sz="2000">
                           <a:solidFill>
                             <a:srgbClr val="1C1717"/>
                           </a:solidFill>
@@ -6705,7 +6765,7 @@
                     <a:lstStyle/>
                     <a:p>
                       <a:r>
-                        <a:rPr sz="1200">
+                        <a:rPr sz="2000" dirty="0">
                           <a:solidFill>
                             <a:srgbClr val="1C1717"/>
                           </a:solidFill>
@@ -6728,14 +6788,20 @@
       </p:graphicFrame>
       <p:sp>
         <p:nvSpPr>
-          <p:cNvPr id="7" name="TextBox 6"/>
+          <p:cNvPr id="7" name="TextBox 6">
+            <a:extLst>
+              <a:ext uri="{FF2B5EF4-FFF2-40B4-BE49-F238E27FC236}">
+                <a16:creationId xmlns:a16="http://schemas.microsoft.com/office/drawing/2014/main" id="{80116DF1-C31E-07FA-1366-4A0A7BE5A14F}"/>
+              </a:ext>
+            </a:extLst>
+          </p:cNvPr>
           <p:cNvSpPr txBox="1"/>
           <p:nvPr/>
         </p:nvSpPr>
         <p:spPr>
           <a:xfrm>
-            <a:off x="457200" y="4206240"/>
-            <a:ext cx="10972800" cy="457200"/>
+            <a:off x="8951976" y="4370832"/>
+            <a:ext cx="2263697" cy="369332"/>
           </a:xfrm>
           <a:prstGeom prst="rect">
             <a:avLst/>
@@ -6743,87 +6809,14 @@
           <a:noFill/>
         </p:spPr>
         <p:txBody>
-          <a:bodyPr wrap="square" lIns="0" tIns="0" rIns="0" bIns="0">
+          <a:bodyPr wrap="none" rtlCol="0">
             <a:spAutoFit/>
           </a:bodyPr>
           <a:lstStyle/>
           <a:p>
-            <a:pPr algn="l"/>
-            <a:r>
-              <a:rPr sz="1400" b="0">
-                <a:solidFill>
-                  <a:srgbClr val="1C1717"/>
-                </a:solidFill>
-              </a:rPr>
-              <a:t>Transformer intent classifier:  train accuracy 1.000 · final CE loss 0.0003 over 40 epochs</a:t>
-            </a:r>
-          </a:p>
-        </p:txBody>
-      </p:sp>
-      <p:sp>
-        <p:nvSpPr>
-          <p:cNvPr id="8" name="TextBox 7"/>
-          <p:cNvSpPr txBox="1"/>
-          <p:nvPr/>
-        </p:nvSpPr>
-        <p:spPr>
-          <a:xfrm>
-            <a:off x="457200" y="4709160"/>
-            <a:ext cx="10972800" cy="457200"/>
-          </a:xfrm>
-          <a:prstGeom prst="rect">
-            <a:avLst/>
-          </a:prstGeom>
-          <a:noFill/>
-        </p:spPr>
-        <p:txBody>
-          <a:bodyPr wrap="square" lIns="0" tIns="0" rIns="0" bIns="0">
-            <a:spAutoFit/>
-          </a:bodyPr>
-          <a:lstStyle/>
-          <a:p>
-            <a:pPr algn="l"/>
-            <a:r>
-              <a:rPr sz="1400" b="0">
-                <a:solidFill>
-                  <a:srgbClr val="1C1717"/>
-                </a:solidFill>
-              </a:rPr>
-              <a:t>Integration suite (api/final_test.py):  62 / 62 PASS  — covers chat, faq, admin, stats, nlp, frontend routes.</a:t>
-            </a:r>
-          </a:p>
-        </p:txBody>
-      </p:sp>
-      <p:sp>
-        <p:nvSpPr>
-          <p:cNvPr id="9" name="TextBox 8"/>
-          <p:cNvSpPr txBox="1"/>
-          <p:nvPr/>
-        </p:nvSpPr>
-        <p:spPr>
-          <a:xfrm>
-            <a:off x="457200" y="5349240"/>
-            <a:ext cx="10972800" cy="457200"/>
-          </a:xfrm>
-          <a:prstGeom prst="rect">
-            <a:avLst/>
-          </a:prstGeom>
-          <a:noFill/>
-        </p:spPr>
-        <p:txBody>
-          <a:bodyPr wrap="square" lIns="0" tIns="0" rIns="0" bIns="0">
-            <a:spAutoFit/>
-          </a:bodyPr>
-          <a:lstStyle/>
-          <a:p>
-            <a:pPr algn="l"/>
-            <a:r>
-              <a:rPr sz="1400" b="0">
-                <a:solidFill>
-                  <a:srgbClr val="1C1717"/>
-                </a:solidFill>
-              </a:rPr>
-              <a:t>Live FAQ counters verified end-to-end:  counts start at 0, increment per match, persist in Mongo.</a:t>
+            <a:r>
+              <a:rPr lang="en-US" dirty="0"/>
+              <a:t>Mean Reciprocal Rank</a:t>
             </a:r>
           </a:p>
         </p:txBody>
@@ -6940,7 +6933,7 @@
         <p:spPr>
           <a:xfrm>
             <a:off x="548640" y="1280160"/>
-            <a:ext cx="11338560" cy="5212080"/>
+            <a:ext cx="11338560" cy="1631216"/>
           </a:xfrm>
           <a:prstGeom prst="rect">
             <a:avLst/>
@@ -6955,153 +6948,109 @@
           <a:p>
             <a:pPr algn="l"/>
             <a:r>
-              <a:rPr sz="1500" b="1">
+              <a:rPr sz="2000" b="1" dirty="0">
                 <a:solidFill>
                   <a:srgbClr val="1C1717"/>
                 </a:solidFill>
               </a:rPr>
-              <a:t>•  No LLM dependency</a:t>
-            </a:r>
-            <a:r>
-              <a:rPr sz="1400">
-                <a:solidFill>
-                  <a:srgbClr val="78716C"/>
-                </a:solidFill>
-              </a:rPr>
-              <a:t>  — reproducible, auditable, no API costs, no hallucinations.</a:t>
+              <a:t>•  Hybrid retrieval works</a:t>
+            </a:r>
+            <a:r>
+              <a:rPr sz="2000" dirty="0">
+                <a:solidFill>
+                  <a:srgbClr val="78716C"/>
+                </a:solidFill>
+              </a:rPr>
+              <a:t>  P@1 0.93 across 116 held-out queries at 22 </a:t>
+            </a:r>
+            <a:r>
+              <a:rPr sz="2000" dirty="0" err="1">
+                <a:solidFill>
+                  <a:srgbClr val="78716C"/>
+                </a:solidFill>
+              </a:rPr>
+              <a:t>ms</a:t>
+            </a:r>
+            <a:r>
+              <a:rPr sz="2000" dirty="0">
+                <a:solidFill>
+                  <a:srgbClr val="78716C"/>
+                </a:solidFill>
+              </a:rPr>
+              <a:t> p50.</a:t>
             </a:r>
           </a:p>
           <a:p>
             <a:pPr algn="l"/>
             <a:r>
-              <a:rPr sz="1500" b="1">
+              <a:rPr sz="2000" b="1" dirty="0">
                 <a:solidFill>
                   <a:srgbClr val="1C1717"/>
                 </a:solidFill>
               </a:rPr>
-              <a:t>•  Every algorithm is ours</a:t>
-            </a:r>
-            <a:r>
-              <a:rPr sz="1400">
-                <a:solidFill>
-                  <a:srgbClr val="78716C"/>
-                </a:solidFill>
-              </a:rPr>
-              <a:t>  — drop-in replacements for sklearn, rank_bm25 and sentence-transformers.</a:t>
+              <a:t>•  Multi-turn dialog</a:t>
+            </a:r>
+            <a:r>
+              <a:rPr sz="2000" dirty="0">
+                <a:solidFill>
+                  <a:srgbClr val="78716C"/>
+                </a:solidFill>
+              </a:rPr>
+              <a:t> coreference, slot filling, topic tracking, triage banner, empathic openers, disambiguation.</a:t>
             </a:r>
           </a:p>
           <a:p>
             <a:pPr algn="l"/>
             <a:r>
-              <a:rPr sz="1500" b="1">
+              <a:rPr sz="2000" b="1" dirty="0">
                 <a:solidFill>
                   <a:srgbClr val="1C1717"/>
                 </a:solidFill>
               </a:rPr>
-              <a:t>•  Hybrid retrieval works</a:t>
-            </a:r>
-            <a:r>
-              <a:rPr sz="1400">
-                <a:solidFill>
-                  <a:srgbClr val="78716C"/>
-                </a:solidFill>
-              </a:rPr>
-              <a:t>  — P@1 0.93 across 116 held-out queries at 22 ms p50.</a:t>
+              <a:t>•  Pakistan-friendly</a:t>
+            </a:r>
+            <a:r>
+              <a:rPr sz="2000" dirty="0">
+                <a:solidFill>
+                  <a:srgbClr val="78716C"/>
+                </a:solidFill>
+              </a:rPr>
+              <a:t> Roman-Urdu phonetic mapping, 1122 emergency wording, PHI scrub at ingest.</a:t>
             </a:r>
           </a:p>
           <a:p>
             <a:pPr algn="l"/>
             <a:r>
-              <a:rPr sz="1500" b="1">
+              <a:rPr sz="2000" b="1" dirty="0">
                 <a:solidFill>
                   <a:srgbClr val="1C1717"/>
                 </a:solidFill>
               </a:rPr>
-              <a:t>•  Multi-turn dialog</a:t>
-            </a:r>
-            <a:r>
-              <a:rPr sz="1400">
-                <a:solidFill>
-                  <a:srgbClr val="78716C"/>
-                </a:solidFill>
-              </a:rPr>
-              <a:t>  — coreference, slot filling, topic tracking, triage banner, empathic openers, disambiguation.</a:t>
-            </a:r>
-          </a:p>
-          <a:p>
-            <a:pPr algn="l"/>
-            <a:r>
-              <a:rPr sz="1500" b="1">
-                <a:solidFill>
-                  <a:srgbClr val="1C1717"/>
-                </a:solidFill>
-              </a:rPr>
-              <a:t>•  Pakistan-friendly</a:t>
-            </a:r>
-            <a:r>
-              <a:rPr sz="1400">
-                <a:solidFill>
-                  <a:srgbClr val="78716C"/>
-                </a:solidFill>
-              </a:rPr>
-              <a:t>  — Roman-Urdu phonetic mapping, 1122 emergency wording, PHI scrub at ingest.</a:t>
-            </a:r>
-          </a:p>
-          <a:p>
-            <a:pPr algn="l"/>
-            <a:r>
-              <a:rPr sz="1500" b="1">
-                <a:solidFill>
-                  <a:srgbClr val="1C1717"/>
-                </a:solidFill>
-              </a:rPr>
-              <a:t>•  One-command deploy</a:t>
-            </a:r>
-            <a:r>
-              <a:rPr sz="1400">
-                <a:solidFill>
-                  <a:srgbClr val="78716C"/>
-                </a:solidFill>
-              </a:rPr>
-              <a:t>  — docker compose up auto-seeds Mongo, builds API + Next.js.</a:t>
-            </a:r>
-          </a:p>
-          <a:p>
-            <a:pPr algn="l"/>
-            <a:r>
-              <a:rPr sz="1500" b="1">
-                <a:solidFill>
-                  <a:srgbClr val="1C1717"/>
-                </a:solidFill>
-              </a:rPr>
               <a:t>•  Real-time analytics</a:t>
             </a:r>
             <a:r>
-              <a:rPr sz="1400">
-                <a:solidFill>
-                  <a:srgbClr val="78716C"/>
-                </a:solidFill>
-              </a:rPr>
-              <a:t>  — FAQ count increments live, persisted in Mongo, surfaced in /admin.</a:t>
-            </a:r>
-          </a:p>
-          <a:p>
-            <a:pPr algn="l"/>
-            <a:r>
-              <a:rPr sz="1500" b="1">
-                <a:solidFill>
-                  <a:srgbClr val="1C1717"/>
-                </a:solidFill>
-              </a:rPr>
-              <a:t>•  Trainable transformer</a:t>
-            </a:r>
-            <a:r>
-              <a:rPr sz="1400">
-                <a:solidFill>
-                  <a:srgbClr val="78716C"/>
-                </a:solidFill>
-              </a:rPr>
-              <a:t>  — GPU-ready PyTorch model trained from scratch on our own corpus.</a:t>
+              <a:rPr sz="2000" dirty="0">
+                <a:solidFill>
+                  <a:srgbClr val="78716C"/>
+                </a:solidFill>
+              </a:rPr>
+              <a:t> FAQ count increments live, </a:t>
+            </a:r>
+            <a:r>
+              <a:rPr lang="en-US" sz="2000" dirty="0">
+                <a:solidFill>
+                  <a:srgbClr val="78716C"/>
+                </a:solidFill>
+              </a:rPr>
+              <a:t>stored</a:t>
+            </a:r>
+            <a:r>
+              <a:rPr sz="2000" dirty="0">
+                <a:solidFill>
+                  <a:srgbClr val="78716C"/>
+                </a:solidFill>
+              </a:rPr>
+              <a:t> in Mongo, surfaced in /admin.</a:t>
             </a:r>
           </a:p>
         </p:txBody>
@@ -7218,7 +7167,7 @@
         <p:spPr>
           <a:xfrm>
             <a:off x="548640" y="1280160"/>
-            <a:ext cx="11338560" cy="5212080"/>
+            <a:ext cx="11338560" cy="3785652"/>
           </a:xfrm>
           <a:prstGeom prst="rect">
             <a:avLst/>
@@ -7233,7 +7182,7 @@
           <a:p>
             <a:pPr algn="l"/>
             <a:r>
-              <a:rPr sz="1500" b="1">
+              <a:rPr sz="2000" b="1" dirty="0">
                 <a:solidFill>
                   <a:srgbClr val="1C1717"/>
                 </a:solidFill>
@@ -7241,18 +7190,50 @@
               <a:t>•  Small corpus</a:t>
             </a:r>
             <a:r>
-              <a:rPr sz="1400">
-                <a:solidFill>
-                  <a:srgbClr val="78716C"/>
-                </a:solidFill>
-              </a:rPr>
-              <a:t>  — 169 FAQs cover the most common questions but out-of-distribution queries fall through to best-guess.</a:t>
+              <a:rPr sz="2000" dirty="0">
+                <a:solidFill>
+                  <a:srgbClr val="78716C"/>
+                </a:solidFill>
+              </a:rPr>
+              <a:t>  </a:t>
+            </a:r>
+            <a:r>
+              <a:rPr lang="en-US" sz="2000" dirty="0">
+                <a:solidFill>
+                  <a:srgbClr val="78716C"/>
+                </a:solidFill>
+              </a:rPr>
+              <a:t>Very less</a:t>
+            </a:r>
+            <a:r>
+              <a:rPr sz="2000" dirty="0">
+                <a:solidFill>
+                  <a:srgbClr val="78716C"/>
+                </a:solidFill>
+              </a:rPr>
+              <a:t> </a:t>
+            </a:r>
+            <a:r>
+              <a:rPr lang="en-US" sz="2000" dirty="0">
+                <a:solidFill>
+                  <a:srgbClr val="78716C"/>
+                </a:solidFill>
+              </a:rPr>
+              <a:t>data </a:t>
+            </a:r>
+            <a:r>
+              <a:rPr sz="2000" dirty="0">
+                <a:solidFill>
+                  <a:srgbClr val="78716C"/>
+                </a:solidFill>
+              </a:rPr>
+              <a:t>cover the most common questions but out-of-distribution queries fall through to best-guess.</a:t>
             </a:r>
           </a:p>
           <a:p>
             <a:pPr algn="l"/>
             <a:r>
-              <a:rPr sz="1500" b="1">
+              <a:rPr sz="2000" b="1" dirty="0">
                 <a:solidFill>
                   <a:srgbClr val="1C1717"/>
                 </a:solidFill>
@@ -7260,18 +7241,18 @@
               <a:t>•  Eval is approximate</a:t>
             </a:r>
             <a:r>
-              <a:rPr sz="1400">
-                <a:solidFill>
-                  <a:srgbClr val="78716C"/>
-                </a:solidFill>
-              </a:rPr>
-              <a:t>  — expected-keyword match in the answer can mark a correct FAQ as wrong when phrasing diverges.</a:t>
+              <a:rPr sz="2000" dirty="0">
+                <a:solidFill>
+                  <a:srgbClr val="78716C"/>
+                </a:solidFill>
+              </a:rPr>
+              <a:t>  expected-keyword match in the answer can mark a correct FAQ as wrong when phrasing diverges.</a:t>
             </a:r>
           </a:p>
           <a:p>
             <a:pPr algn="l"/>
             <a:r>
-              <a:rPr sz="1500" b="1">
+              <a:rPr sz="2000" b="1" dirty="0">
                 <a:solidFill>
                   <a:srgbClr val="1C1717"/>
                 </a:solidFill>
@@ -7279,18 +7260,18 @@
               <a:t>•  Transformer overfits</a:t>
             </a:r>
             <a:r>
-              <a:rPr sz="1400">
-                <a:solidFill>
-                  <a:srgbClr val="78716C"/>
-                </a:solidFill>
-              </a:rPr>
-              <a:t>  — trained on 1206 augmented examples; held-out test of the classifier itself is still small.</a:t>
+              <a:rPr sz="2000" dirty="0">
+                <a:solidFill>
+                  <a:srgbClr val="78716C"/>
+                </a:solidFill>
+              </a:rPr>
+              <a:t>  trained on 1206 augmented examples; held-out test of the classifier itself is still small.</a:t>
             </a:r>
           </a:p>
           <a:p>
             <a:pPr algn="l"/>
             <a:r>
-              <a:rPr sz="1500" b="1">
+              <a:rPr sz="2000" b="1" dirty="0">
                 <a:solidFill>
                   <a:srgbClr val="1C1717"/>
                 </a:solidFill>
@@ -7298,18 +7279,18 @@
               <a:t>•  NER is dictionary-first</a:t>
             </a:r>
             <a:r>
-              <a:rPr sz="1400">
-                <a:solidFill>
-                  <a:srgbClr val="78716C"/>
-                </a:solidFill>
-              </a:rPr>
-              <a:t>  — the CRF + structured perceptron variants improve coverage but training data is only 32 hand-annotated sentences.</a:t>
+              <a:rPr sz="2000" dirty="0">
+                <a:solidFill>
+                  <a:srgbClr val="78716C"/>
+                </a:solidFill>
+              </a:rPr>
+              <a:t>  the CRF + structured perceptron variants improve coverage but training data is only 32 hand-annotated sentences.</a:t>
             </a:r>
           </a:p>
           <a:p>
             <a:pPr algn="l"/>
             <a:r>
-              <a:rPr sz="1500" b="1">
+              <a:rPr sz="2000" b="1" dirty="0">
                 <a:solidFill>
                   <a:srgbClr val="1C1717"/>
                 </a:solidFill>
@@ -7317,18 +7298,18 @@
               <a:t>•  Roman-Urdu is heuristic</a:t>
             </a:r>
             <a:r>
-              <a:rPr sz="1400">
-                <a:solidFill>
-                  <a:srgbClr val="78716C"/>
-                </a:solidFill>
-              </a:rPr>
-              <a:t>  — ~80-word dictionary catches common cases; full transliteration would need a real parallel corpus.</a:t>
+              <a:rPr sz="2000" dirty="0">
+                <a:solidFill>
+                  <a:srgbClr val="78716C"/>
+                </a:solidFill>
+              </a:rPr>
+              <a:t>  ~80-word dictionary catches common cases; full transliteration would need a real parallel corpus.</a:t>
             </a:r>
           </a:p>
           <a:p>
             <a:pPr algn="l"/>
             <a:r>
-              <a:rPr sz="1500" b="1">
+              <a:rPr sz="2000" b="1" dirty="0">
                 <a:solidFill>
                   <a:srgbClr val="1C1717"/>
                 </a:solidFill>
@@ -7336,18 +7317,18 @@
               <a:t>•  Voice input is browser-native</a:t>
             </a:r>
             <a:r>
-              <a:rPr sz="1400">
-                <a:solidFill>
-                  <a:srgbClr val="78716C"/>
-                </a:solidFill>
-              </a:rPr>
-              <a:t>  — Web Speech API works in Chrome / Edge only.</a:t>
+              <a:rPr sz="2000" dirty="0">
+                <a:solidFill>
+                  <a:srgbClr val="78716C"/>
+                </a:solidFill>
+              </a:rPr>
+              <a:t>  Web Speech API works in Chrome / Edge only.</a:t>
             </a:r>
           </a:p>
           <a:p>
             <a:pPr algn="l"/>
             <a:r>
-              <a:rPr sz="1500" b="1">
+              <a:rPr sz="2000" b="1" dirty="0">
                 <a:solidFill>
                   <a:srgbClr val="1C1717"/>
                 </a:solidFill>
@@ -7355,12 +7336,28 @@
               <a:t>•  Counts are at-most-once per turn</a:t>
             </a:r>
             <a:r>
-              <a:rPr sz="1400">
-                <a:solidFill>
-                  <a:srgbClr val="78716C"/>
-                </a:solidFill>
-              </a:rPr>
-              <a:t>  — no fraud / abuse heuristic — every successful match increments.</a:t>
+              <a:rPr sz="2000" dirty="0">
+                <a:solidFill>
+                  <a:srgbClr val="78716C"/>
+                </a:solidFill>
+              </a:rPr>
+              <a:t>  no fraud / abuse heuristic</a:t>
+            </a:r>
+            <a:r>
+              <a:rPr lang="en-US" sz="2000" dirty="0">
+                <a:solidFill>
+                  <a:srgbClr val="78716C"/>
+                </a:solidFill>
+              </a:rPr>
+              <a:t>,</a:t>
+            </a:r>
+            <a:r>
+              <a:rPr sz="2000" dirty="0">
+                <a:solidFill>
+                  <a:srgbClr val="78716C"/>
+                </a:solidFill>
+              </a:rPr>
+              <a:t> every successful match increments.</a:t>
             </a:r>
           </a:p>
         </p:txBody>
@@ -7477,7 +7474,7 @@
         <p:spPr>
           <a:xfrm>
             <a:off x="548640" y="1280160"/>
-            <a:ext cx="11338560" cy="5212080"/>
+            <a:ext cx="11338560" cy="2246769"/>
           </a:xfrm>
           <a:prstGeom prst="rect">
             <a:avLst/>
@@ -7492,7 +7489,7 @@
           <a:p>
             <a:pPr algn="l"/>
             <a:r>
-              <a:rPr sz="1500" b="1">
+              <a:rPr sz="2000" b="1" dirty="0">
                 <a:solidFill>
                   <a:srgbClr val="1C1717"/>
                 </a:solidFill>
@@ -7500,18 +7497,34 @@
               <a:t>•  Grow the corpus</a:t>
             </a:r>
             <a:r>
-              <a:rPr sz="1400">
-                <a:solidFill>
-                  <a:srgbClr val="78716C"/>
-                </a:solidFill>
-              </a:rPr>
-              <a:t>  — 500+ FAQs across more specialties with clinician validation.</a:t>
+              <a:rPr sz="2000" dirty="0">
+                <a:solidFill>
+                  <a:srgbClr val="78716C"/>
+                </a:solidFill>
+              </a:rPr>
+              <a:t>  </a:t>
+            </a:r>
+            <a:r>
+              <a:rPr lang="en-US" sz="2000" dirty="0">
+                <a:solidFill>
+                  <a:srgbClr val="78716C"/>
+                </a:solidFill>
+              </a:rPr>
+              <a:t>More data </a:t>
+            </a:r>
+            <a:r>
+              <a:rPr sz="2000" dirty="0">
+                <a:solidFill>
+                  <a:srgbClr val="78716C"/>
+                </a:solidFill>
+              </a:rPr>
+              <a:t>across more specialties with clinician validation.</a:t>
             </a:r>
           </a:p>
           <a:p>
             <a:pPr algn="l"/>
             <a:r>
-              <a:rPr sz="1500" b="1">
+              <a:rPr sz="2000" b="1" dirty="0">
                 <a:solidFill>
                   <a:srgbClr val="1C1717"/>
                 </a:solidFill>
@@ -7519,18 +7532,18 @@
               <a:t>•  Bi-encoder upgrade</a:t>
             </a:r>
             <a:r>
-              <a:rPr sz="1400">
-                <a:solidFill>
-                  <a:srgbClr val="78716C"/>
-                </a:solidFill>
-              </a:rPr>
-              <a:t>  — train the dual encoder on real clinician-rated query–FAQ pairs, not just keyword-derived positives.</a:t>
+              <a:rPr sz="2000" dirty="0">
+                <a:solidFill>
+                  <a:srgbClr val="78716C"/>
+                </a:solidFill>
+              </a:rPr>
+              <a:t>  train the dual encoder on real clinician-rated query–FAQ pairs, not just keyword-derived positives.</a:t>
             </a:r>
           </a:p>
           <a:p>
             <a:pPr algn="l"/>
             <a:r>
-              <a:rPr sz="1500" b="1">
+              <a:rPr sz="2000" b="1" dirty="0">
                 <a:solidFill>
                   <a:srgbClr val="1C1717"/>
                 </a:solidFill>
@@ -7538,18 +7551,18 @@
               <a:t>•  Active learning loop</a:t>
             </a:r>
             <a:r>
-              <a:rPr sz="1400">
-                <a:solidFill>
-                  <a:srgbClr val="78716C"/>
-                </a:solidFill>
-              </a:rPr>
-              <a:t>  — low-confidence turns get queued for clinician review; approved Q/A pairs feed back into the corpus.</a:t>
+              <a:rPr sz="2000" dirty="0">
+                <a:solidFill>
+                  <a:srgbClr val="78716C"/>
+                </a:solidFill>
+              </a:rPr>
+              <a:t>  low-confidence turns get queued for clinician review; approved Q/A pairs feed back into the corpus.</a:t>
             </a:r>
           </a:p>
           <a:p>
             <a:pPr algn="l"/>
             <a:r>
-              <a:rPr sz="1500" b="1">
+              <a:rPr sz="2000" b="1" dirty="0">
                 <a:solidFill>
                   <a:srgbClr val="1C1717"/>
                 </a:solidFill>
@@ -7557,18 +7570,18 @@
               <a:t>•  Real Urdu</a:t>
             </a:r>
             <a:r>
-              <a:rPr sz="1400">
-                <a:solidFill>
-                  <a:srgbClr val="78716C"/>
-                </a:solidFill>
-              </a:rPr>
-              <a:t>  — deeper transliteration trained on a parallel corpus; voice input in Urdu.</a:t>
+              <a:rPr sz="2000" dirty="0">
+                <a:solidFill>
+                  <a:srgbClr val="78716C"/>
+                </a:solidFill>
+              </a:rPr>
+              <a:t>  deeper transliteration trained on a parallel corpus; voice input in Urdu.</a:t>
             </a:r>
           </a:p>
           <a:p>
             <a:pPr algn="l"/>
             <a:r>
-              <a:rPr sz="1500" b="1">
+              <a:rPr sz="2000" b="1" dirty="0">
                 <a:solidFill>
                   <a:srgbClr val="1C1717"/>
                 </a:solidFill>
@@ -7576,50 +7589,12 @@
               <a:t>•  Clinical eval</a:t>
             </a:r>
             <a:r>
-              <a:rPr sz="1400">
-                <a:solidFill>
-                  <a:srgbClr val="78716C"/>
-                </a:solidFill>
-              </a:rPr>
-              <a:t>  — NDCG with clinician-rated relevance instead of a keyword heuristic.</a:t>
-            </a:r>
-          </a:p>
-          <a:p>
-            <a:pPr algn="l"/>
-            <a:r>
-              <a:rPr sz="1500" b="1">
-                <a:solidFill>
-                  <a:srgbClr val="1C1717"/>
-                </a:solidFill>
-              </a:rPr>
-              <a:t>•  GPU service</a:t>
-            </a:r>
-            <a:r>
-              <a:rPr sz="1400">
-                <a:solidFill>
-                  <a:srgbClr val="78716C"/>
-                </a:solidFill>
-              </a:rPr>
-              <a:t>  — dedicated container with CUDA wheel for heavier neural extensions.</a:t>
-            </a:r>
-          </a:p>
-          <a:p>
-            <a:pPr algn="l"/>
-            <a:r>
-              <a:rPr sz="1500" b="1">
-                <a:solidFill>
-                  <a:srgbClr val="1C1717"/>
-                </a:solidFill>
-              </a:rPr>
-              <a:t>•  Audit + governance</a:t>
-            </a:r>
-            <a:r>
-              <a:rPr sz="1400">
-                <a:solidFill>
-                  <a:srgbClr val="78716C"/>
-                </a:solidFill>
-              </a:rPr>
-              <a:t>  — version-controlled FAQ approval workflow, rollback, change-log.</a:t>
+              <a:rPr sz="2000" dirty="0">
+                <a:solidFill>
+                  <a:srgbClr val="78716C"/>
+                </a:solidFill>
+              </a:rPr>
+              <a:t>  NDCG with clinician-rated relevance instead of a keyword heuristic.</a:t>
             </a:r>
           </a:p>
         </p:txBody>
